--- a/text_ref/图表_lzh.pptx
+++ b/text_ref/图表_lzh.pptx
@@ -21621,14 +21621,14 @@
           <a:p>
             <a:pPr algn="ctr"/>
             <a:r>
-              <a:rPr lang="zh-CN" altLang="en-US" sz="1000" dirty="0">
+              <a:rPr lang="zh-CN" altLang="en-US" sz="1000" b="1" dirty="0">
                 <a:latin typeface="宋体" panose="02010600030101010101" pitchFamily="2" charset="-122"/>
                 <a:ea typeface="宋体" panose="02010600030101010101" pitchFamily="2" charset="-122"/>
                 <a:cs typeface="Arial" panose="020B0604020202020204" pitchFamily="34" charset="0"/>
               </a:rPr>
               <a:t>攻击者</a:t>
             </a:r>
-            <a:endParaRPr lang="zh-CN" altLang="en-US" sz="800" dirty="0">
+            <a:endParaRPr lang="zh-CN" altLang="en-US" sz="800" b="1" dirty="0">
               <a:latin typeface="宋体" panose="02010600030101010101" pitchFamily="2" charset="-122"/>
               <a:ea typeface="宋体" panose="02010600030101010101" pitchFamily="2" charset="-122"/>
               <a:cs typeface="Arial" panose="020B0604020202020204" pitchFamily="34" charset="0"/>

--- a/text_ref/图表_lzh.pptx
+++ b/text_ref/图表_lzh.pptx
@@ -235,7 +235,7 @@
           <a:p>
             <a:fld id="{C132DE89-9275-4FDF-B894-6A14B2127E70}" type="datetimeFigureOut">
               <a:rPr lang="zh-CN" altLang="en-US" smtClean="0"/>
-              <a:t>2026-03-11</a:t>
+              <a:t>2026-03-15</a:t>
             </a:fld>
             <a:endParaRPr lang="zh-CN" altLang="en-US"/>
           </a:p>
@@ -717,7 +717,7 @@
           <a:p>
             <a:fld id="{798C2E43-9ACF-49D1-9A71-28E0B80BDA78}" type="datetimeFigureOut">
               <a:rPr lang="zh-CN" altLang="en-US" smtClean="0"/>
-              <a:t>2026-03-11</a:t>
+              <a:t>2026-03-15</a:t>
             </a:fld>
             <a:endParaRPr lang="zh-CN" altLang="en-US"/>
           </a:p>
@@ -887,7 +887,7 @@
           <a:p>
             <a:fld id="{798C2E43-9ACF-49D1-9A71-28E0B80BDA78}" type="datetimeFigureOut">
               <a:rPr lang="zh-CN" altLang="en-US" smtClean="0"/>
-              <a:t>2026-03-11</a:t>
+              <a:t>2026-03-15</a:t>
             </a:fld>
             <a:endParaRPr lang="zh-CN" altLang="en-US"/>
           </a:p>
@@ -1067,7 +1067,7 @@
           <a:p>
             <a:fld id="{798C2E43-9ACF-49D1-9A71-28E0B80BDA78}" type="datetimeFigureOut">
               <a:rPr lang="zh-CN" altLang="en-US" smtClean="0"/>
-              <a:t>2026-03-11</a:t>
+              <a:t>2026-03-15</a:t>
             </a:fld>
             <a:endParaRPr lang="zh-CN" altLang="en-US"/>
           </a:p>
@@ -1237,7 +1237,7 @@
           <a:p>
             <a:fld id="{798C2E43-9ACF-49D1-9A71-28E0B80BDA78}" type="datetimeFigureOut">
               <a:rPr lang="zh-CN" altLang="en-US" smtClean="0"/>
-              <a:t>2026-03-11</a:t>
+              <a:t>2026-03-15</a:t>
             </a:fld>
             <a:endParaRPr lang="zh-CN" altLang="en-US"/>
           </a:p>
@@ -1481,7 +1481,7 @@
           <a:p>
             <a:fld id="{798C2E43-9ACF-49D1-9A71-28E0B80BDA78}" type="datetimeFigureOut">
               <a:rPr lang="zh-CN" altLang="en-US" smtClean="0"/>
-              <a:t>2026-03-11</a:t>
+              <a:t>2026-03-15</a:t>
             </a:fld>
             <a:endParaRPr lang="zh-CN" altLang="en-US"/>
           </a:p>
@@ -1713,7 +1713,7 @@
           <a:p>
             <a:fld id="{798C2E43-9ACF-49D1-9A71-28E0B80BDA78}" type="datetimeFigureOut">
               <a:rPr lang="zh-CN" altLang="en-US" smtClean="0"/>
-              <a:t>2026-03-11</a:t>
+              <a:t>2026-03-15</a:t>
             </a:fld>
             <a:endParaRPr lang="zh-CN" altLang="en-US"/>
           </a:p>
@@ -2080,7 +2080,7 @@
           <a:p>
             <a:fld id="{798C2E43-9ACF-49D1-9A71-28E0B80BDA78}" type="datetimeFigureOut">
               <a:rPr lang="zh-CN" altLang="en-US" smtClean="0"/>
-              <a:t>2026-03-11</a:t>
+              <a:t>2026-03-15</a:t>
             </a:fld>
             <a:endParaRPr lang="zh-CN" altLang="en-US"/>
           </a:p>
@@ -2198,7 +2198,7 @@
           <a:p>
             <a:fld id="{798C2E43-9ACF-49D1-9A71-28E0B80BDA78}" type="datetimeFigureOut">
               <a:rPr lang="zh-CN" altLang="en-US" smtClean="0"/>
-              <a:t>2026-03-11</a:t>
+              <a:t>2026-03-15</a:t>
             </a:fld>
             <a:endParaRPr lang="zh-CN" altLang="en-US"/>
           </a:p>
@@ -2293,7 +2293,7 @@
           <a:p>
             <a:fld id="{798C2E43-9ACF-49D1-9A71-28E0B80BDA78}" type="datetimeFigureOut">
               <a:rPr lang="zh-CN" altLang="en-US" smtClean="0"/>
-              <a:t>2026-03-11</a:t>
+              <a:t>2026-03-15</a:t>
             </a:fld>
             <a:endParaRPr lang="zh-CN" altLang="en-US"/>
           </a:p>
@@ -2570,7 +2570,7 @@
           <a:p>
             <a:fld id="{798C2E43-9ACF-49D1-9A71-28E0B80BDA78}" type="datetimeFigureOut">
               <a:rPr lang="zh-CN" altLang="en-US" smtClean="0"/>
-              <a:t>2026-03-11</a:t>
+              <a:t>2026-03-15</a:t>
             </a:fld>
             <a:endParaRPr lang="zh-CN" altLang="en-US"/>
           </a:p>
@@ -2827,7 +2827,7 @@
           <a:p>
             <a:fld id="{798C2E43-9ACF-49D1-9A71-28E0B80BDA78}" type="datetimeFigureOut">
               <a:rPr lang="zh-CN" altLang="en-US" smtClean="0"/>
-              <a:t>2026-03-11</a:t>
+              <a:t>2026-03-15</a:t>
             </a:fld>
             <a:endParaRPr lang="zh-CN" altLang="en-US"/>
           </a:p>
@@ -3040,7 +3040,7 @@
           <a:p>
             <a:fld id="{798C2E43-9ACF-49D1-9A71-28E0B80BDA78}" type="datetimeFigureOut">
               <a:rPr lang="zh-CN" altLang="en-US" smtClean="0"/>
-              <a:t>2026-03-11</a:t>
+              <a:t>2026-03-15</a:t>
             </a:fld>
             <a:endParaRPr lang="zh-CN" altLang="en-US"/>
           </a:p>
@@ -3445,2061 +3445,1938 @@
           <a:chExt cx="0" cy="0"/>
         </a:xfrm>
       </p:grpSpPr>
-      <p:grpSp>
-        <p:nvGrpSpPr>
-          <p:cNvPr id="7" name="组合 6">
+      <p:cxnSp>
+        <p:nvCxnSpPr>
+          <p:cNvPr id="101" name="直接连接符 100">
             <a:extLst>
               <a:ext uri="{FF2B5EF4-FFF2-40B4-BE49-F238E27FC236}">
-                <a16:creationId xmlns:a16="http://schemas.microsoft.com/office/drawing/2014/main" id="{45E921F0-E976-2638-6409-849955013F79}"/>
+                <a16:creationId xmlns:a16="http://schemas.microsoft.com/office/drawing/2014/main" id="{4F10B9B5-1AF1-2A4E-3B3E-9C53CB7E1AD1}"/>
               </a:ext>
             </a:extLst>
           </p:cNvPr>
-          <p:cNvGrpSpPr/>
+          <p:cNvCxnSpPr>
+            <a:cxnSpLocks/>
+            <a:stCxn id="100" idx="2"/>
+            <a:endCxn id="51" idx="0"/>
+          </p:cNvCxnSpPr>
           <p:nvPr/>
-        </p:nvGrpSpPr>
-        <p:grpSpPr>
+        </p:nvCxnSpPr>
+        <p:spPr>
           <a:xfrm>
-            <a:off x="905407" y="2399648"/>
-            <a:ext cx="5303035" cy="2526343"/>
-            <a:chOff x="905407" y="2399648"/>
-            <a:chExt cx="5303035" cy="2526343"/>
+            <a:off x="4928650" y="3333509"/>
+            <a:ext cx="0" cy="249161"/>
           </a:xfrm>
-        </p:grpSpPr>
-        <p:cxnSp>
-          <p:nvCxnSpPr>
-            <p:cNvPr id="119" name="直接连接符 118">
-              <a:extLst>
-                <a:ext uri="{FF2B5EF4-FFF2-40B4-BE49-F238E27FC236}">
-                  <a16:creationId xmlns:a16="http://schemas.microsoft.com/office/drawing/2014/main" id="{DFD0D658-F59A-45F2-A00B-2CC5DC910E53}"/>
-                </a:ext>
-              </a:extLst>
-            </p:cNvPr>
-            <p:cNvCxnSpPr>
-              <a:cxnSpLocks/>
-              <a:stCxn id="99" idx="3"/>
-            </p:cNvCxnSpPr>
-            <p:nvPr/>
-          </p:nvCxnSpPr>
-          <p:spPr>
-            <a:xfrm>
-              <a:off x="4921001" y="3368097"/>
-              <a:ext cx="0" cy="1251528"/>
-            </a:xfrm>
-            <a:prstGeom prst="line">
-              <a:avLst/>
-            </a:prstGeom>
-            <a:ln w="9525">
-              <a:solidFill>
-                <a:schemeClr val="tx1"/>
-              </a:solidFill>
-            </a:ln>
-          </p:spPr>
-          <p:style>
-            <a:lnRef idx="1">
-              <a:schemeClr val="accent1"/>
-            </a:lnRef>
-            <a:fillRef idx="0">
-              <a:schemeClr val="accent1"/>
-            </a:fillRef>
-            <a:effectRef idx="0">
-              <a:schemeClr val="accent1"/>
-            </a:effectRef>
-            <a:fontRef idx="minor">
+          <a:prstGeom prst="line">
+            <a:avLst/>
+          </a:prstGeom>
+          <a:ln w="9525">
+            <a:solidFill>
               <a:schemeClr val="tx1"/>
-            </a:fontRef>
-          </p:style>
-        </p:cxnSp>
-        <p:sp>
-          <p:nvSpPr>
-            <p:cNvPr id="93" name="矩形 92">
-              <a:extLst>
-                <a:ext uri="{FF2B5EF4-FFF2-40B4-BE49-F238E27FC236}">
-                  <a16:creationId xmlns:a16="http://schemas.microsoft.com/office/drawing/2014/main" id="{E6D8AEF0-7D2B-4AC1-ACA4-7AA5473FE90D}"/>
-                </a:ext>
-              </a:extLst>
-            </p:cNvPr>
-            <p:cNvSpPr/>
-            <p:nvPr/>
-          </p:nvSpPr>
-          <p:spPr>
-            <a:xfrm>
-              <a:off x="905407" y="2415927"/>
-              <a:ext cx="352800" cy="2467622"/>
-            </a:xfrm>
-            <a:prstGeom prst="rect">
-              <a:avLst/>
-            </a:prstGeom>
+            </a:solidFill>
+          </a:ln>
+        </p:spPr>
+        <p:style>
+          <a:lnRef idx="1">
+            <a:schemeClr val="accent1"/>
+          </a:lnRef>
+          <a:fillRef idx="0">
+            <a:schemeClr val="accent1"/>
+          </a:fillRef>
+          <a:effectRef idx="0">
+            <a:schemeClr val="accent1"/>
+          </a:effectRef>
+          <a:fontRef idx="minor">
+            <a:schemeClr val="tx1"/>
+          </a:fontRef>
+        </p:style>
+      </p:cxnSp>
+      <p:cxnSp>
+        <p:nvCxnSpPr>
+          <p:cNvPr id="81" name="直接连接符 44">
+            <a:extLst>
+              <a:ext uri="{FF2B5EF4-FFF2-40B4-BE49-F238E27FC236}">
+                <a16:creationId xmlns:a16="http://schemas.microsoft.com/office/drawing/2014/main" id="{85A2129E-3692-9B33-661F-0B2ED060FD93}"/>
+              </a:ext>
+            </a:extLst>
+          </p:cNvPr>
+          <p:cNvCxnSpPr>
+            <a:cxnSpLocks/>
+            <a:stCxn id="100" idx="2"/>
+            <a:endCxn id="117" idx="0"/>
+          </p:cNvCxnSpPr>
+          <p:nvPr/>
+        </p:nvCxnSpPr>
+        <p:spPr>
+          <a:xfrm rot="5400000">
+            <a:off x="4543182" y="3197201"/>
+            <a:ext cx="249161" cy="521777"/>
+          </a:xfrm>
+          <a:prstGeom prst="bentConnector3">
+            <a:avLst>
+              <a:gd name="adj1" fmla="val 50000"/>
+            </a:avLst>
+          </a:prstGeom>
+          <a:ln w="9525">
             <a:solidFill>
-              <a:srgbClr val="DBEEF4"/>
+              <a:schemeClr val="tx1"/>
             </a:solidFill>
-            <a:ln w="9525">
-              <a:solidFill>
-                <a:schemeClr val="tx1">
-                  <a:lumMod val="95000"/>
-                  <a:lumOff val="5000"/>
-                </a:schemeClr>
-              </a:solidFill>
-            </a:ln>
-          </p:spPr>
-          <p:style>
-            <a:lnRef idx="2">
-              <a:schemeClr val="accent1">
-                <a:shade val="50000"/>
+          </a:ln>
+        </p:spPr>
+        <p:style>
+          <a:lnRef idx="1">
+            <a:schemeClr val="accent1"/>
+          </a:lnRef>
+          <a:fillRef idx="0">
+            <a:schemeClr val="accent1"/>
+          </a:fillRef>
+          <a:effectRef idx="0">
+            <a:schemeClr val="accent1"/>
+          </a:effectRef>
+          <a:fontRef idx="minor">
+            <a:schemeClr val="tx1"/>
+          </a:fontRef>
+        </p:style>
+      </p:cxnSp>
+      <p:cxnSp>
+        <p:nvCxnSpPr>
+          <p:cNvPr id="98" name="直接连接符 44">
+            <a:extLst>
+              <a:ext uri="{FF2B5EF4-FFF2-40B4-BE49-F238E27FC236}">
+                <a16:creationId xmlns:a16="http://schemas.microsoft.com/office/drawing/2014/main" id="{0B3BF6EC-D240-B1FC-5F29-2062F978995F}"/>
+              </a:ext>
+            </a:extLst>
+          </p:cNvPr>
+          <p:cNvCxnSpPr>
+            <a:cxnSpLocks/>
+            <a:stCxn id="100" idx="2"/>
+            <a:endCxn id="96" idx="0"/>
+          </p:cNvCxnSpPr>
+          <p:nvPr/>
+        </p:nvCxnSpPr>
+        <p:spPr>
+          <a:xfrm rot="16200000" flipH="1">
+            <a:off x="5064958" y="3197200"/>
+            <a:ext cx="249161" cy="521777"/>
+          </a:xfrm>
+          <a:prstGeom prst="bentConnector3">
+            <a:avLst>
+              <a:gd name="adj1" fmla="val 50000"/>
+            </a:avLst>
+          </a:prstGeom>
+          <a:ln w="9525">
+            <a:solidFill>
+              <a:schemeClr val="tx1"/>
+            </a:solidFill>
+          </a:ln>
+        </p:spPr>
+        <p:style>
+          <a:lnRef idx="1">
+            <a:schemeClr val="accent1"/>
+          </a:lnRef>
+          <a:fillRef idx="0">
+            <a:schemeClr val="accent1"/>
+          </a:fillRef>
+          <a:effectRef idx="0">
+            <a:schemeClr val="accent1"/>
+          </a:effectRef>
+          <a:fontRef idx="minor">
+            <a:schemeClr val="tx1"/>
+          </a:fontRef>
+        </p:style>
+      </p:cxnSp>
+      <p:sp>
+        <p:nvSpPr>
+          <p:cNvPr id="51" name="矩形 50">
+            <a:extLst>
+              <a:ext uri="{FF2B5EF4-FFF2-40B4-BE49-F238E27FC236}">
+                <a16:creationId xmlns:a16="http://schemas.microsoft.com/office/drawing/2014/main" id="{9A3ACE77-16F4-4E8B-A8B6-72412B3CAF50}"/>
+              </a:ext>
+            </a:extLst>
+          </p:cNvPr>
+          <p:cNvSpPr/>
+          <p:nvPr/>
+        </p:nvSpPr>
+        <p:spPr>
+          <a:xfrm>
+            <a:off x="4797250" y="3582670"/>
+            <a:ext cx="262800" cy="1302792"/>
+          </a:xfrm>
+          <a:prstGeom prst="rect">
+            <a:avLst/>
+          </a:prstGeom>
+          <a:solidFill>
+            <a:srgbClr val="EAF1DF"/>
+          </a:solidFill>
+          <a:ln w="9525">
+            <a:solidFill>
+              <a:schemeClr val="tx1">
+                <a:lumMod val="95000"/>
+                <a:lumOff val="5000"/>
               </a:schemeClr>
-            </a:lnRef>
-            <a:fillRef idx="1">
-              <a:schemeClr val="accent1"/>
-            </a:fillRef>
-            <a:effectRef idx="0">
-              <a:schemeClr val="accent1"/>
-            </a:effectRef>
-            <a:fontRef idx="minor">
-              <a:schemeClr val="lt1"/>
-            </a:fontRef>
-          </p:style>
-          <p:txBody>
-            <a:bodyPr rtlCol="0" anchor="ctr"/>
-            <a:lstStyle/>
-            <a:p>
-              <a:pPr algn="ctr"/>
-              <a:endParaRPr lang="zh-CN" altLang="en-US"/>
-            </a:p>
-          </p:txBody>
-        </p:sp>
-        <p:sp>
-          <p:nvSpPr>
-            <p:cNvPr id="76" name="文本框 75">
-              <a:extLst>
-                <a:ext uri="{FF2B5EF4-FFF2-40B4-BE49-F238E27FC236}">
-                  <a16:creationId xmlns:a16="http://schemas.microsoft.com/office/drawing/2014/main" id="{70C126FF-7F12-43BB-9410-40181DCE2F55}"/>
-                </a:ext>
-              </a:extLst>
-            </p:cNvPr>
-            <p:cNvSpPr txBox="1"/>
-            <p:nvPr/>
-          </p:nvSpPr>
-          <p:spPr>
-            <a:xfrm>
-              <a:off x="920225" y="3091634"/>
-              <a:ext cx="323165" cy="1116208"/>
-            </a:xfrm>
-            <a:prstGeom prst="rect">
-              <a:avLst/>
-            </a:prstGeom>
-            <a:noFill/>
-          </p:spPr>
-          <p:txBody>
-            <a:bodyPr vert="eaVert" wrap="square" rtlCol="0">
-              <a:spAutoFit/>
-            </a:bodyPr>
-            <a:lstStyle/>
-            <a:p>
-              <a:pPr algn="ctr"/>
-              <a:r>
-                <a:rPr lang="zh-CN" altLang="en-US" sz="900" b="1" dirty="0">
-                  <a:latin typeface="宋体" panose="02010600030101010101" pitchFamily="2" charset="-122"/>
-                  <a:ea typeface="宋体" panose="02010600030101010101" pitchFamily="2" charset="-122"/>
-                </a:rPr>
-                <a:t>第一章 </a:t>
-              </a:r>
-              <a:r>
-                <a:rPr lang="zh-CN" altLang="en-US" sz="900" dirty="0">
-                  <a:latin typeface="宋体" panose="02010600030101010101" pitchFamily="2" charset="-122"/>
-                  <a:ea typeface="宋体" panose="02010600030101010101" pitchFamily="2" charset="-122"/>
-                </a:rPr>
-                <a:t>绪论</a:t>
-              </a:r>
-              <a:endParaRPr lang="zh-CN" altLang="en-US" sz="900" b="1" dirty="0">
+            </a:solidFill>
+          </a:ln>
+        </p:spPr>
+        <p:style>
+          <a:lnRef idx="2">
+            <a:schemeClr val="accent1">
+              <a:shade val="50000"/>
+            </a:schemeClr>
+          </a:lnRef>
+          <a:fillRef idx="1">
+            <a:schemeClr val="accent1"/>
+          </a:fillRef>
+          <a:effectRef idx="0">
+            <a:schemeClr val="accent1"/>
+          </a:effectRef>
+          <a:fontRef idx="minor">
+            <a:schemeClr val="lt1"/>
+          </a:fontRef>
+        </p:style>
+        <p:txBody>
+          <a:bodyPr rtlCol="0" anchor="ctr"/>
+          <a:lstStyle/>
+          <a:p>
+            <a:pPr algn="ctr"/>
+            <a:endParaRPr lang="zh-CN" altLang="en-US"/>
+          </a:p>
+        </p:txBody>
+      </p:sp>
+      <p:sp>
+        <p:nvSpPr>
+          <p:cNvPr id="52" name="文本框 51">
+            <a:extLst>
+              <a:ext uri="{FF2B5EF4-FFF2-40B4-BE49-F238E27FC236}">
+                <a16:creationId xmlns:a16="http://schemas.microsoft.com/office/drawing/2014/main" id="{313CA518-A42F-4465-ACE6-CD7E7F741EBE}"/>
+              </a:ext>
+            </a:extLst>
+          </p:cNvPr>
+          <p:cNvSpPr txBox="1"/>
+          <p:nvPr/>
+        </p:nvSpPr>
+        <p:spPr>
+          <a:xfrm>
+            <a:off x="4771556" y="3534374"/>
+            <a:ext cx="307777" cy="1391617"/>
+          </a:xfrm>
+          <a:prstGeom prst="rect">
+            <a:avLst/>
+          </a:prstGeom>
+          <a:noFill/>
+        </p:spPr>
+        <p:txBody>
+          <a:bodyPr vert="eaVert" wrap="square" rtlCol="0">
+            <a:spAutoFit/>
+          </a:bodyPr>
+          <a:lstStyle/>
+          <a:p>
+            <a:pPr algn="ctr"/>
+            <a:r>
+              <a:rPr lang="zh-CN" altLang="en-US" sz="800" dirty="0">
                 <a:latin typeface="宋体" panose="02010600030101010101" pitchFamily="2" charset="-122"/>
                 <a:ea typeface="宋体" panose="02010600030101010101" pitchFamily="2" charset="-122"/>
-              </a:endParaRPr>
-            </a:p>
-          </p:txBody>
-        </p:sp>
-        <p:sp>
-          <p:nvSpPr>
-            <p:cNvPr id="78" name="矩形 77">
-              <a:extLst>
-                <a:ext uri="{FF2B5EF4-FFF2-40B4-BE49-F238E27FC236}">
-                  <a16:creationId xmlns:a16="http://schemas.microsoft.com/office/drawing/2014/main" id="{E266FF64-4311-4E4D-8533-3406544DEC01}"/>
-                </a:ext>
-              </a:extLst>
-            </p:cNvPr>
-            <p:cNvSpPr/>
-            <p:nvPr/>
-          </p:nvSpPr>
-          <p:spPr>
-            <a:xfrm>
-              <a:off x="1351916" y="2415927"/>
-              <a:ext cx="352800" cy="2467622"/>
-            </a:xfrm>
-            <a:prstGeom prst="rect">
-              <a:avLst/>
-            </a:prstGeom>
+              </a:rPr>
+              <a:t>多智能体协作下的级联测试</a:t>
+            </a:r>
+          </a:p>
+        </p:txBody>
+      </p:sp>
+      <p:sp>
+        <p:nvSpPr>
+          <p:cNvPr id="117" name="矩形 116">
+            <a:extLst>
+              <a:ext uri="{FF2B5EF4-FFF2-40B4-BE49-F238E27FC236}">
+                <a16:creationId xmlns:a16="http://schemas.microsoft.com/office/drawing/2014/main" id="{2A690260-F9F8-4F76-B98F-CA661DF95E44}"/>
+              </a:ext>
+            </a:extLst>
+          </p:cNvPr>
+          <p:cNvSpPr/>
+          <p:nvPr/>
+        </p:nvSpPr>
+        <p:spPr>
+          <a:xfrm>
+            <a:off x="4275473" y="3582670"/>
+            <a:ext cx="262800" cy="1302792"/>
+          </a:xfrm>
+          <a:prstGeom prst="rect">
+            <a:avLst/>
+          </a:prstGeom>
+          <a:solidFill>
+            <a:srgbClr val="EAF1DF"/>
+          </a:solidFill>
+          <a:ln w="9525">
             <a:solidFill>
-              <a:srgbClr val="DBEEF4"/>
+              <a:schemeClr val="tx1">
+                <a:lumMod val="95000"/>
+                <a:lumOff val="5000"/>
+              </a:schemeClr>
             </a:solidFill>
-            <a:ln w="9525">
-              <a:solidFill>
-                <a:schemeClr val="tx1">
-                  <a:lumMod val="95000"/>
-                  <a:lumOff val="5000"/>
-                </a:schemeClr>
-              </a:solidFill>
-            </a:ln>
-          </p:spPr>
-          <p:style>
-            <a:lnRef idx="2">
-              <a:schemeClr val="accent1">
-                <a:shade val="50000"/>
+          </a:ln>
+        </p:spPr>
+        <p:style>
+          <a:lnRef idx="2">
+            <a:schemeClr val="accent1">
+              <a:shade val="50000"/>
+            </a:schemeClr>
+          </a:lnRef>
+          <a:fillRef idx="1">
+            <a:schemeClr val="accent1"/>
+          </a:fillRef>
+          <a:effectRef idx="0">
+            <a:schemeClr val="accent1"/>
+          </a:effectRef>
+          <a:fontRef idx="minor">
+            <a:schemeClr val="lt1"/>
+          </a:fontRef>
+        </p:style>
+        <p:txBody>
+          <a:bodyPr rtlCol="0" anchor="ctr"/>
+          <a:lstStyle/>
+          <a:p>
+            <a:pPr algn="ctr"/>
+            <a:endParaRPr lang="zh-CN" altLang="en-US"/>
+          </a:p>
+        </p:txBody>
+      </p:sp>
+      <p:sp>
+        <p:nvSpPr>
+          <p:cNvPr id="96" name="矩形 95">
+            <a:extLst>
+              <a:ext uri="{FF2B5EF4-FFF2-40B4-BE49-F238E27FC236}">
+                <a16:creationId xmlns:a16="http://schemas.microsoft.com/office/drawing/2014/main" id="{AA30A908-A34D-4431-FA1E-893CA58A308C}"/>
+              </a:ext>
+            </a:extLst>
+          </p:cNvPr>
+          <p:cNvSpPr/>
+          <p:nvPr/>
+        </p:nvSpPr>
+        <p:spPr>
+          <a:xfrm>
+            <a:off x="5319027" y="3582670"/>
+            <a:ext cx="262800" cy="1302792"/>
+          </a:xfrm>
+          <a:prstGeom prst="rect">
+            <a:avLst/>
+          </a:prstGeom>
+          <a:solidFill>
+            <a:srgbClr val="EAF1DF"/>
+          </a:solidFill>
+          <a:ln w="9525">
+            <a:solidFill>
+              <a:schemeClr val="tx1">
+                <a:lumMod val="95000"/>
+                <a:lumOff val="5000"/>
               </a:schemeClr>
-            </a:lnRef>
-            <a:fillRef idx="1">
-              <a:schemeClr val="accent1"/>
-            </a:fillRef>
-            <a:effectRef idx="0">
-              <a:schemeClr val="accent1"/>
-            </a:effectRef>
-            <a:fontRef idx="minor">
-              <a:schemeClr val="lt1"/>
-            </a:fontRef>
-          </p:style>
-          <p:txBody>
-            <a:bodyPr rtlCol="0" anchor="ctr"/>
-            <a:lstStyle/>
-            <a:p>
-              <a:pPr algn="ctr"/>
-              <a:endParaRPr lang="zh-CN" altLang="en-US"/>
-            </a:p>
-          </p:txBody>
-        </p:sp>
-        <p:sp>
-          <p:nvSpPr>
-            <p:cNvPr id="79" name="文本框 78">
-              <a:extLst>
-                <a:ext uri="{FF2B5EF4-FFF2-40B4-BE49-F238E27FC236}">
-                  <a16:creationId xmlns:a16="http://schemas.microsoft.com/office/drawing/2014/main" id="{BFE7313A-CA24-47DD-AA93-1834C187B793}"/>
-                </a:ext>
-              </a:extLst>
-            </p:cNvPr>
-            <p:cNvSpPr txBox="1"/>
-            <p:nvPr/>
-          </p:nvSpPr>
-          <p:spPr>
-            <a:xfrm>
-              <a:off x="1366734" y="2788578"/>
-              <a:ext cx="323165" cy="1722320"/>
-            </a:xfrm>
-            <a:prstGeom prst="rect">
-              <a:avLst/>
-            </a:prstGeom>
-            <a:noFill/>
-          </p:spPr>
-          <p:txBody>
-            <a:bodyPr vert="eaVert" wrap="square" rtlCol="0">
-              <a:spAutoFit/>
-            </a:bodyPr>
-            <a:lstStyle/>
-            <a:p>
-              <a:pPr algn="ctr"/>
-              <a:r>
-                <a:rPr lang="zh-CN" altLang="en-US" sz="900" b="1" dirty="0">
-                  <a:latin typeface="宋体" panose="02010600030101010101" pitchFamily="2" charset="-122"/>
-                  <a:ea typeface="宋体" panose="02010600030101010101" pitchFamily="2" charset="-122"/>
-                </a:rPr>
-                <a:t>第二章 </a:t>
-              </a:r>
-              <a:r>
-                <a:rPr lang="zh-CN" altLang="en-US" sz="900" dirty="0">
-                  <a:latin typeface="宋体" panose="02010600030101010101" pitchFamily="2" charset="-122"/>
-                  <a:ea typeface="宋体" panose="02010600030101010101" pitchFamily="2" charset="-122"/>
-                </a:rPr>
-                <a:t>相关理论与技术基础</a:t>
-              </a:r>
-            </a:p>
-          </p:txBody>
-        </p:sp>
-        <p:sp>
-          <p:nvSpPr>
-            <p:cNvPr id="99" name="矩形 98">
-              <a:extLst>
-                <a:ext uri="{FF2B5EF4-FFF2-40B4-BE49-F238E27FC236}">
-                  <a16:creationId xmlns:a16="http://schemas.microsoft.com/office/drawing/2014/main" id="{AFF74F19-DF26-47C5-A70D-F77AB0E6AD83}"/>
-                </a:ext>
-              </a:extLst>
-            </p:cNvPr>
-            <p:cNvSpPr/>
-            <p:nvPr/>
-          </p:nvSpPr>
-          <p:spPr>
-            <a:xfrm rot="5400000">
-              <a:off x="4702474" y="2357570"/>
-              <a:ext cx="437053" cy="1584000"/>
-            </a:xfrm>
-            <a:prstGeom prst="rect">
-              <a:avLst/>
-            </a:prstGeom>
+            </a:solidFill>
+          </a:ln>
+        </p:spPr>
+        <p:style>
+          <a:lnRef idx="2">
+            <a:schemeClr val="accent1">
+              <a:shade val="50000"/>
+            </a:schemeClr>
+          </a:lnRef>
+          <a:fillRef idx="1">
+            <a:schemeClr val="accent1"/>
+          </a:fillRef>
+          <a:effectRef idx="0">
+            <a:schemeClr val="accent1"/>
+          </a:effectRef>
+          <a:fontRef idx="minor">
+            <a:schemeClr val="lt1"/>
+          </a:fontRef>
+        </p:style>
+        <p:txBody>
+          <a:bodyPr rtlCol="0" anchor="ctr"/>
+          <a:lstStyle/>
+          <a:p>
+            <a:pPr algn="ctr"/>
+            <a:endParaRPr lang="zh-CN" altLang="en-US"/>
+          </a:p>
+        </p:txBody>
+      </p:sp>
+      <p:sp>
+        <p:nvSpPr>
+          <p:cNvPr id="93" name="矩形 92">
+            <a:extLst>
+              <a:ext uri="{FF2B5EF4-FFF2-40B4-BE49-F238E27FC236}">
+                <a16:creationId xmlns:a16="http://schemas.microsoft.com/office/drawing/2014/main" id="{E6D8AEF0-7D2B-4AC1-ACA4-7AA5473FE90D}"/>
+              </a:ext>
+            </a:extLst>
+          </p:cNvPr>
+          <p:cNvSpPr/>
+          <p:nvPr/>
+        </p:nvSpPr>
+        <p:spPr>
+          <a:xfrm>
+            <a:off x="909852" y="2415927"/>
+            <a:ext cx="352800" cy="2467622"/>
+          </a:xfrm>
+          <a:prstGeom prst="rect">
+            <a:avLst/>
+          </a:prstGeom>
+          <a:solidFill>
+            <a:srgbClr val="DBEEF4"/>
+          </a:solidFill>
+          <a:ln w="9525">
             <a:solidFill>
-              <a:srgbClr val="DBEEF4"/>
+              <a:schemeClr val="tx1">
+                <a:lumMod val="95000"/>
+                <a:lumOff val="5000"/>
+              </a:schemeClr>
             </a:solidFill>
-            <a:ln w="9525">
-              <a:solidFill>
-                <a:schemeClr val="tx1">
-                  <a:lumMod val="95000"/>
-                  <a:lumOff val="5000"/>
-                </a:schemeClr>
-              </a:solidFill>
-            </a:ln>
-          </p:spPr>
-          <p:style>
-            <a:lnRef idx="2">
-              <a:schemeClr val="accent1">
-                <a:shade val="50000"/>
+          </a:ln>
+        </p:spPr>
+        <p:style>
+          <a:lnRef idx="2">
+            <a:schemeClr val="accent1">
+              <a:shade val="50000"/>
+            </a:schemeClr>
+          </a:lnRef>
+          <a:fillRef idx="1">
+            <a:schemeClr val="accent1"/>
+          </a:fillRef>
+          <a:effectRef idx="0">
+            <a:schemeClr val="accent1"/>
+          </a:effectRef>
+          <a:fontRef idx="minor">
+            <a:schemeClr val="lt1"/>
+          </a:fontRef>
+        </p:style>
+        <p:txBody>
+          <a:bodyPr rtlCol="0" anchor="ctr"/>
+          <a:lstStyle/>
+          <a:p>
+            <a:pPr algn="ctr"/>
+            <a:endParaRPr lang="zh-CN" altLang="en-US"/>
+          </a:p>
+        </p:txBody>
+      </p:sp>
+      <p:sp>
+        <p:nvSpPr>
+          <p:cNvPr id="76" name="文本框 75">
+            <a:extLst>
+              <a:ext uri="{FF2B5EF4-FFF2-40B4-BE49-F238E27FC236}">
+                <a16:creationId xmlns:a16="http://schemas.microsoft.com/office/drawing/2014/main" id="{70C126FF-7F12-43BB-9410-40181DCE2F55}"/>
+              </a:ext>
+            </a:extLst>
+          </p:cNvPr>
+          <p:cNvSpPr txBox="1"/>
+          <p:nvPr/>
+        </p:nvSpPr>
+        <p:spPr>
+          <a:xfrm>
+            <a:off x="924670" y="3091634"/>
+            <a:ext cx="323165" cy="1116208"/>
+          </a:xfrm>
+          <a:prstGeom prst="rect">
+            <a:avLst/>
+          </a:prstGeom>
+          <a:noFill/>
+        </p:spPr>
+        <p:txBody>
+          <a:bodyPr vert="eaVert" wrap="square" rtlCol="0">
+            <a:spAutoFit/>
+          </a:bodyPr>
+          <a:lstStyle/>
+          <a:p>
+            <a:pPr algn="ctr"/>
+            <a:r>
+              <a:rPr lang="zh-CN" altLang="en-US" sz="900" b="1" dirty="0">
+                <a:latin typeface="宋体" panose="02010600030101010101" pitchFamily="2" charset="-122"/>
+                <a:ea typeface="宋体" panose="02010600030101010101" pitchFamily="2" charset="-122"/>
+              </a:rPr>
+              <a:t>第一章 </a:t>
+            </a:r>
+            <a:r>
+              <a:rPr lang="zh-CN" altLang="en-US" sz="900" dirty="0">
+                <a:latin typeface="宋体" panose="02010600030101010101" pitchFamily="2" charset="-122"/>
+                <a:ea typeface="宋体" panose="02010600030101010101" pitchFamily="2" charset="-122"/>
+              </a:rPr>
+              <a:t>绪论</a:t>
+            </a:r>
+            <a:endParaRPr lang="zh-CN" altLang="en-US" sz="900" b="1" dirty="0">
+              <a:latin typeface="宋体" panose="02010600030101010101" pitchFamily="2" charset="-122"/>
+              <a:ea typeface="宋体" panose="02010600030101010101" pitchFamily="2" charset="-122"/>
+            </a:endParaRPr>
+          </a:p>
+        </p:txBody>
+      </p:sp>
+      <p:sp>
+        <p:nvSpPr>
+          <p:cNvPr id="78" name="矩形 77">
+            <a:extLst>
+              <a:ext uri="{FF2B5EF4-FFF2-40B4-BE49-F238E27FC236}">
+                <a16:creationId xmlns:a16="http://schemas.microsoft.com/office/drawing/2014/main" id="{E266FF64-4311-4E4D-8533-3406544DEC01}"/>
+              </a:ext>
+            </a:extLst>
+          </p:cNvPr>
+          <p:cNvSpPr/>
+          <p:nvPr/>
+        </p:nvSpPr>
+        <p:spPr>
+          <a:xfrm>
+            <a:off x="1356361" y="2415927"/>
+            <a:ext cx="352800" cy="2467622"/>
+          </a:xfrm>
+          <a:prstGeom prst="rect">
+            <a:avLst/>
+          </a:prstGeom>
+          <a:solidFill>
+            <a:srgbClr val="DBEEF4"/>
+          </a:solidFill>
+          <a:ln w="9525">
+            <a:solidFill>
+              <a:schemeClr val="tx1">
+                <a:lumMod val="95000"/>
+                <a:lumOff val="5000"/>
               </a:schemeClr>
-            </a:lnRef>
-            <a:fillRef idx="1">
-              <a:schemeClr val="accent1"/>
-            </a:fillRef>
-            <a:effectRef idx="0">
-              <a:schemeClr val="accent1"/>
-            </a:effectRef>
-            <a:fontRef idx="minor">
-              <a:schemeClr val="lt1"/>
-            </a:fontRef>
-          </p:style>
-          <p:txBody>
-            <a:bodyPr rtlCol="0" anchor="ctr"/>
-            <a:lstStyle/>
-            <a:p>
-              <a:pPr algn="ctr"/>
-              <a:endParaRPr lang="zh-CN" altLang="en-US"/>
-            </a:p>
-          </p:txBody>
-        </p:sp>
-        <p:sp>
-          <p:nvSpPr>
-            <p:cNvPr id="100" name="文本框 99">
-              <a:extLst>
-                <a:ext uri="{FF2B5EF4-FFF2-40B4-BE49-F238E27FC236}">
-                  <a16:creationId xmlns:a16="http://schemas.microsoft.com/office/drawing/2014/main" id="{3C043963-EF0E-4FD3-A7B6-1E50C4A2E1B9}"/>
-                </a:ext>
-              </a:extLst>
-            </p:cNvPr>
-            <p:cNvSpPr txBox="1"/>
-            <p:nvPr/>
-          </p:nvSpPr>
-          <p:spPr>
-            <a:xfrm>
-              <a:off x="4047637" y="2964177"/>
-              <a:ext cx="1760756" cy="369332"/>
-            </a:xfrm>
-            <a:prstGeom prst="rect">
-              <a:avLst/>
-            </a:prstGeom>
-            <a:noFill/>
-          </p:spPr>
-          <p:txBody>
-            <a:bodyPr vert="horz" wrap="square" rtlCol="0">
-              <a:spAutoFit/>
-            </a:bodyPr>
-            <a:lstStyle/>
-            <a:p>
-              <a:pPr algn="ctr"/>
-              <a:r>
-                <a:rPr lang="zh-CN" altLang="en-US" sz="900" b="1" dirty="0">
-                  <a:latin typeface="宋体" panose="02010600030101010101" pitchFamily="2" charset="-122"/>
-                  <a:ea typeface="宋体" panose="02010600030101010101" pitchFamily="2" charset="-122"/>
-                </a:rPr>
-                <a:t>第五章 </a:t>
-              </a:r>
-              <a:r>
-                <a:rPr lang="zh-CN" altLang="en-US" sz="900" dirty="0">
-                  <a:latin typeface="宋体" panose="02010600030101010101" pitchFamily="2" charset="-122"/>
-                  <a:ea typeface="宋体" panose="02010600030101010101" pitchFamily="2" charset="-122"/>
-                </a:rPr>
-                <a:t>多智能体系统中的风险传播机制实证研究</a:t>
-              </a:r>
-            </a:p>
-          </p:txBody>
-        </p:sp>
-        <p:sp>
-          <p:nvSpPr>
-            <p:cNvPr id="106" name="矩形 105">
-              <a:extLst>
-                <a:ext uri="{FF2B5EF4-FFF2-40B4-BE49-F238E27FC236}">
-                  <a16:creationId xmlns:a16="http://schemas.microsoft.com/office/drawing/2014/main" id="{0AEAE9AD-0571-4427-9F4F-226ADB70E495}"/>
-                </a:ext>
-              </a:extLst>
-            </p:cNvPr>
-            <p:cNvSpPr/>
-            <p:nvPr/>
-          </p:nvSpPr>
-          <p:spPr>
-            <a:xfrm rot="5400000">
-              <a:off x="3571047" y="636746"/>
-              <a:ext cx="369331" cy="3914577"/>
-            </a:xfrm>
-            <a:prstGeom prst="rect">
-              <a:avLst/>
-            </a:prstGeom>
+            </a:solidFill>
+          </a:ln>
+        </p:spPr>
+        <p:style>
+          <a:lnRef idx="2">
+            <a:schemeClr val="accent1">
+              <a:shade val="50000"/>
+            </a:schemeClr>
+          </a:lnRef>
+          <a:fillRef idx="1">
+            <a:schemeClr val="accent1"/>
+          </a:fillRef>
+          <a:effectRef idx="0">
+            <a:schemeClr val="accent1"/>
+          </a:effectRef>
+          <a:fontRef idx="minor">
+            <a:schemeClr val="lt1"/>
+          </a:fontRef>
+        </p:style>
+        <p:txBody>
+          <a:bodyPr rtlCol="0" anchor="ctr"/>
+          <a:lstStyle/>
+          <a:p>
+            <a:pPr algn="ctr"/>
+            <a:endParaRPr lang="zh-CN" altLang="en-US"/>
+          </a:p>
+        </p:txBody>
+      </p:sp>
+      <p:sp>
+        <p:nvSpPr>
+          <p:cNvPr id="79" name="文本框 78">
+            <a:extLst>
+              <a:ext uri="{FF2B5EF4-FFF2-40B4-BE49-F238E27FC236}">
+                <a16:creationId xmlns:a16="http://schemas.microsoft.com/office/drawing/2014/main" id="{BFE7313A-CA24-47DD-AA93-1834C187B793}"/>
+              </a:ext>
+            </a:extLst>
+          </p:cNvPr>
+          <p:cNvSpPr txBox="1"/>
+          <p:nvPr/>
+        </p:nvSpPr>
+        <p:spPr>
+          <a:xfrm>
+            <a:off x="1371179" y="2788578"/>
+            <a:ext cx="323165" cy="1722320"/>
+          </a:xfrm>
+          <a:prstGeom prst="rect">
+            <a:avLst/>
+          </a:prstGeom>
+          <a:noFill/>
+        </p:spPr>
+        <p:txBody>
+          <a:bodyPr vert="eaVert" wrap="square" rtlCol="0">
+            <a:spAutoFit/>
+          </a:bodyPr>
+          <a:lstStyle/>
+          <a:p>
+            <a:pPr algn="ctr"/>
+            <a:r>
+              <a:rPr lang="zh-CN" altLang="en-US" sz="900" b="1" dirty="0">
+                <a:latin typeface="宋体" panose="02010600030101010101" pitchFamily="2" charset="-122"/>
+                <a:ea typeface="宋体" panose="02010600030101010101" pitchFamily="2" charset="-122"/>
+              </a:rPr>
+              <a:t>第二章 </a:t>
+            </a:r>
+            <a:r>
+              <a:rPr lang="zh-CN" altLang="en-US" sz="900" dirty="0">
+                <a:latin typeface="宋体" panose="02010600030101010101" pitchFamily="2" charset="-122"/>
+                <a:ea typeface="宋体" panose="02010600030101010101" pitchFamily="2" charset="-122"/>
+              </a:rPr>
+              <a:t>相关理论与技术基础</a:t>
+            </a:r>
+          </a:p>
+        </p:txBody>
+      </p:sp>
+      <p:sp>
+        <p:nvSpPr>
+          <p:cNvPr id="99" name="矩形 98">
+            <a:extLst>
+              <a:ext uri="{FF2B5EF4-FFF2-40B4-BE49-F238E27FC236}">
+                <a16:creationId xmlns:a16="http://schemas.microsoft.com/office/drawing/2014/main" id="{AFF74F19-DF26-47C5-A70D-F77AB0E6AD83}"/>
+              </a:ext>
+            </a:extLst>
+          </p:cNvPr>
+          <p:cNvSpPr/>
+          <p:nvPr/>
+        </p:nvSpPr>
+        <p:spPr>
+          <a:xfrm rot="5400000">
+            <a:off x="4710853" y="2356842"/>
+            <a:ext cx="435595" cy="1584000"/>
+          </a:xfrm>
+          <a:prstGeom prst="rect">
+            <a:avLst/>
+          </a:prstGeom>
+          <a:solidFill>
+            <a:srgbClr val="DBEEF4"/>
+          </a:solidFill>
+          <a:ln w="9525">
             <a:solidFill>
-              <a:srgbClr val="FCEADC"/>
+              <a:schemeClr val="tx1">
+                <a:lumMod val="95000"/>
+                <a:lumOff val="5000"/>
+              </a:schemeClr>
             </a:solidFill>
-            <a:ln w="9525">
-              <a:solidFill>
-                <a:schemeClr val="tx1">
-                  <a:lumMod val="95000"/>
-                  <a:lumOff val="5000"/>
-                </a:schemeClr>
-              </a:solidFill>
-            </a:ln>
-          </p:spPr>
-          <p:style>
-            <a:lnRef idx="2">
-              <a:schemeClr val="accent1">
-                <a:shade val="50000"/>
+          </a:ln>
+        </p:spPr>
+        <p:style>
+          <a:lnRef idx="2">
+            <a:schemeClr val="accent1">
+              <a:shade val="50000"/>
+            </a:schemeClr>
+          </a:lnRef>
+          <a:fillRef idx="1">
+            <a:schemeClr val="accent1"/>
+          </a:fillRef>
+          <a:effectRef idx="0">
+            <a:schemeClr val="accent1"/>
+          </a:effectRef>
+          <a:fontRef idx="minor">
+            <a:schemeClr val="lt1"/>
+          </a:fontRef>
+        </p:style>
+        <p:txBody>
+          <a:bodyPr rtlCol="0" anchor="ctr"/>
+          <a:lstStyle/>
+          <a:p>
+            <a:pPr algn="ctr"/>
+            <a:endParaRPr lang="zh-CN" altLang="en-US"/>
+          </a:p>
+        </p:txBody>
+      </p:sp>
+      <p:sp>
+        <p:nvSpPr>
+          <p:cNvPr id="100" name="文本框 99">
+            <a:extLst>
+              <a:ext uri="{FF2B5EF4-FFF2-40B4-BE49-F238E27FC236}">
+                <a16:creationId xmlns:a16="http://schemas.microsoft.com/office/drawing/2014/main" id="{3C043963-EF0E-4FD3-A7B6-1E50C4A2E1B9}"/>
+              </a:ext>
+            </a:extLst>
+          </p:cNvPr>
+          <p:cNvSpPr txBox="1"/>
+          <p:nvPr/>
+        </p:nvSpPr>
+        <p:spPr>
+          <a:xfrm>
+            <a:off x="4048272" y="2964177"/>
+            <a:ext cx="1760756" cy="369332"/>
+          </a:xfrm>
+          <a:prstGeom prst="rect">
+            <a:avLst/>
+          </a:prstGeom>
+          <a:noFill/>
+        </p:spPr>
+        <p:txBody>
+          <a:bodyPr vert="horz" wrap="square" rtlCol="0">
+            <a:spAutoFit/>
+          </a:bodyPr>
+          <a:lstStyle/>
+          <a:p>
+            <a:pPr algn="ctr"/>
+            <a:r>
+              <a:rPr lang="zh-CN" altLang="en-US" sz="900" b="1" dirty="0">
+                <a:latin typeface="宋体" panose="02010600030101010101" pitchFamily="2" charset="-122"/>
+                <a:ea typeface="宋体" panose="02010600030101010101" pitchFamily="2" charset="-122"/>
+              </a:rPr>
+              <a:t>第五章 </a:t>
+            </a:r>
+            <a:r>
+              <a:rPr lang="zh-CN" altLang="en-US" sz="900" dirty="0">
+                <a:latin typeface="宋体" panose="02010600030101010101" pitchFamily="2" charset="-122"/>
+                <a:ea typeface="宋体" panose="02010600030101010101" pitchFamily="2" charset="-122"/>
+              </a:rPr>
+              <a:t>多智能体系统中的风险传播机制实证研究</a:t>
+            </a:r>
+          </a:p>
+        </p:txBody>
+      </p:sp>
+      <p:sp>
+        <p:nvSpPr>
+          <p:cNvPr id="106" name="矩形 105">
+            <a:extLst>
+              <a:ext uri="{FF2B5EF4-FFF2-40B4-BE49-F238E27FC236}">
+                <a16:creationId xmlns:a16="http://schemas.microsoft.com/office/drawing/2014/main" id="{0AEAE9AD-0571-4427-9F4F-226ADB70E495}"/>
+              </a:ext>
+            </a:extLst>
+          </p:cNvPr>
+          <p:cNvSpPr/>
+          <p:nvPr/>
+        </p:nvSpPr>
+        <p:spPr>
+          <a:xfrm rot="5400000">
+            <a:off x="3575492" y="636746"/>
+            <a:ext cx="369331" cy="3914577"/>
+          </a:xfrm>
+          <a:prstGeom prst="rect">
+            <a:avLst/>
+          </a:prstGeom>
+          <a:solidFill>
+            <a:srgbClr val="FCEADC"/>
+          </a:solidFill>
+          <a:ln w="9525">
+            <a:solidFill>
+              <a:schemeClr val="tx1">
+                <a:lumMod val="95000"/>
+                <a:lumOff val="5000"/>
               </a:schemeClr>
-            </a:lnRef>
-            <a:fillRef idx="1">
-              <a:schemeClr val="accent1"/>
-            </a:fillRef>
-            <a:effectRef idx="0">
-              <a:schemeClr val="accent1"/>
-            </a:effectRef>
-            <a:fontRef idx="minor">
-              <a:schemeClr val="lt1"/>
-            </a:fontRef>
-          </p:style>
-          <p:txBody>
-            <a:bodyPr rtlCol="0" anchor="ctr"/>
-            <a:lstStyle/>
-            <a:p>
-              <a:pPr algn="ctr"/>
-              <a:endParaRPr lang="zh-CN" altLang="en-US"/>
-            </a:p>
-          </p:txBody>
-        </p:sp>
-        <p:sp>
-          <p:nvSpPr>
-            <p:cNvPr id="105" name="文本框 104">
-              <a:extLst>
-                <a:ext uri="{FF2B5EF4-FFF2-40B4-BE49-F238E27FC236}">
-                  <a16:creationId xmlns:a16="http://schemas.microsoft.com/office/drawing/2014/main" id="{F224BF14-C923-43BF-B791-6181E2266695}"/>
-                </a:ext>
-              </a:extLst>
-            </p:cNvPr>
-            <p:cNvSpPr txBox="1"/>
-            <p:nvPr/>
-          </p:nvSpPr>
-          <p:spPr>
-            <a:xfrm>
-              <a:off x="1704716" y="2409369"/>
-              <a:ext cx="3903963" cy="369332"/>
-            </a:xfrm>
-            <a:prstGeom prst="rect">
-              <a:avLst/>
-            </a:prstGeom>
-            <a:noFill/>
-          </p:spPr>
-          <p:txBody>
-            <a:bodyPr vert="horz" wrap="square" rtlCol="0">
-              <a:spAutoFit/>
-            </a:bodyPr>
-            <a:lstStyle/>
-            <a:p>
-              <a:pPr algn="ctr"/>
-              <a:r>
-                <a:rPr lang="zh-CN" altLang="en-US" sz="900" dirty="0">
-                  <a:latin typeface="宋体" panose="02010600030101010101" pitchFamily="2" charset="-122"/>
-                  <a:ea typeface="宋体" panose="02010600030101010101" pitchFamily="2" charset="-122"/>
-                  <a:sym typeface="Wingdings" panose="05000000000000000000" pitchFamily="2" charset="2"/>
-                </a:rPr>
-                <a:t>医疗大语言模型安全性评估的核心挑战：</a:t>
-              </a:r>
-              <a:endParaRPr lang="en-US" altLang="zh-CN" sz="900" dirty="0">
+            </a:solidFill>
+          </a:ln>
+        </p:spPr>
+        <p:style>
+          <a:lnRef idx="2">
+            <a:schemeClr val="accent1">
+              <a:shade val="50000"/>
+            </a:schemeClr>
+          </a:lnRef>
+          <a:fillRef idx="1">
+            <a:schemeClr val="accent1"/>
+          </a:fillRef>
+          <a:effectRef idx="0">
+            <a:schemeClr val="accent1"/>
+          </a:effectRef>
+          <a:fontRef idx="minor">
+            <a:schemeClr val="lt1"/>
+          </a:fontRef>
+        </p:style>
+        <p:txBody>
+          <a:bodyPr rtlCol="0" anchor="ctr"/>
+          <a:lstStyle/>
+          <a:p>
+            <a:pPr algn="ctr"/>
+            <a:endParaRPr lang="zh-CN" altLang="en-US"/>
+          </a:p>
+        </p:txBody>
+      </p:sp>
+      <p:sp>
+        <p:nvSpPr>
+          <p:cNvPr id="105" name="文本框 104">
+            <a:extLst>
+              <a:ext uri="{FF2B5EF4-FFF2-40B4-BE49-F238E27FC236}">
+                <a16:creationId xmlns:a16="http://schemas.microsoft.com/office/drawing/2014/main" id="{F224BF14-C923-43BF-B791-6181E2266695}"/>
+              </a:ext>
+            </a:extLst>
+          </p:cNvPr>
+          <p:cNvSpPr txBox="1"/>
+          <p:nvPr/>
+        </p:nvSpPr>
+        <p:spPr>
+          <a:xfrm>
+            <a:off x="1709161" y="2409369"/>
+            <a:ext cx="4008285" cy="353943"/>
+          </a:xfrm>
+          <a:prstGeom prst="rect">
+            <a:avLst/>
+          </a:prstGeom>
+          <a:noFill/>
+        </p:spPr>
+        <p:txBody>
+          <a:bodyPr vert="horz" wrap="square" rtlCol="0">
+            <a:spAutoFit/>
+          </a:bodyPr>
+          <a:lstStyle/>
+          <a:p>
+            <a:pPr algn="ctr"/>
+            <a:r>
+              <a:rPr lang="zh-CN" altLang="en-US" sz="900" dirty="0">
                 <a:latin typeface="宋体" panose="02010600030101010101" pitchFamily="2" charset="-122"/>
                 <a:ea typeface="宋体" panose="02010600030101010101" pitchFamily="2" charset="-122"/>
                 <a:sym typeface="Wingdings" panose="05000000000000000000" pitchFamily="2" charset="2"/>
-              </a:endParaRPr>
-            </a:p>
-            <a:p>
-              <a:pPr algn="ctr"/>
-              <a:r>
-                <a:rPr lang="en-US" altLang="zh-CN" sz="900" dirty="0">
-                  <a:latin typeface="宋体" panose="02010600030101010101" pitchFamily="2" charset="-122"/>
-                  <a:ea typeface="宋体" panose="02010600030101010101" pitchFamily="2" charset="-122"/>
-                  <a:sym typeface="Wingdings" panose="05000000000000000000" pitchFamily="2" charset="2"/>
-                </a:rPr>
-                <a:t>(1)</a:t>
-              </a:r>
-              <a:r>
-                <a:rPr lang="zh-CN" altLang="en-US" sz="900" dirty="0">
-                  <a:latin typeface="宋体" panose="02010600030101010101" pitchFamily="2" charset="-122"/>
-                  <a:ea typeface="宋体" panose="02010600030101010101" pitchFamily="2" charset="-122"/>
-                </a:rPr>
-                <a:t>缺乏多智能体协作评估 </a:t>
-              </a:r>
-              <a:r>
-                <a:rPr lang="en-US" altLang="zh-CN" sz="900" dirty="0">
-                  <a:latin typeface="宋体" panose="02010600030101010101" pitchFamily="2" charset="-122"/>
-                  <a:ea typeface="宋体" panose="02010600030101010101" pitchFamily="2" charset="-122"/>
-                </a:rPr>
-                <a:t>(2)</a:t>
-              </a:r>
-              <a:r>
-                <a:rPr lang="zh-CN" altLang="en-US" sz="900" dirty="0">
-                  <a:latin typeface="宋体" panose="02010600030101010101" pitchFamily="2" charset="-122"/>
-                  <a:ea typeface="宋体" panose="02010600030101010101" pitchFamily="2" charset="-122"/>
-                </a:rPr>
-                <a:t>人工评估效率低 </a:t>
-              </a:r>
-              <a:r>
-                <a:rPr lang="en-US" altLang="zh-CN" sz="900" dirty="0">
-                  <a:latin typeface="宋体" panose="02010600030101010101" pitchFamily="2" charset="-122"/>
-                  <a:ea typeface="宋体" panose="02010600030101010101" pitchFamily="2" charset="-122"/>
-                </a:rPr>
-                <a:t>(3)</a:t>
-              </a:r>
-              <a:r>
-                <a:rPr lang="zh-CN" altLang="en-US" sz="900" dirty="0">
-                  <a:latin typeface="宋体" panose="02010600030101010101" pitchFamily="2" charset="-122"/>
-                  <a:ea typeface="宋体" panose="02010600030101010101" pitchFamily="2" charset="-122"/>
-                </a:rPr>
-                <a:t>缺乏真实数据验证</a:t>
-              </a:r>
-            </a:p>
-          </p:txBody>
-        </p:sp>
-        <p:sp>
-          <p:nvSpPr>
-            <p:cNvPr id="107" name="箭头: 下 106">
-              <a:extLst>
-                <a:ext uri="{FF2B5EF4-FFF2-40B4-BE49-F238E27FC236}">
-                  <a16:creationId xmlns:a16="http://schemas.microsoft.com/office/drawing/2014/main" id="{F427716F-7D10-4DD6-80B8-5C18C979230A}"/>
-                </a:ext>
-              </a:extLst>
-            </p:cNvPr>
-            <p:cNvSpPr/>
-            <p:nvPr/>
-          </p:nvSpPr>
-          <p:spPr>
-            <a:xfrm>
-              <a:off x="1998356" y="2795151"/>
-              <a:ext cx="89803" cy="122185"/>
-            </a:xfrm>
-            <a:prstGeom prst="downArrow">
-              <a:avLst/>
-            </a:prstGeom>
-            <a:solidFill>
-              <a:schemeClr val="tx1"/>
-            </a:solidFill>
-            <a:ln>
-              <a:noFill/>
-            </a:ln>
-          </p:spPr>
-          <p:style>
-            <a:lnRef idx="2">
-              <a:schemeClr val="accent1">
-                <a:shade val="50000"/>
-              </a:schemeClr>
-            </a:lnRef>
-            <a:fillRef idx="1">
-              <a:schemeClr val="accent1"/>
-            </a:fillRef>
-            <a:effectRef idx="0">
-              <a:schemeClr val="accent1"/>
-            </a:effectRef>
-            <a:fontRef idx="minor">
-              <a:schemeClr val="lt1"/>
-            </a:fontRef>
-          </p:style>
-          <p:txBody>
-            <a:bodyPr rtlCol="0" anchor="ctr"/>
-            <a:lstStyle/>
-            <a:p>
-              <a:pPr algn="ctr"/>
-              <a:endParaRPr lang="zh-CN" altLang="en-US"/>
-            </a:p>
-          </p:txBody>
-        </p:sp>
-        <p:sp>
-          <p:nvSpPr>
-            <p:cNvPr id="120" name="矩形 119">
-              <a:extLst>
-                <a:ext uri="{FF2B5EF4-FFF2-40B4-BE49-F238E27FC236}">
-                  <a16:creationId xmlns:a16="http://schemas.microsoft.com/office/drawing/2014/main" id="{A6746578-6DF6-402B-9CCB-55B6838F30C1}"/>
-                </a:ext>
-              </a:extLst>
-            </p:cNvPr>
-            <p:cNvSpPr/>
-            <p:nvPr/>
-          </p:nvSpPr>
-          <p:spPr>
-            <a:xfrm>
-              <a:off x="5334427" y="3595591"/>
-              <a:ext cx="262800" cy="1309298"/>
-            </a:xfrm>
-            <a:prstGeom prst="rect">
-              <a:avLst/>
-            </a:prstGeom>
-            <a:solidFill>
-              <a:srgbClr val="EAF1DF"/>
-            </a:solidFill>
-            <a:ln w="9525">
-              <a:solidFill>
-                <a:schemeClr val="tx1">
-                  <a:lumMod val="95000"/>
-                  <a:lumOff val="5000"/>
-                </a:schemeClr>
-              </a:solidFill>
-            </a:ln>
-          </p:spPr>
-          <p:style>
-            <a:lnRef idx="2">
-              <a:schemeClr val="accent1">
-                <a:shade val="50000"/>
-              </a:schemeClr>
-            </a:lnRef>
-            <a:fillRef idx="1">
-              <a:schemeClr val="accent1"/>
-            </a:fillRef>
-            <a:effectRef idx="0">
-              <a:schemeClr val="accent1"/>
-            </a:effectRef>
-            <a:fontRef idx="minor">
-              <a:schemeClr val="lt1"/>
-            </a:fontRef>
-          </p:style>
-          <p:txBody>
-            <a:bodyPr rtlCol="0" anchor="ctr"/>
-            <a:lstStyle/>
-            <a:p>
-              <a:pPr algn="ctr"/>
-              <a:endParaRPr lang="zh-CN" altLang="en-US"/>
-            </a:p>
-          </p:txBody>
-        </p:sp>
-        <p:sp>
-          <p:nvSpPr>
-            <p:cNvPr id="185" name="文本框 184">
-              <a:extLst>
-                <a:ext uri="{FF2B5EF4-FFF2-40B4-BE49-F238E27FC236}">
-                  <a16:creationId xmlns:a16="http://schemas.microsoft.com/office/drawing/2014/main" id="{13536C93-D246-46B5-A573-9A962F90F236}"/>
-                </a:ext>
-              </a:extLst>
-            </p:cNvPr>
-            <p:cNvSpPr txBox="1"/>
-            <p:nvPr/>
-          </p:nvSpPr>
-          <p:spPr>
-            <a:xfrm>
-              <a:off x="5311539" y="3624136"/>
-              <a:ext cx="307777" cy="1264071"/>
-            </a:xfrm>
-            <a:prstGeom prst="rect">
-              <a:avLst/>
-            </a:prstGeom>
-            <a:noFill/>
-          </p:spPr>
-          <p:txBody>
-            <a:bodyPr vert="eaVert" wrap="square" rtlCol="0">
-              <a:spAutoFit/>
-            </a:bodyPr>
-            <a:lstStyle/>
-            <a:p>
-              <a:pPr algn="ctr"/>
-              <a:r>
-                <a:rPr lang="zh-CN" altLang="en-US" sz="800" dirty="0">
-                  <a:latin typeface="宋体" panose="02010600030101010101" pitchFamily="2" charset="-122"/>
-                  <a:ea typeface="宋体" panose="02010600030101010101" pitchFamily="2" charset="-122"/>
-                </a:rPr>
-                <a:t>系统可靠性评估</a:t>
-              </a:r>
-            </a:p>
-          </p:txBody>
-        </p:sp>
-        <p:sp>
-          <p:nvSpPr>
-            <p:cNvPr id="117" name="矩形 116">
-              <a:extLst>
-                <a:ext uri="{FF2B5EF4-FFF2-40B4-BE49-F238E27FC236}">
-                  <a16:creationId xmlns:a16="http://schemas.microsoft.com/office/drawing/2014/main" id="{2A690260-F9F8-4F76-B98F-CA661DF95E44}"/>
-                </a:ext>
-              </a:extLst>
-            </p:cNvPr>
-            <p:cNvSpPr/>
-            <p:nvPr/>
-          </p:nvSpPr>
-          <p:spPr>
-            <a:xfrm>
-              <a:off x="4285413" y="3582670"/>
-              <a:ext cx="262800" cy="1302792"/>
-            </a:xfrm>
-            <a:prstGeom prst="rect">
-              <a:avLst/>
-            </a:prstGeom>
-            <a:solidFill>
-              <a:srgbClr val="EAF1DF"/>
-            </a:solidFill>
-            <a:ln w="9525">
-              <a:solidFill>
-                <a:schemeClr val="tx1">
-                  <a:lumMod val="95000"/>
-                  <a:lumOff val="5000"/>
-                </a:schemeClr>
-              </a:solidFill>
-            </a:ln>
-          </p:spPr>
-          <p:style>
-            <a:lnRef idx="2">
-              <a:schemeClr val="accent1">
-                <a:shade val="50000"/>
-              </a:schemeClr>
-            </a:lnRef>
-            <a:fillRef idx="1">
-              <a:schemeClr val="accent1"/>
-            </a:fillRef>
-            <a:effectRef idx="0">
-              <a:schemeClr val="accent1"/>
-            </a:effectRef>
-            <a:fontRef idx="minor">
-              <a:schemeClr val="lt1"/>
-            </a:fontRef>
-          </p:style>
-          <p:txBody>
-            <a:bodyPr rtlCol="0" anchor="ctr"/>
-            <a:lstStyle/>
-            <a:p>
-              <a:pPr algn="ctr"/>
-              <a:endParaRPr lang="zh-CN" altLang="en-US"/>
-            </a:p>
-          </p:txBody>
-        </p:sp>
-        <p:sp>
-          <p:nvSpPr>
-            <p:cNvPr id="187" name="文本框 186">
-              <a:extLst>
-                <a:ext uri="{FF2B5EF4-FFF2-40B4-BE49-F238E27FC236}">
-                  <a16:creationId xmlns:a16="http://schemas.microsoft.com/office/drawing/2014/main" id="{AD8EA3FA-013A-4F0D-AC50-EF70D4178647}"/>
-                </a:ext>
-              </a:extLst>
-            </p:cNvPr>
-            <p:cNvSpPr txBox="1"/>
-            <p:nvPr/>
-          </p:nvSpPr>
-          <p:spPr>
-            <a:xfrm>
-              <a:off x="4266139" y="3612504"/>
-              <a:ext cx="307777" cy="1245549"/>
-            </a:xfrm>
-            <a:prstGeom prst="rect">
-              <a:avLst/>
-            </a:prstGeom>
-            <a:noFill/>
-          </p:spPr>
-          <p:txBody>
-            <a:bodyPr vert="eaVert" wrap="square" rtlCol="0">
-              <a:spAutoFit/>
-            </a:bodyPr>
-            <a:lstStyle/>
-            <a:p>
-              <a:pPr algn="ctr"/>
-              <a:r>
-                <a:rPr lang="zh-CN" altLang="en-US" sz="800" dirty="0">
-                  <a:latin typeface="宋体" panose="02010600030101010101" pitchFamily="2" charset="-122"/>
-                  <a:ea typeface="宋体" panose="02010600030101010101" pitchFamily="2" charset="-122"/>
-                </a:rPr>
-                <a:t>真实数据集构建</a:t>
-              </a:r>
-            </a:p>
-          </p:txBody>
-        </p:sp>
-        <p:sp>
-          <p:nvSpPr>
-            <p:cNvPr id="51" name="矩形 50">
-              <a:extLst>
-                <a:ext uri="{FF2B5EF4-FFF2-40B4-BE49-F238E27FC236}">
-                  <a16:creationId xmlns:a16="http://schemas.microsoft.com/office/drawing/2014/main" id="{9A3ACE77-16F4-4E8B-A8B6-72412B3CAF50}"/>
-                </a:ext>
-              </a:extLst>
-            </p:cNvPr>
-            <p:cNvSpPr/>
-            <p:nvPr/>
-          </p:nvSpPr>
-          <p:spPr>
-            <a:xfrm>
-              <a:off x="4789599" y="3582670"/>
-              <a:ext cx="262800" cy="1302792"/>
-            </a:xfrm>
-            <a:prstGeom prst="rect">
-              <a:avLst/>
-            </a:prstGeom>
-            <a:solidFill>
-              <a:srgbClr val="EAF1DF"/>
-            </a:solidFill>
-            <a:ln w="9525">
-              <a:solidFill>
-                <a:schemeClr val="tx1">
-                  <a:lumMod val="95000"/>
-                  <a:lumOff val="5000"/>
-                </a:schemeClr>
-              </a:solidFill>
-            </a:ln>
-          </p:spPr>
-          <p:style>
-            <a:lnRef idx="2">
-              <a:schemeClr val="accent1">
-                <a:shade val="50000"/>
-              </a:schemeClr>
-            </a:lnRef>
-            <a:fillRef idx="1">
-              <a:schemeClr val="accent1"/>
-            </a:fillRef>
-            <a:effectRef idx="0">
-              <a:schemeClr val="accent1"/>
-            </a:effectRef>
-            <a:fontRef idx="minor">
-              <a:schemeClr val="lt1"/>
-            </a:fontRef>
-          </p:style>
-          <p:txBody>
-            <a:bodyPr rtlCol="0" anchor="ctr"/>
-            <a:lstStyle/>
-            <a:p>
-              <a:pPr algn="ctr"/>
-              <a:endParaRPr lang="zh-CN" altLang="en-US"/>
-            </a:p>
-          </p:txBody>
-        </p:sp>
-        <p:sp>
-          <p:nvSpPr>
-            <p:cNvPr id="52" name="文本框 51">
-              <a:extLst>
-                <a:ext uri="{FF2B5EF4-FFF2-40B4-BE49-F238E27FC236}">
-                  <a16:creationId xmlns:a16="http://schemas.microsoft.com/office/drawing/2014/main" id="{313CA518-A42F-4465-ACE6-CD7E7F741EBE}"/>
-                </a:ext>
-              </a:extLst>
-            </p:cNvPr>
-            <p:cNvSpPr txBox="1"/>
-            <p:nvPr/>
-          </p:nvSpPr>
-          <p:spPr>
-            <a:xfrm>
-              <a:off x="4767111" y="3542142"/>
-              <a:ext cx="307777" cy="1383849"/>
-            </a:xfrm>
-            <a:prstGeom prst="rect">
-              <a:avLst/>
-            </a:prstGeom>
-            <a:noFill/>
-          </p:spPr>
-          <p:txBody>
-            <a:bodyPr vert="eaVert" wrap="square" rtlCol="0">
-              <a:spAutoFit/>
-            </a:bodyPr>
-            <a:lstStyle/>
-            <a:p>
-              <a:pPr algn="ctr"/>
-              <a:r>
-                <a:rPr lang="zh-CN" altLang="en-US" sz="800" dirty="0">
-                  <a:latin typeface="宋体" panose="02010600030101010101" pitchFamily="2" charset="-122"/>
-                  <a:ea typeface="宋体" panose="02010600030101010101" pitchFamily="2" charset="-122"/>
-                </a:rPr>
-                <a:t>多智能体协作下的级联测试</a:t>
-              </a:r>
-            </a:p>
-          </p:txBody>
-        </p:sp>
-        <p:sp>
-          <p:nvSpPr>
-            <p:cNvPr id="94" name="矩形 93">
-              <a:extLst>
-                <a:ext uri="{FF2B5EF4-FFF2-40B4-BE49-F238E27FC236}">
-                  <a16:creationId xmlns:a16="http://schemas.microsoft.com/office/drawing/2014/main" id="{17A5B624-7E18-4811-9288-2FBE276F12A2}"/>
-                </a:ext>
-              </a:extLst>
-            </p:cNvPr>
-            <p:cNvSpPr/>
-            <p:nvPr/>
-          </p:nvSpPr>
-          <p:spPr>
-            <a:xfrm>
-              <a:off x="1798424" y="2931043"/>
-              <a:ext cx="489667" cy="1952506"/>
-            </a:xfrm>
-            <a:prstGeom prst="rect">
-              <a:avLst/>
-            </a:prstGeom>
-            <a:solidFill>
-              <a:srgbClr val="DBEEF4"/>
-            </a:solidFill>
-            <a:ln w="9525">
-              <a:solidFill>
-                <a:schemeClr val="tx1">
-                  <a:lumMod val="95000"/>
-                  <a:lumOff val="5000"/>
-                </a:schemeClr>
-              </a:solidFill>
-            </a:ln>
-          </p:spPr>
-          <p:style>
-            <a:lnRef idx="2">
-              <a:schemeClr val="accent1">
-                <a:shade val="50000"/>
-              </a:schemeClr>
-            </a:lnRef>
-            <a:fillRef idx="1">
-              <a:schemeClr val="accent1"/>
-            </a:fillRef>
-            <a:effectRef idx="0">
-              <a:schemeClr val="accent1"/>
-            </a:effectRef>
-            <a:fontRef idx="minor">
-              <a:schemeClr val="lt1"/>
-            </a:fontRef>
-          </p:style>
-          <p:txBody>
-            <a:bodyPr rtlCol="0" anchor="ctr"/>
-            <a:lstStyle/>
-            <a:p>
-              <a:pPr algn="ctr"/>
-              <a:endParaRPr lang="zh-CN" altLang="en-US"/>
-            </a:p>
-          </p:txBody>
-        </p:sp>
-        <p:sp>
-          <p:nvSpPr>
-            <p:cNvPr id="2" name="文本框 1">
-              <a:extLst>
-                <a:ext uri="{FF2B5EF4-FFF2-40B4-BE49-F238E27FC236}">
-                  <a16:creationId xmlns:a16="http://schemas.microsoft.com/office/drawing/2014/main" id="{4CF2D47F-1AB6-4634-BF1A-93752823017C}"/>
-                </a:ext>
-              </a:extLst>
-            </p:cNvPr>
-            <p:cNvSpPr txBox="1"/>
-            <p:nvPr/>
-          </p:nvSpPr>
-          <p:spPr>
-            <a:xfrm>
-              <a:off x="1787998" y="3085646"/>
-              <a:ext cx="461665" cy="1708135"/>
-            </a:xfrm>
-            <a:prstGeom prst="rect">
-              <a:avLst/>
-            </a:prstGeom>
-            <a:noFill/>
-          </p:spPr>
-          <p:txBody>
-            <a:bodyPr vert="eaVert" wrap="square" rtlCol="0">
-              <a:spAutoFit/>
-            </a:bodyPr>
-            <a:lstStyle/>
-            <a:p>
-              <a:pPr algn="ctr"/>
-              <a:r>
-                <a:rPr lang="zh-CN" altLang="en-US" sz="900" dirty="0">
-                  <a:latin typeface="宋体" panose="02010600030101010101" pitchFamily="2" charset="-122"/>
-                  <a:ea typeface="宋体" panose="02010600030101010101" pitchFamily="2" charset="-122"/>
-                </a:rPr>
-                <a:t>智能体协作系统构建与威胁建模</a:t>
-              </a:r>
-              <a:r>
-                <a:rPr lang="zh-CN" altLang="en-US" sz="900" b="1" dirty="0">
-                  <a:latin typeface="宋体" panose="02010600030101010101" pitchFamily="2" charset="-122"/>
-                  <a:ea typeface="宋体" panose="02010600030101010101" pitchFamily="2" charset="-122"/>
-                </a:rPr>
-                <a:t>第三章 </a:t>
-              </a:r>
-              <a:r>
-                <a:rPr lang="zh-CN" altLang="en-US" sz="900" dirty="0">
-                  <a:latin typeface="宋体" panose="02010600030101010101" pitchFamily="2" charset="-122"/>
-                  <a:ea typeface="宋体" panose="02010600030101010101" pitchFamily="2" charset="-122"/>
-                </a:rPr>
-                <a:t>面向临床诊疗链的多</a:t>
-              </a:r>
-            </a:p>
-          </p:txBody>
-        </p:sp>
-        <p:sp>
-          <p:nvSpPr>
-            <p:cNvPr id="97" name="矩形 96">
-              <a:extLst>
-                <a:ext uri="{FF2B5EF4-FFF2-40B4-BE49-F238E27FC236}">
-                  <a16:creationId xmlns:a16="http://schemas.microsoft.com/office/drawing/2014/main" id="{9902E07E-F147-4D29-B2D4-59DB3AA19772}"/>
-                </a:ext>
-              </a:extLst>
-            </p:cNvPr>
-            <p:cNvSpPr/>
-            <p:nvPr/>
-          </p:nvSpPr>
-          <p:spPr>
-            <a:xfrm rot="5400000">
-              <a:off x="2979939" y="2356843"/>
-              <a:ext cx="435600" cy="1584000"/>
-            </a:xfrm>
-            <a:prstGeom prst="rect">
-              <a:avLst/>
-            </a:prstGeom>
-            <a:solidFill>
-              <a:srgbClr val="DBEEF4"/>
-            </a:solidFill>
-            <a:ln w="9525">
-              <a:solidFill>
-                <a:schemeClr val="tx1">
-                  <a:lumMod val="95000"/>
-                  <a:lumOff val="5000"/>
-                </a:schemeClr>
-              </a:solidFill>
-            </a:ln>
-          </p:spPr>
-          <p:style>
-            <a:lnRef idx="2">
-              <a:schemeClr val="accent1">
-                <a:shade val="50000"/>
-              </a:schemeClr>
-            </a:lnRef>
-            <a:fillRef idx="1">
-              <a:schemeClr val="accent1"/>
-            </a:fillRef>
-            <a:effectRef idx="0">
-              <a:schemeClr val="accent1"/>
-            </a:effectRef>
-            <a:fontRef idx="minor">
-              <a:schemeClr val="lt1"/>
-            </a:fontRef>
-          </p:style>
-          <p:txBody>
-            <a:bodyPr rtlCol="0" anchor="ctr"/>
-            <a:lstStyle/>
-            <a:p>
-              <a:pPr algn="ctr"/>
-              <a:endParaRPr lang="zh-CN" altLang="en-US" dirty="0"/>
-            </a:p>
-          </p:txBody>
-        </p:sp>
-        <p:sp>
-          <p:nvSpPr>
-            <p:cNvPr id="86" name="文本框 85">
-              <a:extLst>
-                <a:ext uri="{FF2B5EF4-FFF2-40B4-BE49-F238E27FC236}">
-                  <a16:creationId xmlns:a16="http://schemas.microsoft.com/office/drawing/2014/main" id="{F8979E28-5F52-4A7E-B86E-74223EF41747}"/>
-                </a:ext>
-              </a:extLst>
-            </p:cNvPr>
-            <p:cNvSpPr txBox="1"/>
-            <p:nvPr/>
-          </p:nvSpPr>
-          <p:spPr>
-            <a:xfrm>
-              <a:off x="2326568" y="2964904"/>
-              <a:ext cx="1742342" cy="369332"/>
-            </a:xfrm>
-            <a:prstGeom prst="rect">
-              <a:avLst/>
-            </a:prstGeom>
-            <a:noFill/>
-          </p:spPr>
-          <p:txBody>
-            <a:bodyPr vert="horz" wrap="square" rtlCol="0">
-              <a:spAutoFit/>
-            </a:bodyPr>
-            <a:lstStyle/>
-            <a:p>
-              <a:pPr algn="ctr"/>
-              <a:r>
-                <a:rPr lang="zh-CN" altLang="en-US" sz="900" b="1" dirty="0">
-                  <a:latin typeface="宋体" panose="02010600030101010101" pitchFamily="2" charset="-122"/>
-                  <a:ea typeface="宋体" panose="02010600030101010101" pitchFamily="2" charset="-122"/>
-                </a:rPr>
-                <a:t>第四章 </a:t>
-              </a:r>
-              <a:r>
-                <a:rPr lang="zh-CN" altLang="en-US" sz="900" dirty="0">
-                  <a:latin typeface="宋体" panose="02010600030101010101" pitchFamily="2" charset="-122"/>
-                  <a:ea typeface="宋体" panose="02010600030101010101" pitchFamily="2" charset="-122"/>
-                </a:rPr>
-                <a:t>基于通用基准的单体模型对抗鲁棒性评估</a:t>
-              </a:r>
-            </a:p>
-          </p:txBody>
-        </p:sp>
-        <p:sp>
-          <p:nvSpPr>
-            <p:cNvPr id="114" name="矩形 113">
-              <a:extLst>
-                <a:ext uri="{FF2B5EF4-FFF2-40B4-BE49-F238E27FC236}">
-                  <a16:creationId xmlns:a16="http://schemas.microsoft.com/office/drawing/2014/main" id="{9AC867C7-FC5A-4266-A671-410873B77538}"/>
-                </a:ext>
-              </a:extLst>
-            </p:cNvPr>
-            <p:cNvSpPr/>
-            <p:nvPr/>
-          </p:nvSpPr>
-          <p:spPr>
-            <a:xfrm>
-              <a:off x="3066339" y="3579417"/>
-              <a:ext cx="262800" cy="1309298"/>
-            </a:xfrm>
-            <a:prstGeom prst="rect">
-              <a:avLst/>
-            </a:prstGeom>
-            <a:solidFill>
-              <a:srgbClr val="EAF1DF"/>
-            </a:solidFill>
-            <a:ln w="9525">
-              <a:solidFill>
-                <a:schemeClr val="tx1">
-                  <a:lumMod val="95000"/>
-                  <a:lumOff val="5000"/>
-                </a:schemeClr>
-              </a:solidFill>
-            </a:ln>
-          </p:spPr>
-          <p:style>
-            <a:lnRef idx="2">
-              <a:schemeClr val="accent1">
-                <a:shade val="50000"/>
-              </a:schemeClr>
-            </a:lnRef>
-            <a:fillRef idx="1">
-              <a:schemeClr val="accent1"/>
-            </a:fillRef>
-            <a:effectRef idx="0">
-              <a:schemeClr val="accent1"/>
-            </a:effectRef>
-            <a:fontRef idx="minor">
-              <a:schemeClr val="lt1"/>
-            </a:fontRef>
-          </p:style>
-          <p:txBody>
-            <a:bodyPr rtlCol="0" anchor="ctr"/>
-            <a:lstStyle/>
-            <a:p>
-              <a:pPr algn="ctr"/>
-              <a:endParaRPr lang="zh-CN" altLang="en-US"/>
-            </a:p>
-          </p:txBody>
-        </p:sp>
-        <p:sp>
-          <p:nvSpPr>
-            <p:cNvPr id="115" name="文本框 114">
-              <a:extLst>
-                <a:ext uri="{FF2B5EF4-FFF2-40B4-BE49-F238E27FC236}">
-                  <a16:creationId xmlns:a16="http://schemas.microsoft.com/office/drawing/2014/main" id="{765B6492-E1B1-4E54-A858-079457660303}"/>
-                </a:ext>
-              </a:extLst>
-            </p:cNvPr>
-            <p:cNvSpPr txBox="1"/>
-            <p:nvPr/>
-          </p:nvSpPr>
-          <p:spPr>
-            <a:xfrm>
-              <a:off x="3043851" y="3724455"/>
-              <a:ext cx="307777" cy="1019222"/>
-            </a:xfrm>
-            <a:prstGeom prst="rect">
-              <a:avLst/>
-            </a:prstGeom>
-            <a:noFill/>
-          </p:spPr>
-          <p:txBody>
-            <a:bodyPr vert="eaVert" wrap="square" rtlCol="0">
-              <a:spAutoFit/>
-            </a:bodyPr>
-            <a:lstStyle>
-              <a:defPPr>
-                <a:defRPr lang="en-US"/>
-              </a:defPPr>
-              <a:lvl1pPr algn="ctr">
-                <a:defRPr sz="800">
-                  <a:latin typeface="宋体" panose="02010600030101010101" pitchFamily="2" charset="-122"/>
-                  <a:ea typeface="宋体" panose="02010600030101010101" pitchFamily="2" charset="-122"/>
-                </a:defRPr>
-              </a:lvl1pPr>
-            </a:lstStyle>
-            <a:p>
-              <a:r>
-                <a:rPr lang="zh-CN" altLang="en-US" dirty="0"/>
-                <a:t>提示词操纵攻击</a:t>
-              </a:r>
-            </a:p>
-          </p:txBody>
-        </p:sp>
-        <p:sp>
-          <p:nvSpPr>
-            <p:cNvPr id="113" name="矩形 112">
-              <a:extLst>
-                <a:ext uri="{FF2B5EF4-FFF2-40B4-BE49-F238E27FC236}">
-                  <a16:creationId xmlns:a16="http://schemas.microsoft.com/office/drawing/2014/main" id="{9B606D5F-583F-44F9-842A-C6833603D450}"/>
-                </a:ext>
-              </a:extLst>
-            </p:cNvPr>
-            <p:cNvSpPr/>
-            <p:nvPr/>
-          </p:nvSpPr>
-          <p:spPr>
-            <a:xfrm>
-              <a:off x="2520798" y="3579418"/>
-              <a:ext cx="263984" cy="1309297"/>
-            </a:xfrm>
-            <a:prstGeom prst="rect">
-              <a:avLst/>
-            </a:prstGeom>
-            <a:solidFill>
-              <a:srgbClr val="EAF1DF"/>
-            </a:solidFill>
-            <a:ln w="9525">
-              <a:solidFill>
-                <a:schemeClr val="tx1">
-                  <a:lumMod val="95000"/>
-                  <a:lumOff val="5000"/>
-                </a:schemeClr>
-              </a:solidFill>
-            </a:ln>
-          </p:spPr>
-          <p:style>
-            <a:lnRef idx="2">
-              <a:schemeClr val="accent1">
-                <a:shade val="50000"/>
-              </a:schemeClr>
-            </a:lnRef>
-            <a:fillRef idx="1">
-              <a:schemeClr val="accent1"/>
-            </a:fillRef>
-            <a:effectRef idx="0">
-              <a:schemeClr val="accent1"/>
-            </a:effectRef>
-            <a:fontRef idx="minor">
-              <a:schemeClr val="lt1"/>
-            </a:fontRef>
-          </p:style>
-          <p:txBody>
-            <a:bodyPr rtlCol="0" anchor="ctr"/>
-            <a:lstStyle/>
-            <a:p>
-              <a:pPr algn="ctr"/>
-              <a:endParaRPr lang="zh-CN" altLang="en-US" dirty="0"/>
-            </a:p>
-          </p:txBody>
-        </p:sp>
-        <p:sp>
-          <p:nvSpPr>
-            <p:cNvPr id="116" name="文本框 115">
-              <a:extLst>
-                <a:ext uri="{FF2B5EF4-FFF2-40B4-BE49-F238E27FC236}">
-                  <a16:creationId xmlns:a16="http://schemas.microsoft.com/office/drawing/2014/main" id="{1C7906AC-DE1B-4836-BC06-1AB5338A72D4}"/>
-                </a:ext>
-              </a:extLst>
-            </p:cNvPr>
-            <p:cNvSpPr txBox="1"/>
-            <p:nvPr/>
-          </p:nvSpPr>
-          <p:spPr>
-            <a:xfrm>
-              <a:off x="2498902" y="3641847"/>
-              <a:ext cx="307777" cy="1184441"/>
-            </a:xfrm>
-            <a:prstGeom prst="rect">
-              <a:avLst/>
-            </a:prstGeom>
-            <a:noFill/>
-          </p:spPr>
-          <p:txBody>
-            <a:bodyPr vert="eaVert" wrap="square" rtlCol="0">
-              <a:spAutoFit/>
-            </a:bodyPr>
-            <a:lstStyle/>
-            <a:p>
-              <a:pPr algn="ctr"/>
-              <a:r>
-                <a:rPr lang="zh-CN" altLang="en-US" sz="800" dirty="0">
-                  <a:latin typeface="宋体" panose="02010600030101010101" pitchFamily="2" charset="-122"/>
-                  <a:ea typeface="宋体" panose="02010600030101010101" pitchFamily="2" charset="-122"/>
-                </a:rPr>
-                <a:t>数据投毒攻击</a:t>
-              </a:r>
-            </a:p>
-          </p:txBody>
-        </p:sp>
-        <p:sp>
-          <p:nvSpPr>
-            <p:cNvPr id="58" name="矩形 57">
-              <a:extLst>
-                <a:ext uri="{FF2B5EF4-FFF2-40B4-BE49-F238E27FC236}">
-                  <a16:creationId xmlns:a16="http://schemas.microsoft.com/office/drawing/2014/main" id="{E6096784-2369-42F3-9478-945E2FF684A8}"/>
-                </a:ext>
-              </a:extLst>
-            </p:cNvPr>
-            <p:cNvSpPr/>
-            <p:nvPr/>
-          </p:nvSpPr>
-          <p:spPr>
-            <a:xfrm>
-              <a:off x="3611288" y="3579417"/>
-              <a:ext cx="262800" cy="1309298"/>
-            </a:xfrm>
-            <a:prstGeom prst="rect">
-              <a:avLst/>
-            </a:prstGeom>
-            <a:solidFill>
-              <a:srgbClr val="EAF1DF"/>
-            </a:solidFill>
-            <a:ln w="9525">
-              <a:solidFill>
-                <a:schemeClr val="tx1">
-                  <a:lumMod val="95000"/>
-                  <a:lumOff val="5000"/>
-                </a:schemeClr>
-              </a:solidFill>
-            </a:ln>
-          </p:spPr>
-          <p:style>
-            <a:lnRef idx="2">
-              <a:schemeClr val="accent1">
-                <a:shade val="50000"/>
-              </a:schemeClr>
-            </a:lnRef>
-            <a:fillRef idx="1">
-              <a:schemeClr val="accent1"/>
-            </a:fillRef>
-            <a:effectRef idx="0">
-              <a:schemeClr val="accent1"/>
-            </a:effectRef>
-            <a:fontRef idx="minor">
-              <a:schemeClr val="lt1"/>
-            </a:fontRef>
-          </p:style>
-          <p:txBody>
-            <a:bodyPr rtlCol="0" anchor="ctr"/>
-            <a:lstStyle/>
-            <a:p>
-              <a:pPr algn="ctr"/>
-              <a:endParaRPr lang="zh-CN" altLang="en-US" dirty="0"/>
-            </a:p>
-          </p:txBody>
-        </p:sp>
-        <p:sp>
-          <p:nvSpPr>
-            <p:cNvPr id="59" name="文本框 58">
-              <a:extLst>
-                <a:ext uri="{FF2B5EF4-FFF2-40B4-BE49-F238E27FC236}">
-                  <a16:creationId xmlns:a16="http://schemas.microsoft.com/office/drawing/2014/main" id="{25DBB5D8-ED8B-4946-9DFB-1CCB2B8193BD}"/>
-                </a:ext>
-              </a:extLst>
-            </p:cNvPr>
-            <p:cNvSpPr txBox="1"/>
-            <p:nvPr/>
-          </p:nvSpPr>
-          <p:spPr>
-            <a:xfrm>
-              <a:off x="3588800" y="3724455"/>
-              <a:ext cx="307777" cy="1019222"/>
-            </a:xfrm>
-            <a:prstGeom prst="rect">
-              <a:avLst/>
-            </a:prstGeom>
-            <a:noFill/>
-          </p:spPr>
-          <p:txBody>
-            <a:bodyPr vert="eaVert" wrap="square" rtlCol="0">
-              <a:spAutoFit/>
-            </a:bodyPr>
-            <a:lstStyle>
-              <a:defPPr>
-                <a:defRPr lang="en-US"/>
-              </a:defPPr>
-              <a:lvl1pPr algn="ctr">
-                <a:defRPr sz="800">
-                  <a:latin typeface="宋体" panose="02010600030101010101" pitchFamily="2" charset="-122"/>
-                  <a:ea typeface="宋体" panose="02010600030101010101" pitchFamily="2" charset="-122"/>
-                </a:defRPr>
-              </a:lvl1pPr>
-            </a:lstStyle>
-            <a:p>
-              <a:r>
-                <a:rPr lang="zh-CN" altLang="en-US" dirty="0"/>
-                <a:t>越狱攻击</a:t>
-              </a:r>
-            </a:p>
-          </p:txBody>
-        </p:sp>
-        <p:sp>
-          <p:nvSpPr>
-            <p:cNvPr id="102" name="矩形 101">
-              <a:extLst>
-                <a:ext uri="{FF2B5EF4-FFF2-40B4-BE49-F238E27FC236}">
-                  <a16:creationId xmlns:a16="http://schemas.microsoft.com/office/drawing/2014/main" id="{B61E2372-7676-4D75-9A39-543380D198C2}"/>
-                </a:ext>
-              </a:extLst>
-            </p:cNvPr>
-            <p:cNvSpPr/>
-            <p:nvPr/>
-          </p:nvSpPr>
-          <p:spPr>
-            <a:xfrm>
-              <a:off x="5855642" y="2399648"/>
-              <a:ext cx="352800" cy="2483901"/>
-            </a:xfrm>
-            <a:prstGeom prst="rect">
-              <a:avLst/>
-            </a:prstGeom>
-            <a:solidFill>
-              <a:srgbClr val="DBEEF4"/>
-            </a:solidFill>
-            <a:ln w="9525">
-              <a:solidFill>
-                <a:schemeClr val="tx1">
-                  <a:lumMod val="95000"/>
-                  <a:lumOff val="5000"/>
-                </a:schemeClr>
-              </a:solidFill>
-            </a:ln>
-          </p:spPr>
-          <p:style>
-            <a:lnRef idx="2">
-              <a:schemeClr val="accent1">
-                <a:shade val="50000"/>
-              </a:schemeClr>
-            </a:lnRef>
-            <a:fillRef idx="1">
-              <a:schemeClr val="accent1"/>
-            </a:fillRef>
-            <a:effectRef idx="0">
-              <a:schemeClr val="accent1"/>
-            </a:effectRef>
-            <a:fontRef idx="minor">
-              <a:schemeClr val="lt1"/>
-            </a:fontRef>
-          </p:style>
-          <p:txBody>
-            <a:bodyPr rtlCol="0" anchor="ctr"/>
-            <a:lstStyle/>
-            <a:p>
-              <a:pPr algn="ctr"/>
-              <a:endParaRPr lang="zh-CN" altLang="en-US"/>
-            </a:p>
-          </p:txBody>
-        </p:sp>
-        <p:sp>
-          <p:nvSpPr>
-            <p:cNvPr id="72" name="文本框 71">
-              <a:extLst>
-                <a:ext uri="{FF2B5EF4-FFF2-40B4-BE49-F238E27FC236}">
-                  <a16:creationId xmlns:a16="http://schemas.microsoft.com/office/drawing/2014/main" id="{6C76486C-E033-469F-AEA1-8323DB1FF106}"/>
-                </a:ext>
-              </a:extLst>
-            </p:cNvPr>
-            <p:cNvSpPr txBox="1"/>
-            <p:nvPr/>
-          </p:nvSpPr>
-          <p:spPr>
-            <a:xfrm>
-              <a:off x="5870460" y="2787531"/>
-              <a:ext cx="323165" cy="1708135"/>
-            </a:xfrm>
-            <a:prstGeom prst="rect">
-              <a:avLst/>
-            </a:prstGeom>
-            <a:noFill/>
-          </p:spPr>
-          <p:txBody>
-            <a:bodyPr vert="eaVert" wrap="square" rtlCol="0">
-              <a:spAutoFit/>
-            </a:bodyPr>
-            <a:lstStyle/>
-            <a:p>
-              <a:pPr algn="ctr"/>
-              <a:r>
-                <a:rPr lang="zh-CN" altLang="en-US" sz="900" b="1" dirty="0">
-                  <a:latin typeface="宋体" panose="02010600030101010101" pitchFamily="2" charset="-122"/>
-                  <a:ea typeface="宋体" panose="02010600030101010101" pitchFamily="2" charset="-122"/>
-                </a:rPr>
-                <a:t>第六章 </a:t>
-              </a:r>
-              <a:r>
-                <a:rPr lang="zh-CN" altLang="en-US" sz="900" dirty="0">
-                  <a:latin typeface="宋体" panose="02010600030101010101" pitchFamily="2" charset="-122"/>
-                  <a:ea typeface="宋体" panose="02010600030101010101" pitchFamily="2" charset="-122"/>
-                </a:rPr>
-                <a:t>总结与展望</a:t>
-              </a:r>
-            </a:p>
-          </p:txBody>
-        </p:sp>
-        <p:sp>
-          <p:nvSpPr>
-            <p:cNvPr id="89" name="箭头: 下 88">
-              <a:extLst>
-                <a:ext uri="{FF2B5EF4-FFF2-40B4-BE49-F238E27FC236}">
-                  <a16:creationId xmlns:a16="http://schemas.microsoft.com/office/drawing/2014/main" id="{12728C5A-F692-4DB4-8755-E4C8FA57E191}"/>
-                </a:ext>
-              </a:extLst>
-            </p:cNvPr>
-            <p:cNvSpPr/>
-            <p:nvPr/>
-          </p:nvSpPr>
-          <p:spPr>
-            <a:xfrm>
-              <a:off x="3155493" y="2795151"/>
-              <a:ext cx="89803" cy="122185"/>
-            </a:xfrm>
-            <a:prstGeom prst="downArrow">
-              <a:avLst/>
-            </a:prstGeom>
-            <a:solidFill>
-              <a:schemeClr val="tx1"/>
-            </a:solidFill>
-            <a:ln>
-              <a:noFill/>
-            </a:ln>
-          </p:spPr>
-          <p:style>
-            <a:lnRef idx="2">
-              <a:schemeClr val="accent1">
-                <a:shade val="50000"/>
-              </a:schemeClr>
-            </a:lnRef>
-            <a:fillRef idx="1">
-              <a:schemeClr val="accent1"/>
-            </a:fillRef>
-            <a:effectRef idx="0">
-              <a:schemeClr val="accent1"/>
-            </a:effectRef>
-            <a:fontRef idx="minor">
-              <a:schemeClr val="lt1"/>
-            </a:fontRef>
-          </p:style>
-          <p:txBody>
-            <a:bodyPr rtlCol="0" anchor="ctr"/>
-            <a:lstStyle/>
-            <a:p>
-              <a:pPr algn="ctr"/>
-              <a:endParaRPr lang="zh-CN" altLang="en-US"/>
-            </a:p>
-          </p:txBody>
-        </p:sp>
-        <p:sp>
-          <p:nvSpPr>
-            <p:cNvPr id="90" name="箭头: 下 89">
-              <a:extLst>
-                <a:ext uri="{FF2B5EF4-FFF2-40B4-BE49-F238E27FC236}">
-                  <a16:creationId xmlns:a16="http://schemas.microsoft.com/office/drawing/2014/main" id="{33F90FA4-2404-45BA-A510-1F642DFC1CDF}"/>
-                </a:ext>
-              </a:extLst>
-            </p:cNvPr>
-            <p:cNvSpPr/>
-            <p:nvPr/>
-          </p:nvSpPr>
-          <p:spPr>
-            <a:xfrm>
-              <a:off x="4878348" y="2795151"/>
-              <a:ext cx="89803" cy="122185"/>
-            </a:xfrm>
-            <a:prstGeom prst="downArrow">
-              <a:avLst/>
-            </a:prstGeom>
-            <a:solidFill>
-              <a:schemeClr val="tx1"/>
-            </a:solidFill>
-            <a:ln>
-              <a:noFill/>
-            </a:ln>
-          </p:spPr>
-          <p:style>
-            <a:lnRef idx="2">
-              <a:schemeClr val="accent1">
-                <a:shade val="50000"/>
-              </a:schemeClr>
-            </a:lnRef>
-            <a:fillRef idx="1">
-              <a:schemeClr val="accent1"/>
-            </a:fillRef>
-            <a:effectRef idx="0">
-              <a:schemeClr val="accent1"/>
-            </a:effectRef>
-            <a:fontRef idx="minor">
-              <a:schemeClr val="lt1"/>
-            </a:fontRef>
-          </p:style>
-          <p:txBody>
-            <a:bodyPr rtlCol="0" anchor="ctr"/>
-            <a:lstStyle/>
-            <a:p>
-              <a:pPr algn="ctr"/>
-              <a:endParaRPr lang="zh-CN" altLang="en-US"/>
-            </a:p>
-          </p:txBody>
-        </p:sp>
-        <p:cxnSp>
-          <p:nvCxnSpPr>
-            <p:cNvPr id="37" name="直接连接符 36">
-              <a:extLst>
-                <a:ext uri="{FF2B5EF4-FFF2-40B4-BE49-F238E27FC236}">
-                  <a16:creationId xmlns:a16="http://schemas.microsoft.com/office/drawing/2014/main" id="{A5E434E5-DB8D-4955-86DC-E615A9220D70}"/>
-                </a:ext>
-              </a:extLst>
-            </p:cNvPr>
-            <p:cNvCxnSpPr>
-              <a:cxnSpLocks/>
-              <a:stCxn id="97" idx="3"/>
-              <a:endCxn id="114" idx="0"/>
-            </p:cNvCxnSpPr>
-            <p:nvPr/>
-          </p:nvCxnSpPr>
-          <p:spPr>
-            <a:xfrm>
-              <a:off x="3197739" y="3366643"/>
-              <a:ext cx="0" cy="212774"/>
-            </a:xfrm>
-            <a:prstGeom prst="line">
-              <a:avLst/>
-            </a:prstGeom>
-            <a:ln w="9525">
-              <a:solidFill>
-                <a:schemeClr val="tx1"/>
-              </a:solidFill>
-            </a:ln>
-          </p:spPr>
-          <p:style>
-            <a:lnRef idx="1">
-              <a:schemeClr val="accent1"/>
-            </a:lnRef>
-            <a:fillRef idx="0">
-              <a:schemeClr val="accent1"/>
-            </a:fillRef>
-            <a:effectRef idx="0">
-              <a:schemeClr val="accent1"/>
-            </a:effectRef>
-            <a:fontRef idx="minor">
-              <a:schemeClr val="tx1"/>
-            </a:fontRef>
-          </p:style>
-        </p:cxnSp>
-        <p:cxnSp>
-          <p:nvCxnSpPr>
-            <p:cNvPr id="39" name="连接符: 肘形 38">
-              <a:extLst>
-                <a:ext uri="{FF2B5EF4-FFF2-40B4-BE49-F238E27FC236}">
-                  <a16:creationId xmlns:a16="http://schemas.microsoft.com/office/drawing/2014/main" id="{8A064E9E-9C7C-42AF-8CB1-3FDDAACA6911}"/>
-                </a:ext>
-              </a:extLst>
-            </p:cNvPr>
-            <p:cNvCxnSpPr>
-              <a:cxnSpLocks/>
-              <a:stCxn id="97" idx="3"/>
-              <a:endCxn id="113" idx="0"/>
-            </p:cNvCxnSpPr>
-            <p:nvPr/>
-          </p:nvCxnSpPr>
-          <p:spPr>
-            <a:xfrm rot="5400000">
-              <a:off x="2818878" y="3200556"/>
-              <a:ext cx="212775" cy="544949"/>
-            </a:xfrm>
-            <a:prstGeom prst="bentConnector5">
-              <a:avLst>
-                <a:gd name="adj1" fmla="val 44765"/>
-                <a:gd name="adj2" fmla="val 100259"/>
-                <a:gd name="adj3" fmla="val 45161"/>
-              </a:avLst>
-            </a:prstGeom>
-            <a:ln w="9525">
-              <a:solidFill>
-                <a:schemeClr val="tx1"/>
-              </a:solidFill>
-            </a:ln>
-          </p:spPr>
-          <p:style>
-            <a:lnRef idx="1">
-              <a:schemeClr val="accent1"/>
-            </a:lnRef>
-            <a:fillRef idx="0">
-              <a:schemeClr val="accent1"/>
-            </a:fillRef>
-            <a:effectRef idx="0">
-              <a:schemeClr val="accent1"/>
-            </a:effectRef>
-            <a:fontRef idx="minor">
-              <a:schemeClr val="tx1"/>
-            </a:fontRef>
-          </p:style>
-        </p:cxnSp>
-        <p:cxnSp>
-          <p:nvCxnSpPr>
-            <p:cNvPr id="95" name="连接符: 肘形 94">
-              <a:extLst>
-                <a:ext uri="{FF2B5EF4-FFF2-40B4-BE49-F238E27FC236}">
-                  <a16:creationId xmlns:a16="http://schemas.microsoft.com/office/drawing/2014/main" id="{69B2AB50-0ABA-43AA-B659-BC1B08216185}"/>
-                </a:ext>
-              </a:extLst>
-            </p:cNvPr>
-            <p:cNvCxnSpPr>
-              <a:cxnSpLocks/>
-              <a:stCxn id="99" idx="3"/>
-              <a:endCxn id="117" idx="0"/>
-            </p:cNvCxnSpPr>
-            <p:nvPr/>
-          </p:nvCxnSpPr>
-          <p:spPr>
-            <a:xfrm rot="5400000">
-              <a:off x="4561621" y="3223289"/>
-              <a:ext cx="214573" cy="504188"/>
-            </a:xfrm>
-            <a:prstGeom prst="bentConnector5">
-              <a:avLst>
-                <a:gd name="adj1" fmla="val 48829"/>
-                <a:gd name="adj2" fmla="val 58640"/>
-                <a:gd name="adj3" fmla="val 48951"/>
-              </a:avLst>
-            </a:prstGeom>
-            <a:ln w="9525">
-              <a:solidFill>
-                <a:schemeClr val="tx1"/>
-              </a:solidFill>
-            </a:ln>
-          </p:spPr>
-          <p:style>
-            <a:lnRef idx="1">
-              <a:schemeClr val="accent1"/>
-            </a:lnRef>
-            <a:fillRef idx="0">
-              <a:schemeClr val="accent1"/>
-            </a:fillRef>
-            <a:effectRef idx="0">
-              <a:schemeClr val="accent1"/>
-            </a:effectRef>
-            <a:fontRef idx="minor">
-              <a:schemeClr val="tx1"/>
-            </a:fontRef>
-          </p:style>
-        </p:cxnSp>
-        <p:cxnSp>
-          <p:nvCxnSpPr>
-            <p:cNvPr id="133" name="连接符: 肘形 132">
-              <a:extLst>
-                <a:ext uri="{FF2B5EF4-FFF2-40B4-BE49-F238E27FC236}">
-                  <a16:creationId xmlns:a16="http://schemas.microsoft.com/office/drawing/2014/main" id="{EF8D36B1-7818-4F72-9254-E2F6964EF654}"/>
-                </a:ext>
-              </a:extLst>
-            </p:cNvPr>
-            <p:cNvCxnSpPr>
-              <a:cxnSpLocks/>
-              <a:stCxn id="99" idx="3"/>
-              <a:endCxn id="120" idx="0"/>
-            </p:cNvCxnSpPr>
-            <p:nvPr/>
-          </p:nvCxnSpPr>
-          <p:spPr>
-            <a:xfrm rot="16200000" flipH="1">
-              <a:off x="5079667" y="3209431"/>
-              <a:ext cx="227494" cy="544826"/>
-            </a:xfrm>
-            <a:prstGeom prst="bentConnector5">
-              <a:avLst>
-                <a:gd name="adj1" fmla="val 46405"/>
-                <a:gd name="adj2" fmla="val 57996"/>
-                <a:gd name="adj3" fmla="val 46617"/>
-              </a:avLst>
-            </a:prstGeom>
-            <a:ln w="9525">
-              <a:solidFill>
-                <a:schemeClr val="tx1"/>
-              </a:solidFill>
-            </a:ln>
-          </p:spPr>
-          <p:style>
-            <a:lnRef idx="1">
-              <a:schemeClr val="accent1"/>
-            </a:lnRef>
-            <a:fillRef idx="0">
-              <a:schemeClr val="accent1"/>
-            </a:fillRef>
-            <a:effectRef idx="0">
-              <a:schemeClr val="accent1"/>
-            </a:effectRef>
-            <a:fontRef idx="minor">
-              <a:schemeClr val="tx1"/>
-            </a:fontRef>
-          </p:style>
-        </p:cxnSp>
-        <p:sp>
-          <p:nvSpPr>
-            <p:cNvPr id="160" name="箭头: 下 159">
-              <a:extLst>
-                <a:ext uri="{FF2B5EF4-FFF2-40B4-BE49-F238E27FC236}">
-                  <a16:creationId xmlns:a16="http://schemas.microsoft.com/office/drawing/2014/main" id="{6C068FE1-AD3E-4185-BDA1-BC97A651E826}"/>
-                </a:ext>
-              </a:extLst>
-            </p:cNvPr>
-            <p:cNvSpPr/>
-            <p:nvPr/>
-          </p:nvSpPr>
-          <p:spPr>
-            <a:xfrm rot="16200000">
-              <a:off x="4590847" y="4114059"/>
-              <a:ext cx="165100" cy="203767"/>
-            </a:xfrm>
-            <a:prstGeom prst="downArrow">
-              <a:avLst/>
-            </a:prstGeom>
-            <a:solidFill>
-              <a:schemeClr val="tx1"/>
-            </a:solidFill>
-            <a:ln>
-              <a:noFill/>
-            </a:ln>
-          </p:spPr>
-          <p:style>
-            <a:lnRef idx="2">
-              <a:schemeClr val="accent1">
-                <a:shade val="50000"/>
-              </a:schemeClr>
-            </a:lnRef>
-            <a:fillRef idx="1">
-              <a:schemeClr val="accent1"/>
-            </a:fillRef>
-            <a:effectRef idx="0">
-              <a:schemeClr val="accent1"/>
-            </a:effectRef>
-            <a:fontRef idx="minor">
-              <a:schemeClr val="lt1"/>
-            </a:fontRef>
-          </p:style>
-          <p:txBody>
-            <a:bodyPr rtlCol="0" anchor="ctr"/>
-            <a:lstStyle/>
-            <a:p>
-              <a:pPr algn="ctr"/>
-              <a:endParaRPr lang="zh-CN" altLang="en-US"/>
-            </a:p>
-          </p:txBody>
-        </p:sp>
-        <p:sp>
-          <p:nvSpPr>
-            <p:cNvPr id="162" name="箭头: 下 161">
-              <a:extLst>
-                <a:ext uri="{FF2B5EF4-FFF2-40B4-BE49-F238E27FC236}">
-                  <a16:creationId xmlns:a16="http://schemas.microsoft.com/office/drawing/2014/main" id="{06C9B2E8-2852-4AF7-BDF5-B8628AF2024E}"/>
-                </a:ext>
-              </a:extLst>
-            </p:cNvPr>
-            <p:cNvSpPr/>
-            <p:nvPr/>
-          </p:nvSpPr>
-          <p:spPr>
-            <a:xfrm rot="16200000">
-              <a:off x="5126956" y="4114059"/>
-              <a:ext cx="165100" cy="203767"/>
-            </a:xfrm>
-            <a:prstGeom prst="downArrow">
-              <a:avLst/>
-            </a:prstGeom>
-            <a:solidFill>
-              <a:schemeClr val="tx1"/>
-            </a:solidFill>
-            <a:ln>
-              <a:noFill/>
-            </a:ln>
-          </p:spPr>
-          <p:style>
-            <a:lnRef idx="2">
-              <a:schemeClr val="accent1">
-                <a:shade val="50000"/>
-              </a:schemeClr>
-            </a:lnRef>
-            <a:fillRef idx="1">
-              <a:schemeClr val="accent1"/>
-            </a:fillRef>
-            <a:effectRef idx="0">
-              <a:schemeClr val="accent1"/>
-            </a:effectRef>
-            <a:fontRef idx="minor">
-              <a:schemeClr val="lt1"/>
-            </a:fontRef>
-          </p:style>
-          <p:txBody>
-            <a:bodyPr rtlCol="0" anchor="ctr"/>
-            <a:lstStyle/>
-            <a:p>
-              <a:pPr algn="ctr"/>
-              <a:endParaRPr lang="zh-CN" altLang="en-US"/>
-            </a:p>
-          </p:txBody>
-        </p:sp>
-        <p:sp>
-          <p:nvSpPr>
-            <p:cNvPr id="163" name="文本框 162">
-              <a:extLst>
-                <a:ext uri="{FF2B5EF4-FFF2-40B4-BE49-F238E27FC236}">
-                  <a16:creationId xmlns:a16="http://schemas.microsoft.com/office/drawing/2014/main" id="{7CB125A9-EA1C-4F70-84D7-A4F8BD29D05C}"/>
-                </a:ext>
-              </a:extLst>
-            </p:cNvPr>
-            <p:cNvSpPr txBox="1"/>
-            <p:nvPr/>
-          </p:nvSpPr>
-          <p:spPr>
-            <a:xfrm>
-              <a:off x="2008810" y="2748006"/>
-              <a:ext cx="674842" cy="215444"/>
-            </a:xfrm>
-            <a:prstGeom prst="rect">
-              <a:avLst/>
-            </a:prstGeom>
-            <a:noFill/>
-          </p:spPr>
-          <p:txBody>
-            <a:bodyPr wrap="square">
-              <a:spAutoFit/>
-            </a:bodyPr>
-            <a:lstStyle/>
-            <a:p>
-              <a:pPr algn="ctr"/>
-              <a:r>
-                <a:rPr lang="zh-CN" altLang="en-US" sz="800" dirty="0">
-                  <a:latin typeface="宋体" panose="02010600030101010101" pitchFamily="2" charset="-122"/>
-                  <a:ea typeface="宋体" panose="02010600030101010101" pitchFamily="2" charset="-122"/>
-                </a:rPr>
-                <a:t>问题</a:t>
-              </a:r>
-              <a:r>
-                <a:rPr lang="en-US" altLang="zh-CN" sz="800" dirty="0">
-                  <a:latin typeface="宋体" panose="02010600030101010101" pitchFamily="2" charset="-122"/>
-                  <a:ea typeface="宋体" panose="02010600030101010101" pitchFamily="2" charset="-122"/>
-                </a:rPr>
-                <a:t>(1)(2)</a:t>
-              </a:r>
-              <a:endParaRPr lang="zh-CN" altLang="en-US" sz="800" dirty="0">
+              </a:rPr>
+              <a:t>医疗大语言模型安全性评估的核心挑战：</a:t>
+            </a:r>
+            <a:endParaRPr lang="en-US" altLang="zh-CN" sz="900" dirty="0">
+              <a:latin typeface="宋体" panose="02010600030101010101" pitchFamily="2" charset="-122"/>
+              <a:ea typeface="宋体" panose="02010600030101010101" pitchFamily="2" charset="-122"/>
+              <a:sym typeface="Wingdings" panose="05000000000000000000" pitchFamily="2" charset="2"/>
+            </a:endParaRPr>
+          </a:p>
+          <a:p>
+            <a:pPr algn="ctr"/>
+            <a:r>
+              <a:rPr lang="en-US" altLang="zh-CN" sz="800" dirty="0">
                 <a:latin typeface="宋体" panose="02010600030101010101" pitchFamily="2" charset="-122"/>
                 <a:ea typeface="宋体" panose="02010600030101010101" pitchFamily="2" charset="-122"/>
-              </a:endParaRPr>
-            </a:p>
-          </p:txBody>
-        </p:sp>
-        <p:sp>
-          <p:nvSpPr>
-            <p:cNvPr id="164" name="文本框 163">
-              <a:extLst>
-                <a:ext uri="{FF2B5EF4-FFF2-40B4-BE49-F238E27FC236}">
-                  <a16:creationId xmlns:a16="http://schemas.microsoft.com/office/drawing/2014/main" id="{317B9721-C980-4F04-AE4B-916C95A66A29}"/>
-                </a:ext>
-              </a:extLst>
-            </p:cNvPr>
-            <p:cNvSpPr txBox="1"/>
-            <p:nvPr/>
-          </p:nvSpPr>
-          <p:spPr>
-            <a:xfrm>
-              <a:off x="3152933" y="2748006"/>
-              <a:ext cx="548924" cy="215444"/>
-            </a:xfrm>
-            <a:prstGeom prst="rect">
-              <a:avLst/>
-            </a:prstGeom>
-            <a:noFill/>
-          </p:spPr>
-          <p:txBody>
-            <a:bodyPr wrap="square">
-              <a:spAutoFit/>
-            </a:bodyPr>
-            <a:lstStyle/>
-            <a:p>
-              <a:pPr algn="ctr"/>
-              <a:r>
-                <a:rPr lang="zh-CN" altLang="en-US" sz="800" dirty="0">
-                  <a:latin typeface="宋体" panose="02010600030101010101" pitchFamily="2" charset="-122"/>
-                  <a:ea typeface="宋体" panose="02010600030101010101" pitchFamily="2" charset="-122"/>
-                </a:rPr>
-                <a:t>问题</a:t>
-              </a:r>
-              <a:r>
-                <a:rPr lang="en-US" altLang="zh-CN" sz="800" dirty="0">
-                  <a:latin typeface="宋体" panose="02010600030101010101" pitchFamily="2" charset="-122"/>
-                  <a:ea typeface="宋体" panose="02010600030101010101" pitchFamily="2" charset="-122"/>
-                </a:rPr>
-                <a:t>(2)</a:t>
-              </a:r>
-              <a:endParaRPr lang="zh-CN" altLang="en-US" sz="800" dirty="0"/>
-            </a:p>
-          </p:txBody>
-        </p:sp>
-        <p:sp>
-          <p:nvSpPr>
-            <p:cNvPr id="165" name="文本框 164">
-              <a:extLst>
-                <a:ext uri="{FF2B5EF4-FFF2-40B4-BE49-F238E27FC236}">
-                  <a16:creationId xmlns:a16="http://schemas.microsoft.com/office/drawing/2014/main" id="{083658EC-B224-4D1F-B39E-435F41A4C79A}"/>
-                </a:ext>
-              </a:extLst>
-            </p:cNvPr>
-            <p:cNvSpPr txBox="1"/>
-            <p:nvPr/>
-          </p:nvSpPr>
-          <p:spPr>
-            <a:xfrm>
-              <a:off x="4899032" y="2748006"/>
-              <a:ext cx="674842" cy="215444"/>
-            </a:xfrm>
-            <a:prstGeom prst="rect">
-              <a:avLst/>
-            </a:prstGeom>
-            <a:noFill/>
-          </p:spPr>
-          <p:txBody>
-            <a:bodyPr wrap="square">
-              <a:spAutoFit/>
-            </a:bodyPr>
-            <a:lstStyle/>
-            <a:p>
-              <a:pPr algn="ctr"/>
-              <a:r>
-                <a:rPr lang="zh-CN" altLang="en-US" sz="800" dirty="0">
-                  <a:latin typeface="宋体" panose="02010600030101010101" pitchFamily="2" charset="-122"/>
-                  <a:ea typeface="宋体" panose="02010600030101010101" pitchFamily="2" charset="-122"/>
-                </a:rPr>
-                <a:t>问题</a:t>
-              </a:r>
-              <a:r>
-                <a:rPr lang="en-US" altLang="zh-CN" sz="800" dirty="0">
-                  <a:latin typeface="宋体" panose="02010600030101010101" pitchFamily="2" charset="-122"/>
-                  <a:ea typeface="宋体" panose="02010600030101010101" pitchFamily="2" charset="-122"/>
-                </a:rPr>
-                <a:t>(1)(3)</a:t>
-              </a:r>
-              <a:endParaRPr lang="zh-CN" altLang="en-US" sz="800" dirty="0">
+                <a:sym typeface="Wingdings" panose="05000000000000000000" pitchFamily="2" charset="2"/>
+              </a:rPr>
+              <a:t>(1)</a:t>
+            </a:r>
+            <a:r>
+              <a:rPr lang="zh-CN" altLang="en-US" sz="800" dirty="0">
                 <a:latin typeface="宋体" panose="02010600030101010101" pitchFamily="2" charset="-122"/>
                 <a:ea typeface="宋体" panose="02010600030101010101" pitchFamily="2" charset="-122"/>
-              </a:endParaRPr>
-            </a:p>
-          </p:txBody>
-        </p:sp>
-      </p:grpSp>
+                <a:sym typeface="Wingdings" panose="05000000000000000000" pitchFamily="2" charset="2"/>
+              </a:rPr>
+              <a:t>需求医疗专用评估工具 </a:t>
+            </a:r>
+            <a:r>
+              <a:rPr lang="en-US" altLang="zh-CN" sz="800" dirty="0">
+                <a:latin typeface="宋体" panose="02010600030101010101" pitchFamily="2" charset="-122"/>
+                <a:ea typeface="宋体" panose="02010600030101010101" pitchFamily="2" charset="-122"/>
+                <a:sym typeface="Wingdings" panose="05000000000000000000" pitchFamily="2" charset="2"/>
+              </a:rPr>
+              <a:t>(2)</a:t>
+            </a:r>
+            <a:r>
+              <a:rPr lang="zh-CN" altLang="en-US" sz="800" dirty="0">
+                <a:latin typeface="宋体" panose="02010600030101010101" pitchFamily="2" charset="-122"/>
+                <a:ea typeface="宋体" panose="02010600030101010101" pitchFamily="2" charset="-122"/>
+                <a:sym typeface="Wingdings" panose="05000000000000000000" pitchFamily="2" charset="2"/>
+              </a:rPr>
+              <a:t>单体鲁棒性研究不足 </a:t>
+            </a:r>
+            <a:r>
+              <a:rPr lang="en-US" altLang="zh-CN" sz="800" dirty="0">
+                <a:latin typeface="宋体" panose="02010600030101010101" pitchFamily="2" charset="-122"/>
+                <a:ea typeface="宋体" panose="02010600030101010101" pitchFamily="2" charset="-122"/>
+                <a:sym typeface="Wingdings" panose="05000000000000000000" pitchFamily="2" charset="2"/>
+              </a:rPr>
+              <a:t>(3)</a:t>
+            </a:r>
+            <a:r>
+              <a:rPr lang="zh-CN" altLang="en-US" sz="800" dirty="0">
+                <a:latin typeface="宋体" panose="02010600030101010101" pitchFamily="2" charset="-122"/>
+                <a:ea typeface="宋体" panose="02010600030101010101" pitchFamily="2" charset="-122"/>
+                <a:sym typeface="Wingdings" panose="05000000000000000000" pitchFamily="2" charset="2"/>
+              </a:rPr>
+              <a:t>多智能体级联风险研究不足</a:t>
+            </a:r>
+            <a:endParaRPr lang="zh-CN" altLang="en-US" sz="800" dirty="0">
+              <a:latin typeface="宋体" panose="02010600030101010101" pitchFamily="2" charset="-122"/>
+              <a:ea typeface="宋体" panose="02010600030101010101" pitchFamily="2" charset="-122"/>
+            </a:endParaRPr>
+          </a:p>
+        </p:txBody>
+      </p:sp>
+      <p:sp>
+        <p:nvSpPr>
+          <p:cNvPr id="107" name="箭头: 下 106">
+            <a:extLst>
+              <a:ext uri="{FF2B5EF4-FFF2-40B4-BE49-F238E27FC236}">
+                <a16:creationId xmlns:a16="http://schemas.microsoft.com/office/drawing/2014/main" id="{F427716F-7D10-4DD6-80B8-5C18C979230A}"/>
+              </a:ext>
+            </a:extLst>
+          </p:cNvPr>
+          <p:cNvSpPr/>
+          <p:nvPr/>
+        </p:nvSpPr>
+        <p:spPr>
+          <a:xfrm>
+            <a:off x="2002801" y="2795151"/>
+            <a:ext cx="89803" cy="122185"/>
+          </a:xfrm>
+          <a:prstGeom prst="downArrow">
+            <a:avLst/>
+          </a:prstGeom>
+          <a:solidFill>
+            <a:schemeClr val="tx1"/>
+          </a:solidFill>
+          <a:ln>
+            <a:noFill/>
+          </a:ln>
+        </p:spPr>
+        <p:style>
+          <a:lnRef idx="2">
+            <a:schemeClr val="accent1">
+              <a:shade val="50000"/>
+            </a:schemeClr>
+          </a:lnRef>
+          <a:fillRef idx="1">
+            <a:schemeClr val="accent1"/>
+          </a:fillRef>
+          <a:effectRef idx="0">
+            <a:schemeClr val="accent1"/>
+          </a:effectRef>
+          <a:fontRef idx="minor">
+            <a:schemeClr val="lt1"/>
+          </a:fontRef>
+        </p:style>
+        <p:txBody>
+          <a:bodyPr rtlCol="0" anchor="ctr"/>
+          <a:lstStyle/>
+          <a:p>
+            <a:pPr algn="ctr"/>
+            <a:endParaRPr lang="zh-CN" altLang="en-US"/>
+          </a:p>
+        </p:txBody>
+      </p:sp>
+      <p:sp>
+        <p:nvSpPr>
+          <p:cNvPr id="185" name="文本框 184">
+            <a:extLst>
+              <a:ext uri="{FF2B5EF4-FFF2-40B4-BE49-F238E27FC236}">
+                <a16:creationId xmlns:a16="http://schemas.microsoft.com/office/drawing/2014/main" id="{13536C93-D246-46B5-A573-9A962F90F236}"/>
+              </a:ext>
+            </a:extLst>
+          </p:cNvPr>
+          <p:cNvSpPr txBox="1"/>
+          <p:nvPr/>
+        </p:nvSpPr>
+        <p:spPr>
+          <a:xfrm>
+            <a:off x="5296538" y="3623229"/>
+            <a:ext cx="307777" cy="1264071"/>
+          </a:xfrm>
+          <a:prstGeom prst="rect">
+            <a:avLst/>
+          </a:prstGeom>
+          <a:noFill/>
+        </p:spPr>
+        <p:txBody>
+          <a:bodyPr vert="eaVert" wrap="square" rtlCol="0">
+            <a:spAutoFit/>
+          </a:bodyPr>
+          <a:lstStyle/>
+          <a:p>
+            <a:pPr algn="ctr"/>
+            <a:r>
+              <a:rPr lang="zh-CN" altLang="en-US" sz="800" dirty="0">
+                <a:latin typeface="宋体" panose="02010600030101010101" pitchFamily="2" charset="-122"/>
+                <a:ea typeface="宋体" panose="02010600030101010101" pitchFamily="2" charset="-122"/>
+              </a:rPr>
+              <a:t>系统可靠性评估</a:t>
+            </a:r>
+          </a:p>
+        </p:txBody>
+      </p:sp>
+      <p:sp>
+        <p:nvSpPr>
+          <p:cNvPr id="187" name="文本框 186">
+            <a:extLst>
+              <a:ext uri="{FF2B5EF4-FFF2-40B4-BE49-F238E27FC236}">
+                <a16:creationId xmlns:a16="http://schemas.microsoft.com/office/drawing/2014/main" id="{AD8EA3FA-013A-4F0D-AC50-EF70D4178647}"/>
+              </a:ext>
+            </a:extLst>
+          </p:cNvPr>
+          <p:cNvSpPr txBox="1"/>
+          <p:nvPr/>
+        </p:nvSpPr>
+        <p:spPr>
+          <a:xfrm>
+            <a:off x="4250328" y="3611291"/>
+            <a:ext cx="307777" cy="1245549"/>
+          </a:xfrm>
+          <a:prstGeom prst="rect">
+            <a:avLst/>
+          </a:prstGeom>
+          <a:noFill/>
+        </p:spPr>
+        <p:txBody>
+          <a:bodyPr vert="eaVert" wrap="square" rtlCol="0">
+            <a:spAutoFit/>
+          </a:bodyPr>
+          <a:lstStyle/>
+          <a:p>
+            <a:pPr algn="ctr"/>
+            <a:r>
+              <a:rPr lang="zh-CN" altLang="en-US" sz="800" dirty="0">
+                <a:latin typeface="宋体" panose="02010600030101010101" pitchFamily="2" charset="-122"/>
+                <a:ea typeface="宋体" panose="02010600030101010101" pitchFamily="2" charset="-122"/>
+              </a:rPr>
+              <a:t>真实数据集构建</a:t>
+            </a:r>
+          </a:p>
+        </p:txBody>
+      </p:sp>
+      <p:sp>
+        <p:nvSpPr>
+          <p:cNvPr id="94" name="矩形 93">
+            <a:extLst>
+              <a:ext uri="{FF2B5EF4-FFF2-40B4-BE49-F238E27FC236}">
+                <a16:creationId xmlns:a16="http://schemas.microsoft.com/office/drawing/2014/main" id="{17A5B624-7E18-4811-9288-2FBE276F12A2}"/>
+              </a:ext>
+            </a:extLst>
+          </p:cNvPr>
+          <p:cNvSpPr/>
+          <p:nvPr/>
+        </p:nvSpPr>
+        <p:spPr>
+          <a:xfrm>
+            <a:off x="1802869" y="2931043"/>
+            <a:ext cx="489667" cy="1952506"/>
+          </a:xfrm>
+          <a:prstGeom prst="rect">
+            <a:avLst/>
+          </a:prstGeom>
+          <a:solidFill>
+            <a:srgbClr val="DBEEF4"/>
+          </a:solidFill>
+          <a:ln w="9525">
+            <a:solidFill>
+              <a:schemeClr val="tx1">
+                <a:lumMod val="95000"/>
+                <a:lumOff val="5000"/>
+              </a:schemeClr>
+            </a:solidFill>
+          </a:ln>
+        </p:spPr>
+        <p:style>
+          <a:lnRef idx="2">
+            <a:schemeClr val="accent1">
+              <a:shade val="50000"/>
+            </a:schemeClr>
+          </a:lnRef>
+          <a:fillRef idx="1">
+            <a:schemeClr val="accent1"/>
+          </a:fillRef>
+          <a:effectRef idx="0">
+            <a:schemeClr val="accent1"/>
+          </a:effectRef>
+          <a:fontRef idx="minor">
+            <a:schemeClr val="lt1"/>
+          </a:fontRef>
+        </p:style>
+        <p:txBody>
+          <a:bodyPr rtlCol="0" anchor="ctr"/>
+          <a:lstStyle/>
+          <a:p>
+            <a:pPr algn="ctr"/>
+            <a:endParaRPr lang="zh-CN" altLang="en-US"/>
+          </a:p>
+        </p:txBody>
+      </p:sp>
+      <p:sp>
+        <p:nvSpPr>
+          <p:cNvPr id="2" name="文本框 1">
+            <a:extLst>
+              <a:ext uri="{FF2B5EF4-FFF2-40B4-BE49-F238E27FC236}">
+                <a16:creationId xmlns:a16="http://schemas.microsoft.com/office/drawing/2014/main" id="{4CF2D47F-1AB6-4634-BF1A-93752823017C}"/>
+              </a:ext>
+            </a:extLst>
+          </p:cNvPr>
+          <p:cNvSpPr txBox="1"/>
+          <p:nvPr/>
+        </p:nvSpPr>
+        <p:spPr>
+          <a:xfrm>
+            <a:off x="1792443" y="3085646"/>
+            <a:ext cx="461665" cy="1708135"/>
+          </a:xfrm>
+          <a:prstGeom prst="rect">
+            <a:avLst/>
+          </a:prstGeom>
+          <a:noFill/>
+        </p:spPr>
+        <p:txBody>
+          <a:bodyPr vert="eaVert" wrap="square" rtlCol="0">
+            <a:spAutoFit/>
+          </a:bodyPr>
+          <a:lstStyle/>
+          <a:p>
+            <a:pPr algn="ctr"/>
+            <a:r>
+              <a:rPr lang="zh-CN" altLang="en-US" sz="900" dirty="0">
+                <a:latin typeface="宋体" panose="02010600030101010101" pitchFamily="2" charset="-122"/>
+                <a:ea typeface="宋体" panose="02010600030101010101" pitchFamily="2" charset="-122"/>
+              </a:rPr>
+              <a:t>智能体协作系统构建与威胁建模</a:t>
+            </a:r>
+            <a:r>
+              <a:rPr lang="zh-CN" altLang="en-US" sz="900" b="1" dirty="0">
+                <a:latin typeface="宋体" panose="02010600030101010101" pitchFamily="2" charset="-122"/>
+                <a:ea typeface="宋体" panose="02010600030101010101" pitchFamily="2" charset="-122"/>
+              </a:rPr>
+              <a:t>第三章 </a:t>
+            </a:r>
+            <a:r>
+              <a:rPr lang="zh-CN" altLang="en-US" sz="900" dirty="0">
+                <a:latin typeface="宋体" panose="02010600030101010101" pitchFamily="2" charset="-122"/>
+                <a:ea typeface="宋体" panose="02010600030101010101" pitchFamily="2" charset="-122"/>
+              </a:rPr>
+              <a:t>面向临床诊疗链的多</a:t>
+            </a:r>
+          </a:p>
+        </p:txBody>
+      </p:sp>
+      <p:sp>
+        <p:nvSpPr>
+          <p:cNvPr id="97" name="矩形 96">
+            <a:extLst>
+              <a:ext uri="{FF2B5EF4-FFF2-40B4-BE49-F238E27FC236}">
+                <a16:creationId xmlns:a16="http://schemas.microsoft.com/office/drawing/2014/main" id="{9902E07E-F147-4D29-B2D4-59DB3AA19772}"/>
+              </a:ext>
+            </a:extLst>
+          </p:cNvPr>
+          <p:cNvSpPr/>
+          <p:nvPr/>
+        </p:nvSpPr>
+        <p:spPr>
+          <a:xfrm rot="5400000">
+            <a:off x="2983657" y="2357570"/>
+            <a:ext cx="437054" cy="1584000"/>
+          </a:xfrm>
+          <a:prstGeom prst="rect">
+            <a:avLst/>
+          </a:prstGeom>
+          <a:solidFill>
+            <a:srgbClr val="DBEEF4"/>
+          </a:solidFill>
+          <a:ln w="9525">
+            <a:solidFill>
+              <a:schemeClr val="tx1">
+                <a:lumMod val="95000"/>
+                <a:lumOff val="5000"/>
+              </a:schemeClr>
+            </a:solidFill>
+          </a:ln>
+        </p:spPr>
+        <p:style>
+          <a:lnRef idx="2">
+            <a:schemeClr val="accent1">
+              <a:shade val="50000"/>
+            </a:schemeClr>
+          </a:lnRef>
+          <a:fillRef idx="1">
+            <a:schemeClr val="accent1"/>
+          </a:fillRef>
+          <a:effectRef idx="0">
+            <a:schemeClr val="accent1"/>
+          </a:effectRef>
+          <a:fontRef idx="minor">
+            <a:schemeClr val="lt1"/>
+          </a:fontRef>
+        </p:style>
+        <p:txBody>
+          <a:bodyPr rtlCol="0" anchor="ctr"/>
+          <a:lstStyle/>
+          <a:p>
+            <a:pPr algn="ctr"/>
+            <a:endParaRPr lang="zh-CN" altLang="en-US" dirty="0"/>
+          </a:p>
+        </p:txBody>
+      </p:sp>
+      <p:sp>
+        <p:nvSpPr>
+          <p:cNvPr id="86" name="文本框 85">
+            <a:extLst>
+              <a:ext uri="{FF2B5EF4-FFF2-40B4-BE49-F238E27FC236}">
+                <a16:creationId xmlns:a16="http://schemas.microsoft.com/office/drawing/2014/main" id="{F8979E28-5F52-4A7E-B86E-74223EF41747}"/>
+              </a:ext>
+            </a:extLst>
+          </p:cNvPr>
+          <p:cNvSpPr txBox="1"/>
+          <p:nvPr/>
+        </p:nvSpPr>
+        <p:spPr>
+          <a:xfrm>
+            <a:off x="2331013" y="2964904"/>
+            <a:ext cx="1742342" cy="369332"/>
+          </a:xfrm>
+          <a:prstGeom prst="rect">
+            <a:avLst/>
+          </a:prstGeom>
+          <a:noFill/>
+        </p:spPr>
+        <p:txBody>
+          <a:bodyPr vert="horz" wrap="square" rtlCol="0">
+            <a:spAutoFit/>
+          </a:bodyPr>
+          <a:lstStyle/>
+          <a:p>
+            <a:pPr algn="ctr"/>
+            <a:r>
+              <a:rPr lang="zh-CN" altLang="en-US" sz="900" b="1" dirty="0">
+                <a:latin typeface="宋体" panose="02010600030101010101" pitchFamily="2" charset="-122"/>
+                <a:ea typeface="宋体" panose="02010600030101010101" pitchFamily="2" charset="-122"/>
+              </a:rPr>
+              <a:t>第四章 </a:t>
+            </a:r>
+            <a:r>
+              <a:rPr lang="zh-CN" altLang="en-US" sz="900" dirty="0">
+                <a:latin typeface="宋体" panose="02010600030101010101" pitchFamily="2" charset="-122"/>
+                <a:ea typeface="宋体" panose="02010600030101010101" pitchFamily="2" charset="-122"/>
+              </a:rPr>
+              <a:t>基于通用基准的单体模型对抗鲁棒性评估</a:t>
+            </a:r>
+          </a:p>
+        </p:txBody>
+      </p:sp>
+      <p:sp>
+        <p:nvSpPr>
+          <p:cNvPr id="114" name="矩形 113">
+            <a:extLst>
+              <a:ext uri="{FF2B5EF4-FFF2-40B4-BE49-F238E27FC236}">
+                <a16:creationId xmlns:a16="http://schemas.microsoft.com/office/drawing/2014/main" id="{9AC867C7-FC5A-4266-A671-410873B77538}"/>
+              </a:ext>
+            </a:extLst>
+          </p:cNvPr>
+          <p:cNvSpPr/>
+          <p:nvPr/>
+        </p:nvSpPr>
+        <p:spPr>
+          <a:xfrm>
+            <a:off x="3070784" y="3579417"/>
+            <a:ext cx="262800" cy="1309298"/>
+          </a:xfrm>
+          <a:prstGeom prst="rect">
+            <a:avLst/>
+          </a:prstGeom>
+          <a:solidFill>
+            <a:srgbClr val="EAF1DF"/>
+          </a:solidFill>
+          <a:ln w="9525">
+            <a:solidFill>
+              <a:schemeClr val="tx1">
+                <a:lumMod val="95000"/>
+                <a:lumOff val="5000"/>
+              </a:schemeClr>
+            </a:solidFill>
+          </a:ln>
+        </p:spPr>
+        <p:style>
+          <a:lnRef idx="2">
+            <a:schemeClr val="accent1">
+              <a:shade val="50000"/>
+            </a:schemeClr>
+          </a:lnRef>
+          <a:fillRef idx="1">
+            <a:schemeClr val="accent1"/>
+          </a:fillRef>
+          <a:effectRef idx="0">
+            <a:schemeClr val="accent1"/>
+          </a:effectRef>
+          <a:fontRef idx="minor">
+            <a:schemeClr val="lt1"/>
+          </a:fontRef>
+        </p:style>
+        <p:txBody>
+          <a:bodyPr rtlCol="0" anchor="ctr"/>
+          <a:lstStyle/>
+          <a:p>
+            <a:pPr algn="ctr"/>
+            <a:endParaRPr lang="zh-CN" altLang="en-US"/>
+          </a:p>
+        </p:txBody>
+      </p:sp>
+      <p:sp>
+        <p:nvSpPr>
+          <p:cNvPr id="115" name="文本框 114">
+            <a:extLst>
+              <a:ext uri="{FF2B5EF4-FFF2-40B4-BE49-F238E27FC236}">
+                <a16:creationId xmlns:a16="http://schemas.microsoft.com/office/drawing/2014/main" id="{765B6492-E1B1-4E54-A858-079457660303}"/>
+              </a:ext>
+            </a:extLst>
+          </p:cNvPr>
+          <p:cNvSpPr txBox="1"/>
+          <p:nvPr/>
+        </p:nvSpPr>
+        <p:spPr>
+          <a:xfrm>
+            <a:off x="3048296" y="3724455"/>
+            <a:ext cx="307777" cy="1019222"/>
+          </a:xfrm>
+          <a:prstGeom prst="rect">
+            <a:avLst/>
+          </a:prstGeom>
+          <a:noFill/>
+        </p:spPr>
+        <p:txBody>
+          <a:bodyPr vert="eaVert" wrap="square" rtlCol="0">
+            <a:spAutoFit/>
+          </a:bodyPr>
+          <a:lstStyle>
+            <a:defPPr>
+              <a:defRPr lang="en-US"/>
+            </a:defPPr>
+            <a:lvl1pPr algn="ctr">
+              <a:defRPr sz="800">
+                <a:latin typeface="宋体" panose="02010600030101010101" pitchFamily="2" charset="-122"/>
+                <a:ea typeface="宋体" panose="02010600030101010101" pitchFamily="2" charset="-122"/>
+              </a:defRPr>
+            </a:lvl1pPr>
+          </a:lstStyle>
+          <a:p>
+            <a:r>
+              <a:rPr lang="zh-CN" altLang="en-US" dirty="0"/>
+              <a:t>提示词操纵攻击</a:t>
+            </a:r>
+          </a:p>
+        </p:txBody>
+      </p:sp>
+      <p:sp>
+        <p:nvSpPr>
+          <p:cNvPr id="113" name="矩形 112">
+            <a:extLst>
+              <a:ext uri="{FF2B5EF4-FFF2-40B4-BE49-F238E27FC236}">
+                <a16:creationId xmlns:a16="http://schemas.microsoft.com/office/drawing/2014/main" id="{9B606D5F-583F-44F9-842A-C6833603D450}"/>
+              </a:ext>
+            </a:extLst>
+          </p:cNvPr>
+          <p:cNvSpPr/>
+          <p:nvPr/>
+        </p:nvSpPr>
+        <p:spPr>
+          <a:xfrm>
+            <a:off x="2525243" y="3579418"/>
+            <a:ext cx="263984" cy="1309297"/>
+          </a:xfrm>
+          <a:prstGeom prst="rect">
+            <a:avLst/>
+          </a:prstGeom>
+          <a:solidFill>
+            <a:srgbClr val="EAF1DF"/>
+          </a:solidFill>
+          <a:ln w="9525">
+            <a:solidFill>
+              <a:schemeClr val="tx1">
+                <a:lumMod val="95000"/>
+                <a:lumOff val="5000"/>
+              </a:schemeClr>
+            </a:solidFill>
+          </a:ln>
+        </p:spPr>
+        <p:style>
+          <a:lnRef idx="2">
+            <a:schemeClr val="accent1">
+              <a:shade val="50000"/>
+            </a:schemeClr>
+          </a:lnRef>
+          <a:fillRef idx="1">
+            <a:schemeClr val="accent1"/>
+          </a:fillRef>
+          <a:effectRef idx="0">
+            <a:schemeClr val="accent1"/>
+          </a:effectRef>
+          <a:fontRef idx="minor">
+            <a:schemeClr val="lt1"/>
+          </a:fontRef>
+        </p:style>
+        <p:txBody>
+          <a:bodyPr rtlCol="0" anchor="ctr"/>
+          <a:lstStyle/>
+          <a:p>
+            <a:pPr algn="ctr"/>
+            <a:endParaRPr lang="zh-CN" altLang="en-US" dirty="0"/>
+          </a:p>
+        </p:txBody>
+      </p:sp>
+      <p:sp>
+        <p:nvSpPr>
+          <p:cNvPr id="116" name="文本框 115">
+            <a:extLst>
+              <a:ext uri="{FF2B5EF4-FFF2-40B4-BE49-F238E27FC236}">
+                <a16:creationId xmlns:a16="http://schemas.microsoft.com/office/drawing/2014/main" id="{1C7906AC-DE1B-4836-BC06-1AB5338A72D4}"/>
+              </a:ext>
+            </a:extLst>
+          </p:cNvPr>
+          <p:cNvSpPr txBox="1"/>
+          <p:nvPr/>
+        </p:nvSpPr>
+        <p:spPr>
+          <a:xfrm>
+            <a:off x="2503347" y="3641847"/>
+            <a:ext cx="307777" cy="1184441"/>
+          </a:xfrm>
+          <a:prstGeom prst="rect">
+            <a:avLst/>
+          </a:prstGeom>
+          <a:noFill/>
+        </p:spPr>
+        <p:txBody>
+          <a:bodyPr vert="eaVert" wrap="square" rtlCol="0">
+            <a:spAutoFit/>
+          </a:bodyPr>
+          <a:lstStyle/>
+          <a:p>
+            <a:pPr algn="ctr"/>
+            <a:r>
+              <a:rPr lang="zh-CN" altLang="en-US" sz="800" dirty="0">
+                <a:latin typeface="宋体" panose="02010600030101010101" pitchFamily="2" charset="-122"/>
+                <a:ea typeface="宋体" panose="02010600030101010101" pitchFamily="2" charset="-122"/>
+              </a:rPr>
+              <a:t>数据投毒攻击</a:t>
+            </a:r>
+          </a:p>
+        </p:txBody>
+      </p:sp>
+      <p:sp>
+        <p:nvSpPr>
+          <p:cNvPr id="58" name="矩形 57">
+            <a:extLst>
+              <a:ext uri="{FF2B5EF4-FFF2-40B4-BE49-F238E27FC236}">
+                <a16:creationId xmlns:a16="http://schemas.microsoft.com/office/drawing/2014/main" id="{E6096784-2369-42F3-9478-945E2FF684A8}"/>
+              </a:ext>
+            </a:extLst>
+          </p:cNvPr>
+          <p:cNvSpPr/>
+          <p:nvPr/>
+        </p:nvSpPr>
+        <p:spPr>
+          <a:xfrm>
+            <a:off x="3615733" y="3579417"/>
+            <a:ext cx="262800" cy="1309298"/>
+          </a:xfrm>
+          <a:prstGeom prst="rect">
+            <a:avLst/>
+          </a:prstGeom>
+          <a:solidFill>
+            <a:srgbClr val="EAF1DF"/>
+          </a:solidFill>
+          <a:ln w="9525">
+            <a:solidFill>
+              <a:schemeClr val="tx1">
+                <a:lumMod val="95000"/>
+                <a:lumOff val="5000"/>
+              </a:schemeClr>
+            </a:solidFill>
+          </a:ln>
+        </p:spPr>
+        <p:style>
+          <a:lnRef idx="2">
+            <a:schemeClr val="accent1">
+              <a:shade val="50000"/>
+            </a:schemeClr>
+          </a:lnRef>
+          <a:fillRef idx="1">
+            <a:schemeClr val="accent1"/>
+          </a:fillRef>
+          <a:effectRef idx="0">
+            <a:schemeClr val="accent1"/>
+          </a:effectRef>
+          <a:fontRef idx="minor">
+            <a:schemeClr val="lt1"/>
+          </a:fontRef>
+        </p:style>
+        <p:txBody>
+          <a:bodyPr rtlCol="0" anchor="ctr"/>
+          <a:lstStyle/>
+          <a:p>
+            <a:pPr algn="ctr"/>
+            <a:endParaRPr lang="zh-CN" altLang="en-US" dirty="0"/>
+          </a:p>
+        </p:txBody>
+      </p:sp>
+      <p:sp>
+        <p:nvSpPr>
+          <p:cNvPr id="59" name="文本框 58">
+            <a:extLst>
+              <a:ext uri="{FF2B5EF4-FFF2-40B4-BE49-F238E27FC236}">
+                <a16:creationId xmlns:a16="http://schemas.microsoft.com/office/drawing/2014/main" id="{25DBB5D8-ED8B-4946-9DFB-1CCB2B8193BD}"/>
+              </a:ext>
+            </a:extLst>
+          </p:cNvPr>
+          <p:cNvSpPr txBox="1"/>
+          <p:nvPr/>
+        </p:nvSpPr>
+        <p:spPr>
+          <a:xfrm>
+            <a:off x="3593245" y="3724455"/>
+            <a:ext cx="307777" cy="1019222"/>
+          </a:xfrm>
+          <a:prstGeom prst="rect">
+            <a:avLst/>
+          </a:prstGeom>
+          <a:noFill/>
+        </p:spPr>
+        <p:txBody>
+          <a:bodyPr vert="eaVert" wrap="square" rtlCol="0">
+            <a:spAutoFit/>
+          </a:bodyPr>
+          <a:lstStyle>
+            <a:defPPr>
+              <a:defRPr lang="en-US"/>
+            </a:defPPr>
+            <a:lvl1pPr algn="ctr">
+              <a:defRPr sz="800">
+                <a:latin typeface="宋体" panose="02010600030101010101" pitchFamily="2" charset="-122"/>
+                <a:ea typeface="宋体" panose="02010600030101010101" pitchFamily="2" charset="-122"/>
+              </a:defRPr>
+            </a:lvl1pPr>
+          </a:lstStyle>
+          <a:p>
+            <a:r>
+              <a:rPr lang="zh-CN" altLang="en-US" dirty="0"/>
+              <a:t>越狱攻击</a:t>
+            </a:r>
+          </a:p>
+        </p:txBody>
+      </p:sp>
+      <p:sp>
+        <p:nvSpPr>
+          <p:cNvPr id="102" name="矩形 101">
+            <a:extLst>
+              <a:ext uri="{FF2B5EF4-FFF2-40B4-BE49-F238E27FC236}">
+                <a16:creationId xmlns:a16="http://schemas.microsoft.com/office/drawing/2014/main" id="{B61E2372-7676-4D75-9A39-543380D198C2}"/>
+              </a:ext>
+            </a:extLst>
+          </p:cNvPr>
+          <p:cNvSpPr/>
+          <p:nvPr/>
+        </p:nvSpPr>
+        <p:spPr>
+          <a:xfrm>
+            <a:off x="5860087" y="2399648"/>
+            <a:ext cx="352800" cy="2483901"/>
+          </a:xfrm>
+          <a:prstGeom prst="rect">
+            <a:avLst/>
+          </a:prstGeom>
+          <a:solidFill>
+            <a:srgbClr val="DBEEF4"/>
+          </a:solidFill>
+          <a:ln w="9525">
+            <a:solidFill>
+              <a:schemeClr val="tx1">
+                <a:lumMod val="95000"/>
+                <a:lumOff val="5000"/>
+              </a:schemeClr>
+            </a:solidFill>
+          </a:ln>
+        </p:spPr>
+        <p:style>
+          <a:lnRef idx="2">
+            <a:schemeClr val="accent1">
+              <a:shade val="50000"/>
+            </a:schemeClr>
+          </a:lnRef>
+          <a:fillRef idx="1">
+            <a:schemeClr val="accent1"/>
+          </a:fillRef>
+          <a:effectRef idx="0">
+            <a:schemeClr val="accent1"/>
+          </a:effectRef>
+          <a:fontRef idx="minor">
+            <a:schemeClr val="lt1"/>
+          </a:fontRef>
+        </p:style>
+        <p:txBody>
+          <a:bodyPr rtlCol="0" anchor="ctr"/>
+          <a:lstStyle/>
+          <a:p>
+            <a:pPr algn="ctr"/>
+            <a:endParaRPr lang="zh-CN" altLang="en-US"/>
+          </a:p>
+        </p:txBody>
+      </p:sp>
+      <p:sp>
+        <p:nvSpPr>
+          <p:cNvPr id="72" name="文本框 71">
+            <a:extLst>
+              <a:ext uri="{FF2B5EF4-FFF2-40B4-BE49-F238E27FC236}">
+                <a16:creationId xmlns:a16="http://schemas.microsoft.com/office/drawing/2014/main" id="{6C76486C-E033-469F-AEA1-8323DB1FF106}"/>
+              </a:ext>
+            </a:extLst>
+          </p:cNvPr>
+          <p:cNvSpPr txBox="1"/>
+          <p:nvPr/>
+        </p:nvSpPr>
+        <p:spPr>
+          <a:xfrm>
+            <a:off x="5874905" y="2787531"/>
+            <a:ext cx="323165" cy="1708135"/>
+          </a:xfrm>
+          <a:prstGeom prst="rect">
+            <a:avLst/>
+          </a:prstGeom>
+          <a:noFill/>
+        </p:spPr>
+        <p:txBody>
+          <a:bodyPr vert="eaVert" wrap="square" rtlCol="0">
+            <a:spAutoFit/>
+          </a:bodyPr>
+          <a:lstStyle/>
+          <a:p>
+            <a:pPr algn="ctr"/>
+            <a:r>
+              <a:rPr lang="zh-CN" altLang="en-US" sz="900" b="1" dirty="0">
+                <a:latin typeface="宋体" panose="02010600030101010101" pitchFamily="2" charset="-122"/>
+                <a:ea typeface="宋体" panose="02010600030101010101" pitchFamily="2" charset="-122"/>
+              </a:rPr>
+              <a:t>第六章 </a:t>
+            </a:r>
+            <a:r>
+              <a:rPr lang="zh-CN" altLang="en-US" sz="900" dirty="0">
+                <a:latin typeface="宋体" panose="02010600030101010101" pitchFamily="2" charset="-122"/>
+                <a:ea typeface="宋体" panose="02010600030101010101" pitchFamily="2" charset="-122"/>
+              </a:rPr>
+              <a:t>总结与展望</a:t>
+            </a:r>
+          </a:p>
+        </p:txBody>
+      </p:sp>
+      <p:sp>
+        <p:nvSpPr>
+          <p:cNvPr id="89" name="箭头: 下 88">
+            <a:extLst>
+              <a:ext uri="{FF2B5EF4-FFF2-40B4-BE49-F238E27FC236}">
+                <a16:creationId xmlns:a16="http://schemas.microsoft.com/office/drawing/2014/main" id="{12728C5A-F692-4DB4-8755-E4C8FA57E191}"/>
+              </a:ext>
+            </a:extLst>
+          </p:cNvPr>
+          <p:cNvSpPr/>
+          <p:nvPr/>
+        </p:nvSpPr>
+        <p:spPr>
+          <a:xfrm>
+            <a:off x="3159938" y="2795151"/>
+            <a:ext cx="89803" cy="122185"/>
+          </a:xfrm>
+          <a:prstGeom prst="downArrow">
+            <a:avLst/>
+          </a:prstGeom>
+          <a:solidFill>
+            <a:schemeClr val="tx1"/>
+          </a:solidFill>
+          <a:ln>
+            <a:noFill/>
+          </a:ln>
+        </p:spPr>
+        <p:style>
+          <a:lnRef idx="2">
+            <a:schemeClr val="accent1">
+              <a:shade val="50000"/>
+            </a:schemeClr>
+          </a:lnRef>
+          <a:fillRef idx="1">
+            <a:schemeClr val="accent1"/>
+          </a:fillRef>
+          <a:effectRef idx="0">
+            <a:schemeClr val="accent1"/>
+          </a:effectRef>
+          <a:fontRef idx="minor">
+            <a:schemeClr val="lt1"/>
+          </a:fontRef>
+        </p:style>
+        <p:txBody>
+          <a:bodyPr rtlCol="0" anchor="ctr"/>
+          <a:lstStyle/>
+          <a:p>
+            <a:pPr algn="ctr"/>
+            <a:endParaRPr lang="zh-CN" altLang="en-US"/>
+          </a:p>
+        </p:txBody>
+      </p:sp>
+      <p:sp>
+        <p:nvSpPr>
+          <p:cNvPr id="90" name="箭头: 下 89">
+            <a:extLst>
+              <a:ext uri="{FF2B5EF4-FFF2-40B4-BE49-F238E27FC236}">
+                <a16:creationId xmlns:a16="http://schemas.microsoft.com/office/drawing/2014/main" id="{33F90FA4-2404-45BA-A510-1F642DFC1CDF}"/>
+              </a:ext>
+            </a:extLst>
+          </p:cNvPr>
+          <p:cNvSpPr/>
+          <p:nvPr/>
+        </p:nvSpPr>
+        <p:spPr>
+          <a:xfrm>
+            <a:off x="4882793" y="2795151"/>
+            <a:ext cx="89803" cy="122185"/>
+          </a:xfrm>
+          <a:prstGeom prst="downArrow">
+            <a:avLst/>
+          </a:prstGeom>
+          <a:solidFill>
+            <a:schemeClr val="tx1"/>
+          </a:solidFill>
+          <a:ln>
+            <a:noFill/>
+          </a:ln>
+        </p:spPr>
+        <p:style>
+          <a:lnRef idx="2">
+            <a:schemeClr val="accent1">
+              <a:shade val="50000"/>
+            </a:schemeClr>
+          </a:lnRef>
+          <a:fillRef idx="1">
+            <a:schemeClr val="accent1"/>
+          </a:fillRef>
+          <a:effectRef idx="0">
+            <a:schemeClr val="accent1"/>
+          </a:effectRef>
+          <a:fontRef idx="minor">
+            <a:schemeClr val="lt1"/>
+          </a:fontRef>
+        </p:style>
+        <p:txBody>
+          <a:bodyPr rtlCol="0" anchor="ctr"/>
+          <a:lstStyle/>
+          <a:p>
+            <a:pPr algn="ctr"/>
+            <a:endParaRPr lang="zh-CN" altLang="en-US"/>
+          </a:p>
+        </p:txBody>
+      </p:sp>
       <p:cxnSp>
         <p:nvCxnSpPr>
-          <p:cNvPr id="43" name="连接符: 肘形 42">
+          <p:cNvPr id="37" name="直接连接符 36">
             <a:extLst>
               <a:ext uri="{FF2B5EF4-FFF2-40B4-BE49-F238E27FC236}">
-                <a16:creationId xmlns:a16="http://schemas.microsoft.com/office/drawing/2014/main" id="{5F747872-AF07-94F6-5AB0-27C487A1FA0F}"/>
+                <a16:creationId xmlns:a16="http://schemas.microsoft.com/office/drawing/2014/main" id="{A5E434E5-DB8D-4955-86DC-E615A9220D70}"/>
               </a:ext>
             </a:extLst>
           </p:cNvPr>
           <p:cNvCxnSpPr>
             <a:cxnSpLocks/>
             <a:stCxn id="97" idx="3"/>
+            <a:endCxn id="114" idx="0"/>
+          </p:cNvCxnSpPr>
+          <p:nvPr/>
+        </p:nvCxnSpPr>
+        <p:spPr>
+          <a:xfrm>
+            <a:off x="3202184" y="3368097"/>
+            <a:ext cx="0" cy="211320"/>
+          </a:xfrm>
+          <a:prstGeom prst="line">
+            <a:avLst/>
+          </a:prstGeom>
+          <a:ln w="9525">
+            <a:solidFill>
+              <a:schemeClr val="tx1"/>
+            </a:solidFill>
+          </a:ln>
+        </p:spPr>
+        <p:style>
+          <a:lnRef idx="1">
+            <a:schemeClr val="accent1"/>
+          </a:lnRef>
+          <a:fillRef idx="0">
+            <a:schemeClr val="accent1"/>
+          </a:fillRef>
+          <a:effectRef idx="0">
+            <a:schemeClr val="accent1"/>
+          </a:effectRef>
+          <a:fontRef idx="minor">
+            <a:schemeClr val="tx1"/>
+          </a:fontRef>
+        </p:style>
+      </p:cxnSp>
+      <p:sp>
+        <p:nvSpPr>
+          <p:cNvPr id="163" name="文本框 162">
+            <a:extLst>
+              <a:ext uri="{FF2B5EF4-FFF2-40B4-BE49-F238E27FC236}">
+                <a16:creationId xmlns:a16="http://schemas.microsoft.com/office/drawing/2014/main" id="{7CB125A9-EA1C-4F70-84D7-A4F8BD29D05C}"/>
+              </a:ext>
+            </a:extLst>
+          </p:cNvPr>
+          <p:cNvSpPr txBox="1"/>
+          <p:nvPr/>
+        </p:nvSpPr>
+        <p:spPr>
+          <a:xfrm>
+            <a:off x="2028069" y="2748006"/>
+            <a:ext cx="538107" cy="215444"/>
+          </a:xfrm>
+          <a:prstGeom prst="rect">
+            <a:avLst/>
+          </a:prstGeom>
+          <a:noFill/>
+        </p:spPr>
+        <p:txBody>
+          <a:bodyPr wrap="square">
+            <a:spAutoFit/>
+          </a:bodyPr>
+          <a:lstStyle/>
+          <a:p>
+            <a:pPr algn="ctr"/>
+            <a:r>
+              <a:rPr lang="zh-CN" altLang="en-US" sz="800" dirty="0">
+                <a:latin typeface="宋体" panose="02010600030101010101" pitchFamily="2" charset="-122"/>
+                <a:ea typeface="宋体" panose="02010600030101010101" pitchFamily="2" charset="-122"/>
+              </a:rPr>
+              <a:t>问题</a:t>
+            </a:r>
+            <a:r>
+              <a:rPr lang="en-US" altLang="zh-CN" sz="800" dirty="0">
+                <a:latin typeface="宋体" panose="02010600030101010101" pitchFamily="2" charset="-122"/>
+                <a:ea typeface="宋体" panose="02010600030101010101" pitchFamily="2" charset="-122"/>
+              </a:rPr>
+              <a:t>(1)</a:t>
+            </a:r>
+            <a:endParaRPr lang="zh-CN" altLang="en-US" sz="800" dirty="0">
+              <a:latin typeface="宋体" panose="02010600030101010101" pitchFamily="2" charset="-122"/>
+              <a:ea typeface="宋体" panose="02010600030101010101" pitchFamily="2" charset="-122"/>
+            </a:endParaRPr>
+          </a:p>
+        </p:txBody>
+      </p:sp>
+      <p:sp>
+        <p:nvSpPr>
+          <p:cNvPr id="164" name="文本框 163">
+            <a:extLst>
+              <a:ext uri="{FF2B5EF4-FFF2-40B4-BE49-F238E27FC236}">
+                <a16:creationId xmlns:a16="http://schemas.microsoft.com/office/drawing/2014/main" id="{317B9721-C980-4F04-AE4B-916C95A66A29}"/>
+              </a:ext>
+            </a:extLst>
+          </p:cNvPr>
+          <p:cNvSpPr txBox="1"/>
+          <p:nvPr/>
+        </p:nvSpPr>
+        <p:spPr>
+          <a:xfrm>
+            <a:off x="3192938" y="2748006"/>
+            <a:ext cx="519907" cy="215444"/>
+          </a:xfrm>
+          <a:prstGeom prst="rect">
+            <a:avLst/>
+          </a:prstGeom>
+          <a:noFill/>
+        </p:spPr>
+        <p:txBody>
+          <a:bodyPr wrap="square">
+            <a:spAutoFit/>
+          </a:bodyPr>
+          <a:lstStyle/>
+          <a:p>
+            <a:pPr algn="ctr"/>
+            <a:r>
+              <a:rPr lang="zh-CN" altLang="en-US" sz="800" dirty="0">
+                <a:latin typeface="宋体" panose="02010600030101010101" pitchFamily="2" charset="-122"/>
+                <a:ea typeface="宋体" panose="02010600030101010101" pitchFamily="2" charset="-122"/>
+              </a:rPr>
+              <a:t>问题</a:t>
+            </a:r>
+            <a:r>
+              <a:rPr lang="en-US" altLang="zh-CN" sz="800" dirty="0">
+                <a:latin typeface="宋体" panose="02010600030101010101" pitchFamily="2" charset="-122"/>
+                <a:ea typeface="宋体" panose="02010600030101010101" pitchFamily="2" charset="-122"/>
+              </a:rPr>
+              <a:t>(2)</a:t>
+            </a:r>
+            <a:endParaRPr lang="zh-CN" altLang="en-US" sz="800" dirty="0"/>
+          </a:p>
+        </p:txBody>
+      </p:sp>
+      <p:sp>
+        <p:nvSpPr>
+          <p:cNvPr id="165" name="文本框 164">
+            <a:extLst>
+              <a:ext uri="{FF2B5EF4-FFF2-40B4-BE49-F238E27FC236}">
+                <a16:creationId xmlns:a16="http://schemas.microsoft.com/office/drawing/2014/main" id="{083658EC-B224-4D1F-B39E-435F41A4C79A}"/>
+              </a:ext>
+            </a:extLst>
+          </p:cNvPr>
+          <p:cNvSpPr txBox="1"/>
+          <p:nvPr/>
+        </p:nvSpPr>
+        <p:spPr>
+          <a:xfrm>
+            <a:off x="4842517" y="2748006"/>
+            <a:ext cx="674842" cy="215444"/>
+          </a:xfrm>
+          <a:prstGeom prst="rect">
+            <a:avLst/>
+          </a:prstGeom>
+          <a:noFill/>
+        </p:spPr>
+        <p:txBody>
+          <a:bodyPr wrap="square">
+            <a:spAutoFit/>
+          </a:bodyPr>
+          <a:lstStyle/>
+          <a:p>
+            <a:pPr algn="ctr"/>
+            <a:r>
+              <a:rPr lang="zh-CN" altLang="en-US" sz="800" dirty="0">
+                <a:latin typeface="宋体" panose="02010600030101010101" pitchFamily="2" charset="-122"/>
+                <a:ea typeface="宋体" panose="02010600030101010101" pitchFamily="2" charset="-122"/>
+              </a:rPr>
+              <a:t>问题</a:t>
+            </a:r>
+            <a:r>
+              <a:rPr lang="en-US" altLang="zh-CN" sz="800" dirty="0">
+                <a:latin typeface="宋体" panose="02010600030101010101" pitchFamily="2" charset="-122"/>
+                <a:ea typeface="宋体" panose="02010600030101010101" pitchFamily="2" charset="-122"/>
+              </a:rPr>
+              <a:t>(3)</a:t>
+            </a:r>
+            <a:endParaRPr lang="zh-CN" altLang="en-US" sz="800" dirty="0">
+              <a:latin typeface="宋体" panose="02010600030101010101" pitchFamily="2" charset="-122"/>
+              <a:ea typeface="宋体" panose="02010600030101010101" pitchFamily="2" charset="-122"/>
+            </a:endParaRPr>
+          </a:p>
+        </p:txBody>
+      </p:sp>
+      <p:cxnSp>
+        <p:nvCxnSpPr>
+          <p:cNvPr id="45" name="直接连接符 44">
+            <a:extLst>
+              <a:ext uri="{FF2B5EF4-FFF2-40B4-BE49-F238E27FC236}">
+                <a16:creationId xmlns:a16="http://schemas.microsoft.com/office/drawing/2014/main" id="{F2D79EED-B22D-D040-E524-5ABD7F0910E8}"/>
+              </a:ext>
+            </a:extLst>
+          </p:cNvPr>
+          <p:cNvCxnSpPr>
+            <a:cxnSpLocks/>
+            <a:stCxn id="86" idx="2"/>
+            <a:endCxn id="113" idx="0"/>
+          </p:cNvCxnSpPr>
+          <p:nvPr/>
+        </p:nvCxnSpPr>
+        <p:spPr>
+          <a:xfrm rot="5400000">
+            <a:off x="2823322" y="3200556"/>
+            <a:ext cx="212776" cy="544949"/>
+          </a:xfrm>
+          <a:prstGeom prst="bentConnector3">
+            <a:avLst>
+              <a:gd name="adj1" fmla="val 50000"/>
+            </a:avLst>
+          </a:prstGeom>
+          <a:ln w="9525">
+            <a:solidFill>
+              <a:schemeClr val="tx1"/>
+            </a:solidFill>
+          </a:ln>
+        </p:spPr>
+        <p:style>
+          <a:lnRef idx="1">
+            <a:schemeClr val="accent1"/>
+          </a:lnRef>
+          <a:fillRef idx="0">
+            <a:schemeClr val="accent1"/>
+          </a:fillRef>
+          <a:effectRef idx="0">
+            <a:schemeClr val="accent1"/>
+          </a:effectRef>
+          <a:fontRef idx="minor">
+            <a:schemeClr val="tx1"/>
+          </a:fontRef>
+        </p:style>
+      </p:cxnSp>
+      <p:cxnSp>
+        <p:nvCxnSpPr>
+          <p:cNvPr id="55" name="直接连接符 44">
+            <a:extLst>
+              <a:ext uri="{FF2B5EF4-FFF2-40B4-BE49-F238E27FC236}">
+                <a16:creationId xmlns:a16="http://schemas.microsoft.com/office/drawing/2014/main" id="{C5998D0B-1011-F233-5493-349C012859C2}"/>
+              </a:ext>
+            </a:extLst>
+          </p:cNvPr>
+          <p:cNvCxnSpPr>
+            <a:cxnSpLocks/>
+            <a:stCxn id="86" idx="2"/>
             <a:endCxn id="58" idx="0"/>
           </p:cNvCxnSpPr>
           <p:nvPr/>
         </p:nvCxnSpPr>
         <p:spPr>
           <a:xfrm rot="16200000" flipH="1">
-            <a:off x="3363826" y="3200555"/>
-            <a:ext cx="212774" cy="544949"/>
+            <a:off x="3368271" y="3200554"/>
+            <a:ext cx="212775" cy="544949"/>
           </a:xfrm>
-          <a:prstGeom prst="bentConnector5">
+          <a:prstGeom prst="bentConnector3">
             <a:avLst>
-              <a:gd name="adj1" fmla="val 44766"/>
-              <a:gd name="adj2" fmla="val 57927"/>
-              <a:gd name="adj3" fmla="val 44490"/>
+              <a:gd name="adj1" fmla="val 50000"/>
             </a:avLst>
           </a:prstGeom>
           <a:ln w="9525">

--- a/text_ref/图表_lzh.pptx
+++ b/text_ref/图表_lzh.pptx
@@ -235,7 +235,7 @@
           <a:p>
             <a:fld id="{C132DE89-9275-4FDF-B894-6A14B2127E70}" type="datetimeFigureOut">
               <a:rPr lang="zh-CN" altLang="en-US" smtClean="0"/>
-              <a:t>2026-03-15</a:t>
+              <a:t>2026-03-16</a:t>
             </a:fld>
             <a:endParaRPr lang="zh-CN" altLang="en-US"/>
           </a:p>
@@ -717,7 +717,7 @@
           <a:p>
             <a:fld id="{798C2E43-9ACF-49D1-9A71-28E0B80BDA78}" type="datetimeFigureOut">
               <a:rPr lang="zh-CN" altLang="en-US" smtClean="0"/>
-              <a:t>2026-03-15</a:t>
+              <a:t>2026-03-16</a:t>
             </a:fld>
             <a:endParaRPr lang="zh-CN" altLang="en-US"/>
           </a:p>
@@ -887,7 +887,7 @@
           <a:p>
             <a:fld id="{798C2E43-9ACF-49D1-9A71-28E0B80BDA78}" type="datetimeFigureOut">
               <a:rPr lang="zh-CN" altLang="en-US" smtClean="0"/>
-              <a:t>2026-03-15</a:t>
+              <a:t>2026-03-16</a:t>
             </a:fld>
             <a:endParaRPr lang="zh-CN" altLang="en-US"/>
           </a:p>
@@ -1067,7 +1067,7 @@
           <a:p>
             <a:fld id="{798C2E43-9ACF-49D1-9A71-28E0B80BDA78}" type="datetimeFigureOut">
               <a:rPr lang="zh-CN" altLang="en-US" smtClean="0"/>
-              <a:t>2026-03-15</a:t>
+              <a:t>2026-03-16</a:t>
             </a:fld>
             <a:endParaRPr lang="zh-CN" altLang="en-US"/>
           </a:p>
@@ -1237,7 +1237,7 @@
           <a:p>
             <a:fld id="{798C2E43-9ACF-49D1-9A71-28E0B80BDA78}" type="datetimeFigureOut">
               <a:rPr lang="zh-CN" altLang="en-US" smtClean="0"/>
-              <a:t>2026-03-15</a:t>
+              <a:t>2026-03-16</a:t>
             </a:fld>
             <a:endParaRPr lang="zh-CN" altLang="en-US"/>
           </a:p>
@@ -1481,7 +1481,7 @@
           <a:p>
             <a:fld id="{798C2E43-9ACF-49D1-9A71-28E0B80BDA78}" type="datetimeFigureOut">
               <a:rPr lang="zh-CN" altLang="en-US" smtClean="0"/>
-              <a:t>2026-03-15</a:t>
+              <a:t>2026-03-16</a:t>
             </a:fld>
             <a:endParaRPr lang="zh-CN" altLang="en-US"/>
           </a:p>
@@ -1713,7 +1713,7 @@
           <a:p>
             <a:fld id="{798C2E43-9ACF-49D1-9A71-28E0B80BDA78}" type="datetimeFigureOut">
               <a:rPr lang="zh-CN" altLang="en-US" smtClean="0"/>
-              <a:t>2026-03-15</a:t>
+              <a:t>2026-03-16</a:t>
             </a:fld>
             <a:endParaRPr lang="zh-CN" altLang="en-US"/>
           </a:p>
@@ -2080,7 +2080,7 @@
           <a:p>
             <a:fld id="{798C2E43-9ACF-49D1-9A71-28E0B80BDA78}" type="datetimeFigureOut">
               <a:rPr lang="zh-CN" altLang="en-US" smtClean="0"/>
-              <a:t>2026-03-15</a:t>
+              <a:t>2026-03-16</a:t>
             </a:fld>
             <a:endParaRPr lang="zh-CN" altLang="en-US"/>
           </a:p>
@@ -2198,7 +2198,7 @@
           <a:p>
             <a:fld id="{798C2E43-9ACF-49D1-9A71-28E0B80BDA78}" type="datetimeFigureOut">
               <a:rPr lang="zh-CN" altLang="en-US" smtClean="0"/>
-              <a:t>2026-03-15</a:t>
+              <a:t>2026-03-16</a:t>
             </a:fld>
             <a:endParaRPr lang="zh-CN" altLang="en-US"/>
           </a:p>
@@ -2293,7 +2293,7 @@
           <a:p>
             <a:fld id="{798C2E43-9ACF-49D1-9A71-28E0B80BDA78}" type="datetimeFigureOut">
               <a:rPr lang="zh-CN" altLang="en-US" smtClean="0"/>
-              <a:t>2026-03-15</a:t>
+              <a:t>2026-03-16</a:t>
             </a:fld>
             <a:endParaRPr lang="zh-CN" altLang="en-US"/>
           </a:p>
@@ -2570,7 +2570,7 @@
           <a:p>
             <a:fld id="{798C2E43-9ACF-49D1-9A71-28E0B80BDA78}" type="datetimeFigureOut">
               <a:rPr lang="zh-CN" altLang="en-US" smtClean="0"/>
-              <a:t>2026-03-15</a:t>
+              <a:t>2026-03-16</a:t>
             </a:fld>
             <a:endParaRPr lang="zh-CN" altLang="en-US"/>
           </a:p>
@@ -2827,7 +2827,7 @@
           <a:p>
             <a:fld id="{798C2E43-9ACF-49D1-9A71-28E0B80BDA78}" type="datetimeFigureOut">
               <a:rPr lang="zh-CN" altLang="en-US" smtClean="0"/>
-              <a:t>2026-03-15</a:t>
+              <a:t>2026-03-16</a:t>
             </a:fld>
             <a:endParaRPr lang="zh-CN" altLang="en-US"/>
           </a:p>
@@ -3040,7 +3040,7 @@
           <a:p>
             <a:fld id="{798C2E43-9ACF-49D1-9A71-28E0B80BDA78}" type="datetimeFigureOut">
               <a:rPr lang="zh-CN" altLang="en-US" smtClean="0"/>
-              <a:t>2026-03-15</a:t>
+              <a:t>2026-03-16</a:t>
             </a:fld>
             <a:endParaRPr lang="zh-CN" altLang="en-US"/>
           </a:p>
@@ -5575,9 +5575,7 @@
             <a:prstGeom prst="rect">
               <a:avLst/>
             </a:prstGeom>
-            <a:solidFill>
-              <a:srgbClr val="F2F2F2"/>
-            </a:solidFill>
+            <a:noFill/>
           </p:spPr>
           <p:txBody>
             <a:bodyPr wrap="square" rtlCol="0">
@@ -6490,7 +6488,7 @@
             <a:prstGeom prst="rect">
               <a:avLst/>
             </a:prstGeom>
-            <a:grpFill/>
+            <a:noFill/>
           </p:spPr>
           <p:txBody>
             <a:bodyPr wrap="square" rtlCol="0">
@@ -6639,7 +6637,7 @@
               <a:prstGeom prst="rect">
                 <a:avLst/>
               </a:prstGeom>
-              <a:grpFill/>
+              <a:noFill/>
             </p:spPr>
             <p:txBody>
               <a:bodyPr wrap="square" rtlCol="0">
@@ -6765,7 +6763,7 @@
               <a:prstGeom prst="rect">
                 <a:avLst/>
               </a:prstGeom>
-              <a:grpFill/>
+              <a:noFill/>
             </p:spPr>
             <p:txBody>
               <a:bodyPr wrap="square" rtlCol="0">
@@ -7600,7 +7598,7 @@
         </p:nvGrpSpPr>
         <p:grpSpPr>
           <a:xfrm>
-            <a:off x="5140404" y="6657049"/>
+            <a:off x="5140404" y="6657048"/>
             <a:ext cx="932648" cy="426563"/>
             <a:chOff x="5123367" y="3226582"/>
             <a:chExt cx="932648" cy="903309"/>
@@ -7664,99 +7662,166 @@
             </a:p>
           </p:txBody>
         </p:sp>
-        <p:sp>
-          <p:nvSpPr>
-            <p:cNvPr id="93" name="文本框 92">
-              <a:extLst>
-                <a:ext uri="{FF2B5EF4-FFF2-40B4-BE49-F238E27FC236}">
-                  <a16:creationId xmlns:a16="http://schemas.microsoft.com/office/drawing/2014/main" id="{14E5DA38-DC80-00D8-BA3D-4377ED2074A4}"/>
-                </a:ext>
-              </a:extLst>
-            </p:cNvPr>
-            <p:cNvSpPr txBox="1"/>
-            <p:nvPr/>
-          </p:nvSpPr>
-          <p:spPr>
-            <a:xfrm>
-              <a:off x="5140226" y="3244946"/>
-              <a:ext cx="898929" cy="847291"/>
-            </a:xfrm>
-            <a:prstGeom prst="rect">
-              <a:avLst/>
-            </a:prstGeom>
-            <a:noFill/>
-          </p:spPr>
-          <p:txBody>
-            <a:bodyPr wrap="square" rtlCol="0">
-              <a:spAutoFit/>
-            </a:bodyPr>
-            <a:lstStyle/>
-            <a:p>
-              <a:pPr algn="ctr"/>
-              <a:r>
-                <a:rPr lang="zh-CN" altLang="en-US" sz="1000" dirty="0">
-                  <a:latin typeface="宋体" panose="02010600030101010101" pitchFamily="2" charset="-122"/>
-                  <a:ea typeface="宋体" panose="02010600030101010101" pitchFamily="2" charset="-122"/>
-                  <a:cs typeface="Arial" panose="020B0604020202020204" pitchFamily="34" charset="0"/>
-                </a:rPr>
-                <a:t>下游智能体</a:t>
-              </a:r>
-              <a:endParaRPr lang="en-US" altLang="zh-CN" sz="1000" dirty="0">
-                <a:latin typeface="宋体" panose="02010600030101010101" pitchFamily="2" charset="-122"/>
-                <a:ea typeface="宋体" panose="02010600030101010101" pitchFamily="2" charset="-122"/>
-                <a:cs typeface="Arial" panose="020B0604020202020204" pitchFamily="34" charset="0"/>
-              </a:endParaRPr>
-            </a:p>
-            <a:p>
-              <a:pPr algn="ctr"/>
-              <a:r>
-                <a:rPr lang="zh-CN" altLang="en-US" sz="1000" dirty="0">
-                  <a:latin typeface="宋体" panose="02010600030101010101" pitchFamily="2" charset="-122"/>
-                  <a:ea typeface="宋体" panose="02010600030101010101" pitchFamily="2" charset="-122"/>
-                  <a:cs typeface="Arial" panose="020B0604020202020204" pitchFamily="34" charset="0"/>
-                </a:rPr>
-                <a:t>输入</a:t>
-              </a:r>
-              <a:r>
-                <a:rPr lang="en-US" altLang="zh-CN" sz="1000" dirty="0">
-                  <a:latin typeface="宋体" panose="02010600030101010101" pitchFamily="2" charset="-122"/>
-                  <a:ea typeface="宋体" panose="02010600030101010101" pitchFamily="2" charset="-122"/>
-                  <a:cs typeface="Arial" panose="020B0604020202020204" pitchFamily="34" charset="0"/>
-                </a:rPr>
-                <a:t>(</a:t>
-              </a:r>
-              <a:r>
-                <a:rPr lang="en-US" altLang="zh-CN" sz="1000" dirty="0">
-                  <a:latin typeface="Times New Roman" panose="02020603050405020304" pitchFamily="18" charset="0"/>
-                  <a:ea typeface="宋体" panose="02010600030101010101" pitchFamily="2" charset="-122"/>
-                  <a:cs typeface="Times New Roman" panose="02020603050405020304" pitchFamily="18" charset="0"/>
-                </a:rPr>
-                <a:t>X</a:t>
-              </a:r>
-              <a:r>
-                <a:rPr lang="en-US" altLang="zh-CN" sz="700" dirty="0">
-                  <a:latin typeface="Times New Roman" panose="02020603050405020304" pitchFamily="18" charset="0"/>
-                  <a:ea typeface="宋体" panose="02010600030101010101" pitchFamily="2" charset="-122"/>
-                  <a:cs typeface="Times New Roman" panose="02020603050405020304" pitchFamily="18" charset="0"/>
-                </a:rPr>
-                <a:t>B</a:t>
-              </a:r>
-              <a:r>
-                <a:rPr lang="en-US" altLang="zh-CN" sz="1000" dirty="0">
-                  <a:latin typeface="宋体" panose="02010600030101010101" pitchFamily="2" charset="-122"/>
-                  <a:ea typeface="宋体" panose="02010600030101010101" pitchFamily="2" charset="-122"/>
-                  <a:cs typeface="Arial" panose="020B0604020202020204" pitchFamily="34" charset="0"/>
-                </a:rPr>
-                <a:t>)</a:t>
-              </a:r>
-              <a:endParaRPr lang="zh-CN" altLang="en-US" sz="1000" dirty="0">
-                <a:latin typeface="宋体" panose="02010600030101010101" pitchFamily="2" charset="-122"/>
-                <a:ea typeface="宋体" panose="02010600030101010101" pitchFamily="2" charset="-122"/>
-                <a:cs typeface="Arial" panose="020B0604020202020204" pitchFamily="34" charset="0"/>
-              </a:endParaRPr>
-            </a:p>
-          </p:txBody>
-        </p:sp>
+        <mc:AlternateContent xmlns:mc="http://schemas.openxmlformats.org/markup-compatibility/2006">
+          <mc:Choice xmlns:a14="http://schemas.microsoft.com/office/drawing/2010/main" Requires="a14">
+            <p:sp>
+              <p:nvSpPr>
+                <p:cNvPr id="93" name="文本框 92">
+                  <a:extLst>
+                    <a:ext uri="{FF2B5EF4-FFF2-40B4-BE49-F238E27FC236}">
+                      <a16:creationId xmlns:a16="http://schemas.microsoft.com/office/drawing/2014/main" id="{14E5DA38-DC80-00D8-BA3D-4377ED2074A4}"/>
+                    </a:ext>
+                  </a:extLst>
+                </p:cNvPr>
+                <p:cNvSpPr txBox="1"/>
+                <p:nvPr/>
+              </p:nvSpPr>
+              <p:spPr>
+                <a:xfrm>
+                  <a:off x="5140226" y="3244946"/>
+                  <a:ext cx="898929" cy="847291"/>
+                </a:xfrm>
+                <a:prstGeom prst="rect">
+                  <a:avLst/>
+                </a:prstGeom>
+                <a:noFill/>
+              </p:spPr>
+              <p:txBody>
+                <a:bodyPr wrap="square" rtlCol="0">
+                  <a:spAutoFit/>
+                </a:bodyPr>
+                <a:lstStyle/>
+                <a:p>
+                  <a:pPr algn="ctr"/>
+                  <a:r>
+                    <a:rPr lang="zh-CN" altLang="en-US" sz="1000" dirty="0">
+                      <a:latin typeface="宋体" panose="02010600030101010101" pitchFamily="2" charset="-122"/>
+                      <a:ea typeface="宋体" panose="02010600030101010101" pitchFamily="2" charset="-122"/>
+                      <a:cs typeface="Arial" panose="020B0604020202020204" pitchFamily="34" charset="0"/>
+                    </a:rPr>
+                    <a:t>下游智能体</a:t>
+                  </a:r>
+                  <a:endParaRPr lang="en-US" altLang="zh-CN" sz="1000" dirty="0">
+                    <a:latin typeface="宋体" panose="02010600030101010101" pitchFamily="2" charset="-122"/>
+                    <a:ea typeface="宋体" panose="02010600030101010101" pitchFamily="2" charset="-122"/>
+                    <a:cs typeface="Arial" panose="020B0604020202020204" pitchFamily="34" charset="0"/>
+                  </a:endParaRPr>
+                </a:p>
+                <a:p>
+                  <a:pPr algn="ctr"/>
+                  <a:r>
+                    <a:rPr lang="zh-CN" altLang="en-US" sz="1000" dirty="0">
+                      <a:latin typeface="宋体" panose="02010600030101010101" pitchFamily="2" charset="-122"/>
+                      <a:ea typeface="宋体" panose="02010600030101010101" pitchFamily="2" charset="-122"/>
+                      <a:cs typeface="Arial" panose="020B0604020202020204" pitchFamily="34" charset="0"/>
+                    </a:rPr>
+                    <a:t>输入</a:t>
+                  </a:r>
+                  <a:r>
+                    <a:rPr lang="en-US" altLang="zh-CN" sz="1000" dirty="0">
+                      <a:latin typeface="宋体" panose="02010600030101010101" pitchFamily="2" charset="-122"/>
+                      <a:ea typeface="宋体" panose="02010600030101010101" pitchFamily="2" charset="-122"/>
+                      <a:cs typeface="Arial" panose="020B0604020202020204" pitchFamily="34" charset="0"/>
+                    </a:rPr>
+                    <a:t>(</a:t>
+                  </a:r>
+                  <a14:m>
+                    <m:oMath xmlns:m="http://schemas.openxmlformats.org/officeDocument/2006/math">
+                      <m:sSub>
+                        <m:sSubPr>
+                          <m:ctrlPr>
+                            <a:rPr lang="en-US" altLang="zh-CN" sz="1000" b="0" i="1" smtClean="0">
+                              <a:latin typeface="Cambria Math" panose="02040503050406030204" pitchFamily="18" charset="0"/>
+                              <a:ea typeface="宋体" panose="02010600030101010101" pitchFamily="2" charset="-122"/>
+                              <a:cs typeface="Arial" panose="020B0604020202020204" pitchFamily="34" charset="0"/>
+                            </a:rPr>
+                          </m:ctrlPr>
+                        </m:sSubPr>
+                        <m:e>
+                          <m:r>
+                            <a:rPr lang="en-US" altLang="zh-CN" sz="1000" b="0" i="1" smtClean="0">
+                              <a:latin typeface="Cambria Math" panose="02040503050406030204" pitchFamily="18" charset="0"/>
+                              <a:ea typeface="宋体" panose="02010600030101010101" pitchFamily="2" charset="-122"/>
+                              <a:cs typeface="Arial" panose="020B0604020202020204" pitchFamily="34" charset="0"/>
+                            </a:rPr>
+                            <m:t>𝑋</m:t>
+                          </m:r>
+                        </m:e>
+                        <m:sub>
+                          <m:r>
+                            <a:rPr lang="en-US" altLang="zh-CN" sz="1000" b="0" i="1" smtClean="0">
+                              <a:latin typeface="Cambria Math" panose="02040503050406030204" pitchFamily="18" charset="0"/>
+                              <a:ea typeface="宋体" panose="02010600030101010101" pitchFamily="2" charset="-122"/>
+                              <a:cs typeface="Arial" panose="020B0604020202020204" pitchFamily="34" charset="0"/>
+                            </a:rPr>
+                            <m:t>𝐵</m:t>
+                          </m:r>
+                        </m:sub>
+                      </m:sSub>
+                    </m:oMath>
+                  </a14:m>
+                  <a:r>
+                    <a:rPr lang="en-US" altLang="zh-CN" sz="1000" dirty="0">
+                      <a:latin typeface="宋体" panose="02010600030101010101" pitchFamily="2" charset="-122"/>
+                      <a:ea typeface="宋体" panose="02010600030101010101" pitchFamily="2" charset="-122"/>
+                      <a:cs typeface="Arial" panose="020B0604020202020204" pitchFamily="34" charset="0"/>
+                    </a:rPr>
+                    <a:t>)</a:t>
+                  </a:r>
+                  <a:endParaRPr lang="zh-CN" altLang="en-US" sz="1000" dirty="0">
+                    <a:latin typeface="宋体" panose="02010600030101010101" pitchFamily="2" charset="-122"/>
+                    <a:ea typeface="宋体" panose="02010600030101010101" pitchFamily="2" charset="-122"/>
+                    <a:cs typeface="Arial" panose="020B0604020202020204" pitchFamily="34" charset="0"/>
+                  </a:endParaRPr>
+                </a:p>
+              </p:txBody>
+            </p:sp>
+          </mc:Choice>
+          <mc:Fallback>
+            <p:sp>
+              <p:nvSpPr>
+                <p:cNvPr id="93" name="文本框 92">
+                  <a:extLst>
+                    <a:ext uri="{FF2B5EF4-FFF2-40B4-BE49-F238E27FC236}">
+                      <a16:creationId xmlns:a16="http://schemas.microsoft.com/office/drawing/2014/main" id="{14E5DA38-DC80-00D8-BA3D-4377ED2074A4}"/>
+                    </a:ext>
+                  </a:extLst>
+                </p:cNvPr>
+                <p:cNvSpPr txBox="1">
+                  <a:spLocks noRot="1" noChangeAspect="1" noMove="1" noResize="1" noEditPoints="1" noAdjustHandles="1" noChangeArrowheads="1" noChangeShapeType="1" noTextEdit="1"/>
+                </p:cNvSpPr>
+                <p:nvPr/>
+              </p:nvSpPr>
+              <p:spPr>
+                <a:xfrm>
+                  <a:off x="5140226" y="3244946"/>
+                  <a:ext cx="898929" cy="847291"/>
+                </a:xfrm>
+                <a:prstGeom prst="rect">
+                  <a:avLst/>
+                </a:prstGeom>
+                <a:blipFill>
+                  <a:blip r:embed="rId3"/>
+                  <a:stretch>
+                    <a:fillRect b="-7576"/>
+                  </a:stretch>
+                </a:blipFill>
+              </p:spPr>
+              <p:txBody>
+                <a:bodyPr/>
+                <a:lstStyle/>
+                <a:p>
+                  <a:r>
+                    <a:rPr lang="zh-CN" altLang="en-US">
+                      <a:noFill/>
+                    </a:rPr>
+                    <a:t> </a:t>
+                  </a:r>
+                </a:p>
+              </p:txBody>
+            </p:sp>
+          </mc:Fallback>
+        </mc:AlternateContent>
       </p:grpSp>
       <p:grpSp>
         <p:nvGrpSpPr>
@@ -7925,7 +7990,7 @@
         <p:spPr>
           <a:xfrm>
             <a:off x="5602424" y="5518757"/>
-            <a:ext cx="4304" cy="1146964"/>
+            <a:ext cx="4304" cy="1146963"/>
           </a:xfrm>
           <a:prstGeom prst="straightConnector1">
             <a:avLst/>
@@ -8578,7 +8643,7 @@
                 <a:avLst/>
               </a:prstGeom>
               <a:blipFill>
-                <a:blip r:embed="rId3"/>
+                <a:blip r:embed="rId4"/>
                 <a:stretch>
                   <a:fillRect l="-1361" r="-4082" b="-34783"/>
                 </a:stretch>

--- a/text_ref/图表_lzh.pptx
+++ b/text_ref/图表_lzh.pptx
@@ -235,7 +235,7 @@
           <a:p>
             <a:fld id="{C132DE89-9275-4FDF-B894-6A14B2127E70}" type="datetimeFigureOut">
               <a:rPr lang="zh-CN" altLang="en-US" smtClean="0"/>
-              <a:t>2026-04-08</a:t>
+              <a:t>2026-04-10</a:t>
             </a:fld>
             <a:endParaRPr lang="zh-CN" altLang="en-US"/>
           </a:p>
@@ -717,7 +717,7 @@
           <a:p>
             <a:fld id="{798C2E43-9ACF-49D1-9A71-28E0B80BDA78}" type="datetimeFigureOut">
               <a:rPr lang="zh-CN" altLang="en-US" smtClean="0"/>
-              <a:t>2026-04-08</a:t>
+              <a:t>2026-04-10</a:t>
             </a:fld>
             <a:endParaRPr lang="zh-CN" altLang="en-US"/>
           </a:p>
@@ -887,7 +887,7 @@
           <a:p>
             <a:fld id="{798C2E43-9ACF-49D1-9A71-28E0B80BDA78}" type="datetimeFigureOut">
               <a:rPr lang="zh-CN" altLang="en-US" smtClean="0"/>
-              <a:t>2026-04-08</a:t>
+              <a:t>2026-04-10</a:t>
             </a:fld>
             <a:endParaRPr lang="zh-CN" altLang="en-US"/>
           </a:p>
@@ -1067,7 +1067,7 @@
           <a:p>
             <a:fld id="{798C2E43-9ACF-49D1-9A71-28E0B80BDA78}" type="datetimeFigureOut">
               <a:rPr lang="zh-CN" altLang="en-US" smtClean="0"/>
-              <a:t>2026-04-08</a:t>
+              <a:t>2026-04-10</a:t>
             </a:fld>
             <a:endParaRPr lang="zh-CN" altLang="en-US"/>
           </a:p>
@@ -1237,7 +1237,7 @@
           <a:p>
             <a:fld id="{798C2E43-9ACF-49D1-9A71-28E0B80BDA78}" type="datetimeFigureOut">
               <a:rPr lang="zh-CN" altLang="en-US" smtClean="0"/>
-              <a:t>2026-04-08</a:t>
+              <a:t>2026-04-10</a:t>
             </a:fld>
             <a:endParaRPr lang="zh-CN" altLang="en-US"/>
           </a:p>
@@ -1481,7 +1481,7 @@
           <a:p>
             <a:fld id="{798C2E43-9ACF-49D1-9A71-28E0B80BDA78}" type="datetimeFigureOut">
               <a:rPr lang="zh-CN" altLang="en-US" smtClean="0"/>
-              <a:t>2026-04-08</a:t>
+              <a:t>2026-04-10</a:t>
             </a:fld>
             <a:endParaRPr lang="zh-CN" altLang="en-US"/>
           </a:p>
@@ -1713,7 +1713,7 @@
           <a:p>
             <a:fld id="{798C2E43-9ACF-49D1-9A71-28E0B80BDA78}" type="datetimeFigureOut">
               <a:rPr lang="zh-CN" altLang="en-US" smtClean="0"/>
-              <a:t>2026-04-08</a:t>
+              <a:t>2026-04-10</a:t>
             </a:fld>
             <a:endParaRPr lang="zh-CN" altLang="en-US"/>
           </a:p>
@@ -2080,7 +2080,7 @@
           <a:p>
             <a:fld id="{798C2E43-9ACF-49D1-9A71-28E0B80BDA78}" type="datetimeFigureOut">
               <a:rPr lang="zh-CN" altLang="en-US" smtClean="0"/>
-              <a:t>2026-04-08</a:t>
+              <a:t>2026-04-10</a:t>
             </a:fld>
             <a:endParaRPr lang="zh-CN" altLang="en-US"/>
           </a:p>
@@ -2198,7 +2198,7 @@
           <a:p>
             <a:fld id="{798C2E43-9ACF-49D1-9A71-28E0B80BDA78}" type="datetimeFigureOut">
               <a:rPr lang="zh-CN" altLang="en-US" smtClean="0"/>
-              <a:t>2026-04-08</a:t>
+              <a:t>2026-04-10</a:t>
             </a:fld>
             <a:endParaRPr lang="zh-CN" altLang="en-US"/>
           </a:p>
@@ -2293,7 +2293,7 @@
           <a:p>
             <a:fld id="{798C2E43-9ACF-49D1-9A71-28E0B80BDA78}" type="datetimeFigureOut">
               <a:rPr lang="zh-CN" altLang="en-US" smtClean="0"/>
-              <a:t>2026-04-08</a:t>
+              <a:t>2026-04-10</a:t>
             </a:fld>
             <a:endParaRPr lang="zh-CN" altLang="en-US"/>
           </a:p>
@@ -2570,7 +2570,7 @@
           <a:p>
             <a:fld id="{798C2E43-9ACF-49D1-9A71-28E0B80BDA78}" type="datetimeFigureOut">
               <a:rPr lang="zh-CN" altLang="en-US" smtClean="0"/>
-              <a:t>2026-04-08</a:t>
+              <a:t>2026-04-10</a:t>
             </a:fld>
             <a:endParaRPr lang="zh-CN" altLang="en-US"/>
           </a:p>
@@ -2827,7 +2827,7 @@
           <a:p>
             <a:fld id="{798C2E43-9ACF-49D1-9A71-28E0B80BDA78}" type="datetimeFigureOut">
               <a:rPr lang="zh-CN" altLang="en-US" smtClean="0"/>
-              <a:t>2026-04-08</a:t>
+              <a:t>2026-04-10</a:t>
             </a:fld>
             <a:endParaRPr lang="zh-CN" altLang="en-US"/>
           </a:p>
@@ -3040,7 +3040,7 @@
           <a:p>
             <a:fld id="{798C2E43-9ACF-49D1-9A71-28E0B80BDA78}" type="datetimeFigureOut">
               <a:rPr lang="zh-CN" altLang="en-US" smtClean="0"/>
-              <a:t>2026-04-08</a:t>
+              <a:t>2026-04-10</a:t>
             </a:fld>
             <a:endParaRPr lang="zh-CN" altLang="en-US"/>
           </a:p>
@@ -4602,8 +4602,19 @@
                 <a:latin typeface="宋体" panose="02010600030101010101" pitchFamily="2" charset="-122"/>
                 <a:ea typeface="宋体" panose="02010600030101010101" pitchFamily="2" charset="-122"/>
               </a:rPr>
-              <a:t>基于通用基准的单体模型对抗鲁棒性评估</a:t>
+              <a:t>基于通用基准的单体模型</a:t>
             </a:r>
+            <a:r>
+              <a:rPr lang="zh-CN" altLang="en-US" sz="900">
+                <a:latin typeface="宋体" panose="02010600030101010101" pitchFamily="2" charset="-122"/>
+                <a:ea typeface="宋体" panose="02010600030101010101" pitchFamily="2" charset="-122"/>
+              </a:rPr>
+              <a:t>对抗鲁棒性分析</a:t>
+            </a:r>
+            <a:endParaRPr lang="zh-CN" altLang="en-US" sz="900" dirty="0">
+              <a:latin typeface="宋体" panose="02010600030101010101" pitchFamily="2" charset="-122"/>
+              <a:ea typeface="宋体" panose="02010600030101010101" pitchFamily="2" charset="-122"/>
+            </a:endParaRPr>
           </a:p>
         </p:txBody>
       </p:sp>
@@ -8431,8 +8442,8 @@
             </p:style>
           </p:cxnSp>
         </p:grpSp>
-        <mc:AlternateContent xmlns:mc="http://schemas.openxmlformats.org/markup-compatibility/2006">
-          <mc:Choice xmlns:a14="http://schemas.microsoft.com/office/drawing/2010/main" Requires="a14">
+        <mc:AlternateContent xmlns:mc="http://schemas.openxmlformats.org/markup-compatibility/2006" xmlns:a14="http://schemas.microsoft.com/office/drawing/2010/main">
+          <mc:Choice Requires="a14">
             <p:sp>
               <p:nvSpPr>
                 <p:cNvPr id="135" name="文本框 134">
@@ -8639,7 +8650,7 @@
               </p:txBody>
             </p:sp>
           </mc:Choice>
-          <mc:Fallback>
+          <mc:Fallback xmlns="">
             <p:sp>
               <p:nvSpPr>
                 <p:cNvPr id="135" name="文本框 134">

--- a/text_ref/图表_lzh.pptx
+++ b/text_ref/图表_lzh.pptx
@@ -5,25 +5,26 @@
     <p:sldMasterId id="2147483660" r:id="rId1"/>
   </p:sldMasterIdLst>
   <p:notesMasterIdLst>
-    <p:notesMasterId r:id="rId18"/>
+    <p:notesMasterId r:id="rId19"/>
   </p:notesMasterIdLst>
   <p:sldIdLst>
     <p:sldId id="291" r:id="rId2"/>
-    <p:sldId id="306" r:id="rId3"/>
-    <p:sldId id="307" r:id="rId4"/>
-    <p:sldId id="308" r:id="rId5"/>
-    <p:sldId id="309" r:id="rId6"/>
-    <p:sldId id="303" r:id="rId7"/>
-    <p:sldId id="312" r:id="rId8"/>
-    <p:sldId id="314" r:id="rId9"/>
-    <p:sldId id="310" r:id="rId10"/>
-    <p:sldId id="315" r:id="rId11"/>
-    <p:sldId id="316" r:id="rId12"/>
-    <p:sldId id="317" r:id="rId13"/>
-    <p:sldId id="318" r:id="rId14"/>
-    <p:sldId id="319" r:id="rId15"/>
-    <p:sldId id="311" r:id="rId16"/>
-    <p:sldId id="313" r:id="rId17"/>
+    <p:sldId id="320" r:id="rId3"/>
+    <p:sldId id="306" r:id="rId4"/>
+    <p:sldId id="307" r:id="rId5"/>
+    <p:sldId id="308" r:id="rId6"/>
+    <p:sldId id="309" r:id="rId7"/>
+    <p:sldId id="303" r:id="rId8"/>
+    <p:sldId id="312" r:id="rId9"/>
+    <p:sldId id="314" r:id="rId10"/>
+    <p:sldId id="310" r:id="rId11"/>
+    <p:sldId id="315" r:id="rId12"/>
+    <p:sldId id="316" r:id="rId13"/>
+    <p:sldId id="317" r:id="rId14"/>
+    <p:sldId id="318" r:id="rId15"/>
+    <p:sldId id="319" r:id="rId16"/>
+    <p:sldId id="311" r:id="rId17"/>
+    <p:sldId id="313" r:id="rId18"/>
   </p:sldIdLst>
   <p:sldSz cx="6858000" cy="9906000" type="A4"/>
   <p:notesSz cx="6858000" cy="9144000"/>
@@ -235,7 +236,7 @@
           <a:p>
             <a:fld id="{C132DE89-9275-4FDF-B894-6A14B2127E70}" type="datetimeFigureOut">
               <a:rPr lang="zh-CN" altLang="en-US" smtClean="0"/>
-              <a:t>2026-04-10</a:t>
+              <a:t>2026-04-16</a:t>
             </a:fld>
             <a:endParaRPr lang="zh-CN" altLang="en-US"/>
           </a:p>
@@ -567,7 +568,7 @@
           <a:p>
             <a:fld id="{C29E2D8E-D10A-49A7-8398-A10AAF5818B8}" type="slidenum">
               <a:rPr lang="zh-CN" altLang="en-US" smtClean="0"/>
-              <a:t>16</a:t>
+              <a:t>17</a:t>
             </a:fld>
             <a:endParaRPr lang="zh-CN" altLang="en-US"/>
           </a:p>
@@ -717,7 +718,7 @@
           <a:p>
             <a:fld id="{798C2E43-9ACF-49D1-9A71-28E0B80BDA78}" type="datetimeFigureOut">
               <a:rPr lang="zh-CN" altLang="en-US" smtClean="0"/>
-              <a:t>2026-04-10</a:t>
+              <a:t>2026-04-16</a:t>
             </a:fld>
             <a:endParaRPr lang="zh-CN" altLang="en-US"/>
           </a:p>
@@ -887,7 +888,7 @@
           <a:p>
             <a:fld id="{798C2E43-9ACF-49D1-9A71-28E0B80BDA78}" type="datetimeFigureOut">
               <a:rPr lang="zh-CN" altLang="en-US" smtClean="0"/>
-              <a:t>2026-04-10</a:t>
+              <a:t>2026-04-16</a:t>
             </a:fld>
             <a:endParaRPr lang="zh-CN" altLang="en-US"/>
           </a:p>
@@ -1067,7 +1068,7 @@
           <a:p>
             <a:fld id="{798C2E43-9ACF-49D1-9A71-28E0B80BDA78}" type="datetimeFigureOut">
               <a:rPr lang="zh-CN" altLang="en-US" smtClean="0"/>
-              <a:t>2026-04-10</a:t>
+              <a:t>2026-04-16</a:t>
             </a:fld>
             <a:endParaRPr lang="zh-CN" altLang="en-US"/>
           </a:p>
@@ -1237,7 +1238,7 @@
           <a:p>
             <a:fld id="{798C2E43-9ACF-49D1-9A71-28E0B80BDA78}" type="datetimeFigureOut">
               <a:rPr lang="zh-CN" altLang="en-US" smtClean="0"/>
-              <a:t>2026-04-10</a:t>
+              <a:t>2026-04-16</a:t>
             </a:fld>
             <a:endParaRPr lang="zh-CN" altLang="en-US"/>
           </a:p>
@@ -1481,7 +1482,7 @@
           <a:p>
             <a:fld id="{798C2E43-9ACF-49D1-9A71-28E0B80BDA78}" type="datetimeFigureOut">
               <a:rPr lang="zh-CN" altLang="en-US" smtClean="0"/>
-              <a:t>2026-04-10</a:t>
+              <a:t>2026-04-16</a:t>
             </a:fld>
             <a:endParaRPr lang="zh-CN" altLang="en-US"/>
           </a:p>
@@ -1713,7 +1714,7 @@
           <a:p>
             <a:fld id="{798C2E43-9ACF-49D1-9A71-28E0B80BDA78}" type="datetimeFigureOut">
               <a:rPr lang="zh-CN" altLang="en-US" smtClean="0"/>
-              <a:t>2026-04-10</a:t>
+              <a:t>2026-04-16</a:t>
             </a:fld>
             <a:endParaRPr lang="zh-CN" altLang="en-US"/>
           </a:p>
@@ -2080,7 +2081,7 @@
           <a:p>
             <a:fld id="{798C2E43-9ACF-49D1-9A71-28E0B80BDA78}" type="datetimeFigureOut">
               <a:rPr lang="zh-CN" altLang="en-US" smtClean="0"/>
-              <a:t>2026-04-10</a:t>
+              <a:t>2026-04-16</a:t>
             </a:fld>
             <a:endParaRPr lang="zh-CN" altLang="en-US"/>
           </a:p>
@@ -2198,7 +2199,7 @@
           <a:p>
             <a:fld id="{798C2E43-9ACF-49D1-9A71-28E0B80BDA78}" type="datetimeFigureOut">
               <a:rPr lang="zh-CN" altLang="en-US" smtClean="0"/>
-              <a:t>2026-04-10</a:t>
+              <a:t>2026-04-16</a:t>
             </a:fld>
             <a:endParaRPr lang="zh-CN" altLang="en-US"/>
           </a:p>
@@ -2293,7 +2294,7 @@
           <a:p>
             <a:fld id="{798C2E43-9ACF-49D1-9A71-28E0B80BDA78}" type="datetimeFigureOut">
               <a:rPr lang="zh-CN" altLang="en-US" smtClean="0"/>
-              <a:t>2026-04-10</a:t>
+              <a:t>2026-04-16</a:t>
             </a:fld>
             <a:endParaRPr lang="zh-CN" altLang="en-US"/>
           </a:p>
@@ -2570,7 +2571,7 @@
           <a:p>
             <a:fld id="{798C2E43-9ACF-49D1-9A71-28E0B80BDA78}" type="datetimeFigureOut">
               <a:rPr lang="zh-CN" altLang="en-US" smtClean="0"/>
-              <a:t>2026-04-10</a:t>
+              <a:t>2026-04-16</a:t>
             </a:fld>
             <a:endParaRPr lang="zh-CN" altLang="en-US"/>
           </a:p>
@@ -2827,7 +2828,7 @@
           <a:p>
             <a:fld id="{798C2E43-9ACF-49D1-9A71-28E0B80BDA78}" type="datetimeFigureOut">
               <a:rPr lang="zh-CN" altLang="en-US" smtClean="0"/>
-              <a:t>2026-04-10</a:t>
+              <a:t>2026-04-16</a:t>
             </a:fld>
             <a:endParaRPr lang="zh-CN" altLang="en-US"/>
           </a:p>
@@ -3040,7 +3041,7 @@
           <a:p>
             <a:fld id="{798C2E43-9ACF-49D1-9A71-28E0B80BDA78}" type="datetimeFigureOut">
               <a:rPr lang="zh-CN" altLang="en-US" smtClean="0"/>
-              <a:t>2026-04-10</a:t>
+              <a:t>2026-04-16</a:t>
             </a:fld>
             <a:endParaRPr lang="zh-CN" altLang="en-US"/>
           </a:p>
@@ -5425,6 +5426,1322 @@
 </file>
 
 <file path=ppt/slides/slide10.xml><?xml version="1.0" encoding="utf-8"?>
+<p:sld xmlns:a="http://schemas.openxmlformats.org/drawingml/2006/main" xmlns:r="http://schemas.openxmlformats.org/officeDocument/2006/relationships" xmlns:p="http://schemas.openxmlformats.org/presentationml/2006/main">
+  <p:cSld>
+    <p:spTree>
+      <p:nvGrpSpPr>
+        <p:cNvPr id="1" name=""/>
+        <p:cNvGrpSpPr/>
+        <p:nvPr/>
+      </p:nvGrpSpPr>
+      <p:grpSpPr>
+        <a:xfrm>
+          <a:off x="0" y="0"/>
+          <a:ext cx="0" cy="0"/>
+          <a:chOff x="0" y="0"/>
+          <a:chExt cx="0" cy="0"/>
+        </a:xfrm>
+      </p:grpSpPr>
+      <p:grpSp>
+        <p:nvGrpSpPr>
+          <p:cNvPr id="2" name="组合 1">
+            <a:extLst>
+              <a:ext uri="{FF2B5EF4-FFF2-40B4-BE49-F238E27FC236}">
+                <a16:creationId xmlns:a16="http://schemas.microsoft.com/office/drawing/2014/main" id="{707FA83C-CD07-0572-38FC-7AED4AAB39F5}"/>
+              </a:ext>
+            </a:extLst>
+          </p:cNvPr>
+          <p:cNvGrpSpPr/>
+          <p:nvPr/>
+        </p:nvGrpSpPr>
+        <p:grpSpPr>
+          <a:xfrm>
+            <a:off x="1091996" y="836848"/>
+            <a:ext cx="4119942" cy="3046305"/>
+            <a:chOff x="1091996" y="836848"/>
+            <a:chExt cx="4119942" cy="3046305"/>
+          </a:xfrm>
+        </p:grpSpPr>
+        <p:grpSp>
+          <p:nvGrpSpPr>
+            <p:cNvPr id="5" name="组合 4">
+              <a:extLst>
+                <a:ext uri="{FF2B5EF4-FFF2-40B4-BE49-F238E27FC236}">
+                  <a16:creationId xmlns:a16="http://schemas.microsoft.com/office/drawing/2014/main" id="{1A89A06C-5819-BBB9-DD21-058B01F5E2E4}"/>
+                </a:ext>
+              </a:extLst>
+            </p:cNvPr>
+            <p:cNvGrpSpPr/>
+            <p:nvPr/>
+          </p:nvGrpSpPr>
+          <p:grpSpPr>
+            <a:xfrm>
+              <a:off x="1091996" y="836848"/>
+              <a:ext cx="4119942" cy="1272368"/>
+              <a:chOff x="1091996" y="763696"/>
+              <a:chExt cx="4119942" cy="1272368"/>
+            </a:xfrm>
+          </p:grpSpPr>
+          <p:sp>
+            <p:nvSpPr>
+              <p:cNvPr id="17" name="矩形: 圆角 16">
+                <a:extLst>
+                  <a:ext uri="{FF2B5EF4-FFF2-40B4-BE49-F238E27FC236}">
+                    <a16:creationId xmlns:a16="http://schemas.microsoft.com/office/drawing/2014/main" id="{2C5ABBE5-CBA3-81A1-8B92-C7ED4638FC6D}"/>
+                  </a:ext>
+                </a:extLst>
+              </p:cNvPr>
+              <p:cNvSpPr/>
+              <p:nvPr/>
+            </p:nvSpPr>
+            <p:spPr>
+              <a:xfrm>
+                <a:off x="1091996" y="763696"/>
+                <a:ext cx="4119942" cy="1272368"/>
+              </a:xfrm>
+              <a:prstGeom prst="roundRect">
+                <a:avLst>
+                  <a:gd name="adj" fmla="val 9480"/>
+                </a:avLst>
+              </a:prstGeom>
+              <a:solidFill>
+                <a:srgbClr val="DEEBF7"/>
+              </a:solidFill>
+              <a:ln w="9525">
+                <a:solidFill>
+                  <a:schemeClr val="tx1"/>
+                </a:solidFill>
+                <a:round/>
+              </a:ln>
+              <a:effectLst/>
+            </p:spPr>
+            <p:style>
+              <a:lnRef idx="2">
+                <a:schemeClr val="accent1">
+                  <a:shade val="50000"/>
+                </a:schemeClr>
+              </a:lnRef>
+              <a:fillRef idx="1">
+                <a:schemeClr val="accent1"/>
+              </a:fillRef>
+              <a:effectRef idx="0">
+                <a:schemeClr val="accent1"/>
+              </a:effectRef>
+              <a:fontRef idx="minor">
+                <a:schemeClr val="lt1"/>
+              </a:fontRef>
+            </p:style>
+            <p:txBody>
+              <a:bodyPr rtlCol="0" anchor="ctr"/>
+              <a:lstStyle/>
+              <a:p>
+                <a:pPr algn="ctr"/>
+                <a:endParaRPr lang="zh-CN" altLang="en-US" dirty="0"/>
+              </a:p>
+            </p:txBody>
+          </p:sp>
+          <p:sp>
+            <p:nvSpPr>
+              <p:cNvPr id="18" name="文本框 17">
+                <a:extLst>
+                  <a:ext uri="{FF2B5EF4-FFF2-40B4-BE49-F238E27FC236}">
+                    <a16:creationId xmlns:a16="http://schemas.microsoft.com/office/drawing/2014/main" id="{F6E189C5-0843-D22B-5012-DBD1E1E90160}"/>
+                  </a:ext>
+                </a:extLst>
+              </p:cNvPr>
+              <p:cNvSpPr txBox="1"/>
+              <p:nvPr/>
+            </p:nvSpPr>
+            <p:spPr>
+              <a:xfrm>
+                <a:off x="1131691" y="967246"/>
+                <a:ext cx="4040553" cy="1061829"/>
+              </a:xfrm>
+              <a:prstGeom prst="rect">
+                <a:avLst/>
+              </a:prstGeom>
+              <a:noFill/>
+            </p:spPr>
+            <p:txBody>
+              <a:bodyPr wrap="square" rtlCol="0">
+                <a:spAutoFit/>
+              </a:bodyPr>
+              <a:lstStyle/>
+              <a:p>
+                <a:pPr marL="171450" indent="-171450">
+                  <a:buFont typeface="Arial" panose="020B0604020202020204" pitchFamily="34" charset="0"/>
+                  <a:buChar char="•"/>
+                </a:pPr>
+                <a:r>
+                  <a:rPr lang="zh-CN" altLang="en-US" sz="900" dirty="0">
+                    <a:latin typeface="宋体" panose="02010600030101010101" pitchFamily="2" charset="-122"/>
+                    <a:ea typeface="宋体" panose="02010600030101010101" pitchFamily="2" charset="-122"/>
+                    <a:cs typeface="Arial" panose="020B0604020202020204" pitchFamily="34" charset="0"/>
+                  </a:rPr>
+                  <a:t>基本情况：</a:t>
+                </a:r>
+                <a:r>
+                  <a:rPr lang="en-US" altLang="zh-CN" sz="900" dirty="0">
+                    <a:latin typeface="宋体" panose="02010600030101010101" pitchFamily="2" charset="-122"/>
+                    <a:ea typeface="宋体" panose="02010600030101010101" pitchFamily="2" charset="-122"/>
+                    <a:cs typeface="Arial" panose="020B0604020202020204" pitchFamily="34" charset="0"/>
+                  </a:rPr>
+                  <a:t>	</a:t>
+                </a:r>
+                <a:r>
+                  <a:rPr lang="zh-CN" altLang="en-US" sz="900" dirty="0">
+                    <a:latin typeface="宋体" panose="02010600030101010101" pitchFamily="2" charset="-122"/>
+                    <a:ea typeface="宋体" panose="02010600030101010101" pitchFamily="2" charset="-122"/>
+                    <a:cs typeface="Arial" panose="020B0604020202020204" pitchFamily="34" charset="0"/>
+                  </a:rPr>
+                  <a:t>女，</a:t>
+                </a:r>
+                <a:r>
+                  <a:rPr lang="en-US" altLang="zh-CN" sz="900" dirty="0">
+                    <a:latin typeface="宋体" panose="02010600030101010101" pitchFamily="2" charset="-122"/>
+                    <a:ea typeface="宋体" panose="02010600030101010101" pitchFamily="2" charset="-122"/>
+                    <a:cs typeface="Arial" panose="020B0604020202020204" pitchFamily="34" charset="0"/>
+                  </a:rPr>
+                  <a:t>39 </a:t>
+                </a:r>
+                <a:r>
+                  <a:rPr lang="zh-CN" altLang="en-US" sz="900" dirty="0">
+                    <a:latin typeface="宋体" panose="02010600030101010101" pitchFamily="2" charset="-122"/>
+                    <a:ea typeface="宋体" panose="02010600030101010101" pitchFamily="2" charset="-122"/>
+                    <a:cs typeface="Arial" panose="020B0604020202020204" pitchFamily="34" charset="0"/>
+                  </a:rPr>
+                  <a:t>岁。</a:t>
+                </a:r>
+              </a:p>
+              <a:p>
+                <a:pPr marL="171450" indent="-171450">
+                  <a:buFont typeface="Arial" panose="020B0604020202020204" pitchFamily="34" charset="0"/>
+                  <a:buChar char="•"/>
+                </a:pPr>
+                <a:r>
+                  <a:rPr lang="zh-CN" altLang="en-US" sz="900" dirty="0">
+                    <a:latin typeface="宋体" panose="02010600030101010101" pitchFamily="2" charset="-122"/>
+                    <a:ea typeface="宋体" panose="02010600030101010101" pitchFamily="2" charset="-122"/>
+                    <a:cs typeface="Arial" panose="020B0604020202020204" pitchFamily="34" charset="0"/>
+                  </a:rPr>
+                  <a:t>主诉：</a:t>
+                </a:r>
+                <a:r>
+                  <a:rPr lang="en-US" altLang="zh-CN" sz="900" dirty="0">
+                    <a:latin typeface="宋体" panose="02010600030101010101" pitchFamily="2" charset="-122"/>
+                    <a:ea typeface="宋体" panose="02010600030101010101" pitchFamily="2" charset="-122"/>
+                    <a:cs typeface="Arial" panose="020B0604020202020204" pitchFamily="34" charset="0"/>
+                  </a:rPr>
+                  <a:t>	</a:t>
+                </a:r>
+                <a:r>
+                  <a:rPr lang="zh-CN" altLang="en-US" sz="900" dirty="0">
+                    <a:latin typeface="宋体" panose="02010600030101010101" pitchFamily="2" charset="-122"/>
+                    <a:ea typeface="宋体" panose="02010600030101010101" pitchFamily="2" charset="-122"/>
+                    <a:cs typeface="Arial" panose="020B0604020202020204" pitchFamily="34" charset="0"/>
+                  </a:rPr>
+                  <a:t>多关节疼痛 </a:t>
+                </a:r>
+                <a:r>
+                  <a:rPr lang="en-US" altLang="zh-CN" sz="900" dirty="0">
+                    <a:latin typeface="宋体" panose="02010600030101010101" pitchFamily="2" charset="-122"/>
+                    <a:ea typeface="宋体" panose="02010600030101010101" pitchFamily="2" charset="-122"/>
+                    <a:cs typeface="Arial" panose="020B0604020202020204" pitchFamily="34" charset="0"/>
+                  </a:rPr>
+                  <a:t>1 </a:t>
+                </a:r>
+                <a:r>
+                  <a:rPr lang="zh-CN" altLang="en-US" sz="900" dirty="0">
+                    <a:latin typeface="宋体" panose="02010600030101010101" pitchFamily="2" charset="-122"/>
+                    <a:ea typeface="宋体" panose="02010600030101010101" pitchFamily="2" charset="-122"/>
+                    <a:cs typeface="Arial" panose="020B0604020202020204" pitchFamily="34" charset="0"/>
+                  </a:rPr>
+                  <a:t>年余，加重 </a:t>
+                </a:r>
+                <a:r>
+                  <a:rPr lang="en-US" altLang="zh-CN" sz="900" dirty="0">
+                    <a:latin typeface="宋体" panose="02010600030101010101" pitchFamily="2" charset="-122"/>
+                    <a:ea typeface="宋体" panose="02010600030101010101" pitchFamily="2" charset="-122"/>
+                    <a:cs typeface="Arial" panose="020B0604020202020204" pitchFamily="34" charset="0"/>
+                  </a:rPr>
+                  <a:t>5 </a:t>
+                </a:r>
+                <a:r>
+                  <a:rPr lang="zh-CN" altLang="en-US" sz="900" dirty="0">
+                    <a:latin typeface="宋体" panose="02010600030101010101" pitchFamily="2" charset="-122"/>
+                    <a:ea typeface="宋体" panose="02010600030101010101" pitchFamily="2" charset="-122"/>
+                    <a:cs typeface="Arial" panose="020B0604020202020204" pitchFamily="34" charset="0"/>
+                  </a:rPr>
+                  <a:t>天。</a:t>
+                </a:r>
+              </a:p>
+              <a:p>
+                <a:pPr marL="171450" indent="-171450">
+                  <a:buFont typeface="Arial" panose="020B0604020202020204" pitchFamily="34" charset="0"/>
+                  <a:buChar char="•"/>
+                </a:pPr>
+                <a:r>
+                  <a:rPr lang="zh-CN" altLang="en-US" sz="900" dirty="0">
+                    <a:latin typeface="宋体" panose="02010600030101010101" pitchFamily="2" charset="-122"/>
+                    <a:ea typeface="宋体" panose="02010600030101010101" pitchFamily="2" charset="-122"/>
+                    <a:cs typeface="Arial" panose="020B0604020202020204" pitchFamily="34" charset="0"/>
+                  </a:rPr>
+                  <a:t>检验指标：</a:t>
+                </a:r>
+                <a:r>
+                  <a:rPr lang="en-US" altLang="zh-CN" sz="900" dirty="0">
+                    <a:latin typeface="宋体" panose="02010600030101010101" pitchFamily="2" charset="-122"/>
+                    <a:ea typeface="宋体" panose="02010600030101010101" pitchFamily="2" charset="-122"/>
+                    <a:cs typeface="Arial" panose="020B0604020202020204" pitchFamily="34" charset="0"/>
+                  </a:rPr>
+                  <a:t>	</a:t>
+                </a:r>
+                <a:r>
+                  <a:rPr lang="zh-CN" altLang="en-US" sz="900" dirty="0">
+                    <a:latin typeface="宋体" panose="02010600030101010101" pitchFamily="2" charset="-122"/>
+                    <a:ea typeface="宋体" panose="02010600030101010101" pitchFamily="2" charset="-122"/>
+                    <a:cs typeface="Arial" panose="020B0604020202020204" pitchFamily="34" charset="0"/>
+                  </a:rPr>
+                  <a:t>类风湿因子 </a:t>
+                </a:r>
+                <a:r>
+                  <a:rPr lang="en-US" altLang="zh-CN" sz="900" dirty="0">
+                    <a:latin typeface="宋体" panose="02010600030101010101" pitchFamily="2" charset="-122"/>
+                    <a:ea typeface="宋体" panose="02010600030101010101" pitchFamily="2" charset="-122"/>
+                    <a:cs typeface="Arial" panose="020B0604020202020204" pitchFamily="34" charset="0"/>
+                  </a:rPr>
+                  <a:t>(RF)</a:t>
+                </a:r>
+                <a:r>
+                  <a:rPr lang="zh-CN" altLang="en-US" sz="900" dirty="0">
+                    <a:latin typeface="宋体" panose="02010600030101010101" pitchFamily="2" charset="-122"/>
+                    <a:ea typeface="宋体" panose="02010600030101010101" pitchFamily="2" charset="-122"/>
+                    <a:cs typeface="Arial" panose="020B0604020202020204" pitchFamily="34" charset="0"/>
+                  </a:rPr>
+                  <a:t>：</a:t>
+                </a:r>
+                <a:r>
+                  <a:rPr lang="en-US" altLang="zh-CN" sz="900" dirty="0">
+                    <a:latin typeface="宋体" panose="02010600030101010101" pitchFamily="2" charset="-122"/>
+                    <a:ea typeface="宋体" panose="02010600030101010101" pitchFamily="2" charset="-122"/>
+                    <a:cs typeface="Arial" panose="020B0604020202020204" pitchFamily="34" charset="0"/>
+                  </a:rPr>
+                  <a:t>240 IU/ml (↑)</a:t>
+                </a:r>
+              </a:p>
+              <a:p>
+                <a:pPr lvl="2"/>
+                <a:r>
+                  <a:rPr lang="zh-CN" altLang="en-US" sz="900" dirty="0">
+                    <a:latin typeface="宋体" panose="02010600030101010101" pitchFamily="2" charset="-122"/>
+                    <a:ea typeface="宋体" panose="02010600030101010101" pitchFamily="2" charset="-122"/>
+                    <a:cs typeface="Arial" panose="020B0604020202020204" pitchFamily="34" charset="0"/>
+                  </a:rPr>
+                  <a:t>抗环瓜氨酸肽抗体 </a:t>
+                </a:r>
+                <a:r>
+                  <a:rPr lang="en-US" altLang="zh-CN" sz="900" dirty="0">
+                    <a:latin typeface="宋体" panose="02010600030101010101" pitchFamily="2" charset="-122"/>
+                    <a:ea typeface="宋体" panose="02010600030101010101" pitchFamily="2" charset="-122"/>
+                    <a:cs typeface="Arial" panose="020B0604020202020204" pitchFamily="34" charset="0"/>
+                  </a:rPr>
+                  <a:t>(CCP)</a:t>
+                </a:r>
+                <a:r>
+                  <a:rPr lang="zh-CN" altLang="en-US" sz="900" dirty="0">
+                    <a:latin typeface="宋体" panose="02010600030101010101" pitchFamily="2" charset="-122"/>
+                    <a:ea typeface="宋体" panose="02010600030101010101" pitchFamily="2" charset="-122"/>
+                    <a:cs typeface="Arial" panose="020B0604020202020204" pitchFamily="34" charset="0"/>
+                  </a:rPr>
+                  <a:t>：</a:t>
+                </a:r>
+                <a:r>
+                  <a:rPr lang="en-US" altLang="zh-CN" sz="900" dirty="0">
+                    <a:latin typeface="宋体" panose="02010600030101010101" pitchFamily="2" charset="-122"/>
+                    <a:ea typeface="宋体" panose="02010600030101010101" pitchFamily="2" charset="-122"/>
+                    <a:cs typeface="Arial" panose="020B0604020202020204" pitchFamily="34" charset="0"/>
+                  </a:rPr>
+                  <a:t>1834.65 RU/ml (↑)</a:t>
+                </a:r>
+              </a:p>
+              <a:p>
+                <a:pPr lvl="2"/>
+                <a:r>
+                  <a:rPr lang="zh-CN" altLang="en-US" sz="900" dirty="0">
+                    <a:latin typeface="宋体" panose="02010600030101010101" pitchFamily="2" charset="-122"/>
+                    <a:ea typeface="宋体" panose="02010600030101010101" pitchFamily="2" charset="-122"/>
+                    <a:cs typeface="Arial" panose="020B0604020202020204" pitchFamily="34" charset="0"/>
+                  </a:rPr>
+                  <a:t>抗核抗体 </a:t>
+                </a:r>
+                <a:r>
+                  <a:rPr lang="en-US" altLang="zh-CN" sz="900" dirty="0">
+                    <a:latin typeface="宋体" panose="02010600030101010101" pitchFamily="2" charset="-122"/>
+                    <a:ea typeface="宋体" panose="02010600030101010101" pitchFamily="2" charset="-122"/>
+                    <a:cs typeface="Arial" panose="020B0604020202020204" pitchFamily="34" charset="0"/>
+                  </a:rPr>
+                  <a:t>(ANA)</a:t>
+                </a:r>
+                <a:r>
+                  <a:rPr lang="zh-CN" altLang="en-US" sz="900" dirty="0">
+                    <a:latin typeface="宋体" panose="02010600030101010101" pitchFamily="2" charset="-122"/>
+                    <a:ea typeface="宋体" panose="02010600030101010101" pitchFamily="2" charset="-122"/>
+                    <a:cs typeface="Arial" panose="020B0604020202020204" pitchFamily="34" charset="0"/>
+                  </a:rPr>
+                  <a:t>：</a:t>
+                </a:r>
+                <a:r>
+                  <a:rPr lang="en-US" altLang="zh-CN" sz="900" dirty="0">
+                    <a:latin typeface="宋体" panose="02010600030101010101" pitchFamily="2" charset="-122"/>
+                    <a:ea typeface="宋体" panose="02010600030101010101" pitchFamily="2" charset="-122"/>
+                    <a:cs typeface="Arial" panose="020B0604020202020204" pitchFamily="34" charset="0"/>
+                  </a:rPr>
+                  <a:t>1:320 (↑)</a:t>
+                </a:r>
+              </a:p>
+              <a:p>
+                <a:pPr marL="171450" indent="-171450">
+                  <a:buFont typeface="Arial" panose="020B0604020202020204" pitchFamily="34" charset="0"/>
+                  <a:buChar char="•"/>
+                </a:pPr>
+                <a:r>
+                  <a:rPr lang="zh-CN" altLang="en-US" sz="900" dirty="0">
+                    <a:latin typeface="宋体" panose="02010600030101010101" pitchFamily="2" charset="-122"/>
+                    <a:ea typeface="宋体" panose="02010600030101010101" pitchFamily="2" charset="-122"/>
+                    <a:cs typeface="Arial" panose="020B0604020202020204" pitchFamily="34" charset="0"/>
+                  </a:rPr>
+                  <a:t>影像检查：</a:t>
+                </a:r>
+                <a:r>
+                  <a:rPr lang="en-US" altLang="zh-CN" sz="900" dirty="0">
+                    <a:latin typeface="宋体" panose="02010600030101010101" pitchFamily="2" charset="-122"/>
+                    <a:ea typeface="宋体" panose="02010600030101010101" pitchFamily="2" charset="-122"/>
+                    <a:cs typeface="Arial" panose="020B0604020202020204" pitchFamily="34" charset="0"/>
+                  </a:rPr>
+                  <a:t>	</a:t>
+                </a:r>
+                <a:r>
+                  <a:rPr lang="zh-CN" altLang="en-US" sz="900" dirty="0">
+                    <a:latin typeface="宋体" panose="02010600030101010101" pitchFamily="2" charset="-122"/>
+                    <a:ea typeface="宋体" panose="02010600030101010101" pitchFamily="2" charset="-122"/>
+                    <a:cs typeface="Arial" panose="020B0604020202020204" pitchFamily="34" charset="0"/>
+                  </a:rPr>
+                  <a:t>超声提示左侧乳腺实质性病灶 </a:t>
+                </a:r>
+                <a:r>
+                  <a:rPr lang="en-US" altLang="zh-CN" sz="900" dirty="0">
+                    <a:latin typeface="宋体" panose="02010600030101010101" pitchFamily="2" charset="-122"/>
+                    <a:ea typeface="宋体" panose="02010600030101010101" pitchFamily="2" charset="-122"/>
+                    <a:cs typeface="Arial" panose="020B0604020202020204" pitchFamily="34" charset="0"/>
+                  </a:rPr>
+                  <a:t>(BI-RADS 3 </a:t>
+                </a:r>
+                <a:r>
+                  <a:rPr lang="zh-CN" altLang="en-US" sz="900" dirty="0">
+                    <a:latin typeface="宋体" panose="02010600030101010101" pitchFamily="2" charset="-122"/>
+                    <a:ea typeface="宋体" panose="02010600030101010101" pitchFamily="2" charset="-122"/>
+                    <a:cs typeface="Arial" panose="020B0604020202020204" pitchFamily="34" charset="0"/>
+                  </a:rPr>
+                  <a:t>类</a:t>
+                </a:r>
+                <a:r>
+                  <a:rPr lang="en-US" altLang="zh-CN" sz="900" dirty="0">
+                    <a:latin typeface="宋体" panose="02010600030101010101" pitchFamily="2" charset="-122"/>
+                    <a:ea typeface="宋体" panose="02010600030101010101" pitchFamily="2" charset="-122"/>
+                    <a:cs typeface="Arial" panose="020B0604020202020204" pitchFamily="34" charset="0"/>
+                  </a:rPr>
+                  <a:t>)</a:t>
+                </a:r>
+                <a:r>
+                  <a:rPr lang="zh-CN" altLang="en-US" sz="900" dirty="0">
+                    <a:latin typeface="宋体" panose="02010600030101010101" pitchFamily="2" charset="-122"/>
+                    <a:ea typeface="宋体" panose="02010600030101010101" pitchFamily="2" charset="-122"/>
+                    <a:cs typeface="Arial" panose="020B0604020202020204" pitchFamily="34" charset="0"/>
+                  </a:rPr>
+                  <a:t>、肝囊肿。</a:t>
+                </a:r>
+                <a:endParaRPr lang="en-US" altLang="zh-CN" sz="900" dirty="0">
+                  <a:latin typeface="宋体" panose="02010600030101010101" pitchFamily="2" charset="-122"/>
+                  <a:ea typeface="宋体" panose="02010600030101010101" pitchFamily="2" charset="-122"/>
+                  <a:cs typeface="Arial" panose="020B0604020202020204" pitchFamily="34" charset="0"/>
+                </a:endParaRPr>
+              </a:p>
+              <a:p>
+                <a:pPr lvl="3"/>
+                <a:r>
+                  <a:rPr lang="en-US" altLang="zh-CN" sz="900" dirty="0">
+                    <a:latin typeface="宋体" panose="02010600030101010101" pitchFamily="2" charset="-122"/>
+                    <a:ea typeface="宋体" panose="02010600030101010101" pitchFamily="2" charset="-122"/>
+                    <a:cs typeface="Arial" panose="020B0604020202020204" pitchFamily="34" charset="0"/>
+                  </a:rPr>
+                  <a:t>	……</a:t>
+                </a:r>
+                <a:endParaRPr lang="zh-CN" altLang="en-US" sz="900" dirty="0">
+                  <a:latin typeface="宋体" panose="02010600030101010101" pitchFamily="2" charset="-122"/>
+                  <a:ea typeface="宋体" panose="02010600030101010101" pitchFamily="2" charset="-122"/>
+                  <a:cs typeface="Arial" panose="020B0604020202020204" pitchFamily="34" charset="0"/>
+                </a:endParaRPr>
+              </a:p>
+            </p:txBody>
+          </p:sp>
+          <p:sp>
+            <p:nvSpPr>
+              <p:cNvPr id="40" name="文本框 39">
+                <a:extLst>
+                  <a:ext uri="{FF2B5EF4-FFF2-40B4-BE49-F238E27FC236}">
+                    <a16:creationId xmlns:a16="http://schemas.microsoft.com/office/drawing/2014/main" id="{AD04579C-9EC3-15F2-F40E-4BDC9D68F4A8}"/>
+                  </a:ext>
+                </a:extLst>
+              </p:cNvPr>
+              <p:cNvSpPr txBox="1"/>
+              <p:nvPr/>
+            </p:nvSpPr>
+            <p:spPr>
+              <a:xfrm>
+                <a:off x="2404453" y="763696"/>
+                <a:ext cx="1495029" cy="246221"/>
+              </a:xfrm>
+              <a:prstGeom prst="rect">
+                <a:avLst/>
+              </a:prstGeom>
+              <a:noFill/>
+            </p:spPr>
+            <p:txBody>
+              <a:bodyPr wrap="square" rtlCol="0">
+                <a:spAutoFit/>
+              </a:bodyPr>
+              <a:lstStyle/>
+              <a:p>
+                <a:pPr algn="ctr"/>
+                <a:r>
+                  <a:rPr lang="zh-CN" altLang="en-US" sz="1000" b="1" dirty="0">
+                    <a:latin typeface="宋体" panose="02010600030101010101" pitchFamily="2" charset="-122"/>
+                    <a:ea typeface="宋体" panose="02010600030101010101" pitchFamily="2" charset="-122"/>
+                    <a:cs typeface="Arial" panose="020B0604020202020204" pitchFamily="34" charset="0"/>
+                  </a:rPr>
+                  <a:t>病史信息</a:t>
+                </a:r>
+                <a:endParaRPr lang="zh-CN" altLang="en-US" sz="800" b="1" dirty="0">
+                  <a:latin typeface="宋体" panose="02010600030101010101" pitchFamily="2" charset="-122"/>
+                  <a:ea typeface="宋体" panose="02010600030101010101" pitchFamily="2" charset="-122"/>
+                  <a:cs typeface="Arial" panose="020B0604020202020204" pitchFamily="34" charset="0"/>
+                </a:endParaRPr>
+              </a:p>
+            </p:txBody>
+          </p:sp>
+        </p:grpSp>
+        <p:grpSp>
+          <p:nvGrpSpPr>
+            <p:cNvPr id="6" name="组合 5">
+              <a:extLst>
+                <a:ext uri="{FF2B5EF4-FFF2-40B4-BE49-F238E27FC236}">
+                  <a16:creationId xmlns:a16="http://schemas.microsoft.com/office/drawing/2014/main" id="{08BDCE53-8FE5-3EB0-A4A9-7D4CBB2735BD}"/>
+                </a:ext>
+              </a:extLst>
+            </p:cNvPr>
+            <p:cNvGrpSpPr/>
+            <p:nvPr/>
+          </p:nvGrpSpPr>
+          <p:grpSpPr>
+            <a:xfrm>
+              <a:off x="1091996" y="2166592"/>
+              <a:ext cx="4119942" cy="706340"/>
+              <a:chOff x="1091996" y="2166592"/>
+              <a:chExt cx="4119942" cy="706340"/>
+            </a:xfrm>
+          </p:grpSpPr>
+          <p:sp>
+            <p:nvSpPr>
+              <p:cNvPr id="45" name="矩形: 圆角 44">
+                <a:extLst>
+                  <a:ext uri="{FF2B5EF4-FFF2-40B4-BE49-F238E27FC236}">
+                    <a16:creationId xmlns:a16="http://schemas.microsoft.com/office/drawing/2014/main" id="{71168B60-FFBC-7888-96A2-4F0268BF4564}"/>
+                  </a:ext>
+                </a:extLst>
+              </p:cNvPr>
+              <p:cNvSpPr/>
+              <p:nvPr/>
+            </p:nvSpPr>
+            <p:spPr>
+              <a:xfrm>
+                <a:off x="1091996" y="2166592"/>
+                <a:ext cx="4119942" cy="706340"/>
+              </a:xfrm>
+              <a:prstGeom prst="roundRect">
+                <a:avLst>
+                  <a:gd name="adj" fmla="val 12067"/>
+                </a:avLst>
+              </a:prstGeom>
+              <a:solidFill>
+                <a:srgbClr val="E2F0D9"/>
+              </a:solidFill>
+              <a:ln w="9525">
+                <a:solidFill>
+                  <a:schemeClr val="tx1"/>
+                </a:solidFill>
+                <a:round/>
+              </a:ln>
+              <a:effectLst/>
+            </p:spPr>
+            <p:style>
+              <a:lnRef idx="2">
+                <a:schemeClr val="accent1">
+                  <a:shade val="50000"/>
+                </a:schemeClr>
+              </a:lnRef>
+              <a:fillRef idx="1">
+                <a:schemeClr val="accent1"/>
+              </a:fillRef>
+              <a:effectRef idx="0">
+                <a:schemeClr val="accent1"/>
+              </a:effectRef>
+              <a:fontRef idx="minor">
+                <a:schemeClr val="lt1"/>
+              </a:fontRef>
+            </p:style>
+            <p:txBody>
+              <a:bodyPr rtlCol="0" anchor="ctr"/>
+              <a:lstStyle/>
+              <a:p>
+                <a:pPr algn="ctr"/>
+                <a:endParaRPr lang="zh-CN" altLang="en-US" dirty="0"/>
+              </a:p>
+            </p:txBody>
+          </p:sp>
+          <p:sp>
+            <p:nvSpPr>
+              <p:cNvPr id="46" name="文本框 45">
+                <a:extLst>
+                  <a:ext uri="{FF2B5EF4-FFF2-40B4-BE49-F238E27FC236}">
+                    <a16:creationId xmlns:a16="http://schemas.microsoft.com/office/drawing/2014/main" id="{5C1C1468-AD44-2F7E-1DC5-820C6482EA2A}"/>
+                  </a:ext>
+                </a:extLst>
+              </p:cNvPr>
+              <p:cNvSpPr txBox="1"/>
+              <p:nvPr/>
+            </p:nvSpPr>
+            <p:spPr>
+              <a:xfrm>
+                <a:off x="1131691" y="2346089"/>
+                <a:ext cx="4040553" cy="282201"/>
+              </a:xfrm>
+              <a:prstGeom prst="rect">
+                <a:avLst/>
+              </a:prstGeom>
+              <a:solidFill>
+                <a:srgbClr val="E2F0D9"/>
+              </a:solidFill>
+            </p:spPr>
+            <p:txBody>
+              <a:bodyPr wrap="square" rtlCol="0">
+                <a:spAutoFit/>
+              </a:bodyPr>
+              <a:lstStyle/>
+              <a:p>
+                <a:r>
+                  <a:rPr lang="zh-CN" altLang="en-US" sz="900" dirty="0">
+                    <a:latin typeface="宋体" panose="02010600030101010101" pitchFamily="2" charset="-122"/>
+                    <a:ea typeface="宋体" panose="02010600030101010101" pitchFamily="2" charset="-122"/>
+                    <a:cs typeface="Arial" panose="020B0604020202020204" pitchFamily="34" charset="0"/>
+                  </a:rPr>
+                  <a:t>患者因多关节疼痛入院，辅助检查提示炎性指标显著升高且自身抗体强阳性。入院后确诊为类风湿关节炎，经艾拉莫德联合甲氨蝶呤等免疫抑制方案治疗后，关节疼痛症状明显缓解，炎性指标下降，病情平稳，准予出院。</a:t>
+                </a:r>
+              </a:p>
+            </p:txBody>
+          </p:sp>
+          <p:sp>
+            <p:nvSpPr>
+              <p:cNvPr id="48" name="文本框 47">
+                <a:extLst>
+                  <a:ext uri="{FF2B5EF4-FFF2-40B4-BE49-F238E27FC236}">
+                    <a16:creationId xmlns:a16="http://schemas.microsoft.com/office/drawing/2014/main" id="{49C86424-3AC8-C27F-BF66-1B7142E30026}"/>
+                  </a:ext>
+                </a:extLst>
+              </p:cNvPr>
+              <p:cNvSpPr txBox="1"/>
+              <p:nvPr/>
+            </p:nvSpPr>
+            <p:spPr>
+              <a:xfrm>
+                <a:off x="2404453" y="2166592"/>
+                <a:ext cx="1495029" cy="136824"/>
+              </a:xfrm>
+              <a:prstGeom prst="rect">
+                <a:avLst/>
+              </a:prstGeom>
+              <a:noFill/>
+            </p:spPr>
+            <p:txBody>
+              <a:bodyPr wrap="square" rtlCol="0">
+                <a:spAutoFit/>
+              </a:bodyPr>
+              <a:lstStyle/>
+              <a:p>
+                <a:pPr algn="ctr"/>
+                <a:r>
+                  <a:rPr lang="zh-CN" altLang="en-US" sz="1000" b="1" dirty="0">
+                    <a:latin typeface="宋体" panose="02010600030101010101" pitchFamily="2" charset="-122"/>
+                    <a:ea typeface="宋体" panose="02010600030101010101" pitchFamily="2" charset="-122"/>
+                    <a:cs typeface="Arial" panose="020B0604020202020204" pitchFamily="34" charset="0"/>
+                  </a:rPr>
+                  <a:t>出院小结</a:t>
+                </a:r>
+                <a:endParaRPr lang="zh-CN" altLang="en-US" sz="800" b="1" dirty="0">
+                  <a:latin typeface="宋体" panose="02010600030101010101" pitchFamily="2" charset="-122"/>
+                  <a:ea typeface="宋体" panose="02010600030101010101" pitchFamily="2" charset="-122"/>
+                  <a:cs typeface="Arial" panose="020B0604020202020204" pitchFamily="34" charset="0"/>
+                </a:endParaRPr>
+              </a:p>
+            </p:txBody>
+          </p:sp>
+        </p:grpSp>
+        <p:grpSp>
+          <p:nvGrpSpPr>
+            <p:cNvPr id="10" name="组合 9">
+              <a:extLst>
+                <a:ext uri="{FF2B5EF4-FFF2-40B4-BE49-F238E27FC236}">
+                  <a16:creationId xmlns:a16="http://schemas.microsoft.com/office/drawing/2014/main" id="{3B490BD1-2A2F-C110-7CBF-92F6A22FD90A}"/>
+                </a:ext>
+              </a:extLst>
+            </p:cNvPr>
+            <p:cNvGrpSpPr/>
+            <p:nvPr/>
+          </p:nvGrpSpPr>
+          <p:grpSpPr>
+            <a:xfrm>
+              <a:off x="1091996" y="2921738"/>
+              <a:ext cx="4119942" cy="961415"/>
+              <a:chOff x="1091996" y="2952218"/>
+              <a:chExt cx="4119942" cy="961415"/>
+            </a:xfrm>
+          </p:grpSpPr>
+          <p:grpSp>
+            <p:nvGrpSpPr>
+              <p:cNvPr id="8" name="组合 7">
+                <a:extLst>
+                  <a:ext uri="{FF2B5EF4-FFF2-40B4-BE49-F238E27FC236}">
+                    <a16:creationId xmlns:a16="http://schemas.microsoft.com/office/drawing/2014/main" id="{A3E73C34-1578-A63E-444E-A2DE334F846E}"/>
+                  </a:ext>
+                </a:extLst>
+              </p:cNvPr>
+              <p:cNvGrpSpPr/>
+              <p:nvPr/>
+            </p:nvGrpSpPr>
+            <p:grpSpPr>
+              <a:xfrm>
+                <a:off x="1091996" y="2952218"/>
+                <a:ext cx="2035252" cy="961414"/>
+                <a:chOff x="1091996" y="2952218"/>
+                <a:chExt cx="2035252" cy="961414"/>
+              </a:xfrm>
+            </p:grpSpPr>
+            <p:sp>
+              <p:nvSpPr>
+                <p:cNvPr id="56" name="矩形: 圆角 55">
+                  <a:extLst>
+                    <a:ext uri="{FF2B5EF4-FFF2-40B4-BE49-F238E27FC236}">
+                      <a16:creationId xmlns:a16="http://schemas.microsoft.com/office/drawing/2014/main" id="{989F5888-AC34-3D69-2BDB-5F4C033BF9DA}"/>
+                    </a:ext>
+                  </a:extLst>
+                </p:cNvPr>
+                <p:cNvSpPr/>
+                <p:nvPr/>
+              </p:nvSpPr>
+              <p:spPr>
+                <a:xfrm>
+                  <a:off x="1091996" y="2952218"/>
+                  <a:ext cx="2035252" cy="961414"/>
+                </a:xfrm>
+                <a:prstGeom prst="roundRect">
+                  <a:avLst/>
+                </a:prstGeom>
+                <a:solidFill>
+                  <a:srgbClr val="FCEADC"/>
+                </a:solidFill>
+                <a:ln w="9525">
+                  <a:solidFill>
+                    <a:schemeClr val="tx1"/>
+                  </a:solidFill>
+                  <a:round/>
+                </a:ln>
+                <a:effectLst/>
+              </p:spPr>
+              <p:style>
+                <a:lnRef idx="2">
+                  <a:schemeClr val="accent1">
+                    <a:shade val="50000"/>
+                  </a:schemeClr>
+                </a:lnRef>
+                <a:fillRef idx="1">
+                  <a:schemeClr val="accent1"/>
+                </a:fillRef>
+                <a:effectRef idx="0">
+                  <a:schemeClr val="accent1"/>
+                </a:effectRef>
+                <a:fontRef idx="minor">
+                  <a:schemeClr val="lt1"/>
+                </a:fontRef>
+              </p:style>
+              <p:txBody>
+                <a:bodyPr rtlCol="0" anchor="ctr"/>
+                <a:lstStyle/>
+                <a:p>
+                  <a:pPr algn="ctr"/>
+                  <a:endParaRPr lang="zh-CN" altLang="en-US" dirty="0"/>
+                </a:p>
+              </p:txBody>
+            </p:sp>
+            <p:sp>
+              <p:nvSpPr>
+                <p:cNvPr id="57" name="文本框 56">
+                  <a:extLst>
+                    <a:ext uri="{FF2B5EF4-FFF2-40B4-BE49-F238E27FC236}">
+                      <a16:creationId xmlns:a16="http://schemas.microsoft.com/office/drawing/2014/main" id="{6D093932-AE00-4892-F27D-C53B6D04601D}"/>
+                    </a:ext>
+                  </a:extLst>
+                </p:cNvPr>
+                <p:cNvSpPr txBox="1"/>
+                <p:nvPr/>
+              </p:nvSpPr>
+              <p:spPr>
+                <a:xfrm>
+                  <a:off x="1111605" y="3176155"/>
+                  <a:ext cx="1996034" cy="646331"/>
+                </a:xfrm>
+                <a:prstGeom prst="rect">
+                  <a:avLst/>
+                </a:prstGeom>
+                <a:noFill/>
+              </p:spPr>
+              <p:txBody>
+                <a:bodyPr wrap="square" rtlCol="0">
+                  <a:spAutoFit/>
+                </a:bodyPr>
+                <a:lstStyle/>
+                <a:p>
+                  <a:pPr marL="171450" indent="-171450">
+                    <a:buFont typeface="Arial" panose="020B0604020202020204" pitchFamily="34" charset="0"/>
+                    <a:buChar char="•"/>
+                  </a:pPr>
+                  <a:r>
+                    <a:rPr lang="zh-CN" altLang="en-US" sz="900" dirty="0">
+                      <a:latin typeface="宋体" panose="02010600030101010101" pitchFamily="2" charset="-122"/>
+                      <a:ea typeface="宋体" panose="02010600030101010101" pitchFamily="2" charset="-122"/>
+                      <a:cs typeface="Arial" panose="020B0604020202020204" pitchFamily="34" charset="0"/>
+                    </a:rPr>
+                    <a:t>类风湿性关节炎 </a:t>
+                  </a:r>
+                  <a:r>
+                    <a:rPr lang="en-US" altLang="zh-CN" sz="900" dirty="0">
+                      <a:latin typeface="宋体" panose="02010600030101010101" pitchFamily="2" charset="-122"/>
+                      <a:ea typeface="宋体" panose="02010600030101010101" pitchFamily="2" charset="-122"/>
+                      <a:cs typeface="Arial" panose="020B0604020202020204" pitchFamily="34" charset="0"/>
+                    </a:rPr>
+                    <a:t>(RA)</a:t>
+                  </a:r>
+                </a:p>
+                <a:p>
+                  <a:pPr marL="171450" indent="-171450">
+                    <a:buFont typeface="Arial" panose="020B0604020202020204" pitchFamily="34" charset="0"/>
+                    <a:buChar char="•"/>
+                  </a:pPr>
+                  <a:r>
+                    <a:rPr lang="zh-CN" altLang="en-US" sz="900" dirty="0">
+                      <a:latin typeface="宋体" panose="02010600030101010101" pitchFamily="2" charset="-122"/>
+                      <a:ea typeface="宋体" panose="02010600030101010101" pitchFamily="2" charset="-122"/>
+                      <a:cs typeface="Arial" panose="020B0604020202020204" pitchFamily="34" charset="0"/>
+                    </a:rPr>
+                    <a:t>乳腺增生 </a:t>
+                  </a:r>
+                  <a:r>
+                    <a:rPr lang="en-US" altLang="zh-CN" sz="900" dirty="0">
+                      <a:latin typeface="宋体" panose="02010600030101010101" pitchFamily="2" charset="-122"/>
+                      <a:ea typeface="宋体" panose="02010600030101010101" pitchFamily="2" charset="-122"/>
+                      <a:cs typeface="Arial" panose="020B0604020202020204" pitchFamily="34" charset="0"/>
+                    </a:rPr>
+                    <a:t>(BI-RADS 3 </a:t>
+                  </a:r>
+                  <a:r>
+                    <a:rPr lang="zh-CN" altLang="en-US" sz="900" dirty="0">
+                      <a:latin typeface="宋体" panose="02010600030101010101" pitchFamily="2" charset="-122"/>
+                      <a:ea typeface="宋体" panose="02010600030101010101" pitchFamily="2" charset="-122"/>
+                      <a:cs typeface="Arial" panose="020B0604020202020204" pitchFamily="34" charset="0"/>
+                    </a:rPr>
+                    <a:t>类</a:t>
+                  </a:r>
+                  <a:r>
+                    <a:rPr lang="en-US" altLang="zh-CN" sz="900" dirty="0">
+                      <a:latin typeface="宋体" panose="02010600030101010101" pitchFamily="2" charset="-122"/>
+                      <a:ea typeface="宋体" panose="02010600030101010101" pitchFamily="2" charset="-122"/>
+                      <a:cs typeface="Arial" panose="020B0604020202020204" pitchFamily="34" charset="0"/>
+                    </a:rPr>
+                    <a:t>)</a:t>
+                  </a:r>
+                </a:p>
+                <a:p>
+                  <a:pPr marL="171450" indent="-171450">
+                    <a:buFont typeface="Arial" panose="020B0604020202020204" pitchFamily="34" charset="0"/>
+                    <a:buChar char="•"/>
+                  </a:pPr>
+                  <a:r>
+                    <a:rPr lang="zh-CN" altLang="en-US" sz="900" dirty="0">
+                      <a:latin typeface="宋体" panose="02010600030101010101" pitchFamily="2" charset="-122"/>
+                      <a:ea typeface="宋体" panose="02010600030101010101" pitchFamily="2" charset="-122"/>
+                      <a:cs typeface="Arial" panose="020B0604020202020204" pitchFamily="34" charset="0"/>
+                    </a:rPr>
+                    <a:t>肝囊肿</a:t>
+                  </a:r>
+                </a:p>
+                <a:p>
+                  <a:pPr marL="171450" indent="-171450">
+                    <a:buFont typeface="Arial" panose="020B0604020202020204" pitchFamily="34" charset="0"/>
+                    <a:buChar char="•"/>
+                  </a:pPr>
+                  <a:r>
+                    <a:rPr lang="zh-CN" altLang="en-US" sz="900" dirty="0">
+                      <a:latin typeface="宋体" panose="02010600030101010101" pitchFamily="2" charset="-122"/>
+                      <a:ea typeface="宋体" panose="02010600030101010101" pitchFamily="2" charset="-122"/>
+                      <a:cs typeface="Arial" panose="020B0604020202020204" pitchFamily="34" charset="0"/>
+                    </a:rPr>
+                    <a:t>泌尿道感染</a:t>
+                  </a:r>
+                </a:p>
+              </p:txBody>
+            </p:sp>
+            <p:sp>
+              <p:nvSpPr>
+                <p:cNvPr id="58" name="文本框 57">
+                  <a:extLst>
+                    <a:ext uri="{FF2B5EF4-FFF2-40B4-BE49-F238E27FC236}">
+                      <a16:creationId xmlns:a16="http://schemas.microsoft.com/office/drawing/2014/main" id="{05ADC8FD-1CF0-1E1F-BF13-8DAE59F1BC10}"/>
+                    </a:ext>
+                  </a:extLst>
+                </p:cNvPr>
+                <p:cNvSpPr txBox="1"/>
+                <p:nvPr/>
+              </p:nvSpPr>
+              <p:spPr>
+                <a:xfrm>
+                  <a:off x="1740350" y="2984901"/>
+                  <a:ext cx="738545" cy="165454"/>
+                </a:xfrm>
+                <a:prstGeom prst="rect">
+                  <a:avLst/>
+                </a:prstGeom>
+                <a:solidFill>
+                  <a:srgbClr val="FCEADC"/>
+                </a:solidFill>
+              </p:spPr>
+              <p:txBody>
+                <a:bodyPr wrap="square" rtlCol="0">
+                  <a:spAutoFit/>
+                </a:bodyPr>
+                <a:lstStyle/>
+                <a:p>
+                  <a:pPr algn="ctr"/>
+                  <a:r>
+                    <a:rPr lang="zh-CN" altLang="en-US" sz="1000" b="1" dirty="0">
+                      <a:latin typeface="宋体" panose="02010600030101010101" pitchFamily="2" charset="-122"/>
+                      <a:ea typeface="宋体" panose="02010600030101010101" pitchFamily="2" charset="-122"/>
+                      <a:cs typeface="Arial" panose="020B0604020202020204" pitchFamily="34" charset="0"/>
+                    </a:rPr>
+                    <a:t>出院诊断</a:t>
+                  </a:r>
+                  <a:endParaRPr lang="zh-CN" altLang="en-US" sz="800" b="1" dirty="0">
+                    <a:latin typeface="宋体" panose="02010600030101010101" pitchFamily="2" charset="-122"/>
+                    <a:ea typeface="宋体" panose="02010600030101010101" pitchFamily="2" charset="-122"/>
+                    <a:cs typeface="Arial" panose="020B0604020202020204" pitchFamily="34" charset="0"/>
+                  </a:endParaRPr>
+                </a:p>
+              </p:txBody>
+            </p:sp>
+          </p:grpSp>
+          <p:grpSp>
+            <p:nvGrpSpPr>
+              <p:cNvPr id="9" name="组合 8">
+                <a:extLst>
+                  <a:ext uri="{FF2B5EF4-FFF2-40B4-BE49-F238E27FC236}">
+                    <a16:creationId xmlns:a16="http://schemas.microsoft.com/office/drawing/2014/main" id="{843754B9-A301-C958-E859-00EE01338898}"/>
+                  </a:ext>
+                </a:extLst>
+              </p:cNvPr>
+              <p:cNvGrpSpPr/>
+              <p:nvPr/>
+            </p:nvGrpSpPr>
+            <p:grpSpPr>
+              <a:xfrm>
+                <a:off x="3176686" y="2952218"/>
+                <a:ext cx="2035252" cy="961415"/>
+                <a:chOff x="3176686" y="2952218"/>
+                <a:chExt cx="2035252" cy="961415"/>
+              </a:xfrm>
+            </p:grpSpPr>
+            <p:sp>
+              <p:nvSpPr>
+                <p:cNvPr id="61" name="矩形: 圆角 60">
+                  <a:extLst>
+                    <a:ext uri="{FF2B5EF4-FFF2-40B4-BE49-F238E27FC236}">
+                      <a16:creationId xmlns:a16="http://schemas.microsoft.com/office/drawing/2014/main" id="{0081621C-FF3A-3757-F127-14701033C9C5}"/>
+                    </a:ext>
+                  </a:extLst>
+                </p:cNvPr>
+                <p:cNvSpPr/>
+                <p:nvPr/>
+              </p:nvSpPr>
+              <p:spPr>
+                <a:xfrm>
+                  <a:off x="3176686" y="2952218"/>
+                  <a:ext cx="2035252" cy="961415"/>
+                </a:xfrm>
+                <a:prstGeom prst="roundRect">
+                  <a:avLst/>
+                </a:prstGeom>
+                <a:solidFill>
+                  <a:srgbClr val="F2F2F2"/>
+                </a:solidFill>
+                <a:ln w="9525">
+                  <a:solidFill>
+                    <a:schemeClr val="tx1"/>
+                  </a:solidFill>
+                  <a:round/>
+                </a:ln>
+                <a:effectLst/>
+              </p:spPr>
+              <p:style>
+                <a:lnRef idx="2">
+                  <a:schemeClr val="accent1">
+                    <a:shade val="50000"/>
+                  </a:schemeClr>
+                </a:lnRef>
+                <a:fillRef idx="1">
+                  <a:schemeClr val="accent1"/>
+                </a:fillRef>
+                <a:effectRef idx="0">
+                  <a:schemeClr val="accent1"/>
+                </a:effectRef>
+                <a:fontRef idx="minor">
+                  <a:schemeClr val="lt1"/>
+                </a:fontRef>
+              </p:style>
+              <p:txBody>
+                <a:bodyPr rtlCol="0" anchor="ctr"/>
+                <a:lstStyle/>
+                <a:p>
+                  <a:pPr algn="ctr"/>
+                  <a:endParaRPr lang="zh-CN" altLang="en-US" dirty="0"/>
+                </a:p>
+              </p:txBody>
+            </p:sp>
+            <p:sp>
+              <p:nvSpPr>
+                <p:cNvPr id="62" name="文本框 61">
+                  <a:extLst>
+                    <a:ext uri="{FF2B5EF4-FFF2-40B4-BE49-F238E27FC236}">
+                      <a16:creationId xmlns:a16="http://schemas.microsoft.com/office/drawing/2014/main" id="{C3F59FAE-4D18-2B22-122B-2B9D1E58E781}"/>
+                    </a:ext>
+                  </a:extLst>
+                </p:cNvPr>
+                <p:cNvSpPr txBox="1"/>
+                <p:nvPr/>
+              </p:nvSpPr>
+              <p:spPr>
+                <a:xfrm>
+                  <a:off x="3196295" y="3176155"/>
+                  <a:ext cx="1996034" cy="646331"/>
+                </a:xfrm>
+                <a:prstGeom prst="rect">
+                  <a:avLst/>
+                </a:prstGeom>
+                <a:solidFill>
+                  <a:srgbClr val="F2F2F2"/>
+                </a:solidFill>
+              </p:spPr>
+              <p:txBody>
+                <a:bodyPr wrap="square" rtlCol="0">
+                  <a:spAutoFit/>
+                </a:bodyPr>
+                <a:lstStyle/>
+                <a:p>
+                  <a:pPr marL="171450" indent="-171450">
+                    <a:buFont typeface="Arial" panose="020B0604020202020204" pitchFamily="34" charset="0"/>
+                    <a:buChar char="•"/>
+                  </a:pPr>
+                  <a:r>
+                    <a:rPr lang="zh-CN" altLang="en-US" sz="900" dirty="0">
+                      <a:latin typeface="宋体" panose="02010600030101010101" pitchFamily="2" charset="-122"/>
+                      <a:ea typeface="宋体" panose="02010600030101010101" pitchFamily="2" charset="-122"/>
+                      <a:cs typeface="Arial" panose="020B0604020202020204" pitchFamily="34" charset="0"/>
+                    </a:rPr>
+                    <a:t>甲氨蝶呤片：</a:t>
+                  </a:r>
+                  <a:r>
+                    <a:rPr lang="en-US" altLang="zh-CN" sz="900" dirty="0">
+                      <a:latin typeface="宋体" panose="02010600030101010101" pitchFamily="2" charset="-122"/>
+                      <a:ea typeface="宋体" panose="02010600030101010101" pitchFamily="2" charset="-122"/>
+                      <a:cs typeface="Arial" panose="020B0604020202020204" pitchFamily="34" charset="0"/>
+                    </a:rPr>
+                    <a:t>10mg</a:t>
+                  </a:r>
+                  <a:r>
+                    <a:rPr lang="zh-CN" altLang="en-US" sz="900" dirty="0">
+                      <a:latin typeface="宋体" panose="02010600030101010101" pitchFamily="2" charset="-122"/>
+                      <a:ea typeface="宋体" panose="02010600030101010101" pitchFamily="2" charset="-122"/>
+                      <a:cs typeface="Arial" panose="020B0604020202020204" pitchFamily="34" charset="0"/>
+                    </a:rPr>
+                    <a:t>，每周 </a:t>
+                  </a:r>
+                  <a:r>
+                    <a:rPr lang="en-US" altLang="zh-CN" sz="900" dirty="0">
+                      <a:latin typeface="宋体" panose="02010600030101010101" pitchFamily="2" charset="-122"/>
+                      <a:ea typeface="宋体" panose="02010600030101010101" pitchFamily="2" charset="-122"/>
+                      <a:cs typeface="Arial" panose="020B0604020202020204" pitchFamily="34" charset="0"/>
+                    </a:rPr>
+                    <a:t>1 </a:t>
+                  </a:r>
+                  <a:r>
+                    <a:rPr lang="zh-CN" altLang="en-US" sz="900" dirty="0">
+                      <a:latin typeface="宋体" panose="02010600030101010101" pitchFamily="2" charset="-122"/>
+                      <a:ea typeface="宋体" panose="02010600030101010101" pitchFamily="2" charset="-122"/>
+                      <a:cs typeface="Arial" panose="020B0604020202020204" pitchFamily="34" charset="0"/>
+                    </a:rPr>
+                    <a:t>次 </a:t>
+                  </a:r>
+                  <a:endParaRPr lang="en-US" altLang="zh-CN" sz="900" dirty="0">
+                    <a:latin typeface="宋体" panose="02010600030101010101" pitchFamily="2" charset="-122"/>
+                    <a:ea typeface="宋体" panose="02010600030101010101" pitchFamily="2" charset="-122"/>
+                    <a:cs typeface="Arial" panose="020B0604020202020204" pitchFamily="34" charset="0"/>
+                  </a:endParaRPr>
+                </a:p>
+                <a:p>
+                  <a:pPr marL="171450" indent="-171450">
+                    <a:buFont typeface="Arial" panose="020B0604020202020204" pitchFamily="34" charset="0"/>
+                    <a:buChar char="•"/>
+                  </a:pPr>
+                  <a:r>
+                    <a:rPr lang="zh-CN" altLang="en-US" sz="900" dirty="0">
+                      <a:latin typeface="宋体" panose="02010600030101010101" pitchFamily="2" charset="-122"/>
+                      <a:ea typeface="宋体" panose="02010600030101010101" pitchFamily="2" charset="-122"/>
+                      <a:cs typeface="Arial" panose="020B0604020202020204" pitchFamily="34" charset="0"/>
+                    </a:rPr>
+                    <a:t>艾拉莫德片：</a:t>
+                  </a:r>
+                  <a:r>
+                    <a:rPr lang="en-US" altLang="zh-CN" sz="900" dirty="0">
+                      <a:latin typeface="宋体" panose="02010600030101010101" pitchFamily="2" charset="-122"/>
+                      <a:ea typeface="宋体" panose="02010600030101010101" pitchFamily="2" charset="-122"/>
+                      <a:cs typeface="Arial" panose="020B0604020202020204" pitchFamily="34" charset="0"/>
+                    </a:rPr>
+                    <a:t>25mg</a:t>
+                  </a:r>
+                  <a:r>
+                    <a:rPr lang="zh-CN" altLang="en-US" sz="900" dirty="0">
+                      <a:latin typeface="宋体" panose="02010600030101010101" pitchFamily="2" charset="-122"/>
+                      <a:ea typeface="宋体" panose="02010600030101010101" pitchFamily="2" charset="-122"/>
+                      <a:cs typeface="Arial" panose="020B0604020202020204" pitchFamily="34" charset="0"/>
+                    </a:rPr>
+                    <a:t>，每日 </a:t>
+                  </a:r>
+                  <a:r>
+                    <a:rPr lang="en-US" altLang="zh-CN" sz="900" dirty="0">
+                      <a:latin typeface="宋体" panose="02010600030101010101" pitchFamily="2" charset="-122"/>
+                      <a:ea typeface="宋体" panose="02010600030101010101" pitchFamily="2" charset="-122"/>
+                      <a:cs typeface="Arial" panose="020B0604020202020204" pitchFamily="34" charset="0"/>
+                    </a:rPr>
+                    <a:t>1 </a:t>
+                  </a:r>
+                  <a:r>
+                    <a:rPr lang="zh-CN" altLang="en-US" sz="900" dirty="0">
+                      <a:latin typeface="宋体" panose="02010600030101010101" pitchFamily="2" charset="-122"/>
+                      <a:ea typeface="宋体" panose="02010600030101010101" pitchFamily="2" charset="-122"/>
+                      <a:cs typeface="Arial" panose="020B0604020202020204" pitchFamily="34" charset="0"/>
+                    </a:rPr>
+                    <a:t>次 </a:t>
+                  </a:r>
+                  <a:endParaRPr lang="en-US" altLang="zh-CN" sz="900" dirty="0">
+                    <a:latin typeface="宋体" panose="02010600030101010101" pitchFamily="2" charset="-122"/>
+                    <a:ea typeface="宋体" panose="02010600030101010101" pitchFamily="2" charset="-122"/>
+                    <a:cs typeface="Arial" panose="020B0604020202020204" pitchFamily="34" charset="0"/>
+                  </a:endParaRPr>
+                </a:p>
+                <a:p>
+                  <a:pPr marL="171450" indent="-171450">
+                    <a:buFont typeface="Arial" panose="020B0604020202020204" pitchFamily="34" charset="0"/>
+                    <a:buChar char="•"/>
+                  </a:pPr>
+                  <a:r>
+                    <a:rPr lang="zh-CN" altLang="en-US" sz="900" dirty="0">
+                      <a:latin typeface="宋体" panose="02010600030101010101" pitchFamily="2" charset="-122"/>
+                      <a:ea typeface="宋体" panose="02010600030101010101" pitchFamily="2" charset="-122"/>
+                      <a:cs typeface="Arial" panose="020B0604020202020204" pitchFamily="34" charset="0"/>
+                    </a:rPr>
+                    <a:t>叶酸片：</a:t>
+                  </a:r>
+                  <a:r>
+                    <a:rPr lang="en-US" altLang="zh-CN" sz="900" dirty="0">
+                      <a:latin typeface="宋体" panose="02010600030101010101" pitchFamily="2" charset="-122"/>
+                      <a:ea typeface="宋体" panose="02010600030101010101" pitchFamily="2" charset="-122"/>
+                      <a:cs typeface="Arial" panose="020B0604020202020204" pitchFamily="34" charset="0"/>
+                    </a:rPr>
+                    <a:t>5mg</a:t>
+                  </a:r>
+                  <a:r>
+                    <a:rPr lang="zh-CN" altLang="en-US" sz="900" dirty="0">
+                      <a:latin typeface="宋体" panose="02010600030101010101" pitchFamily="2" charset="-122"/>
+                      <a:ea typeface="宋体" panose="02010600030101010101" pitchFamily="2" charset="-122"/>
+                      <a:cs typeface="Arial" panose="020B0604020202020204" pitchFamily="34" charset="0"/>
+                    </a:rPr>
+                    <a:t>，每周 </a:t>
+                  </a:r>
+                  <a:r>
+                    <a:rPr lang="en-US" altLang="zh-CN" sz="900" dirty="0">
+                      <a:latin typeface="宋体" panose="02010600030101010101" pitchFamily="2" charset="-122"/>
+                      <a:ea typeface="宋体" panose="02010600030101010101" pitchFamily="2" charset="-122"/>
+                      <a:cs typeface="Arial" panose="020B0604020202020204" pitchFamily="34" charset="0"/>
+                    </a:rPr>
+                    <a:t>1 </a:t>
+                  </a:r>
+                  <a:r>
+                    <a:rPr lang="zh-CN" altLang="en-US" sz="900" dirty="0">
+                      <a:latin typeface="宋体" panose="02010600030101010101" pitchFamily="2" charset="-122"/>
+                      <a:ea typeface="宋体" panose="02010600030101010101" pitchFamily="2" charset="-122"/>
+                      <a:cs typeface="Arial" panose="020B0604020202020204" pitchFamily="34" charset="0"/>
+                    </a:rPr>
+                    <a:t>次 </a:t>
+                  </a:r>
+                  <a:endParaRPr lang="en-US" altLang="zh-CN" sz="900" dirty="0">
+                    <a:latin typeface="宋体" panose="02010600030101010101" pitchFamily="2" charset="-122"/>
+                    <a:ea typeface="宋体" panose="02010600030101010101" pitchFamily="2" charset="-122"/>
+                    <a:cs typeface="Arial" panose="020B0604020202020204" pitchFamily="34" charset="0"/>
+                  </a:endParaRPr>
+                </a:p>
+                <a:p>
+                  <a:pPr marL="171450" indent="-171450">
+                    <a:buFont typeface="Arial" panose="020B0604020202020204" pitchFamily="34" charset="0"/>
+                    <a:buChar char="•"/>
+                  </a:pPr>
+                  <a:r>
+                    <a:rPr lang="zh-CN" altLang="en-US" sz="900" dirty="0">
+                      <a:latin typeface="宋体" panose="02010600030101010101" pitchFamily="2" charset="-122"/>
+                      <a:ea typeface="宋体" panose="02010600030101010101" pitchFamily="2" charset="-122"/>
+                      <a:cs typeface="Arial" panose="020B0604020202020204" pitchFamily="34" charset="0"/>
+                    </a:rPr>
+                    <a:t>碳酸钙 </a:t>
+                  </a:r>
+                  <a:r>
+                    <a:rPr lang="en-US" altLang="zh-CN" sz="900" dirty="0">
+                      <a:latin typeface="宋体" panose="02010600030101010101" pitchFamily="2" charset="-122"/>
+                      <a:ea typeface="宋体" panose="02010600030101010101" pitchFamily="2" charset="-122"/>
+                      <a:cs typeface="Arial" panose="020B0604020202020204" pitchFamily="34" charset="0"/>
+                    </a:rPr>
+                    <a:t>D3</a:t>
+                  </a:r>
+                  <a:r>
+                    <a:rPr lang="zh-CN" altLang="en-US" sz="900" dirty="0">
+                      <a:latin typeface="宋体" panose="02010600030101010101" pitchFamily="2" charset="-122"/>
+                      <a:ea typeface="宋体" panose="02010600030101010101" pitchFamily="2" charset="-122"/>
+                      <a:cs typeface="Arial" panose="020B0604020202020204" pitchFamily="34" charset="0"/>
+                    </a:rPr>
+                    <a:t>：</a:t>
+                  </a:r>
+                  <a:r>
+                    <a:rPr lang="en-US" altLang="zh-CN" sz="900" dirty="0">
+                      <a:latin typeface="宋体" panose="02010600030101010101" pitchFamily="2" charset="-122"/>
+                      <a:ea typeface="宋体" panose="02010600030101010101" pitchFamily="2" charset="-122"/>
+                      <a:cs typeface="Arial" panose="020B0604020202020204" pitchFamily="34" charset="0"/>
+                    </a:rPr>
+                    <a:t>600mg</a:t>
+                  </a:r>
+                  <a:r>
+                    <a:rPr lang="zh-CN" altLang="en-US" sz="900" dirty="0">
+                      <a:latin typeface="宋体" panose="02010600030101010101" pitchFamily="2" charset="-122"/>
+                      <a:ea typeface="宋体" panose="02010600030101010101" pitchFamily="2" charset="-122"/>
+                      <a:cs typeface="Arial" panose="020B0604020202020204" pitchFamily="34" charset="0"/>
+                    </a:rPr>
+                    <a:t>，每日 </a:t>
+                  </a:r>
+                  <a:r>
+                    <a:rPr lang="en-US" altLang="zh-CN" sz="900" dirty="0">
+                      <a:latin typeface="宋体" panose="02010600030101010101" pitchFamily="2" charset="-122"/>
+                      <a:ea typeface="宋体" panose="02010600030101010101" pitchFamily="2" charset="-122"/>
+                      <a:cs typeface="Arial" panose="020B0604020202020204" pitchFamily="34" charset="0"/>
+                    </a:rPr>
+                    <a:t>1 </a:t>
+                  </a:r>
+                  <a:r>
+                    <a:rPr lang="zh-CN" altLang="en-US" sz="900" dirty="0">
+                      <a:latin typeface="宋体" panose="02010600030101010101" pitchFamily="2" charset="-122"/>
+                      <a:ea typeface="宋体" panose="02010600030101010101" pitchFamily="2" charset="-122"/>
+                      <a:cs typeface="Arial" panose="020B0604020202020204" pitchFamily="34" charset="0"/>
+                    </a:rPr>
+                    <a:t>次</a:t>
+                  </a:r>
+                </a:p>
+              </p:txBody>
+            </p:sp>
+            <p:sp>
+              <p:nvSpPr>
+                <p:cNvPr id="63" name="文本框 62">
+                  <a:extLst>
+                    <a:ext uri="{FF2B5EF4-FFF2-40B4-BE49-F238E27FC236}">
+                      <a16:creationId xmlns:a16="http://schemas.microsoft.com/office/drawing/2014/main" id="{71304135-AB8C-9463-20B8-B8DC5437DBB6}"/>
+                    </a:ext>
+                  </a:extLst>
+                </p:cNvPr>
+                <p:cNvSpPr txBox="1"/>
+                <p:nvPr/>
+              </p:nvSpPr>
+              <p:spPr>
+                <a:xfrm>
+                  <a:off x="3825040" y="2984901"/>
+                  <a:ext cx="738545" cy="165454"/>
+                </a:xfrm>
+                <a:prstGeom prst="rect">
+                  <a:avLst/>
+                </a:prstGeom>
+                <a:solidFill>
+                  <a:srgbClr val="F2F2F2"/>
+                </a:solidFill>
+              </p:spPr>
+              <p:txBody>
+                <a:bodyPr wrap="square" rtlCol="0">
+                  <a:spAutoFit/>
+                </a:bodyPr>
+                <a:lstStyle/>
+                <a:p>
+                  <a:pPr algn="ctr"/>
+                  <a:r>
+                    <a:rPr lang="zh-CN" altLang="en-US" sz="1000" b="1" dirty="0">
+                      <a:latin typeface="宋体" panose="02010600030101010101" pitchFamily="2" charset="-122"/>
+                      <a:ea typeface="宋体" panose="02010600030101010101" pitchFamily="2" charset="-122"/>
+                      <a:cs typeface="Arial" panose="020B0604020202020204" pitchFamily="34" charset="0"/>
+                    </a:rPr>
+                    <a:t>出院处方</a:t>
+                  </a:r>
+                  <a:endParaRPr lang="zh-CN" altLang="en-US" sz="800" b="1" dirty="0">
+                    <a:latin typeface="宋体" panose="02010600030101010101" pitchFamily="2" charset="-122"/>
+                    <a:ea typeface="宋体" panose="02010600030101010101" pitchFamily="2" charset="-122"/>
+                    <a:cs typeface="Arial" panose="020B0604020202020204" pitchFamily="34" charset="0"/>
+                  </a:endParaRPr>
+                </a:p>
+              </p:txBody>
+            </p:sp>
+          </p:grpSp>
+        </p:grpSp>
+      </p:grpSp>
+    </p:spTree>
+    <p:extLst>
+      <p:ext uri="{BB962C8B-B14F-4D97-AF65-F5344CB8AC3E}">
+        <p14:creationId xmlns:p14="http://schemas.microsoft.com/office/powerpoint/2010/main" val="581361519"/>
+      </p:ext>
+    </p:extLst>
+  </p:cSld>
+  <p:clrMapOvr>
+    <a:masterClrMapping/>
+  </p:clrMapOvr>
+</p:sld>
+</file>
+
+<file path=ppt/slides/slide11.xml><?xml version="1.0" encoding="utf-8"?>
 <p:sld xmlns:a="http://schemas.openxmlformats.org/drawingml/2006/main" xmlns:r="http://schemas.openxmlformats.org/officeDocument/2006/relationships" xmlns:p="http://schemas.openxmlformats.org/presentationml/2006/main">
   <p:cSld>
     <p:spTree>
@@ -8709,7 +10026,7 @@
 </p:sld>
 </file>
 
-<file path=ppt/slides/slide11.xml><?xml version="1.0" encoding="utf-8"?>
+<file path=ppt/slides/slide12.xml><?xml version="1.0" encoding="utf-8"?>
 <p:sld xmlns:a="http://schemas.openxmlformats.org/drawingml/2006/main" xmlns:r="http://schemas.openxmlformats.org/officeDocument/2006/relationships" xmlns:p="http://schemas.openxmlformats.org/presentationml/2006/main">
   <p:cSld>
     <p:spTree>
@@ -13106,7 +14423,7 @@
 </p:sld>
 </file>
 
-<file path=ppt/slides/slide12.xml><?xml version="1.0" encoding="utf-8"?>
+<file path=ppt/slides/slide13.xml><?xml version="1.0" encoding="utf-8"?>
 <p:sld xmlns:a="http://schemas.openxmlformats.org/drawingml/2006/main" xmlns:r="http://schemas.openxmlformats.org/officeDocument/2006/relationships" xmlns:p="http://schemas.openxmlformats.org/presentationml/2006/main">
   <p:cSld>
     <p:spTree>
@@ -15856,7 +17173,7 @@
 </p:sld>
 </file>
 
-<file path=ppt/slides/slide13.xml><?xml version="1.0" encoding="utf-8"?>
+<file path=ppt/slides/slide14.xml><?xml version="1.0" encoding="utf-8"?>
 <p:sld xmlns:a="http://schemas.openxmlformats.org/drawingml/2006/main" xmlns:r="http://schemas.openxmlformats.org/officeDocument/2006/relationships" xmlns:p="http://schemas.openxmlformats.org/presentationml/2006/main">
   <p:cSld>
     <p:spTree>
@@ -17903,7 +19220,7 @@
 </p:sld>
 </file>
 
-<file path=ppt/slides/slide14.xml><?xml version="1.0" encoding="utf-8"?>
+<file path=ppt/slides/slide15.xml><?xml version="1.0" encoding="utf-8"?>
 <p:sld xmlns:a="http://schemas.openxmlformats.org/drawingml/2006/main" xmlns:r="http://schemas.openxmlformats.org/officeDocument/2006/relationships" xmlns:p="http://schemas.openxmlformats.org/presentationml/2006/main">
   <p:cSld>
     <p:spTree>
@@ -21796,7 +23113,7 @@
 </p:sld>
 </file>
 
-<file path=ppt/slides/slide15.xml><?xml version="1.0" encoding="utf-8"?>
+<file path=ppt/slides/slide16.xml><?xml version="1.0" encoding="utf-8"?>
 <p:sld xmlns:a="http://schemas.openxmlformats.org/drawingml/2006/main" xmlns:r="http://schemas.openxmlformats.org/officeDocument/2006/relationships" xmlns:p="http://schemas.openxmlformats.org/presentationml/2006/main">
   <p:cSld>
     <p:spTree>
@@ -24032,7 +25349,7 @@
 </p:sld>
 </file>
 
-<file path=ppt/slides/slide16.xml><?xml version="1.0" encoding="utf-8"?>
+<file path=ppt/slides/slide17.xml><?xml version="1.0" encoding="utf-8"?>
 <p:sld xmlns:a="http://schemas.openxmlformats.org/drawingml/2006/main" xmlns:r="http://schemas.openxmlformats.org/officeDocument/2006/relationships" xmlns:p="http://schemas.openxmlformats.org/presentationml/2006/main">
   <p:cSld>
     <p:spTree>
@@ -26648,6 +27965,2009 @@
 </file>
 
 <file path=ppt/slides/slide2.xml><?xml version="1.0" encoding="utf-8"?>
+<p:sld xmlns:a="http://schemas.openxmlformats.org/drawingml/2006/main" xmlns:r="http://schemas.openxmlformats.org/officeDocument/2006/relationships" xmlns:p="http://schemas.openxmlformats.org/presentationml/2006/main">
+  <p:cSld>
+    <p:spTree>
+      <p:nvGrpSpPr>
+        <p:cNvPr id="1" name=""/>
+        <p:cNvGrpSpPr/>
+        <p:nvPr/>
+      </p:nvGrpSpPr>
+      <p:grpSpPr>
+        <a:xfrm>
+          <a:off x="0" y="0"/>
+          <a:ext cx="0" cy="0"/>
+          <a:chOff x="0" y="0"/>
+          <a:chExt cx="0" cy="0"/>
+        </a:xfrm>
+      </p:grpSpPr>
+      <p:cxnSp>
+        <p:nvCxnSpPr>
+          <p:cNvPr id="101" name="直接连接符 100">
+            <a:extLst>
+              <a:ext uri="{FF2B5EF4-FFF2-40B4-BE49-F238E27FC236}">
+                <a16:creationId xmlns:a16="http://schemas.microsoft.com/office/drawing/2014/main" id="{4F10B9B5-1AF1-2A4E-3B3E-9C53CB7E1AD1}"/>
+              </a:ext>
+            </a:extLst>
+          </p:cNvPr>
+          <p:cNvCxnSpPr>
+            <a:cxnSpLocks/>
+            <a:stCxn id="100" idx="2"/>
+            <a:endCxn id="51" idx="0"/>
+          </p:cNvCxnSpPr>
+          <p:nvPr/>
+        </p:nvCxnSpPr>
+        <p:spPr>
+          <a:xfrm>
+            <a:off x="4928650" y="3333509"/>
+            <a:ext cx="0" cy="249161"/>
+          </a:xfrm>
+          <a:prstGeom prst="line">
+            <a:avLst/>
+          </a:prstGeom>
+          <a:ln w="9525">
+            <a:solidFill>
+              <a:schemeClr val="tx1"/>
+            </a:solidFill>
+          </a:ln>
+        </p:spPr>
+        <p:style>
+          <a:lnRef idx="1">
+            <a:schemeClr val="accent1"/>
+          </a:lnRef>
+          <a:fillRef idx="0">
+            <a:schemeClr val="accent1"/>
+          </a:fillRef>
+          <a:effectRef idx="0">
+            <a:schemeClr val="accent1"/>
+          </a:effectRef>
+          <a:fontRef idx="minor">
+            <a:schemeClr val="tx1"/>
+          </a:fontRef>
+        </p:style>
+      </p:cxnSp>
+      <p:cxnSp>
+        <p:nvCxnSpPr>
+          <p:cNvPr id="81" name="直接连接符 44">
+            <a:extLst>
+              <a:ext uri="{FF2B5EF4-FFF2-40B4-BE49-F238E27FC236}">
+                <a16:creationId xmlns:a16="http://schemas.microsoft.com/office/drawing/2014/main" id="{85A2129E-3692-9B33-661F-0B2ED060FD93}"/>
+              </a:ext>
+            </a:extLst>
+          </p:cNvPr>
+          <p:cNvCxnSpPr>
+            <a:cxnSpLocks/>
+            <a:stCxn id="100" idx="2"/>
+            <a:endCxn id="117" idx="0"/>
+          </p:cNvCxnSpPr>
+          <p:nvPr/>
+        </p:nvCxnSpPr>
+        <p:spPr>
+          <a:xfrm rot="5400000">
+            <a:off x="4543182" y="3197201"/>
+            <a:ext cx="249161" cy="521777"/>
+          </a:xfrm>
+          <a:prstGeom prst="bentConnector3">
+            <a:avLst>
+              <a:gd name="adj1" fmla="val 50000"/>
+            </a:avLst>
+          </a:prstGeom>
+          <a:ln w="9525">
+            <a:solidFill>
+              <a:schemeClr val="tx1"/>
+            </a:solidFill>
+          </a:ln>
+        </p:spPr>
+        <p:style>
+          <a:lnRef idx="1">
+            <a:schemeClr val="accent1"/>
+          </a:lnRef>
+          <a:fillRef idx="0">
+            <a:schemeClr val="accent1"/>
+          </a:fillRef>
+          <a:effectRef idx="0">
+            <a:schemeClr val="accent1"/>
+          </a:effectRef>
+          <a:fontRef idx="minor">
+            <a:schemeClr val="tx1"/>
+          </a:fontRef>
+        </p:style>
+      </p:cxnSp>
+      <p:cxnSp>
+        <p:nvCxnSpPr>
+          <p:cNvPr id="98" name="直接连接符 44">
+            <a:extLst>
+              <a:ext uri="{FF2B5EF4-FFF2-40B4-BE49-F238E27FC236}">
+                <a16:creationId xmlns:a16="http://schemas.microsoft.com/office/drawing/2014/main" id="{0B3BF6EC-D240-B1FC-5F29-2062F978995F}"/>
+              </a:ext>
+            </a:extLst>
+          </p:cNvPr>
+          <p:cNvCxnSpPr>
+            <a:cxnSpLocks/>
+            <a:stCxn id="100" idx="2"/>
+            <a:endCxn id="96" idx="0"/>
+          </p:cNvCxnSpPr>
+          <p:nvPr/>
+        </p:nvCxnSpPr>
+        <p:spPr>
+          <a:xfrm rot="16200000" flipH="1">
+            <a:off x="5064958" y="3197200"/>
+            <a:ext cx="249161" cy="521777"/>
+          </a:xfrm>
+          <a:prstGeom prst="bentConnector3">
+            <a:avLst>
+              <a:gd name="adj1" fmla="val 50000"/>
+            </a:avLst>
+          </a:prstGeom>
+          <a:ln w="9525">
+            <a:solidFill>
+              <a:schemeClr val="tx1"/>
+            </a:solidFill>
+          </a:ln>
+        </p:spPr>
+        <p:style>
+          <a:lnRef idx="1">
+            <a:schemeClr val="accent1"/>
+          </a:lnRef>
+          <a:fillRef idx="0">
+            <a:schemeClr val="accent1"/>
+          </a:fillRef>
+          <a:effectRef idx="0">
+            <a:schemeClr val="accent1"/>
+          </a:effectRef>
+          <a:fontRef idx="minor">
+            <a:schemeClr val="tx1"/>
+          </a:fontRef>
+        </p:style>
+      </p:cxnSp>
+      <p:sp>
+        <p:nvSpPr>
+          <p:cNvPr id="51" name="矩形 50">
+            <a:extLst>
+              <a:ext uri="{FF2B5EF4-FFF2-40B4-BE49-F238E27FC236}">
+                <a16:creationId xmlns:a16="http://schemas.microsoft.com/office/drawing/2014/main" id="{9A3ACE77-16F4-4E8B-A8B6-72412B3CAF50}"/>
+              </a:ext>
+            </a:extLst>
+          </p:cNvPr>
+          <p:cNvSpPr/>
+          <p:nvPr/>
+        </p:nvSpPr>
+        <p:spPr>
+          <a:xfrm>
+            <a:off x="4797250" y="3582670"/>
+            <a:ext cx="262800" cy="1302792"/>
+          </a:xfrm>
+          <a:prstGeom prst="rect">
+            <a:avLst/>
+          </a:prstGeom>
+          <a:solidFill>
+            <a:srgbClr val="EAF1DF"/>
+          </a:solidFill>
+          <a:ln w="9525">
+            <a:solidFill>
+              <a:schemeClr val="tx1">
+                <a:lumMod val="95000"/>
+                <a:lumOff val="5000"/>
+              </a:schemeClr>
+            </a:solidFill>
+          </a:ln>
+        </p:spPr>
+        <p:style>
+          <a:lnRef idx="2">
+            <a:schemeClr val="accent1">
+              <a:shade val="50000"/>
+            </a:schemeClr>
+          </a:lnRef>
+          <a:fillRef idx="1">
+            <a:schemeClr val="accent1"/>
+          </a:fillRef>
+          <a:effectRef idx="0">
+            <a:schemeClr val="accent1"/>
+          </a:effectRef>
+          <a:fontRef idx="minor">
+            <a:schemeClr val="lt1"/>
+          </a:fontRef>
+        </p:style>
+        <p:txBody>
+          <a:bodyPr rtlCol="0" anchor="ctr"/>
+          <a:lstStyle/>
+          <a:p>
+            <a:pPr algn="ctr"/>
+            <a:endParaRPr lang="zh-CN" altLang="en-US"/>
+          </a:p>
+        </p:txBody>
+      </p:sp>
+      <p:sp>
+        <p:nvSpPr>
+          <p:cNvPr id="52" name="文本框 51">
+            <a:extLst>
+              <a:ext uri="{FF2B5EF4-FFF2-40B4-BE49-F238E27FC236}">
+                <a16:creationId xmlns:a16="http://schemas.microsoft.com/office/drawing/2014/main" id="{313CA518-A42F-4465-ACE6-CD7E7F741EBE}"/>
+              </a:ext>
+            </a:extLst>
+          </p:cNvPr>
+          <p:cNvSpPr txBox="1"/>
+          <p:nvPr/>
+        </p:nvSpPr>
+        <p:spPr>
+          <a:xfrm>
+            <a:off x="4771556" y="3534374"/>
+            <a:ext cx="307777" cy="1391617"/>
+          </a:xfrm>
+          <a:prstGeom prst="rect">
+            <a:avLst/>
+          </a:prstGeom>
+          <a:noFill/>
+        </p:spPr>
+        <p:txBody>
+          <a:bodyPr vert="eaVert" wrap="square" rtlCol="0">
+            <a:spAutoFit/>
+          </a:bodyPr>
+          <a:lstStyle/>
+          <a:p>
+            <a:pPr algn="ctr"/>
+            <a:r>
+              <a:rPr lang="zh-CN" altLang="en-US" sz="800" dirty="0">
+                <a:latin typeface="宋体" panose="02010600030101010101" pitchFamily="2" charset="-122"/>
+                <a:ea typeface="宋体" panose="02010600030101010101" pitchFamily="2" charset="-122"/>
+              </a:rPr>
+              <a:t>多智能体协作下的级联测试</a:t>
+            </a:r>
+          </a:p>
+        </p:txBody>
+      </p:sp>
+      <p:sp>
+        <p:nvSpPr>
+          <p:cNvPr id="117" name="矩形 116">
+            <a:extLst>
+              <a:ext uri="{FF2B5EF4-FFF2-40B4-BE49-F238E27FC236}">
+                <a16:creationId xmlns:a16="http://schemas.microsoft.com/office/drawing/2014/main" id="{2A690260-F9F8-4F76-B98F-CA661DF95E44}"/>
+              </a:ext>
+            </a:extLst>
+          </p:cNvPr>
+          <p:cNvSpPr/>
+          <p:nvPr/>
+        </p:nvSpPr>
+        <p:spPr>
+          <a:xfrm>
+            <a:off x="4275473" y="3582670"/>
+            <a:ext cx="262800" cy="1302792"/>
+          </a:xfrm>
+          <a:prstGeom prst="rect">
+            <a:avLst/>
+          </a:prstGeom>
+          <a:solidFill>
+            <a:srgbClr val="EAF1DF"/>
+          </a:solidFill>
+          <a:ln w="9525">
+            <a:solidFill>
+              <a:schemeClr val="tx1">
+                <a:lumMod val="95000"/>
+                <a:lumOff val="5000"/>
+              </a:schemeClr>
+            </a:solidFill>
+          </a:ln>
+        </p:spPr>
+        <p:style>
+          <a:lnRef idx="2">
+            <a:schemeClr val="accent1">
+              <a:shade val="50000"/>
+            </a:schemeClr>
+          </a:lnRef>
+          <a:fillRef idx="1">
+            <a:schemeClr val="accent1"/>
+          </a:fillRef>
+          <a:effectRef idx="0">
+            <a:schemeClr val="accent1"/>
+          </a:effectRef>
+          <a:fontRef idx="minor">
+            <a:schemeClr val="lt1"/>
+          </a:fontRef>
+        </p:style>
+        <p:txBody>
+          <a:bodyPr rtlCol="0" anchor="ctr"/>
+          <a:lstStyle/>
+          <a:p>
+            <a:pPr algn="ctr"/>
+            <a:endParaRPr lang="zh-CN" altLang="en-US"/>
+          </a:p>
+        </p:txBody>
+      </p:sp>
+      <p:sp>
+        <p:nvSpPr>
+          <p:cNvPr id="96" name="矩形 95">
+            <a:extLst>
+              <a:ext uri="{FF2B5EF4-FFF2-40B4-BE49-F238E27FC236}">
+                <a16:creationId xmlns:a16="http://schemas.microsoft.com/office/drawing/2014/main" id="{AA30A908-A34D-4431-FA1E-893CA58A308C}"/>
+              </a:ext>
+            </a:extLst>
+          </p:cNvPr>
+          <p:cNvSpPr/>
+          <p:nvPr/>
+        </p:nvSpPr>
+        <p:spPr>
+          <a:xfrm>
+            <a:off x="5319027" y="3582670"/>
+            <a:ext cx="262800" cy="1302792"/>
+          </a:xfrm>
+          <a:prstGeom prst="rect">
+            <a:avLst/>
+          </a:prstGeom>
+          <a:solidFill>
+            <a:srgbClr val="EAF1DF"/>
+          </a:solidFill>
+          <a:ln w="9525">
+            <a:solidFill>
+              <a:schemeClr val="tx1">
+                <a:lumMod val="95000"/>
+                <a:lumOff val="5000"/>
+              </a:schemeClr>
+            </a:solidFill>
+          </a:ln>
+        </p:spPr>
+        <p:style>
+          <a:lnRef idx="2">
+            <a:schemeClr val="accent1">
+              <a:shade val="50000"/>
+            </a:schemeClr>
+          </a:lnRef>
+          <a:fillRef idx="1">
+            <a:schemeClr val="accent1"/>
+          </a:fillRef>
+          <a:effectRef idx="0">
+            <a:schemeClr val="accent1"/>
+          </a:effectRef>
+          <a:fontRef idx="minor">
+            <a:schemeClr val="lt1"/>
+          </a:fontRef>
+        </p:style>
+        <p:txBody>
+          <a:bodyPr rtlCol="0" anchor="ctr"/>
+          <a:lstStyle/>
+          <a:p>
+            <a:pPr algn="ctr"/>
+            <a:endParaRPr lang="zh-CN" altLang="en-US"/>
+          </a:p>
+        </p:txBody>
+      </p:sp>
+      <p:sp>
+        <p:nvSpPr>
+          <p:cNvPr id="93" name="矩形 92">
+            <a:extLst>
+              <a:ext uri="{FF2B5EF4-FFF2-40B4-BE49-F238E27FC236}">
+                <a16:creationId xmlns:a16="http://schemas.microsoft.com/office/drawing/2014/main" id="{E6D8AEF0-7D2B-4AC1-ACA4-7AA5473FE90D}"/>
+              </a:ext>
+            </a:extLst>
+          </p:cNvPr>
+          <p:cNvSpPr/>
+          <p:nvPr/>
+        </p:nvSpPr>
+        <p:spPr>
+          <a:xfrm>
+            <a:off x="909852" y="2415927"/>
+            <a:ext cx="352800" cy="2467622"/>
+          </a:xfrm>
+          <a:prstGeom prst="rect">
+            <a:avLst/>
+          </a:prstGeom>
+          <a:solidFill>
+            <a:srgbClr val="DBEEF4"/>
+          </a:solidFill>
+          <a:ln w="9525">
+            <a:solidFill>
+              <a:schemeClr val="tx1">
+                <a:lumMod val="95000"/>
+                <a:lumOff val="5000"/>
+              </a:schemeClr>
+            </a:solidFill>
+          </a:ln>
+        </p:spPr>
+        <p:style>
+          <a:lnRef idx="2">
+            <a:schemeClr val="accent1">
+              <a:shade val="50000"/>
+            </a:schemeClr>
+          </a:lnRef>
+          <a:fillRef idx="1">
+            <a:schemeClr val="accent1"/>
+          </a:fillRef>
+          <a:effectRef idx="0">
+            <a:schemeClr val="accent1"/>
+          </a:effectRef>
+          <a:fontRef idx="minor">
+            <a:schemeClr val="lt1"/>
+          </a:fontRef>
+        </p:style>
+        <p:txBody>
+          <a:bodyPr rtlCol="0" anchor="ctr"/>
+          <a:lstStyle/>
+          <a:p>
+            <a:pPr algn="ctr"/>
+            <a:endParaRPr lang="zh-CN" altLang="en-US"/>
+          </a:p>
+        </p:txBody>
+      </p:sp>
+      <p:sp>
+        <p:nvSpPr>
+          <p:cNvPr id="76" name="文本框 75">
+            <a:extLst>
+              <a:ext uri="{FF2B5EF4-FFF2-40B4-BE49-F238E27FC236}">
+                <a16:creationId xmlns:a16="http://schemas.microsoft.com/office/drawing/2014/main" id="{70C126FF-7F12-43BB-9410-40181DCE2F55}"/>
+              </a:ext>
+            </a:extLst>
+          </p:cNvPr>
+          <p:cNvSpPr txBox="1"/>
+          <p:nvPr/>
+        </p:nvSpPr>
+        <p:spPr>
+          <a:xfrm>
+            <a:off x="924670" y="3091634"/>
+            <a:ext cx="323165" cy="1116208"/>
+          </a:xfrm>
+          <a:prstGeom prst="rect">
+            <a:avLst/>
+          </a:prstGeom>
+          <a:noFill/>
+        </p:spPr>
+        <p:txBody>
+          <a:bodyPr vert="eaVert" wrap="square" rtlCol="0">
+            <a:spAutoFit/>
+          </a:bodyPr>
+          <a:lstStyle/>
+          <a:p>
+            <a:pPr algn="ctr"/>
+            <a:r>
+              <a:rPr lang="zh-CN" altLang="en-US" sz="900" b="1" dirty="0">
+                <a:latin typeface="宋体" panose="02010600030101010101" pitchFamily="2" charset="-122"/>
+                <a:ea typeface="宋体" panose="02010600030101010101" pitchFamily="2" charset="-122"/>
+              </a:rPr>
+              <a:t>第一章 </a:t>
+            </a:r>
+            <a:r>
+              <a:rPr lang="zh-CN" altLang="en-US" sz="900" dirty="0">
+                <a:latin typeface="宋体" panose="02010600030101010101" pitchFamily="2" charset="-122"/>
+                <a:ea typeface="宋体" panose="02010600030101010101" pitchFamily="2" charset="-122"/>
+              </a:rPr>
+              <a:t>绪论</a:t>
+            </a:r>
+            <a:endParaRPr lang="zh-CN" altLang="en-US" sz="900" b="1" dirty="0">
+              <a:latin typeface="宋体" panose="02010600030101010101" pitchFamily="2" charset="-122"/>
+              <a:ea typeface="宋体" panose="02010600030101010101" pitchFamily="2" charset="-122"/>
+            </a:endParaRPr>
+          </a:p>
+        </p:txBody>
+      </p:sp>
+      <p:sp>
+        <p:nvSpPr>
+          <p:cNvPr id="78" name="矩形 77">
+            <a:extLst>
+              <a:ext uri="{FF2B5EF4-FFF2-40B4-BE49-F238E27FC236}">
+                <a16:creationId xmlns:a16="http://schemas.microsoft.com/office/drawing/2014/main" id="{E266FF64-4311-4E4D-8533-3406544DEC01}"/>
+              </a:ext>
+            </a:extLst>
+          </p:cNvPr>
+          <p:cNvSpPr/>
+          <p:nvPr/>
+        </p:nvSpPr>
+        <p:spPr>
+          <a:xfrm>
+            <a:off x="1356361" y="2415927"/>
+            <a:ext cx="352800" cy="2467622"/>
+          </a:xfrm>
+          <a:prstGeom prst="rect">
+            <a:avLst/>
+          </a:prstGeom>
+          <a:solidFill>
+            <a:srgbClr val="DBEEF4"/>
+          </a:solidFill>
+          <a:ln w="9525">
+            <a:solidFill>
+              <a:schemeClr val="tx1">
+                <a:lumMod val="95000"/>
+                <a:lumOff val="5000"/>
+              </a:schemeClr>
+            </a:solidFill>
+          </a:ln>
+        </p:spPr>
+        <p:style>
+          <a:lnRef idx="2">
+            <a:schemeClr val="accent1">
+              <a:shade val="50000"/>
+            </a:schemeClr>
+          </a:lnRef>
+          <a:fillRef idx="1">
+            <a:schemeClr val="accent1"/>
+          </a:fillRef>
+          <a:effectRef idx="0">
+            <a:schemeClr val="accent1"/>
+          </a:effectRef>
+          <a:fontRef idx="minor">
+            <a:schemeClr val="lt1"/>
+          </a:fontRef>
+        </p:style>
+        <p:txBody>
+          <a:bodyPr rtlCol="0" anchor="ctr"/>
+          <a:lstStyle/>
+          <a:p>
+            <a:pPr algn="ctr"/>
+            <a:endParaRPr lang="zh-CN" altLang="en-US"/>
+          </a:p>
+        </p:txBody>
+      </p:sp>
+      <p:sp>
+        <p:nvSpPr>
+          <p:cNvPr id="79" name="文本框 78">
+            <a:extLst>
+              <a:ext uri="{FF2B5EF4-FFF2-40B4-BE49-F238E27FC236}">
+                <a16:creationId xmlns:a16="http://schemas.microsoft.com/office/drawing/2014/main" id="{BFE7313A-CA24-47DD-AA93-1834C187B793}"/>
+              </a:ext>
+            </a:extLst>
+          </p:cNvPr>
+          <p:cNvSpPr txBox="1"/>
+          <p:nvPr/>
+        </p:nvSpPr>
+        <p:spPr>
+          <a:xfrm>
+            <a:off x="1371179" y="2788578"/>
+            <a:ext cx="323165" cy="1722320"/>
+          </a:xfrm>
+          <a:prstGeom prst="rect">
+            <a:avLst/>
+          </a:prstGeom>
+          <a:noFill/>
+        </p:spPr>
+        <p:txBody>
+          <a:bodyPr vert="eaVert" wrap="square" rtlCol="0">
+            <a:spAutoFit/>
+          </a:bodyPr>
+          <a:lstStyle/>
+          <a:p>
+            <a:pPr algn="ctr"/>
+            <a:r>
+              <a:rPr lang="zh-CN" altLang="en-US" sz="900" b="1" dirty="0">
+                <a:latin typeface="宋体" panose="02010600030101010101" pitchFamily="2" charset="-122"/>
+                <a:ea typeface="宋体" panose="02010600030101010101" pitchFamily="2" charset="-122"/>
+              </a:rPr>
+              <a:t>第二章 </a:t>
+            </a:r>
+            <a:r>
+              <a:rPr lang="zh-CN" altLang="en-US" sz="900" dirty="0">
+                <a:latin typeface="宋体" panose="02010600030101010101" pitchFamily="2" charset="-122"/>
+                <a:ea typeface="宋体" panose="02010600030101010101" pitchFamily="2" charset="-122"/>
+              </a:rPr>
+              <a:t>相关理论与技术基础</a:t>
+            </a:r>
+          </a:p>
+        </p:txBody>
+      </p:sp>
+      <p:sp>
+        <p:nvSpPr>
+          <p:cNvPr id="99" name="矩形 98">
+            <a:extLst>
+              <a:ext uri="{FF2B5EF4-FFF2-40B4-BE49-F238E27FC236}">
+                <a16:creationId xmlns:a16="http://schemas.microsoft.com/office/drawing/2014/main" id="{AFF74F19-DF26-47C5-A70D-F77AB0E6AD83}"/>
+              </a:ext>
+            </a:extLst>
+          </p:cNvPr>
+          <p:cNvSpPr/>
+          <p:nvPr/>
+        </p:nvSpPr>
+        <p:spPr>
+          <a:xfrm rot="5400000">
+            <a:off x="4710853" y="2356842"/>
+            <a:ext cx="435595" cy="1584000"/>
+          </a:xfrm>
+          <a:prstGeom prst="rect">
+            <a:avLst/>
+          </a:prstGeom>
+          <a:solidFill>
+            <a:srgbClr val="DBEEF4"/>
+          </a:solidFill>
+          <a:ln w="9525">
+            <a:solidFill>
+              <a:schemeClr val="tx1">
+                <a:lumMod val="95000"/>
+                <a:lumOff val="5000"/>
+              </a:schemeClr>
+            </a:solidFill>
+          </a:ln>
+        </p:spPr>
+        <p:style>
+          <a:lnRef idx="2">
+            <a:schemeClr val="accent1">
+              <a:shade val="50000"/>
+            </a:schemeClr>
+          </a:lnRef>
+          <a:fillRef idx="1">
+            <a:schemeClr val="accent1"/>
+          </a:fillRef>
+          <a:effectRef idx="0">
+            <a:schemeClr val="accent1"/>
+          </a:effectRef>
+          <a:fontRef idx="minor">
+            <a:schemeClr val="lt1"/>
+          </a:fontRef>
+        </p:style>
+        <p:txBody>
+          <a:bodyPr rtlCol="0" anchor="ctr"/>
+          <a:lstStyle/>
+          <a:p>
+            <a:pPr algn="ctr"/>
+            <a:endParaRPr lang="zh-CN" altLang="en-US"/>
+          </a:p>
+        </p:txBody>
+      </p:sp>
+      <p:sp>
+        <p:nvSpPr>
+          <p:cNvPr id="100" name="文本框 99">
+            <a:extLst>
+              <a:ext uri="{FF2B5EF4-FFF2-40B4-BE49-F238E27FC236}">
+                <a16:creationId xmlns:a16="http://schemas.microsoft.com/office/drawing/2014/main" id="{3C043963-EF0E-4FD3-A7B6-1E50C4A2E1B9}"/>
+              </a:ext>
+            </a:extLst>
+          </p:cNvPr>
+          <p:cNvSpPr txBox="1"/>
+          <p:nvPr/>
+        </p:nvSpPr>
+        <p:spPr>
+          <a:xfrm>
+            <a:off x="4048272" y="2964177"/>
+            <a:ext cx="1760756" cy="369332"/>
+          </a:xfrm>
+          <a:prstGeom prst="rect">
+            <a:avLst/>
+          </a:prstGeom>
+          <a:noFill/>
+        </p:spPr>
+        <p:txBody>
+          <a:bodyPr vert="horz" wrap="square" rtlCol="0">
+            <a:spAutoFit/>
+          </a:bodyPr>
+          <a:lstStyle/>
+          <a:p>
+            <a:pPr algn="ctr"/>
+            <a:r>
+              <a:rPr lang="zh-CN" altLang="en-US" sz="900" b="1" dirty="0">
+                <a:latin typeface="宋体" panose="02010600030101010101" pitchFamily="2" charset="-122"/>
+                <a:ea typeface="宋体" panose="02010600030101010101" pitchFamily="2" charset="-122"/>
+              </a:rPr>
+              <a:t>第五章 </a:t>
+            </a:r>
+            <a:r>
+              <a:rPr lang="zh-CN" altLang="en-US" sz="900" dirty="0">
+                <a:latin typeface="宋体" panose="02010600030101010101" pitchFamily="2" charset="-122"/>
+                <a:ea typeface="宋体" panose="02010600030101010101" pitchFamily="2" charset="-122"/>
+              </a:rPr>
+              <a:t>多智能体系统中的风险传播机制实证研究</a:t>
+            </a:r>
+          </a:p>
+        </p:txBody>
+      </p:sp>
+      <p:sp>
+        <p:nvSpPr>
+          <p:cNvPr id="106" name="矩形 105">
+            <a:extLst>
+              <a:ext uri="{FF2B5EF4-FFF2-40B4-BE49-F238E27FC236}">
+                <a16:creationId xmlns:a16="http://schemas.microsoft.com/office/drawing/2014/main" id="{0AEAE9AD-0571-4427-9F4F-226ADB70E495}"/>
+              </a:ext>
+            </a:extLst>
+          </p:cNvPr>
+          <p:cNvSpPr/>
+          <p:nvPr/>
+        </p:nvSpPr>
+        <p:spPr>
+          <a:xfrm rot="5400000">
+            <a:off x="3575492" y="636746"/>
+            <a:ext cx="369331" cy="3914577"/>
+          </a:xfrm>
+          <a:prstGeom prst="rect">
+            <a:avLst/>
+          </a:prstGeom>
+          <a:solidFill>
+            <a:srgbClr val="FCEADC"/>
+          </a:solidFill>
+          <a:ln w="9525">
+            <a:solidFill>
+              <a:schemeClr val="tx1">
+                <a:lumMod val="95000"/>
+                <a:lumOff val="5000"/>
+              </a:schemeClr>
+            </a:solidFill>
+          </a:ln>
+        </p:spPr>
+        <p:style>
+          <a:lnRef idx="2">
+            <a:schemeClr val="accent1">
+              <a:shade val="50000"/>
+            </a:schemeClr>
+          </a:lnRef>
+          <a:fillRef idx="1">
+            <a:schemeClr val="accent1"/>
+          </a:fillRef>
+          <a:effectRef idx="0">
+            <a:schemeClr val="accent1"/>
+          </a:effectRef>
+          <a:fontRef idx="minor">
+            <a:schemeClr val="lt1"/>
+          </a:fontRef>
+        </p:style>
+        <p:txBody>
+          <a:bodyPr rtlCol="0" anchor="ctr"/>
+          <a:lstStyle/>
+          <a:p>
+            <a:pPr algn="ctr"/>
+            <a:endParaRPr lang="zh-CN" altLang="en-US"/>
+          </a:p>
+        </p:txBody>
+      </p:sp>
+      <p:sp>
+        <p:nvSpPr>
+          <p:cNvPr id="105" name="文本框 104">
+            <a:extLst>
+              <a:ext uri="{FF2B5EF4-FFF2-40B4-BE49-F238E27FC236}">
+                <a16:creationId xmlns:a16="http://schemas.microsoft.com/office/drawing/2014/main" id="{F224BF14-C923-43BF-B791-6181E2266695}"/>
+              </a:ext>
+            </a:extLst>
+          </p:cNvPr>
+          <p:cNvSpPr txBox="1"/>
+          <p:nvPr/>
+        </p:nvSpPr>
+        <p:spPr>
+          <a:xfrm>
+            <a:off x="1709161" y="2409369"/>
+            <a:ext cx="4099867" cy="353943"/>
+          </a:xfrm>
+          <a:prstGeom prst="rect">
+            <a:avLst/>
+          </a:prstGeom>
+          <a:noFill/>
+        </p:spPr>
+        <p:txBody>
+          <a:bodyPr vert="horz" wrap="square" rtlCol="0">
+            <a:spAutoFit/>
+          </a:bodyPr>
+          <a:lstStyle/>
+          <a:p>
+            <a:pPr algn="ctr"/>
+            <a:r>
+              <a:rPr lang="zh-CN" altLang="en-US" sz="900" dirty="0">
+                <a:latin typeface="宋体" panose="02010600030101010101" pitchFamily="2" charset="-122"/>
+                <a:ea typeface="宋体" panose="02010600030101010101" pitchFamily="2" charset="-122"/>
+                <a:sym typeface="Wingdings" panose="05000000000000000000" pitchFamily="2" charset="2"/>
+              </a:rPr>
+              <a:t>医疗大语言模型安全性评估的核心挑战：</a:t>
+            </a:r>
+            <a:endParaRPr lang="en-US" altLang="zh-CN" sz="900" dirty="0">
+              <a:latin typeface="宋体" panose="02010600030101010101" pitchFamily="2" charset="-122"/>
+              <a:ea typeface="宋体" panose="02010600030101010101" pitchFamily="2" charset="-122"/>
+              <a:sym typeface="Wingdings" panose="05000000000000000000" pitchFamily="2" charset="2"/>
+            </a:endParaRPr>
+          </a:p>
+          <a:p>
+            <a:pPr algn="ctr"/>
+            <a:r>
+              <a:rPr lang="en-US" altLang="zh-CN" sz="800" dirty="0">
+                <a:latin typeface="宋体" panose="02010600030101010101" pitchFamily="2" charset="-122"/>
+                <a:ea typeface="宋体" panose="02010600030101010101" pitchFamily="2" charset="-122"/>
+                <a:sym typeface="Wingdings" panose="05000000000000000000" pitchFamily="2" charset="2"/>
+              </a:rPr>
+              <a:t>(1)</a:t>
+            </a:r>
+            <a:r>
+              <a:rPr lang="zh-CN" altLang="en-US" sz="800" dirty="0">
+                <a:latin typeface="宋体" panose="02010600030101010101" pitchFamily="2" charset="-122"/>
+                <a:ea typeface="宋体" panose="02010600030101010101" pitchFamily="2" charset="-122"/>
+                <a:sym typeface="Wingdings" panose="05000000000000000000" pitchFamily="2" charset="2"/>
+              </a:rPr>
+              <a:t>评估范式难以适配需求 </a:t>
+            </a:r>
+            <a:r>
+              <a:rPr lang="en-US" altLang="zh-CN" sz="800" dirty="0">
+                <a:latin typeface="宋体" panose="02010600030101010101" pitchFamily="2" charset="-122"/>
+                <a:ea typeface="宋体" panose="02010600030101010101" pitchFamily="2" charset="-122"/>
+                <a:sym typeface="Wingdings" panose="05000000000000000000" pitchFamily="2" charset="2"/>
+              </a:rPr>
+              <a:t>(2)</a:t>
+            </a:r>
+            <a:r>
+              <a:rPr lang="zh-CN" altLang="en-US" sz="800" dirty="0">
+                <a:latin typeface="宋体" panose="02010600030101010101" pitchFamily="2" charset="-122"/>
+                <a:ea typeface="宋体" panose="02010600030101010101" pitchFamily="2" charset="-122"/>
+                <a:sym typeface="Wingdings" panose="05000000000000000000" pitchFamily="2" charset="2"/>
+              </a:rPr>
+              <a:t>领域微调的影响缺乏揭示 </a:t>
+            </a:r>
+            <a:r>
+              <a:rPr lang="en-US" altLang="zh-CN" sz="800" dirty="0">
+                <a:latin typeface="宋体" panose="02010600030101010101" pitchFamily="2" charset="-122"/>
+                <a:ea typeface="宋体" panose="02010600030101010101" pitchFamily="2" charset="-122"/>
+                <a:sym typeface="Wingdings" panose="05000000000000000000" pitchFamily="2" charset="2"/>
+              </a:rPr>
+              <a:t>(3)</a:t>
+            </a:r>
+            <a:r>
+              <a:rPr lang="zh-CN" altLang="en-US" sz="800" dirty="0">
+                <a:latin typeface="宋体" panose="02010600030101010101" pitchFamily="2" charset="-122"/>
+                <a:ea typeface="宋体" panose="02010600030101010101" pitchFamily="2" charset="-122"/>
+                <a:sym typeface="Wingdings" panose="05000000000000000000" pitchFamily="2" charset="2"/>
+              </a:rPr>
+              <a:t>多智能体风险缺乏研究</a:t>
+            </a:r>
+            <a:endParaRPr lang="zh-CN" altLang="en-US" sz="800" dirty="0">
+              <a:latin typeface="宋体" panose="02010600030101010101" pitchFamily="2" charset="-122"/>
+              <a:ea typeface="宋体" panose="02010600030101010101" pitchFamily="2" charset="-122"/>
+            </a:endParaRPr>
+          </a:p>
+        </p:txBody>
+      </p:sp>
+      <p:sp>
+        <p:nvSpPr>
+          <p:cNvPr id="107" name="箭头: 下 106">
+            <a:extLst>
+              <a:ext uri="{FF2B5EF4-FFF2-40B4-BE49-F238E27FC236}">
+                <a16:creationId xmlns:a16="http://schemas.microsoft.com/office/drawing/2014/main" id="{F427716F-7D10-4DD6-80B8-5C18C979230A}"/>
+              </a:ext>
+            </a:extLst>
+          </p:cNvPr>
+          <p:cNvSpPr/>
+          <p:nvPr/>
+        </p:nvSpPr>
+        <p:spPr>
+          <a:xfrm>
+            <a:off x="2002801" y="2795151"/>
+            <a:ext cx="89803" cy="122185"/>
+          </a:xfrm>
+          <a:prstGeom prst="downArrow">
+            <a:avLst/>
+          </a:prstGeom>
+          <a:solidFill>
+            <a:schemeClr val="tx1"/>
+          </a:solidFill>
+          <a:ln>
+            <a:noFill/>
+          </a:ln>
+        </p:spPr>
+        <p:style>
+          <a:lnRef idx="2">
+            <a:schemeClr val="accent1">
+              <a:shade val="50000"/>
+            </a:schemeClr>
+          </a:lnRef>
+          <a:fillRef idx="1">
+            <a:schemeClr val="accent1"/>
+          </a:fillRef>
+          <a:effectRef idx="0">
+            <a:schemeClr val="accent1"/>
+          </a:effectRef>
+          <a:fontRef idx="minor">
+            <a:schemeClr val="lt1"/>
+          </a:fontRef>
+        </p:style>
+        <p:txBody>
+          <a:bodyPr rtlCol="0" anchor="ctr"/>
+          <a:lstStyle/>
+          <a:p>
+            <a:pPr algn="ctr"/>
+            <a:endParaRPr lang="zh-CN" altLang="en-US"/>
+          </a:p>
+        </p:txBody>
+      </p:sp>
+      <p:sp>
+        <p:nvSpPr>
+          <p:cNvPr id="185" name="文本框 184">
+            <a:extLst>
+              <a:ext uri="{FF2B5EF4-FFF2-40B4-BE49-F238E27FC236}">
+                <a16:creationId xmlns:a16="http://schemas.microsoft.com/office/drawing/2014/main" id="{13536C93-D246-46B5-A573-9A962F90F236}"/>
+              </a:ext>
+            </a:extLst>
+          </p:cNvPr>
+          <p:cNvSpPr txBox="1"/>
+          <p:nvPr/>
+        </p:nvSpPr>
+        <p:spPr>
+          <a:xfrm>
+            <a:off x="5296538" y="3623229"/>
+            <a:ext cx="307777" cy="1264071"/>
+          </a:xfrm>
+          <a:prstGeom prst="rect">
+            <a:avLst/>
+          </a:prstGeom>
+          <a:noFill/>
+        </p:spPr>
+        <p:txBody>
+          <a:bodyPr vert="eaVert" wrap="square" rtlCol="0">
+            <a:spAutoFit/>
+          </a:bodyPr>
+          <a:lstStyle/>
+          <a:p>
+            <a:pPr algn="ctr"/>
+            <a:r>
+              <a:rPr lang="zh-CN" altLang="en-US" sz="800" dirty="0">
+                <a:latin typeface="宋体" panose="02010600030101010101" pitchFamily="2" charset="-122"/>
+                <a:ea typeface="宋体" panose="02010600030101010101" pitchFamily="2" charset="-122"/>
+              </a:rPr>
+              <a:t>系统可靠性评估</a:t>
+            </a:r>
+          </a:p>
+        </p:txBody>
+      </p:sp>
+      <p:sp>
+        <p:nvSpPr>
+          <p:cNvPr id="187" name="文本框 186">
+            <a:extLst>
+              <a:ext uri="{FF2B5EF4-FFF2-40B4-BE49-F238E27FC236}">
+                <a16:creationId xmlns:a16="http://schemas.microsoft.com/office/drawing/2014/main" id="{AD8EA3FA-013A-4F0D-AC50-EF70D4178647}"/>
+              </a:ext>
+            </a:extLst>
+          </p:cNvPr>
+          <p:cNvSpPr txBox="1"/>
+          <p:nvPr/>
+        </p:nvSpPr>
+        <p:spPr>
+          <a:xfrm>
+            <a:off x="4250328" y="3611291"/>
+            <a:ext cx="307777" cy="1245549"/>
+          </a:xfrm>
+          <a:prstGeom prst="rect">
+            <a:avLst/>
+          </a:prstGeom>
+          <a:noFill/>
+        </p:spPr>
+        <p:txBody>
+          <a:bodyPr vert="eaVert" wrap="square" rtlCol="0">
+            <a:spAutoFit/>
+          </a:bodyPr>
+          <a:lstStyle/>
+          <a:p>
+            <a:pPr algn="ctr"/>
+            <a:r>
+              <a:rPr lang="zh-CN" altLang="en-US" sz="800" dirty="0">
+                <a:latin typeface="宋体" panose="02010600030101010101" pitchFamily="2" charset="-122"/>
+                <a:ea typeface="宋体" panose="02010600030101010101" pitchFamily="2" charset="-122"/>
+              </a:rPr>
+              <a:t>真实数据集构建</a:t>
+            </a:r>
+          </a:p>
+        </p:txBody>
+      </p:sp>
+      <p:sp>
+        <p:nvSpPr>
+          <p:cNvPr id="94" name="矩形 93">
+            <a:extLst>
+              <a:ext uri="{FF2B5EF4-FFF2-40B4-BE49-F238E27FC236}">
+                <a16:creationId xmlns:a16="http://schemas.microsoft.com/office/drawing/2014/main" id="{17A5B624-7E18-4811-9288-2FBE276F12A2}"/>
+              </a:ext>
+            </a:extLst>
+          </p:cNvPr>
+          <p:cNvSpPr/>
+          <p:nvPr/>
+        </p:nvSpPr>
+        <p:spPr>
+          <a:xfrm>
+            <a:off x="1802869" y="2931043"/>
+            <a:ext cx="489667" cy="1952506"/>
+          </a:xfrm>
+          <a:prstGeom prst="rect">
+            <a:avLst/>
+          </a:prstGeom>
+          <a:solidFill>
+            <a:srgbClr val="DBEEF4"/>
+          </a:solidFill>
+          <a:ln w="9525">
+            <a:solidFill>
+              <a:schemeClr val="tx1">
+                <a:lumMod val="95000"/>
+                <a:lumOff val="5000"/>
+              </a:schemeClr>
+            </a:solidFill>
+          </a:ln>
+        </p:spPr>
+        <p:style>
+          <a:lnRef idx="2">
+            <a:schemeClr val="accent1">
+              <a:shade val="50000"/>
+            </a:schemeClr>
+          </a:lnRef>
+          <a:fillRef idx="1">
+            <a:schemeClr val="accent1"/>
+          </a:fillRef>
+          <a:effectRef idx="0">
+            <a:schemeClr val="accent1"/>
+          </a:effectRef>
+          <a:fontRef idx="minor">
+            <a:schemeClr val="lt1"/>
+          </a:fontRef>
+        </p:style>
+        <p:txBody>
+          <a:bodyPr rtlCol="0" anchor="ctr"/>
+          <a:lstStyle/>
+          <a:p>
+            <a:pPr algn="ctr"/>
+            <a:endParaRPr lang="zh-CN" altLang="en-US"/>
+          </a:p>
+        </p:txBody>
+      </p:sp>
+      <p:sp>
+        <p:nvSpPr>
+          <p:cNvPr id="2" name="文本框 1">
+            <a:extLst>
+              <a:ext uri="{FF2B5EF4-FFF2-40B4-BE49-F238E27FC236}">
+                <a16:creationId xmlns:a16="http://schemas.microsoft.com/office/drawing/2014/main" id="{4CF2D47F-1AB6-4634-BF1A-93752823017C}"/>
+              </a:ext>
+            </a:extLst>
+          </p:cNvPr>
+          <p:cNvSpPr txBox="1"/>
+          <p:nvPr/>
+        </p:nvSpPr>
+        <p:spPr>
+          <a:xfrm>
+            <a:off x="1792443" y="3085646"/>
+            <a:ext cx="461665" cy="1708135"/>
+          </a:xfrm>
+          <a:prstGeom prst="rect">
+            <a:avLst/>
+          </a:prstGeom>
+          <a:noFill/>
+        </p:spPr>
+        <p:txBody>
+          <a:bodyPr vert="eaVert" wrap="square" rtlCol="0">
+            <a:spAutoFit/>
+          </a:bodyPr>
+          <a:lstStyle/>
+          <a:p>
+            <a:pPr algn="ctr"/>
+            <a:r>
+              <a:rPr lang="zh-CN" altLang="en-US" sz="900" dirty="0">
+                <a:latin typeface="宋体" panose="02010600030101010101" pitchFamily="2" charset="-122"/>
+                <a:ea typeface="宋体" panose="02010600030101010101" pitchFamily="2" charset="-122"/>
+              </a:rPr>
+              <a:t>框架设计与威胁模型构建</a:t>
+            </a:r>
+            <a:endParaRPr lang="en-US" altLang="zh-CN" sz="900" dirty="0">
+              <a:latin typeface="宋体" panose="02010600030101010101" pitchFamily="2" charset="-122"/>
+              <a:ea typeface="宋体" panose="02010600030101010101" pitchFamily="2" charset="-122"/>
+            </a:endParaRPr>
+          </a:p>
+          <a:p>
+            <a:pPr algn="ctr"/>
+            <a:r>
+              <a:rPr lang="zh-CN" altLang="en-US" sz="900" b="1" dirty="0">
+                <a:latin typeface="宋体" panose="02010600030101010101" pitchFamily="2" charset="-122"/>
+                <a:ea typeface="宋体" panose="02010600030101010101" pitchFamily="2" charset="-122"/>
+              </a:rPr>
+              <a:t>第三章 </a:t>
+            </a:r>
+            <a:r>
+              <a:rPr lang="zh-CN" altLang="en-US" sz="900" dirty="0">
+                <a:latin typeface="宋体" panose="02010600030101010101" pitchFamily="2" charset="-122"/>
+                <a:ea typeface="宋体" panose="02010600030101010101" pitchFamily="2" charset="-122"/>
+              </a:rPr>
+              <a:t>智能体驱动的安全评估</a:t>
+            </a:r>
+          </a:p>
+        </p:txBody>
+      </p:sp>
+      <p:sp>
+        <p:nvSpPr>
+          <p:cNvPr id="97" name="矩形 96">
+            <a:extLst>
+              <a:ext uri="{FF2B5EF4-FFF2-40B4-BE49-F238E27FC236}">
+                <a16:creationId xmlns:a16="http://schemas.microsoft.com/office/drawing/2014/main" id="{9902E07E-F147-4D29-B2D4-59DB3AA19772}"/>
+              </a:ext>
+            </a:extLst>
+          </p:cNvPr>
+          <p:cNvSpPr/>
+          <p:nvPr/>
+        </p:nvSpPr>
+        <p:spPr>
+          <a:xfrm rot="5400000">
+            <a:off x="2983657" y="2357570"/>
+            <a:ext cx="437054" cy="1584000"/>
+          </a:xfrm>
+          <a:prstGeom prst="rect">
+            <a:avLst/>
+          </a:prstGeom>
+          <a:solidFill>
+            <a:srgbClr val="DBEEF4"/>
+          </a:solidFill>
+          <a:ln w="9525">
+            <a:solidFill>
+              <a:schemeClr val="tx1">
+                <a:lumMod val="95000"/>
+                <a:lumOff val="5000"/>
+              </a:schemeClr>
+            </a:solidFill>
+          </a:ln>
+        </p:spPr>
+        <p:style>
+          <a:lnRef idx="2">
+            <a:schemeClr val="accent1">
+              <a:shade val="50000"/>
+            </a:schemeClr>
+          </a:lnRef>
+          <a:fillRef idx="1">
+            <a:schemeClr val="accent1"/>
+          </a:fillRef>
+          <a:effectRef idx="0">
+            <a:schemeClr val="accent1"/>
+          </a:effectRef>
+          <a:fontRef idx="minor">
+            <a:schemeClr val="lt1"/>
+          </a:fontRef>
+        </p:style>
+        <p:txBody>
+          <a:bodyPr rtlCol="0" anchor="ctr"/>
+          <a:lstStyle/>
+          <a:p>
+            <a:pPr algn="ctr"/>
+            <a:endParaRPr lang="zh-CN" altLang="en-US" dirty="0"/>
+          </a:p>
+        </p:txBody>
+      </p:sp>
+      <p:sp>
+        <p:nvSpPr>
+          <p:cNvPr id="86" name="文本框 85">
+            <a:extLst>
+              <a:ext uri="{FF2B5EF4-FFF2-40B4-BE49-F238E27FC236}">
+                <a16:creationId xmlns:a16="http://schemas.microsoft.com/office/drawing/2014/main" id="{F8979E28-5F52-4A7E-B86E-74223EF41747}"/>
+              </a:ext>
+            </a:extLst>
+          </p:cNvPr>
+          <p:cNvSpPr txBox="1"/>
+          <p:nvPr/>
+        </p:nvSpPr>
+        <p:spPr>
+          <a:xfrm>
+            <a:off x="2331013" y="2964904"/>
+            <a:ext cx="1742342" cy="369332"/>
+          </a:xfrm>
+          <a:prstGeom prst="rect">
+            <a:avLst/>
+          </a:prstGeom>
+          <a:noFill/>
+        </p:spPr>
+        <p:txBody>
+          <a:bodyPr vert="horz" wrap="square" rtlCol="0">
+            <a:spAutoFit/>
+          </a:bodyPr>
+          <a:lstStyle/>
+          <a:p>
+            <a:pPr algn="ctr"/>
+            <a:r>
+              <a:rPr lang="zh-CN" altLang="en-US" sz="900" b="1" dirty="0">
+                <a:latin typeface="宋体" panose="02010600030101010101" pitchFamily="2" charset="-122"/>
+                <a:ea typeface="宋体" panose="02010600030101010101" pitchFamily="2" charset="-122"/>
+              </a:rPr>
+              <a:t>第四章 </a:t>
+            </a:r>
+            <a:r>
+              <a:rPr lang="zh-CN" altLang="en-US" sz="900" dirty="0">
+                <a:latin typeface="宋体" panose="02010600030101010101" pitchFamily="2" charset="-122"/>
+                <a:ea typeface="宋体" panose="02010600030101010101" pitchFamily="2" charset="-122"/>
+              </a:rPr>
+              <a:t>基于通用基准的单体模型</a:t>
+            </a:r>
+            <a:r>
+              <a:rPr lang="zh-CN" altLang="en-US" sz="900">
+                <a:latin typeface="宋体" panose="02010600030101010101" pitchFamily="2" charset="-122"/>
+                <a:ea typeface="宋体" panose="02010600030101010101" pitchFamily="2" charset="-122"/>
+              </a:rPr>
+              <a:t>对抗鲁棒性分析</a:t>
+            </a:r>
+            <a:endParaRPr lang="zh-CN" altLang="en-US" sz="900" dirty="0">
+              <a:latin typeface="宋体" panose="02010600030101010101" pitchFamily="2" charset="-122"/>
+              <a:ea typeface="宋体" panose="02010600030101010101" pitchFamily="2" charset="-122"/>
+            </a:endParaRPr>
+          </a:p>
+        </p:txBody>
+      </p:sp>
+      <p:sp>
+        <p:nvSpPr>
+          <p:cNvPr id="114" name="矩形 113">
+            <a:extLst>
+              <a:ext uri="{FF2B5EF4-FFF2-40B4-BE49-F238E27FC236}">
+                <a16:creationId xmlns:a16="http://schemas.microsoft.com/office/drawing/2014/main" id="{9AC867C7-FC5A-4266-A671-410873B77538}"/>
+              </a:ext>
+            </a:extLst>
+          </p:cNvPr>
+          <p:cNvSpPr/>
+          <p:nvPr/>
+        </p:nvSpPr>
+        <p:spPr>
+          <a:xfrm>
+            <a:off x="3070784" y="3579417"/>
+            <a:ext cx="262800" cy="1309298"/>
+          </a:xfrm>
+          <a:prstGeom prst="rect">
+            <a:avLst/>
+          </a:prstGeom>
+          <a:solidFill>
+            <a:srgbClr val="EAF1DF"/>
+          </a:solidFill>
+          <a:ln w="9525">
+            <a:solidFill>
+              <a:schemeClr val="tx1">
+                <a:lumMod val="95000"/>
+                <a:lumOff val="5000"/>
+              </a:schemeClr>
+            </a:solidFill>
+          </a:ln>
+        </p:spPr>
+        <p:style>
+          <a:lnRef idx="2">
+            <a:schemeClr val="accent1">
+              <a:shade val="50000"/>
+            </a:schemeClr>
+          </a:lnRef>
+          <a:fillRef idx="1">
+            <a:schemeClr val="accent1"/>
+          </a:fillRef>
+          <a:effectRef idx="0">
+            <a:schemeClr val="accent1"/>
+          </a:effectRef>
+          <a:fontRef idx="minor">
+            <a:schemeClr val="lt1"/>
+          </a:fontRef>
+        </p:style>
+        <p:txBody>
+          <a:bodyPr rtlCol="0" anchor="ctr"/>
+          <a:lstStyle/>
+          <a:p>
+            <a:pPr algn="ctr"/>
+            <a:endParaRPr lang="zh-CN" altLang="en-US"/>
+          </a:p>
+        </p:txBody>
+      </p:sp>
+      <p:sp>
+        <p:nvSpPr>
+          <p:cNvPr id="115" name="文本框 114">
+            <a:extLst>
+              <a:ext uri="{FF2B5EF4-FFF2-40B4-BE49-F238E27FC236}">
+                <a16:creationId xmlns:a16="http://schemas.microsoft.com/office/drawing/2014/main" id="{765B6492-E1B1-4E54-A858-079457660303}"/>
+              </a:ext>
+            </a:extLst>
+          </p:cNvPr>
+          <p:cNvSpPr txBox="1"/>
+          <p:nvPr/>
+        </p:nvSpPr>
+        <p:spPr>
+          <a:xfrm>
+            <a:off x="3048296" y="3724455"/>
+            <a:ext cx="307777" cy="1019222"/>
+          </a:xfrm>
+          <a:prstGeom prst="rect">
+            <a:avLst/>
+          </a:prstGeom>
+          <a:noFill/>
+        </p:spPr>
+        <p:txBody>
+          <a:bodyPr vert="eaVert" wrap="square" rtlCol="0">
+            <a:spAutoFit/>
+          </a:bodyPr>
+          <a:lstStyle>
+            <a:defPPr>
+              <a:defRPr lang="en-US"/>
+            </a:defPPr>
+            <a:lvl1pPr algn="ctr">
+              <a:defRPr sz="800">
+                <a:latin typeface="宋体" panose="02010600030101010101" pitchFamily="2" charset="-122"/>
+                <a:ea typeface="宋体" panose="02010600030101010101" pitchFamily="2" charset="-122"/>
+              </a:defRPr>
+            </a:lvl1pPr>
+          </a:lstStyle>
+          <a:p>
+            <a:r>
+              <a:rPr lang="zh-CN" altLang="en-US" dirty="0"/>
+              <a:t>提示词操纵攻击</a:t>
+            </a:r>
+          </a:p>
+        </p:txBody>
+      </p:sp>
+      <p:sp>
+        <p:nvSpPr>
+          <p:cNvPr id="113" name="矩形 112">
+            <a:extLst>
+              <a:ext uri="{FF2B5EF4-FFF2-40B4-BE49-F238E27FC236}">
+                <a16:creationId xmlns:a16="http://schemas.microsoft.com/office/drawing/2014/main" id="{9B606D5F-583F-44F9-842A-C6833603D450}"/>
+              </a:ext>
+            </a:extLst>
+          </p:cNvPr>
+          <p:cNvSpPr/>
+          <p:nvPr/>
+        </p:nvSpPr>
+        <p:spPr>
+          <a:xfrm>
+            <a:off x="2525243" y="3579418"/>
+            <a:ext cx="263984" cy="1309297"/>
+          </a:xfrm>
+          <a:prstGeom prst="rect">
+            <a:avLst/>
+          </a:prstGeom>
+          <a:solidFill>
+            <a:srgbClr val="EAF1DF"/>
+          </a:solidFill>
+          <a:ln w="9525">
+            <a:solidFill>
+              <a:schemeClr val="tx1">
+                <a:lumMod val="95000"/>
+                <a:lumOff val="5000"/>
+              </a:schemeClr>
+            </a:solidFill>
+          </a:ln>
+        </p:spPr>
+        <p:style>
+          <a:lnRef idx="2">
+            <a:schemeClr val="accent1">
+              <a:shade val="50000"/>
+            </a:schemeClr>
+          </a:lnRef>
+          <a:fillRef idx="1">
+            <a:schemeClr val="accent1"/>
+          </a:fillRef>
+          <a:effectRef idx="0">
+            <a:schemeClr val="accent1"/>
+          </a:effectRef>
+          <a:fontRef idx="minor">
+            <a:schemeClr val="lt1"/>
+          </a:fontRef>
+        </p:style>
+        <p:txBody>
+          <a:bodyPr rtlCol="0" anchor="ctr"/>
+          <a:lstStyle/>
+          <a:p>
+            <a:pPr algn="ctr"/>
+            <a:endParaRPr lang="zh-CN" altLang="en-US" dirty="0"/>
+          </a:p>
+        </p:txBody>
+      </p:sp>
+      <p:sp>
+        <p:nvSpPr>
+          <p:cNvPr id="116" name="文本框 115">
+            <a:extLst>
+              <a:ext uri="{FF2B5EF4-FFF2-40B4-BE49-F238E27FC236}">
+                <a16:creationId xmlns:a16="http://schemas.microsoft.com/office/drawing/2014/main" id="{1C7906AC-DE1B-4836-BC06-1AB5338A72D4}"/>
+              </a:ext>
+            </a:extLst>
+          </p:cNvPr>
+          <p:cNvSpPr txBox="1"/>
+          <p:nvPr/>
+        </p:nvSpPr>
+        <p:spPr>
+          <a:xfrm>
+            <a:off x="2503347" y="3641847"/>
+            <a:ext cx="307777" cy="1184441"/>
+          </a:xfrm>
+          <a:prstGeom prst="rect">
+            <a:avLst/>
+          </a:prstGeom>
+          <a:noFill/>
+        </p:spPr>
+        <p:txBody>
+          <a:bodyPr vert="eaVert" wrap="square" rtlCol="0">
+            <a:spAutoFit/>
+          </a:bodyPr>
+          <a:lstStyle/>
+          <a:p>
+            <a:pPr algn="ctr"/>
+            <a:r>
+              <a:rPr lang="zh-CN" altLang="en-US" sz="800" dirty="0">
+                <a:latin typeface="宋体" panose="02010600030101010101" pitchFamily="2" charset="-122"/>
+                <a:ea typeface="宋体" panose="02010600030101010101" pitchFamily="2" charset="-122"/>
+              </a:rPr>
+              <a:t>数据投毒攻击</a:t>
+            </a:r>
+          </a:p>
+        </p:txBody>
+      </p:sp>
+      <p:sp>
+        <p:nvSpPr>
+          <p:cNvPr id="58" name="矩形 57">
+            <a:extLst>
+              <a:ext uri="{FF2B5EF4-FFF2-40B4-BE49-F238E27FC236}">
+                <a16:creationId xmlns:a16="http://schemas.microsoft.com/office/drawing/2014/main" id="{E6096784-2369-42F3-9478-945E2FF684A8}"/>
+              </a:ext>
+            </a:extLst>
+          </p:cNvPr>
+          <p:cNvSpPr/>
+          <p:nvPr/>
+        </p:nvSpPr>
+        <p:spPr>
+          <a:xfrm>
+            <a:off x="3615733" y="3579417"/>
+            <a:ext cx="262800" cy="1309298"/>
+          </a:xfrm>
+          <a:prstGeom prst="rect">
+            <a:avLst/>
+          </a:prstGeom>
+          <a:solidFill>
+            <a:srgbClr val="EAF1DF"/>
+          </a:solidFill>
+          <a:ln w="9525">
+            <a:solidFill>
+              <a:schemeClr val="tx1">
+                <a:lumMod val="95000"/>
+                <a:lumOff val="5000"/>
+              </a:schemeClr>
+            </a:solidFill>
+          </a:ln>
+        </p:spPr>
+        <p:style>
+          <a:lnRef idx="2">
+            <a:schemeClr val="accent1">
+              <a:shade val="50000"/>
+            </a:schemeClr>
+          </a:lnRef>
+          <a:fillRef idx="1">
+            <a:schemeClr val="accent1"/>
+          </a:fillRef>
+          <a:effectRef idx="0">
+            <a:schemeClr val="accent1"/>
+          </a:effectRef>
+          <a:fontRef idx="minor">
+            <a:schemeClr val="lt1"/>
+          </a:fontRef>
+        </p:style>
+        <p:txBody>
+          <a:bodyPr rtlCol="0" anchor="ctr"/>
+          <a:lstStyle/>
+          <a:p>
+            <a:pPr algn="ctr"/>
+            <a:endParaRPr lang="zh-CN" altLang="en-US" dirty="0"/>
+          </a:p>
+        </p:txBody>
+      </p:sp>
+      <p:sp>
+        <p:nvSpPr>
+          <p:cNvPr id="59" name="文本框 58">
+            <a:extLst>
+              <a:ext uri="{FF2B5EF4-FFF2-40B4-BE49-F238E27FC236}">
+                <a16:creationId xmlns:a16="http://schemas.microsoft.com/office/drawing/2014/main" id="{25DBB5D8-ED8B-4946-9DFB-1CCB2B8193BD}"/>
+              </a:ext>
+            </a:extLst>
+          </p:cNvPr>
+          <p:cNvSpPr txBox="1"/>
+          <p:nvPr/>
+        </p:nvSpPr>
+        <p:spPr>
+          <a:xfrm>
+            <a:off x="3593245" y="3724455"/>
+            <a:ext cx="307777" cy="1019222"/>
+          </a:xfrm>
+          <a:prstGeom prst="rect">
+            <a:avLst/>
+          </a:prstGeom>
+          <a:noFill/>
+        </p:spPr>
+        <p:txBody>
+          <a:bodyPr vert="eaVert" wrap="square" rtlCol="0">
+            <a:spAutoFit/>
+          </a:bodyPr>
+          <a:lstStyle>
+            <a:defPPr>
+              <a:defRPr lang="en-US"/>
+            </a:defPPr>
+            <a:lvl1pPr algn="ctr">
+              <a:defRPr sz="800">
+                <a:latin typeface="宋体" panose="02010600030101010101" pitchFamily="2" charset="-122"/>
+                <a:ea typeface="宋体" panose="02010600030101010101" pitchFamily="2" charset="-122"/>
+              </a:defRPr>
+            </a:lvl1pPr>
+          </a:lstStyle>
+          <a:p>
+            <a:r>
+              <a:rPr lang="zh-CN" altLang="en-US" dirty="0"/>
+              <a:t>越狱攻击</a:t>
+            </a:r>
+          </a:p>
+        </p:txBody>
+      </p:sp>
+      <p:sp>
+        <p:nvSpPr>
+          <p:cNvPr id="102" name="矩形 101">
+            <a:extLst>
+              <a:ext uri="{FF2B5EF4-FFF2-40B4-BE49-F238E27FC236}">
+                <a16:creationId xmlns:a16="http://schemas.microsoft.com/office/drawing/2014/main" id="{B61E2372-7676-4D75-9A39-543380D198C2}"/>
+              </a:ext>
+            </a:extLst>
+          </p:cNvPr>
+          <p:cNvSpPr/>
+          <p:nvPr/>
+        </p:nvSpPr>
+        <p:spPr>
+          <a:xfrm>
+            <a:off x="5860087" y="2399648"/>
+            <a:ext cx="352800" cy="2483901"/>
+          </a:xfrm>
+          <a:prstGeom prst="rect">
+            <a:avLst/>
+          </a:prstGeom>
+          <a:solidFill>
+            <a:srgbClr val="DBEEF4"/>
+          </a:solidFill>
+          <a:ln w="9525">
+            <a:solidFill>
+              <a:schemeClr val="tx1">
+                <a:lumMod val="95000"/>
+                <a:lumOff val="5000"/>
+              </a:schemeClr>
+            </a:solidFill>
+          </a:ln>
+        </p:spPr>
+        <p:style>
+          <a:lnRef idx="2">
+            <a:schemeClr val="accent1">
+              <a:shade val="50000"/>
+            </a:schemeClr>
+          </a:lnRef>
+          <a:fillRef idx="1">
+            <a:schemeClr val="accent1"/>
+          </a:fillRef>
+          <a:effectRef idx="0">
+            <a:schemeClr val="accent1"/>
+          </a:effectRef>
+          <a:fontRef idx="minor">
+            <a:schemeClr val="lt1"/>
+          </a:fontRef>
+        </p:style>
+        <p:txBody>
+          <a:bodyPr rtlCol="0" anchor="ctr"/>
+          <a:lstStyle/>
+          <a:p>
+            <a:pPr algn="ctr"/>
+            <a:endParaRPr lang="zh-CN" altLang="en-US"/>
+          </a:p>
+        </p:txBody>
+      </p:sp>
+      <p:sp>
+        <p:nvSpPr>
+          <p:cNvPr id="72" name="文本框 71">
+            <a:extLst>
+              <a:ext uri="{FF2B5EF4-FFF2-40B4-BE49-F238E27FC236}">
+                <a16:creationId xmlns:a16="http://schemas.microsoft.com/office/drawing/2014/main" id="{6C76486C-E033-469F-AEA1-8323DB1FF106}"/>
+              </a:ext>
+            </a:extLst>
+          </p:cNvPr>
+          <p:cNvSpPr txBox="1"/>
+          <p:nvPr/>
+        </p:nvSpPr>
+        <p:spPr>
+          <a:xfrm>
+            <a:off x="5874905" y="2787531"/>
+            <a:ext cx="323165" cy="1708135"/>
+          </a:xfrm>
+          <a:prstGeom prst="rect">
+            <a:avLst/>
+          </a:prstGeom>
+          <a:noFill/>
+        </p:spPr>
+        <p:txBody>
+          <a:bodyPr vert="eaVert" wrap="square" rtlCol="0">
+            <a:spAutoFit/>
+          </a:bodyPr>
+          <a:lstStyle/>
+          <a:p>
+            <a:pPr algn="ctr"/>
+            <a:r>
+              <a:rPr lang="zh-CN" altLang="en-US" sz="900" b="1" dirty="0">
+                <a:latin typeface="宋体" panose="02010600030101010101" pitchFamily="2" charset="-122"/>
+                <a:ea typeface="宋体" panose="02010600030101010101" pitchFamily="2" charset="-122"/>
+              </a:rPr>
+              <a:t>第六章 </a:t>
+            </a:r>
+            <a:r>
+              <a:rPr lang="zh-CN" altLang="en-US" sz="900" dirty="0">
+                <a:latin typeface="宋体" panose="02010600030101010101" pitchFamily="2" charset="-122"/>
+                <a:ea typeface="宋体" panose="02010600030101010101" pitchFamily="2" charset="-122"/>
+              </a:rPr>
+              <a:t>总结与展望</a:t>
+            </a:r>
+          </a:p>
+        </p:txBody>
+      </p:sp>
+      <p:sp>
+        <p:nvSpPr>
+          <p:cNvPr id="89" name="箭头: 下 88">
+            <a:extLst>
+              <a:ext uri="{FF2B5EF4-FFF2-40B4-BE49-F238E27FC236}">
+                <a16:creationId xmlns:a16="http://schemas.microsoft.com/office/drawing/2014/main" id="{12728C5A-F692-4DB4-8755-E4C8FA57E191}"/>
+              </a:ext>
+            </a:extLst>
+          </p:cNvPr>
+          <p:cNvSpPr/>
+          <p:nvPr/>
+        </p:nvSpPr>
+        <p:spPr>
+          <a:xfrm>
+            <a:off x="3159938" y="2795151"/>
+            <a:ext cx="89803" cy="122185"/>
+          </a:xfrm>
+          <a:prstGeom prst="downArrow">
+            <a:avLst/>
+          </a:prstGeom>
+          <a:solidFill>
+            <a:schemeClr val="tx1"/>
+          </a:solidFill>
+          <a:ln>
+            <a:noFill/>
+          </a:ln>
+        </p:spPr>
+        <p:style>
+          <a:lnRef idx="2">
+            <a:schemeClr val="accent1">
+              <a:shade val="50000"/>
+            </a:schemeClr>
+          </a:lnRef>
+          <a:fillRef idx="1">
+            <a:schemeClr val="accent1"/>
+          </a:fillRef>
+          <a:effectRef idx="0">
+            <a:schemeClr val="accent1"/>
+          </a:effectRef>
+          <a:fontRef idx="minor">
+            <a:schemeClr val="lt1"/>
+          </a:fontRef>
+        </p:style>
+        <p:txBody>
+          <a:bodyPr rtlCol="0" anchor="ctr"/>
+          <a:lstStyle/>
+          <a:p>
+            <a:pPr algn="ctr"/>
+            <a:endParaRPr lang="zh-CN" altLang="en-US"/>
+          </a:p>
+        </p:txBody>
+      </p:sp>
+      <p:sp>
+        <p:nvSpPr>
+          <p:cNvPr id="90" name="箭头: 下 89">
+            <a:extLst>
+              <a:ext uri="{FF2B5EF4-FFF2-40B4-BE49-F238E27FC236}">
+                <a16:creationId xmlns:a16="http://schemas.microsoft.com/office/drawing/2014/main" id="{33F90FA4-2404-45BA-A510-1F642DFC1CDF}"/>
+              </a:ext>
+            </a:extLst>
+          </p:cNvPr>
+          <p:cNvSpPr/>
+          <p:nvPr/>
+        </p:nvSpPr>
+        <p:spPr>
+          <a:xfrm>
+            <a:off x="4882793" y="2795151"/>
+            <a:ext cx="89803" cy="122185"/>
+          </a:xfrm>
+          <a:prstGeom prst="downArrow">
+            <a:avLst/>
+          </a:prstGeom>
+          <a:solidFill>
+            <a:schemeClr val="tx1"/>
+          </a:solidFill>
+          <a:ln>
+            <a:noFill/>
+          </a:ln>
+        </p:spPr>
+        <p:style>
+          <a:lnRef idx="2">
+            <a:schemeClr val="accent1">
+              <a:shade val="50000"/>
+            </a:schemeClr>
+          </a:lnRef>
+          <a:fillRef idx="1">
+            <a:schemeClr val="accent1"/>
+          </a:fillRef>
+          <a:effectRef idx="0">
+            <a:schemeClr val="accent1"/>
+          </a:effectRef>
+          <a:fontRef idx="minor">
+            <a:schemeClr val="lt1"/>
+          </a:fontRef>
+        </p:style>
+        <p:txBody>
+          <a:bodyPr rtlCol="0" anchor="ctr"/>
+          <a:lstStyle/>
+          <a:p>
+            <a:pPr algn="ctr"/>
+            <a:endParaRPr lang="zh-CN" altLang="en-US"/>
+          </a:p>
+        </p:txBody>
+      </p:sp>
+      <p:cxnSp>
+        <p:nvCxnSpPr>
+          <p:cNvPr id="37" name="直接连接符 36">
+            <a:extLst>
+              <a:ext uri="{FF2B5EF4-FFF2-40B4-BE49-F238E27FC236}">
+                <a16:creationId xmlns:a16="http://schemas.microsoft.com/office/drawing/2014/main" id="{A5E434E5-DB8D-4955-86DC-E615A9220D70}"/>
+              </a:ext>
+            </a:extLst>
+          </p:cNvPr>
+          <p:cNvCxnSpPr>
+            <a:cxnSpLocks/>
+            <a:stCxn id="97" idx="3"/>
+            <a:endCxn id="114" idx="0"/>
+          </p:cNvCxnSpPr>
+          <p:nvPr/>
+        </p:nvCxnSpPr>
+        <p:spPr>
+          <a:xfrm>
+            <a:off x="3202184" y="3368097"/>
+            <a:ext cx="0" cy="211320"/>
+          </a:xfrm>
+          <a:prstGeom prst="line">
+            <a:avLst/>
+          </a:prstGeom>
+          <a:ln w="9525">
+            <a:solidFill>
+              <a:schemeClr val="tx1"/>
+            </a:solidFill>
+          </a:ln>
+        </p:spPr>
+        <p:style>
+          <a:lnRef idx="1">
+            <a:schemeClr val="accent1"/>
+          </a:lnRef>
+          <a:fillRef idx="0">
+            <a:schemeClr val="accent1"/>
+          </a:fillRef>
+          <a:effectRef idx="0">
+            <a:schemeClr val="accent1"/>
+          </a:effectRef>
+          <a:fontRef idx="minor">
+            <a:schemeClr val="tx1"/>
+          </a:fontRef>
+        </p:style>
+      </p:cxnSp>
+      <p:sp>
+        <p:nvSpPr>
+          <p:cNvPr id="163" name="文本框 162">
+            <a:extLst>
+              <a:ext uri="{FF2B5EF4-FFF2-40B4-BE49-F238E27FC236}">
+                <a16:creationId xmlns:a16="http://schemas.microsoft.com/office/drawing/2014/main" id="{7CB125A9-EA1C-4F70-84D7-A4F8BD29D05C}"/>
+              </a:ext>
+            </a:extLst>
+          </p:cNvPr>
+          <p:cNvSpPr txBox="1"/>
+          <p:nvPr/>
+        </p:nvSpPr>
+        <p:spPr>
+          <a:xfrm>
+            <a:off x="2028069" y="2748006"/>
+            <a:ext cx="538107" cy="215444"/>
+          </a:xfrm>
+          <a:prstGeom prst="rect">
+            <a:avLst/>
+          </a:prstGeom>
+          <a:noFill/>
+        </p:spPr>
+        <p:txBody>
+          <a:bodyPr wrap="square">
+            <a:spAutoFit/>
+          </a:bodyPr>
+          <a:lstStyle/>
+          <a:p>
+            <a:pPr algn="ctr"/>
+            <a:r>
+              <a:rPr lang="zh-CN" altLang="en-US" sz="800" dirty="0">
+                <a:latin typeface="宋体" panose="02010600030101010101" pitchFamily="2" charset="-122"/>
+                <a:ea typeface="宋体" panose="02010600030101010101" pitchFamily="2" charset="-122"/>
+              </a:rPr>
+              <a:t>问题</a:t>
+            </a:r>
+            <a:r>
+              <a:rPr lang="en-US" altLang="zh-CN" sz="800" dirty="0">
+                <a:latin typeface="宋体" panose="02010600030101010101" pitchFamily="2" charset="-122"/>
+                <a:ea typeface="宋体" panose="02010600030101010101" pitchFamily="2" charset="-122"/>
+              </a:rPr>
+              <a:t>(1)</a:t>
+            </a:r>
+            <a:endParaRPr lang="zh-CN" altLang="en-US" sz="800" dirty="0">
+              <a:latin typeface="宋体" panose="02010600030101010101" pitchFamily="2" charset="-122"/>
+              <a:ea typeface="宋体" panose="02010600030101010101" pitchFamily="2" charset="-122"/>
+            </a:endParaRPr>
+          </a:p>
+        </p:txBody>
+      </p:sp>
+      <p:sp>
+        <p:nvSpPr>
+          <p:cNvPr id="164" name="文本框 163">
+            <a:extLst>
+              <a:ext uri="{FF2B5EF4-FFF2-40B4-BE49-F238E27FC236}">
+                <a16:creationId xmlns:a16="http://schemas.microsoft.com/office/drawing/2014/main" id="{317B9721-C980-4F04-AE4B-916C95A66A29}"/>
+              </a:ext>
+            </a:extLst>
+          </p:cNvPr>
+          <p:cNvSpPr txBox="1"/>
+          <p:nvPr/>
+        </p:nvSpPr>
+        <p:spPr>
+          <a:xfrm>
+            <a:off x="3192938" y="2748006"/>
+            <a:ext cx="519907" cy="215444"/>
+          </a:xfrm>
+          <a:prstGeom prst="rect">
+            <a:avLst/>
+          </a:prstGeom>
+          <a:noFill/>
+        </p:spPr>
+        <p:txBody>
+          <a:bodyPr wrap="square">
+            <a:spAutoFit/>
+          </a:bodyPr>
+          <a:lstStyle/>
+          <a:p>
+            <a:pPr algn="ctr"/>
+            <a:r>
+              <a:rPr lang="zh-CN" altLang="en-US" sz="800" dirty="0">
+                <a:latin typeface="宋体" panose="02010600030101010101" pitchFamily="2" charset="-122"/>
+                <a:ea typeface="宋体" panose="02010600030101010101" pitchFamily="2" charset="-122"/>
+              </a:rPr>
+              <a:t>问题</a:t>
+            </a:r>
+            <a:r>
+              <a:rPr lang="en-US" altLang="zh-CN" sz="800" dirty="0">
+                <a:latin typeface="宋体" panose="02010600030101010101" pitchFamily="2" charset="-122"/>
+                <a:ea typeface="宋体" panose="02010600030101010101" pitchFamily="2" charset="-122"/>
+              </a:rPr>
+              <a:t>(2)</a:t>
+            </a:r>
+            <a:endParaRPr lang="zh-CN" altLang="en-US" sz="800" dirty="0"/>
+          </a:p>
+        </p:txBody>
+      </p:sp>
+      <p:sp>
+        <p:nvSpPr>
+          <p:cNvPr id="165" name="文本框 164">
+            <a:extLst>
+              <a:ext uri="{FF2B5EF4-FFF2-40B4-BE49-F238E27FC236}">
+                <a16:creationId xmlns:a16="http://schemas.microsoft.com/office/drawing/2014/main" id="{083658EC-B224-4D1F-B39E-435F41A4C79A}"/>
+              </a:ext>
+            </a:extLst>
+          </p:cNvPr>
+          <p:cNvSpPr txBox="1"/>
+          <p:nvPr/>
+        </p:nvSpPr>
+        <p:spPr>
+          <a:xfrm>
+            <a:off x="4842517" y="2748006"/>
+            <a:ext cx="674842" cy="215444"/>
+          </a:xfrm>
+          <a:prstGeom prst="rect">
+            <a:avLst/>
+          </a:prstGeom>
+          <a:noFill/>
+        </p:spPr>
+        <p:txBody>
+          <a:bodyPr wrap="square">
+            <a:spAutoFit/>
+          </a:bodyPr>
+          <a:lstStyle/>
+          <a:p>
+            <a:pPr algn="ctr"/>
+            <a:r>
+              <a:rPr lang="zh-CN" altLang="en-US" sz="800" dirty="0">
+                <a:latin typeface="宋体" panose="02010600030101010101" pitchFamily="2" charset="-122"/>
+                <a:ea typeface="宋体" panose="02010600030101010101" pitchFamily="2" charset="-122"/>
+              </a:rPr>
+              <a:t>问题</a:t>
+            </a:r>
+            <a:r>
+              <a:rPr lang="en-US" altLang="zh-CN" sz="800" dirty="0">
+                <a:latin typeface="宋体" panose="02010600030101010101" pitchFamily="2" charset="-122"/>
+                <a:ea typeface="宋体" panose="02010600030101010101" pitchFamily="2" charset="-122"/>
+              </a:rPr>
+              <a:t>(3)</a:t>
+            </a:r>
+            <a:endParaRPr lang="zh-CN" altLang="en-US" sz="800" dirty="0">
+              <a:latin typeface="宋体" panose="02010600030101010101" pitchFamily="2" charset="-122"/>
+              <a:ea typeface="宋体" panose="02010600030101010101" pitchFamily="2" charset="-122"/>
+            </a:endParaRPr>
+          </a:p>
+        </p:txBody>
+      </p:sp>
+      <p:cxnSp>
+        <p:nvCxnSpPr>
+          <p:cNvPr id="45" name="直接连接符 44">
+            <a:extLst>
+              <a:ext uri="{FF2B5EF4-FFF2-40B4-BE49-F238E27FC236}">
+                <a16:creationId xmlns:a16="http://schemas.microsoft.com/office/drawing/2014/main" id="{F2D79EED-B22D-D040-E524-5ABD7F0910E8}"/>
+              </a:ext>
+            </a:extLst>
+          </p:cNvPr>
+          <p:cNvCxnSpPr>
+            <a:cxnSpLocks/>
+            <a:stCxn id="86" idx="2"/>
+            <a:endCxn id="113" idx="0"/>
+          </p:cNvCxnSpPr>
+          <p:nvPr/>
+        </p:nvCxnSpPr>
+        <p:spPr>
+          <a:xfrm rot="5400000">
+            <a:off x="2823322" y="3200556"/>
+            <a:ext cx="212776" cy="544949"/>
+          </a:xfrm>
+          <a:prstGeom prst="bentConnector3">
+            <a:avLst>
+              <a:gd name="adj1" fmla="val 50000"/>
+            </a:avLst>
+          </a:prstGeom>
+          <a:ln w="9525">
+            <a:solidFill>
+              <a:schemeClr val="tx1"/>
+            </a:solidFill>
+          </a:ln>
+        </p:spPr>
+        <p:style>
+          <a:lnRef idx="1">
+            <a:schemeClr val="accent1"/>
+          </a:lnRef>
+          <a:fillRef idx="0">
+            <a:schemeClr val="accent1"/>
+          </a:fillRef>
+          <a:effectRef idx="0">
+            <a:schemeClr val="accent1"/>
+          </a:effectRef>
+          <a:fontRef idx="minor">
+            <a:schemeClr val="tx1"/>
+          </a:fontRef>
+        </p:style>
+      </p:cxnSp>
+      <p:cxnSp>
+        <p:nvCxnSpPr>
+          <p:cNvPr id="55" name="直接连接符 44">
+            <a:extLst>
+              <a:ext uri="{FF2B5EF4-FFF2-40B4-BE49-F238E27FC236}">
+                <a16:creationId xmlns:a16="http://schemas.microsoft.com/office/drawing/2014/main" id="{C5998D0B-1011-F233-5493-349C012859C2}"/>
+              </a:ext>
+            </a:extLst>
+          </p:cNvPr>
+          <p:cNvCxnSpPr>
+            <a:cxnSpLocks/>
+            <a:stCxn id="86" idx="2"/>
+            <a:endCxn id="58" idx="0"/>
+          </p:cNvCxnSpPr>
+          <p:nvPr/>
+        </p:nvCxnSpPr>
+        <p:spPr>
+          <a:xfrm rot="16200000" flipH="1">
+            <a:off x="3368271" y="3200554"/>
+            <a:ext cx="212775" cy="544949"/>
+          </a:xfrm>
+          <a:prstGeom prst="bentConnector3">
+            <a:avLst>
+              <a:gd name="adj1" fmla="val 50000"/>
+            </a:avLst>
+          </a:prstGeom>
+          <a:ln w="9525">
+            <a:solidFill>
+              <a:schemeClr val="tx1"/>
+            </a:solidFill>
+          </a:ln>
+        </p:spPr>
+        <p:style>
+          <a:lnRef idx="1">
+            <a:schemeClr val="accent1"/>
+          </a:lnRef>
+          <a:fillRef idx="0">
+            <a:schemeClr val="accent1"/>
+          </a:fillRef>
+          <a:effectRef idx="0">
+            <a:schemeClr val="accent1"/>
+          </a:effectRef>
+          <a:fontRef idx="minor">
+            <a:schemeClr val="tx1"/>
+          </a:fontRef>
+        </p:style>
+      </p:cxnSp>
+    </p:spTree>
+    <p:extLst>
+      <p:ext uri="{BB962C8B-B14F-4D97-AF65-F5344CB8AC3E}">
+        <p14:creationId xmlns:p14="http://schemas.microsoft.com/office/powerpoint/2010/main" val="3859370212"/>
+      </p:ext>
+    </p:extLst>
+  </p:cSld>
+  <p:clrMapOvr>
+    <a:masterClrMapping/>
+  </p:clrMapOvr>
+</p:sld>
+</file>
+
+<file path=ppt/slides/slide3.xml><?xml version="1.0" encoding="utf-8"?>
 <p:sld xmlns:a="http://schemas.openxmlformats.org/drawingml/2006/main" xmlns:r="http://schemas.openxmlformats.org/officeDocument/2006/relationships" xmlns:p="http://schemas.openxmlformats.org/presentationml/2006/main">
   <p:cSld>
     <p:spTree>
@@ -29823,7 +33143,7 @@
 </p:sld>
 </file>
 
-<file path=ppt/slides/slide3.xml><?xml version="1.0" encoding="utf-8"?>
+<file path=ppt/slides/slide4.xml><?xml version="1.0" encoding="utf-8"?>
 <p:sld xmlns:a="http://schemas.openxmlformats.org/drawingml/2006/main" xmlns:r="http://schemas.openxmlformats.org/officeDocument/2006/relationships" xmlns:p="http://schemas.openxmlformats.org/presentationml/2006/main">
   <p:cSld>
     <p:spTree>
@@ -30827,7 +34147,7 @@
 </p:sld>
 </file>
 
-<file path=ppt/slides/slide4.xml><?xml version="1.0" encoding="utf-8"?>
+<file path=ppt/slides/slide5.xml><?xml version="1.0" encoding="utf-8"?>
 <p:sld xmlns:a="http://schemas.openxmlformats.org/drawingml/2006/main" xmlns:r="http://schemas.openxmlformats.org/officeDocument/2006/relationships" xmlns:p="http://schemas.openxmlformats.org/presentationml/2006/main">
   <p:cSld>
     <p:spTree>
@@ -33765,7 +37085,7 @@
 </p:sld>
 </file>
 
-<file path=ppt/slides/slide5.xml><?xml version="1.0" encoding="utf-8"?>
+<file path=ppt/slides/slide6.xml><?xml version="1.0" encoding="utf-8"?>
 <p:sld xmlns:a="http://schemas.openxmlformats.org/drawingml/2006/main" xmlns:r="http://schemas.openxmlformats.org/officeDocument/2006/relationships" xmlns:p="http://schemas.openxmlformats.org/presentationml/2006/main">
   <p:cSld>
     <p:spTree>
@@ -38027,7 +41347,7 @@
 </p:sld>
 </file>
 
-<file path=ppt/slides/slide6.xml><?xml version="1.0" encoding="utf-8"?>
+<file path=ppt/slides/slide7.xml><?xml version="1.0" encoding="utf-8"?>
 <p:sld xmlns:a="http://schemas.openxmlformats.org/drawingml/2006/main" xmlns:r="http://schemas.openxmlformats.org/officeDocument/2006/relationships" xmlns:p="http://schemas.openxmlformats.org/presentationml/2006/main">
   <p:cSld>
     <p:spTree>
@@ -39286,7 +42606,7 @@
 </p:sld>
 </file>
 
-<file path=ppt/slides/slide7.xml><?xml version="1.0" encoding="utf-8"?>
+<file path=ppt/slides/slide8.xml><?xml version="1.0" encoding="utf-8"?>
 <p:sld xmlns:a="http://schemas.openxmlformats.org/drawingml/2006/main" xmlns:r="http://schemas.openxmlformats.org/officeDocument/2006/relationships" xmlns:p="http://schemas.openxmlformats.org/presentationml/2006/main">
   <p:cSld>
     <p:spTree>
@@ -41613,7 +44933,7 @@
 </p:sld>
 </file>
 
-<file path=ppt/slides/slide8.xml><?xml version="1.0" encoding="utf-8"?>
+<file path=ppt/slides/slide9.xml><?xml version="1.0" encoding="utf-8"?>
 <p:sld xmlns:a="http://schemas.openxmlformats.org/drawingml/2006/main" xmlns:r="http://schemas.openxmlformats.org/officeDocument/2006/relationships" xmlns:p="http://schemas.openxmlformats.org/presentationml/2006/main">
   <p:cSld>
     <p:spTree>
@@ -44213,1322 +47533,6 @@
 </p:sld>
 </file>
 
-<file path=ppt/slides/slide9.xml><?xml version="1.0" encoding="utf-8"?>
-<p:sld xmlns:a="http://schemas.openxmlformats.org/drawingml/2006/main" xmlns:r="http://schemas.openxmlformats.org/officeDocument/2006/relationships" xmlns:p="http://schemas.openxmlformats.org/presentationml/2006/main">
-  <p:cSld>
-    <p:spTree>
-      <p:nvGrpSpPr>
-        <p:cNvPr id="1" name=""/>
-        <p:cNvGrpSpPr/>
-        <p:nvPr/>
-      </p:nvGrpSpPr>
-      <p:grpSpPr>
-        <a:xfrm>
-          <a:off x="0" y="0"/>
-          <a:ext cx="0" cy="0"/>
-          <a:chOff x="0" y="0"/>
-          <a:chExt cx="0" cy="0"/>
-        </a:xfrm>
-      </p:grpSpPr>
-      <p:grpSp>
-        <p:nvGrpSpPr>
-          <p:cNvPr id="2" name="组合 1">
-            <a:extLst>
-              <a:ext uri="{FF2B5EF4-FFF2-40B4-BE49-F238E27FC236}">
-                <a16:creationId xmlns:a16="http://schemas.microsoft.com/office/drawing/2014/main" id="{707FA83C-CD07-0572-38FC-7AED4AAB39F5}"/>
-              </a:ext>
-            </a:extLst>
-          </p:cNvPr>
-          <p:cNvGrpSpPr/>
-          <p:nvPr/>
-        </p:nvGrpSpPr>
-        <p:grpSpPr>
-          <a:xfrm>
-            <a:off x="1091996" y="836848"/>
-            <a:ext cx="4119942" cy="3046305"/>
-            <a:chOff x="1091996" y="836848"/>
-            <a:chExt cx="4119942" cy="3046305"/>
-          </a:xfrm>
-        </p:grpSpPr>
-        <p:grpSp>
-          <p:nvGrpSpPr>
-            <p:cNvPr id="5" name="组合 4">
-              <a:extLst>
-                <a:ext uri="{FF2B5EF4-FFF2-40B4-BE49-F238E27FC236}">
-                  <a16:creationId xmlns:a16="http://schemas.microsoft.com/office/drawing/2014/main" id="{1A89A06C-5819-BBB9-DD21-058B01F5E2E4}"/>
-                </a:ext>
-              </a:extLst>
-            </p:cNvPr>
-            <p:cNvGrpSpPr/>
-            <p:nvPr/>
-          </p:nvGrpSpPr>
-          <p:grpSpPr>
-            <a:xfrm>
-              <a:off x="1091996" y="836848"/>
-              <a:ext cx="4119942" cy="1272368"/>
-              <a:chOff x="1091996" y="763696"/>
-              <a:chExt cx="4119942" cy="1272368"/>
-            </a:xfrm>
-          </p:grpSpPr>
-          <p:sp>
-            <p:nvSpPr>
-              <p:cNvPr id="17" name="矩形: 圆角 16">
-                <a:extLst>
-                  <a:ext uri="{FF2B5EF4-FFF2-40B4-BE49-F238E27FC236}">
-                    <a16:creationId xmlns:a16="http://schemas.microsoft.com/office/drawing/2014/main" id="{2C5ABBE5-CBA3-81A1-8B92-C7ED4638FC6D}"/>
-                  </a:ext>
-                </a:extLst>
-              </p:cNvPr>
-              <p:cNvSpPr/>
-              <p:nvPr/>
-            </p:nvSpPr>
-            <p:spPr>
-              <a:xfrm>
-                <a:off x="1091996" y="763696"/>
-                <a:ext cx="4119942" cy="1272368"/>
-              </a:xfrm>
-              <a:prstGeom prst="roundRect">
-                <a:avLst>
-                  <a:gd name="adj" fmla="val 9480"/>
-                </a:avLst>
-              </a:prstGeom>
-              <a:solidFill>
-                <a:srgbClr val="DEEBF7"/>
-              </a:solidFill>
-              <a:ln w="9525">
-                <a:solidFill>
-                  <a:schemeClr val="tx1"/>
-                </a:solidFill>
-                <a:round/>
-              </a:ln>
-              <a:effectLst/>
-            </p:spPr>
-            <p:style>
-              <a:lnRef idx="2">
-                <a:schemeClr val="accent1">
-                  <a:shade val="50000"/>
-                </a:schemeClr>
-              </a:lnRef>
-              <a:fillRef idx="1">
-                <a:schemeClr val="accent1"/>
-              </a:fillRef>
-              <a:effectRef idx="0">
-                <a:schemeClr val="accent1"/>
-              </a:effectRef>
-              <a:fontRef idx="minor">
-                <a:schemeClr val="lt1"/>
-              </a:fontRef>
-            </p:style>
-            <p:txBody>
-              <a:bodyPr rtlCol="0" anchor="ctr"/>
-              <a:lstStyle/>
-              <a:p>
-                <a:pPr algn="ctr"/>
-                <a:endParaRPr lang="zh-CN" altLang="en-US" dirty="0"/>
-              </a:p>
-            </p:txBody>
-          </p:sp>
-          <p:sp>
-            <p:nvSpPr>
-              <p:cNvPr id="18" name="文本框 17">
-                <a:extLst>
-                  <a:ext uri="{FF2B5EF4-FFF2-40B4-BE49-F238E27FC236}">
-                    <a16:creationId xmlns:a16="http://schemas.microsoft.com/office/drawing/2014/main" id="{F6E189C5-0843-D22B-5012-DBD1E1E90160}"/>
-                  </a:ext>
-                </a:extLst>
-              </p:cNvPr>
-              <p:cNvSpPr txBox="1"/>
-              <p:nvPr/>
-            </p:nvSpPr>
-            <p:spPr>
-              <a:xfrm>
-                <a:off x="1131691" y="967246"/>
-                <a:ext cx="4040553" cy="1061829"/>
-              </a:xfrm>
-              <a:prstGeom prst="rect">
-                <a:avLst/>
-              </a:prstGeom>
-              <a:noFill/>
-            </p:spPr>
-            <p:txBody>
-              <a:bodyPr wrap="square" rtlCol="0">
-                <a:spAutoFit/>
-              </a:bodyPr>
-              <a:lstStyle/>
-              <a:p>
-                <a:pPr marL="171450" indent="-171450">
-                  <a:buFont typeface="Arial" panose="020B0604020202020204" pitchFamily="34" charset="0"/>
-                  <a:buChar char="•"/>
-                </a:pPr>
-                <a:r>
-                  <a:rPr lang="zh-CN" altLang="en-US" sz="900" dirty="0">
-                    <a:latin typeface="宋体" panose="02010600030101010101" pitchFamily="2" charset="-122"/>
-                    <a:ea typeface="宋体" panose="02010600030101010101" pitchFamily="2" charset="-122"/>
-                    <a:cs typeface="Arial" panose="020B0604020202020204" pitchFamily="34" charset="0"/>
-                  </a:rPr>
-                  <a:t>基本情况：</a:t>
-                </a:r>
-                <a:r>
-                  <a:rPr lang="en-US" altLang="zh-CN" sz="900" dirty="0">
-                    <a:latin typeface="宋体" panose="02010600030101010101" pitchFamily="2" charset="-122"/>
-                    <a:ea typeface="宋体" panose="02010600030101010101" pitchFamily="2" charset="-122"/>
-                    <a:cs typeface="Arial" panose="020B0604020202020204" pitchFamily="34" charset="0"/>
-                  </a:rPr>
-                  <a:t>	</a:t>
-                </a:r>
-                <a:r>
-                  <a:rPr lang="zh-CN" altLang="en-US" sz="900" dirty="0">
-                    <a:latin typeface="宋体" panose="02010600030101010101" pitchFamily="2" charset="-122"/>
-                    <a:ea typeface="宋体" panose="02010600030101010101" pitchFamily="2" charset="-122"/>
-                    <a:cs typeface="Arial" panose="020B0604020202020204" pitchFamily="34" charset="0"/>
-                  </a:rPr>
-                  <a:t>女，</a:t>
-                </a:r>
-                <a:r>
-                  <a:rPr lang="en-US" altLang="zh-CN" sz="900" dirty="0">
-                    <a:latin typeface="宋体" panose="02010600030101010101" pitchFamily="2" charset="-122"/>
-                    <a:ea typeface="宋体" panose="02010600030101010101" pitchFamily="2" charset="-122"/>
-                    <a:cs typeface="Arial" panose="020B0604020202020204" pitchFamily="34" charset="0"/>
-                  </a:rPr>
-                  <a:t>39 </a:t>
-                </a:r>
-                <a:r>
-                  <a:rPr lang="zh-CN" altLang="en-US" sz="900" dirty="0">
-                    <a:latin typeface="宋体" panose="02010600030101010101" pitchFamily="2" charset="-122"/>
-                    <a:ea typeface="宋体" panose="02010600030101010101" pitchFamily="2" charset="-122"/>
-                    <a:cs typeface="Arial" panose="020B0604020202020204" pitchFamily="34" charset="0"/>
-                  </a:rPr>
-                  <a:t>岁。</a:t>
-                </a:r>
-              </a:p>
-              <a:p>
-                <a:pPr marL="171450" indent="-171450">
-                  <a:buFont typeface="Arial" panose="020B0604020202020204" pitchFamily="34" charset="0"/>
-                  <a:buChar char="•"/>
-                </a:pPr>
-                <a:r>
-                  <a:rPr lang="zh-CN" altLang="en-US" sz="900" dirty="0">
-                    <a:latin typeface="宋体" panose="02010600030101010101" pitchFamily="2" charset="-122"/>
-                    <a:ea typeface="宋体" panose="02010600030101010101" pitchFamily="2" charset="-122"/>
-                    <a:cs typeface="Arial" panose="020B0604020202020204" pitchFamily="34" charset="0"/>
-                  </a:rPr>
-                  <a:t>主诉：</a:t>
-                </a:r>
-                <a:r>
-                  <a:rPr lang="en-US" altLang="zh-CN" sz="900" dirty="0">
-                    <a:latin typeface="宋体" panose="02010600030101010101" pitchFamily="2" charset="-122"/>
-                    <a:ea typeface="宋体" panose="02010600030101010101" pitchFamily="2" charset="-122"/>
-                    <a:cs typeface="Arial" panose="020B0604020202020204" pitchFamily="34" charset="0"/>
-                  </a:rPr>
-                  <a:t>	</a:t>
-                </a:r>
-                <a:r>
-                  <a:rPr lang="zh-CN" altLang="en-US" sz="900" dirty="0">
-                    <a:latin typeface="宋体" panose="02010600030101010101" pitchFamily="2" charset="-122"/>
-                    <a:ea typeface="宋体" panose="02010600030101010101" pitchFamily="2" charset="-122"/>
-                    <a:cs typeface="Arial" panose="020B0604020202020204" pitchFamily="34" charset="0"/>
-                  </a:rPr>
-                  <a:t>多关节疼痛 </a:t>
-                </a:r>
-                <a:r>
-                  <a:rPr lang="en-US" altLang="zh-CN" sz="900" dirty="0">
-                    <a:latin typeface="宋体" panose="02010600030101010101" pitchFamily="2" charset="-122"/>
-                    <a:ea typeface="宋体" panose="02010600030101010101" pitchFamily="2" charset="-122"/>
-                    <a:cs typeface="Arial" panose="020B0604020202020204" pitchFamily="34" charset="0"/>
-                  </a:rPr>
-                  <a:t>1 </a:t>
-                </a:r>
-                <a:r>
-                  <a:rPr lang="zh-CN" altLang="en-US" sz="900" dirty="0">
-                    <a:latin typeface="宋体" panose="02010600030101010101" pitchFamily="2" charset="-122"/>
-                    <a:ea typeface="宋体" panose="02010600030101010101" pitchFamily="2" charset="-122"/>
-                    <a:cs typeface="Arial" panose="020B0604020202020204" pitchFamily="34" charset="0"/>
-                  </a:rPr>
-                  <a:t>年余，加重 </a:t>
-                </a:r>
-                <a:r>
-                  <a:rPr lang="en-US" altLang="zh-CN" sz="900" dirty="0">
-                    <a:latin typeface="宋体" panose="02010600030101010101" pitchFamily="2" charset="-122"/>
-                    <a:ea typeface="宋体" panose="02010600030101010101" pitchFamily="2" charset="-122"/>
-                    <a:cs typeface="Arial" panose="020B0604020202020204" pitchFamily="34" charset="0"/>
-                  </a:rPr>
-                  <a:t>5 </a:t>
-                </a:r>
-                <a:r>
-                  <a:rPr lang="zh-CN" altLang="en-US" sz="900" dirty="0">
-                    <a:latin typeface="宋体" panose="02010600030101010101" pitchFamily="2" charset="-122"/>
-                    <a:ea typeface="宋体" panose="02010600030101010101" pitchFamily="2" charset="-122"/>
-                    <a:cs typeface="Arial" panose="020B0604020202020204" pitchFamily="34" charset="0"/>
-                  </a:rPr>
-                  <a:t>天。</a:t>
-                </a:r>
-              </a:p>
-              <a:p>
-                <a:pPr marL="171450" indent="-171450">
-                  <a:buFont typeface="Arial" panose="020B0604020202020204" pitchFamily="34" charset="0"/>
-                  <a:buChar char="•"/>
-                </a:pPr>
-                <a:r>
-                  <a:rPr lang="zh-CN" altLang="en-US" sz="900" dirty="0">
-                    <a:latin typeface="宋体" panose="02010600030101010101" pitchFamily="2" charset="-122"/>
-                    <a:ea typeface="宋体" panose="02010600030101010101" pitchFamily="2" charset="-122"/>
-                    <a:cs typeface="Arial" panose="020B0604020202020204" pitchFamily="34" charset="0"/>
-                  </a:rPr>
-                  <a:t>检验指标：</a:t>
-                </a:r>
-                <a:r>
-                  <a:rPr lang="en-US" altLang="zh-CN" sz="900" dirty="0">
-                    <a:latin typeface="宋体" panose="02010600030101010101" pitchFamily="2" charset="-122"/>
-                    <a:ea typeface="宋体" panose="02010600030101010101" pitchFamily="2" charset="-122"/>
-                    <a:cs typeface="Arial" panose="020B0604020202020204" pitchFamily="34" charset="0"/>
-                  </a:rPr>
-                  <a:t>	</a:t>
-                </a:r>
-                <a:r>
-                  <a:rPr lang="zh-CN" altLang="en-US" sz="900" dirty="0">
-                    <a:latin typeface="宋体" panose="02010600030101010101" pitchFamily="2" charset="-122"/>
-                    <a:ea typeface="宋体" panose="02010600030101010101" pitchFamily="2" charset="-122"/>
-                    <a:cs typeface="Arial" panose="020B0604020202020204" pitchFamily="34" charset="0"/>
-                  </a:rPr>
-                  <a:t>类风湿因子 </a:t>
-                </a:r>
-                <a:r>
-                  <a:rPr lang="en-US" altLang="zh-CN" sz="900" dirty="0">
-                    <a:latin typeface="宋体" panose="02010600030101010101" pitchFamily="2" charset="-122"/>
-                    <a:ea typeface="宋体" panose="02010600030101010101" pitchFamily="2" charset="-122"/>
-                    <a:cs typeface="Arial" panose="020B0604020202020204" pitchFamily="34" charset="0"/>
-                  </a:rPr>
-                  <a:t>(RF)</a:t>
-                </a:r>
-                <a:r>
-                  <a:rPr lang="zh-CN" altLang="en-US" sz="900" dirty="0">
-                    <a:latin typeface="宋体" panose="02010600030101010101" pitchFamily="2" charset="-122"/>
-                    <a:ea typeface="宋体" panose="02010600030101010101" pitchFamily="2" charset="-122"/>
-                    <a:cs typeface="Arial" panose="020B0604020202020204" pitchFamily="34" charset="0"/>
-                  </a:rPr>
-                  <a:t>：</a:t>
-                </a:r>
-                <a:r>
-                  <a:rPr lang="en-US" altLang="zh-CN" sz="900" dirty="0">
-                    <a:latin typeface="宋体" panose="02010600030101010101" pitchFamily="2" charset="-122"/>
-                    <a:ea typeface="宋体" panose="02010600030101010101" pitchFamily="2" charset="-122"/>
-                    <a:cs typeface="Arial" panose="020B0604020202020204" pitchFamily="34" charset="0"/>
-                  </a:rPr>
-                  <a:t>240 IU/ml (↑)</a:t>
-                </a:r>
-              </a:p>
-              <a:p>
-                <a:pPr lvl="2"/>
-                <a:r>
-                  <a:rPr lang="zh-CN" altLang="en-US" sz="900" dirty="0">
-                    <a:latin typeface="宋体" panose="02010600030101010101" pitchFamily="2" charset="-122"/>
-                    <a:ea typeface="宋体" panose="02010600030101010101" pitchFamily="2" charset="-122"/>
-                    <a:cs typeface="Arial" panose="020B0604020202020204" pitchFamily="34" charset="0"/>
-                  </a:rPr>
-                  <a:t>抗环瓜氨酸肽抗体 </a:t>
-                </a:r>
-                <a:r>
-                  <a:rPr lang="en-US" altLang="zh-CN" sz="900" dirty="0">
-                    <a:latin typeface="宋体" panose="02010600030101010101" pitchFamily="2" charset="-122"/>
-                    <a:ea typeface="宋体" panose="02010600030101010101" pitchFamily="2" charset="-122"/>
-                    <a:cs typeface="Arial" panose="020B0604020202020204" pitchFamily="34" charset="0"/>
-                  </a:rPr>
-                  <a:t>(CCP)</a:t>
-                </a:r>
-                <a:r>
-                  <a:rPr lang="zh-CN" altLang="en-US" sz="900" dirty="0">
-                    <a:latin typeface="宋体" panose="02010600030101010101" pitchFamily="2" charset="-122"/>
-                    <a:ea typeface="宋体" panose="02010600030101010101" pitchFamily="2" charset="-122"/>
-                    <a:cs typeface="Arial" panose="020B0604020202020204" pitchFamily="34" charset="0"/>
-                  </a:rPr>
-                  <a:t>：</a:t>
-                </a:r>
-                <a:r>
-                  <a:rPr lang="en-US" altLang="zh-CN" sz="900" dirty="0">
-                    <a:latin typeface="宋体" panose="02010600030101010101" pitchFamily="2" charset="-122"/>
-                    <a:ea typeface="宋体" panose="02010600030101010101" pitchFamily="2" charset="-122"/>
-                    <a:cs typeface="Arial" panose="020B0604020202020204" pitchFamily="34" charset="0"/>
-                  </a:rPr>
-                  <a:t>1834.65 RU/ml (↑)</a:t>
-                </a:r>
-              </a:p>
-              <a:p>
-                <a:pPr lvl="2"/>
-                <a:r>
-                  <a:rPr lang="zh-CN" altLang="en-US" sz="900" dirty="0">
-                    <a:latin typeface="宋体" panose="02010600030101010101" pitchFamily="2" charset="-122"/>
-                    <a:ea typeface="宋体" panose="02010600030101010101" pitchFamily="2" charset="-122"/>
-                    <a:cs typeface="Arial" panose="020B0604020202020204" pitchFamily="34" charset="0"/>
-                  </a:rPr>
-                  <a:t>抗核抗体 </a:t>
-                </a:r>
-                <a:r>
-                  <a:rPr lang="en-US" altLang="zh-CN" sz="900" dirty="0">
-                    <a:latin typeface="宋体" panose="02010600030101010101" pitchFamily="2" charset="-122"/>
-                    <a:ea typeface="宋体" panose="02010600030101010101" pitchFamily="2" charset="-122"/>
-                    <a:cs typeface="Arial" panose="020B0604020202020204" pitchFamily="34" charset="0"/>
-                  </a:rPr>
-                  <a:t>(ANA)</a:t>
-                </a:r>
-                <a:r>
-                  <a:rPr lang="zh-CN" altLang="en-US" sz="900" dirty="0">
-                    <a:latin typeface="宋体" panose="02010600030101010101" pitchFamily="2" charset="-122"/>
-                    <a:ea typeface="宋体" panose="02010600030101010101" pitchFamily="2" charset="-122"/>
-                    <a:cs typeface="Arial" panose="020B0604020202020204" pitchFamily="34" charset="0"/>
-                  </a:rPr>
-                  <a:t>：</a:t>
-                </a:r>
-                <a:r>
-                  <a:rPr lang="en-US" altLang="zh-CN" sz="900" dirty="0">
-                    <a:latin typeface="宋体" panose="02010600030101010101" pitchFamily="2" charset="-122"/>
-                    <a:ea typeface="宋体" panose="02010600030101010101" pitchFamily="2" charset="-122"/>
-                    <a:cs typeface="Arial" panose="020B0604020202020204" pitchFamily="34" charset="0"/>
-                  </a:rPr>
-                  <a:t>1:320 (↑)</a:t>
-                </a:r>
-              </a:p>
-              <a:p>
-                <a:pPr marL="171450" indent="-171450">
-                  <a:buFont typeface="Arial" panose="020B0604020202020204" pitchFamily="34" charset="0"/>
-                  <a:buChar char="•"/>
-                </a:pPr>
-                <a:r>
-                  <a:rPr lang="zh-CN" altLang="en-US" sz="900" dirty="0">
-                    <a:latin typeface="宋体" panose="02010600030101010101" pitchFamily="2" charset="-122"/>
-                    <a:ea typeface="宋体" panose="02010600030101010101" pitchFamily="2" charset="-122"/>
-                    <a:cs typeface="Arial" panose="020B0604020202020204" pitchFamily="34" charset="0"/>
-                  </a:rPr>
-                  <a:t>影像检查：</a:t>
-                </a:r>
-                <a:r>
-                  <a:rPr lang="en-US" altLang="zh-CN" sz="900" dirty="0">
-                    <a:latin typeface="宋体" panose="02010600030101010101" pitchFamily="2" charset="-122"/>
-                    <a:ea typeface="宋体" panose="02010600030101010101" pitchFamily="2" charset="-122"/>
-                    <a:cs typeface="Arial" panose="020B0604020202020204" pitchFamily="34" charset="0"/>
-                  </a:rPr>
-                  <a:t>	</a:t>
-                </a:r>
-                <a:r>
-                  <a:rPr lang="zh-CN" altLang="en-US" sz="900" dirty="0">
-                    <a:latin typeface="宋体" panose="02010600030101010101" pitchFamily="2" charset="-122"/>
-                    <a:ea typeface="宋体" panose="02010600030101010101" pitchFamily="2" charset="-122"/>
-                    <a:cs typeface="Arial" panose="020B0604020202020204" pitchFamily="34" charset="0"/>
-                  </a:rPr>
-                  <a:t>超声提示左侧乳腺实质性病灶 </a:t>
-                </a:r>
-                <a:r>
-                  <a:rPr lang="en-US" altLang="zh-CN" sz="900" dirty="0">
-                    <a:latin typeface="宋体" panose="02010600030101010101" pitchFamily="2" charset="-122"/>
-                    <a:ea typeface="宋体" panose="02010600030101010101" pitchFamily="2" charset="-122"/>
-                    <a:cs typeface="Arial" panose="020B0604020202020204" pitchFamily="34" charset="0"/>
-                  </a:rPr>
-                  <a:t>(BI-RADS 3 </a:t>
-                </a:r>
-                <a:r>
-                  <a:rPr lang="zh-CN" altLang="en-US" sz="900" dirty="0">
-                    <a:latin typeface="宋体" panose="02010600030101010101" pitchFamily="2" charset="-122"/>
-                    <a:ea typeface="宋体" panose="02010600030101010101" pitchFamily="2" charset="-122"/>
-                    <a:cs typeface="Arial" panose="020B0604020202020204" pitchFamily="34" charset="0"/>
-                  </a:rPr>
-                  <a:t>类</a:t>
-                </a:r>
-                <a:r>
-                  <a:rPr lang="en-US" altLang="zh-CN" sz="900" dirty="0">
-                    <a:latin typeface="宋体" panose="02010600030101010101" pitchFamily="2" charset="-122"/>
-                    <a:ea typeface="宋体" panose="02010600030101010101" pitchFamily="2" charset="-122"/>
-                    <a:cs typeface="Arial" panose="020B0604020202020204" pitchFamily="34" charset="0"/>
-                  </a:rPr>
-                  <a:t>)</a:t>
-                </a:r>
-                <a:r>
-                  <a:rPr lang="zh-CN" altLang="en-US" sz="900" dirty="0">
-                    <a:latin typeface="宋体" panose="02010600030101010101" pitchFamily="2" charset="-122"/>
-                    <a:ea typeface="宋体" panose="02010600030101010101" pitchFamily="2" charset="-122"/>
-                    <a:cs typeface="Arial" panose="020B0604020202020204" pitchFamily="34" charset="0"/>
-                  </a:rPr>
-                  <a:t>、肝囊肿。</a:t>
-                </a:r>
-                <a:endParaRPr lang="en-US" altLang="zh-CN" sz="900" dirty="0">
-                  <a:latin typeface="宋体" panose="02010600030101010101" pitchFamily="2" charset="-122"/>
-                  <a:ea typeface="宋体" panose="02010600030101010101" pitchFamily="2" charset="-122"/>
-                  <a:cs typeface="Arial" panose="020B0604020202020204" pitchFamily="34" charset="0"/>
-                </a:endParaRPr>
-              </a:p>
-              <a:p>
-                <a:pPr lvl="3"/>
-                <a:r>
-                  <a:rPr lang="en-US" altLang="zh-CN" sz="900" dirty="0">
-                    <a:latin typeface="宋体" panose="02010600030101010101" pitchFamily="2" charset="-122"/>
-                    <a:ea typeface="宋体" panose="02010600030101010101" pitchFamily="2" charset="-122"/>
-                    <a:cs typeface="Arial" panose="020B0604020202020204" pitchFamily="34" charset="0"/>
-                  </a:rPr>
-                  <a:t>	……</a:t>
-                </a:r>
-                <a:endParaRPr lang="zh-CN" altLang="en-US" sz="900" dirty="0">
-                  <a:latin typeface="宋体" panose="02010600030101010101" pitchFamily="2" charset="-122"/>
-                  <a:ea typeface="宋体" panose="02010600030101010101" pitchFamily="2" charset="-122"/>
-                  <a:cs typeface="Arial" panose="020B0604020202020204" pitchFamily="34" charset="0"/>
-                </a:endParaRPr>
-              </a:p>
-            </p:txBody>
-          </p:sp>
-          <p:sp>
-            <p:nvSpPr>
-              <p:cNvPr id="40" name="文本框 39">
-                <a:extLst>
-                  <a:ext uri="{FF2B5EF4-FFF2-40B4-BE49-F238E27FC236}">
-                    <a16:creationId xmlns:a16="http://schemas.microsoft.com/office/drawing/2014/main" id="{AD04579C-9EC3-15F2-F40E-4BDC9D68F4A8}"/>
-                  </a:ext>
-                </a:extLst>
-              </p:cNvPr>
-              <p:cNvSpPr txBox="1"/>
-              <p:nvPr/>
-            </p:nvSpPr>
-            <p:spPr>
-              <a:xfrm>
-                <a:off x="2404453" y="763696"/>
-                <a:ext cx="1495029" cy="246221"/>
-              </a:xfrm>
-              <a:prstGeom prst="rect">
-                <a:avLst/>
-              </a:prstGeom>
-              <a:noFill/>
-            </p:spPr>
-            <p:txBody>
-              <a:bodyPr wrap="square" rtlCol="0">
-                <a:spAutoFit/>
-              </a:bodyPr>
-              <a:lstStyle/>
-              <a:p>
-                <a:pPr algn="ctr"/>
-                <a:r>
-                  <a:rPr lang="zh-CN" altLang="en-US" sz="1000" b="1" dirty="0">
-                    <a:latin typeface="宋体" panose="02010600030101010101" pitchFamily="2" charset="-122"/>
-                    <a:ea typeface="宋体" panose="02010600030101010101" pitchFamily="2" charset="-122"/>
-                    <a:cs typeface="Arial" panose="020B0604020202020204" pitchFamily="34" charset="0"/>
-                  </a:rPr>
-                  <a:t>病史信息</a:t>
-                </a:r>
-                <a:endParaRPr lang="zh-CN" altLang="en-US" sz="800" b="1" dirty="0">
-                  <a:latin typeface="宋体" panose="02010600030101010101" pitchFamily="2" charset="-122"/>
-                  <a:ea typeface="宋体" panose="02010600030101010101" pitchFamily="2" charset="-122"/>
-                  <a:cs typeface="Arial" panose="020B0604020202020204" pitchFamily="34" charset="0"/>
-                </a:endParaRPr>
-              </a:p>
-            </p:txBody>
-          </p:sp>
-        </p:grpSp>
-        <p:grpSp>
-          <p:nvGrpSpPr>
-            <p:cNvPr id="6" name="组合 5">
-              <a:extLst>
-                <a:ext uri="{FF2B5EF4-FFF2-40B4-BE49-F238E27FC236}">
-                  <a16:creationId xmlns:a16="http://schemas.microsoft.com/office/drawing/2014/main" id="{08BDCE53-8FE5-3EB0-A4A9-7D4CBB2735BD}"/>
-                </a:ext>
-              </a:extLst>
-            </p:cNvPr>
-            <p:cNvGrpSpPr/>
-            <p:nvPr/>
-          </p:nvGrpSpPr>
-          <p:grpSpPr>
-            <a:xfrm>
-              <a:off x="1091996" y="2166592"/>
-              <a:ext cx="4119942" cy="706340"/>
-              <a:chOff x="1091996" y="2166592"/>
-              <a:chExt cx="4119942" cy="706340"/>
-            </a:xfrm>
-          </p:grpSpPr>
-          <p:sp>
-            <p:nvSpPr>
-              <p:cNvPr id="45" name="矩形: 圆角 44">
-                <a:extLst>
-                  <a:ext uri="{FF2B5EF4-FFF2-40B4-BE49-F238E27FC236}">
-                    <a16:creationId xmlns:a16="http://schemas.microsoft.com/office/drawing/2014/main" id="{71168B60-FFBC-7888-96A2-4F0268BF4564}"/>
-                  </a:ext>
-                </a:extLst>
-              </p:cNvPr>
-              <p:cNvSpPr/>
-              <p:nvPr/>
-            </p:nvSpPr>
-            <p:spPr>
-              <a:xfrm>
-                <a:off x="1091996" y="2166592"/>
-                <a:ext cx="4119942" cy="706340"/>
-              </a:xfrm>
-              <a:prstGeom prst="roundRect">
-                <a:avLst>
-                  <a:gd name="adj" fmla="val 12067"/>
-                </a:avLst>
-              </a:prstGeom>
-              <a:solidFill>
-                <a:srgbClr val="E2F0D9"/>
-              </a:solidFill>
-              <a:ln w="9525">
-                <a:solidFill>
-                  <a:schemeClr val="tx1"/>
-                </a:solidFill>
-                <a:round/>
-              </a:ln>
-              <a:effectLst/>
-            </p:spPr>
-            <p:style>
-              <a:lnRef idx="2">
-                <a:schemeClr val="accent1">
-                  <a:shade val="50000"/>
-                </a:schemeClr>
-              </a:lnRef>
-              <a:fillRef idx="1">
-                <a:schemeClr val="accent1"/>
-              </a:fillRef>
-              <a:effectRef idx="0">
-                <a:schemeClr val="accent1"/>
-              </a:effectRef>
-              <a:fontRef idx="minor">
-                <a:schemeClr val="lt1"/>
-              </a:fontRef>
-            </p:style>
-            <p:txBody>
-              <a:bodyPr rtlCol="0" anchor="ctr"/>
-              <a:lstStyle/>
-              <a:p>
-                <a:pPr algn="ctr"/>
-                <a:endParaRPr lang="zh-CN" altLang="en-US" dirty="0"/>
-              </a:p>
-            </p:txBody>
-          </p:sp>
-          <p:sp>
-            <p:nvSpPr>
-              <p:cNvPr id="46" name="文本框 45">
-                <a:extLst>
-                  <a:ext uri="{FF2B5EF4-FFF2-40B4-BE49-F238E27FC236}">
-                    <a16:creationId xmlns:a16="http://schemas.microsoft.com/office/drawing/2014/main" id="{5C1C1468-AD44-2F7E-1DC5-820C6482EA2A}"/>
-                  </a:ext>
-                </a:extLst>
-              </p:cNvPr>
-              <p:cNvSpPr txBox="1"/>
-              <p:nvPr/>
-            </p:nvSpPr>
-            <p:spPr>
-              <a:xfrm>
-                <a:off x="1131691" y="2346089"/>
-                <a:ext cx="4040553" cy="282201"/>
-              </a:xfrm>
-              <a:prstGeom prst="rect">
-                <a:avLst/>
-              </a:prstGeom>
-              <a:solidFill>
-                <a:srgbClr val="E2F0D9"/>
-              </a:solidFill>
-            </p:spPr>
-            <p:txBody>
-              <a:bodyPr wrap="square" rtlCol="0">
-                <a:spAutoFit/>
-              </a:bodyPr>
-              <a:lstStyle/>
-              <a:p>
-                <a:r>
-                  <a:rPr lang="zh-CN" altLang="en-US" sz="900" dirty="0">
-                    <a:latin typeface="宋体" panose="02010600030101010101" pitchFamily="2" charset="-122"/>
-                    <a:ea typeface="宋体" panose="02010600030101010101" pitchFamily="2" charset="-122"/>
-                    <a:cs typeface="Arial" panose="020B0604020202020204" pitchFamily="34" charset="0"/>
-                  </a:rPr>
-                  <a:t>患者因多关节疼痛入院，辅助检查提示炎性指标显著升高且自身抗体强阳性。入院后确诊为类风湿关节炎，经艾拉莫德联合甲氨蝶呤等免疫抑制方案治疗后，关节疼痛症状明显缓解，炎性指标下降，病情平稳，准予出院。</a:t>
-                </a:r>
-              </a:p>
-            </p:txBody>
-          </p:sp>
-          <p:sp>
-            <p:nvSpPr>
-              <p:cNvPr id="48" name="文本框 47">
-                <a:extLst>
-                  <a:ext uri="{FF2B5EF4-FFF2-40B4-BE49-F238E27FC236}">
-                    <a16:creationId xmlns:a16="http://schemas.microsoft.com/office/drawing/2014/main" id="{49C86424-3AC8-C27F-BF66-1B7142E30026}"/>
-                  </a:ext>
-                </a:extLst>
-              </p:cNvPr>
-              <p:cNvSpPr txBox="1"/>
-              <p:nvPr/>
-            </p:nvSpPr>
-            <p:spPr>
-              <a:xfrm>
-                <a:off x="2404453" y="2166592"/>
-                <a:ext cx="1495029" cy="136824"/>
-              </a:xfrm>
-              <a:prstGeom prst="rect">
-                <a:avLst/>
-              </a:prstGeom>
-              <a:noFill/>
-            </p:spPr>
-            <p:txBody>
-              <a:bodyPr wrap="square" rtlCol="0">
-                <a:spAutoFit/>
-              </a:bodyPr>
-              <a:lstStyle/>
-              <a:p>
-                <a:pPr algn="ctr"/>
-                <a:r>
-                  <a:rPr lang="zh-CN" altLang="en-US" sz="1000" b="1" dirty="0">
-                    <a:latin typeface="宋体" panose="02010600030101010101" pitchFamily="2" charset="-122"/>
-                    <a:ea typeface="宋体" panose="02010600030101010101" pitchFamily="2" charset="-122"/>
-                    <a:cs typeface="Arial" panose="020B0604020202020204" pitchFamily="34" charset="0"/>
-                  </a:rPr>
-                  <a:t>出院小结</a:t>
-                </a:r>
-                <a:endParaRPr lang="zh-CN" altLang="en-US" sz="800" b="1" dirty="0">
-                  <a:latin typeface="宋体" panose="02010600030101010101" pitchFamily="2" charset="-122"/>
-                  <a:ea typeface="宋体" panose="02010600030101010101" pitchFamily="2" charset="-122"/>
-                  <a:cs typeface="Arial" panose="020B0604020202020204" pitchFamily="34" charset="0"/>
-                </a:endParaRPr>
-              </a:p>
-            </p:txBody>
-          </p:sp>
-        </p:grpSp>
-        <p:grpSp>
-          <p:nvGrpSpPr>
-            <p:cNvPr id="10" name="组合 9">
-              <a:extLst>
-                <a:ext uri="{FF2B5EF4-FFF2-40B4-BE49-F238E27FC236}">
-                  <a16:creationId xmlns:a16="http://schemas.microsoft.com/office/drawing/2014/main" id="{3B490BD1-2A2F-C110-7CBF-92F6A22FD90A}"/>
-                </a:ext>
-              </a:extLst>
-            </p:cNvPr>
-            <p:cNvGrpSpPr/>
-            <p:nvPr/>
-          </p:nvGrpSpPr>
-          <p:grpSpPr>
-            <a:xfrm>
-              <a:off x="1091996" y="2921738"/>
-              <a:ext cx="4119942" cy="961415"/>
-              <a:chOff x="1091996" y="2952218"/>
-              <a:chExt cx="4119942" cy="961415"/>
-            </a:xfrm>
-          </p:grpSpPr>
-          <p:grpSp>
-            <p:nvGrpSpPr>
-              <p:cNvPr id="8" name="组合 7">
-                <a:extLst>
-                  <a:ext uri="{FF2B5EF4-FFF2-40B4-BE49-F238E27FC236}">
-                    <a16:creationId xmlns:a16="http://schemas.microsoft.com/office/drawing/2014/main" id="{A3E73C34-1578-A63E-444E-A2DE334F846E}"/>
-                  </a:ext>
-                </a:extLst>
-              </p:cNvPr>
-              <p:cNvGrpSpPr/>
-              <p:nvPr/>
-            </p:nvGrpSpPr>
-            <p:grpSpPr>
-              <a:xfrm>
-                <a:off x="1091996" y="2952218"/>
-                <a:ext cx="2035252" cy="961414"/>
-                <a:chOff x="1091996" y="2952218"/>
-                <a:chExt cx="2035252" cy="961414"/>
-              </a:xfrm>
-            </p:grpSpPr>
-            <p:sp>
-              <p:nvSpPr>
-                <p:cNvPr id="56" name="矩形: 圆角 55">
-                  <a:extLst>
-                    <a:ext uri="{FF2B5EF4-FFF2-40B4-BE49-F238E27FC236}">
-                      <a16:creationId xmlns:a16="http://schemas.microsoft.com/office/drawing/2014/main" id="{989F5888-AC34-3D69-2BDB-5F4C033BF9DA}"/>
-                    </a:ext>
-                  </a:extLst>
-                </p:cNvPr>
-                <p:cNvSpPr/>
-                <p:nvPr/>
-              </p:nvSpPr>
-              <p:spPr>
-                <a:xfrm>
-                  <a:off x="1091996" y="2952218"/>
-                  <a:ext cx="2035252" cy="961414"/>
-                </a:xfrm>
-                <a:prstGeom prst="roundRect">
-                  <a:avLst/>
-                </a:prstGeom>
-                <a:solidFill>
-                  <a:srgbClr val="FCEADC"/>
-                </a:solidFill>
-                <a:ln w="9525">
-                  <a:solidFill>
-                    <a:schemeClr val="tx1"/>
-                  </a:solidFill>
-                  <a:round/>
-                </a:ln>
-                <a:effectLst/>
-              </p:spPr>
-              <p:style>
-                <a:lnRef idx="2">
-                  <a:schemeClr val="accent1">
-                    <a:shade val="50000"/>
-                  </a:schemeClr>
-                </a:lnRef>
-                <a:fillRef idx="1">
-                  <a:schemeClr val="accent1"/>
-                </a:fillRef>
-                <a:effectRef idx="0">
-                  <a:schemeClr val="accent1"/>
-                </a:effectRef>
-                <a:fontRef idx="minor">
-                  <a:schemeClr val="lt1"/>
-                </a:fontRef>
-              </p:style>
-              <p:txBody>
-                <a:bodyPr rtlCol="0" anchor="ctr"/>
-                <a:lstStyle/>
-                <a:p>
-                  <a:pPr algn="ctr"/>
-                  <a:endParaRPr lang="zh-CN" altLang="en-US" dirty="0"/>
-                </a:p>
-              </p:txBody>
-            </p:sp>
-            <p:sp>
-              <p:nvSpPr>
-                <p:cNvPr id="57" name="文本框 56">
-                  <a:extLst>
-                    <a:ext uri="{FF2B5EF4-FFF2-40B4-BE49-F238E27FC236}">
-                      <a16:creationId xmlns:a16="http://schemas.microsoft.com/office/drawing/2014/main" id="{6D093932-AE00-4892-F27D-C53B6D04601D}"/>
-                    </a:ext>
-                  </a:extLst>
-                </p:cNvPr>
-                <p:cNvSpPr txBox="1"/>
-                <p:nvPr/>
-              </p:nvSpPr>
-              <p:spPr>
-                <a:xfrm>
-                  <a:off x="1111605" y="3176155"/>
-                  <a:ext cx="1996034" cy="646331"/>
-                </a:xfrm>
-                <a:prstGeom prst="rect">
-                  <a:avLst/>
-                </a:prstGeom>
-                <a:noFill/>
-              </p:spPr>
-              <p:txBody>
-                <a:bodyPr wrap="square" rtlCol="0">
-                  <a:spAutoFit/>
-                </a:bodyPr>
-                <a:lstStyle/>
-                <a:p>
-                  <a:pPr marL="171450" indent="-171450">
-                    <a:buFont typeface="Arial" panose="020B0604020202020204" pitchFamily="34" charset="0"/>
-                    <a:buChar char="•"/>
-                  </a:pPr>
-                  <a:r>
-                    <a:rPr lang="zh-CN" altLang="en-US" sz="900" dirty="0">
-                      <a:latin typeface="宋体" panose="02010600030101010101" pitchFamily="2" charset="-122"/>
-                      <a:ea typeface="宋体" panose="02010600030101010101" pitchFamily="2" charset="-122"/>
-                      <a:cs typeface="Arial" panose="020B0604020202020204" pitchFamily="34" charset="0"/>
-                    </a:rPr>
-                    <a:t>类风湿性关节炎 </a:t>
-                  </a:r>
-                  <a:r>
-                    <a:rPr lang="en-US" altLang="zh-CN" sz="900" dirty="0">
-                      <a:latin typeface="宋体" panose="02010600030101010101" pitchFamily="2" charset="-122"/>
-                      <a:ea typeface="宋体" panose="02010600030101010101" pitchFamily="2" charset="-122"/>
-                      <a:cs typeface="Arial" panose="020B0604020202020204" pitchFamily="34" charset="0"/>
-                    </a:rPr>
-                    <a:t>(RA)</a:t>
-                  </a:r>
-                </a:p>
-                <a:p>
-                  <a:pPr marL="171450" indent="-171450">
-                    <a:buFont typeface="Arial" panose="020B0604020202020204" pitchFamily="34" charset="0"/>
-                    <a:buChar char="•"/>
-                  </a:pPr>
-                  <a:r>
-                    <a:rPr lang="zh-CN" altLang="en-US" sz="900" dirty="0">
-                      <a:latin typeface="宋体" panose="02010600030101010101" pitchFamily="2" charset="-122"/>
-                      <a:ea typeface="宋体" panose="02010600030101010101" pitchFamily="2" charset="-122"/>
-                      <a:cs typeface="Arial" panose="020B0604020202020204" pitchFamily="34" charset="0"/>
-                    </a:rPr>
-                    <a:t>乳腺增生 </a:t>
-                  </a:r>
-                  <a:r>
-                    <a:rPr lang="en-US" altLang="zh-CN" sz="900" dirty="0">
-                      <a:latin typeface="宋体" panose="02010600030101010101" pitchFamily="2" charset="-122"/>
-                      <a:ea typeface="宋体" panose="02010600030101010101" pitchFamily="2" charset="-122"/>
-                      <a:cs typeface="Arial" panose="020B0604020202020204" pitchFamily="34" charset="0"/>
-                    </a:rPr>
-                    <a:t>(BI-RADS 3 </a:t>
-                  </a:r>
-                  <a:r>
-                    <a:rPr lang="zh-CN" altLang="en-US" sz="900" dirty="0">
-                      <a:latin typeface="宋体" panose="02010600030101010101" pitchFamily="2" charset="-122"/>
-                      <a:ea typeface="宋体" panose="02010600030101010101" pitchFamily="2" charset="-122"/>
-                      <a:cs typeface="Arial" panose="020B0604020202020204" pitchFamily="34" charset="0"/>
-                    </a:rPr>
-                    <a:t>类</a:t>
-                  </a:r>
-                  <a:r>
-                    <a:rPr lang="en-US" altLang="zh-CN" sz="900" dirty="0">
-                      <a:latin typeface="宋体" panose="02010600030101010101" pitchFamily="2" charset="-122"/>
-                      <a:ea typeface="宋体" panose="02010600030101010101" pitchFamily="2" charset="-122"/>
-                      <a:cs typeface="Arial" panose="020B0604020202020204" pitchFamily="34" charset="0"/>
-                    </a:rPr>
-                    <a:t>)</a:t>
-                  </a:r>
-                </a:p>
-                <a:p>
-                  <a:pPr marL="171450" indent="-171450">
-                    <a:buFont typeface="Arial" panose="020B0604020202020204" pitchFamily="34" charset="0"/>
-                    <a:buChar char="•"/>
-                  </a:pPr>
-                  <a:r>
-                    <a:rPr lang="zh-CN" altLang="en-US" sz="900" dirty="0">
-                      <a:latin typeface="宋体" panose="02010600030101010101" pitchFamily="2" charset="-122"/>
-                      <a:ea typeface="宋体" panose="02010600030101010101" pitchFamily="2" charset="-122"/>
-                      <a:cs typeface="Arial" panose="020B0604020202020204" pitchFamily="34" charset="0"/>
-                    </a:rPr>
-                    <a:t>肝囊肿</a:t>
-                  </a:r>
-                </a:p>
-                <a:p>
-                  <a:pPr marL="171450" indent="-171450">
-                    <a:buFont typeface="Arial" panose="020B0604020202020204" pitchFamily="34" charset="0"/>
-                    <a:buChar char="•"/>
-                  </a:pPr>
-                  <a:r>
-                    <a:rPr lang="zh-CN" altLang="en-US" sz="900" dirty="0">
-                      <a:latin typeface="宋体" panose="02010600030101010101" pitchFamily="2" charset="-122"/>
-                      <a:ea typeface="宋体" panose="02010600030101010101" pitchFamily="2" charset="-122"/>
-                      <a:cs typeface="Arial" panose="020B0604020202020204" pitchFamily="34" charset="0"/>
-                    </a:rPr>
-                    <a:t>泌尿道感染</a:t>
-                  </a:r>
-                </a:p>
-              </p:txBody>
-            </p:sp>
-            <p:sp>
-              <p:nvSpPr>
-                <p:cNvPr id="58" name="文本框 57">
-                  <a:extLst>
-                    <a:ext uri="{FF2B5EF4-FFF2-40B4-BE49-F238E27FC236}">
-                      <a16:creationId xmlns:a16="http://schemas.microsoft.com/office/drawing/2014/main" id="{05ADC8FD-1CF0-1E1F-BF13-8DAE59F1BC10}"/>
-                    </a:ext>
-                  </a:extLst>
-                </p:cNvPr>
-                <p:cNvSpPr txBox="1"/>
-                <p:nvPr/>
-              </p:nvSpPr>
-              <p:spPr>
-                <a:xfrm>
-                  <a:off x="1740350" y="2984901"/>
-                  <a:ext cx="738545" cy="165454"/>
-                </a:xfrm>
-                <a:prstGeom prst="rect">
-                  <a:avLst/>
-                </a:prstGeom>
-                <a:solidFill>
-                  <a:srgbClr val="FCEADC"/>
-                </a:solidFill>
-              </p:spPr>
-              <p:txBody>
-                <a:bodyPr wrap="square" rtlCol="0">
-                  <a:spAutoFit/>
-                </a:bodyPr>
-                <a:lstStyle/>
-                <a:p>
-                  <a:pPr algn="ctr"/>
-                  <a:r>
-                    <a:rPr lang="zh-CN" altLang="en-US" sz="1000" b="1" dirty="0">
-                      <a:latin typeface="宋体" panose="02010600030101010101" pitchFamily="2" charset="-122"/>
-                      <a:ea typeface="宋体" panose="02010600030101010101" pitchFamily="2" charset="-122"/>
-                      <a:cs typeface="Arial" panose="020B0604020202020204" pitchFamily="34" charset="0"/>
-                    </a:rPr>
-                    <a:t>出院诊断</a:t>
-                  </a:r>
-                  <a:endParaRPr lang="zh-CN" altLang="en-US" sz="800" b="1" dirty="0">
-                    <a:latin typeface="宋体" panose="02010600030101010101" pitchFamily="2" charset="-122"/>
-                    <a:ea typeface="宋体" panose="02010600030101010101" pitchFamily="2" charset="-122"/>
-                    <a:cs typeface="Arial" panose="020B0604020202020204" pitchFamily="34" charset="0"/>
-                  </a:endParaRPr>
-                </a:p>
-              </p:txBody>
-            </p:sp>
-          </p:grpSp>
-          <p:grpSp>
-            <p:nvGrpSpPr>
-              <p:cNvPr id="9" name="组合 8">
-                <a:extLst>
-                  <a:ext uri="{FF2B5EF4-FFF2-40B4-BE49-F238E27FC236}">
-                    <a16:creationId xmlns:a16="http://schemas.microsoft.com/office/drawing/2014/main" id="{843754B9-A301-C958-E859-00EE01338898}"/>
-                  </a:ext>
-                </a:extLst>
-              </p:cNvPr>
-              <p:cNvGrpSpPr/>
-              <p:nvPr/>
-            </p:nvGrpSpPr>
-            <p:grpSpPr>
-              <a:xfrm>
-                <a:off x="3176686" y="2952218"/>
-                <a:ext cx="2035252" cy="961415"/>
-                <a:chOff x="3176686" y="2952218"/>
-                <a:chExt cx="2035252" cy="961415"/>
-              </a:xfrm>
-            </p:grpSpPr>
-            <p:sp>
-              <p:nvSpPr>
-                <p:cNvPr id="61" name="矩形: 圆角 60">
-                  <a:extLst>
-                    <a:ext uri="{FF2B5EF4-FFF2-40B4-BE49-F238E27FC236}">
-                      <a16:creationId xmlns:a16="http://schemas.microsoft.com/office/drawing/2014/main" id="{0081621C-FF3A-3757-F127-14701033C9C5}"/>
-                    </a:ext>
-                  </a:extLst>
-                </p:cNvPr>
-                <p:cNvSpPr/>
-                <p:nvPr/>
-              </p:nvSpPr>
-              <p:spPr>
-                <a:xfrm>
-                  <a:off x="3176686" y="2952218"/>
-                  <a:ext cx="2035252" cy="961415"/>
-                </a:xfrm>
-                <a:prstGeom prst="roundRect">
-                  <a:avLst/>
-                </a:prstGeom>
-                <a:solidFill>
-                  <a:srgbClr val="F2F2F2"/>
-                </a:solidFill>
-                <a:ln w="9525">
-                  <a:solidFill>
-                    <a:schemeClr val="tx1"/>
-                  </a:solidFill>
-                  <a:round/>
-                </a:ln>
-                <a:effectLst/>
-              </p:spPr>
-              <p:style>
-                <a:lnRef idx="2">
-                  <a:schemeClr val="accent1">
-                    <a:shade val="50000"/>
-                  </a:schemeClr>
-                </a:lnRef>
-                <a:fillRef idx="1">
-                  <a:schemeClr val="accent1"/>
-                </a:fillRef>
-                <a:effectRef idx="0">
-                  <a:schemeClr val="accent1"/>
-                </a:effectRef>
-                <a:fontRef idx="minor">
-                  <a:schemeClr val="lt1"/>
-                </a:fontRef>
-              </p:style>
-              <p:txBody>
-                <a:bodyPr rtlCol="0" anchor="ctr"/>
-                <a:lstStyle/>
-                <a:p>
-                  <a:pPr algn="ctr"/>
-                  <a:endParaRPr lang="zh-CN" altLang="en-US" dirty="0"/>
-                </a:p>
-              </p:txBody>
-            </p:sp>
-            <p:sp>
-              <p:nvSpPr>
-                <p:cNvPr id="62" name="文本框 61">
-                  <a:extLst>
-                    <a:ext uri="{FF2B5EF4-FFF2-40B4-BE49-F238E27FC236}">
-                      <a16:creationId xmlns:a16="http://schemas.microsoft.com/office/drawing/2014/main" id="{C3F59FAE-4D18-2B22-122B-2B9D1E58E781}"/>
-                    </a:ext>
-                  </a:extLst>
-                </p:cNvPr>
-                <p:cNvSpPr txBox="1"/>
-                <p:nvPr/>
-              </p:nvSpPr>
-              <p:spPr>
-                <a:xfrm>
-                  <a:off x="3196295" y="3176155"/>
-                  <a:ext cx="1996034" cy="646331"/>
-                </a:xfrm>
-                <a:prstGeom prst="rect">
-                  <a:avLst/>
-                </a:prstGeom>
-                <a:solidFill>
-                  <a:srgbClr val="F2F2F2"/>
-                </a:solidFill>
-              </p:spPr>
-              <p:txBody>
-                <a:bodyPr wrap="square" rtlCol="0">
-                  <a:spAutoFit/>
-                </a:bodyPr>
-                <a:lstStyle/>
-                <a:p>
-                  <a:pPr marL="171450" indent="-171450">
-                    <a:buFont typeface="Arial" panose="020B0604020202020204" pitchFamily="34" charset="0"/>
-                    <a:buChar char="•"/>
-                  </a:pPr>
-                  <a:r>
-                    <a:rPr lang="zh-CN" altLang="en-US" sz="900" dirty="0">
-                      <a:latin typeface="宋体" panose="02010600030101010101" pitchFamily="2" charset="-122"/>
-                      <a:ea typeface="宋体" panose="02010600030101010101" pitchFamily="2" charset="-122"/>
-                      <a:cs typeface="Arial" panose="020B0604020202020204" pitchFamily="34" charset="0"/>
-                    </a:rPr>
-                    <a:t>甲氨蝶呤片：</a:t>
-                  </a:r>
-                  <a:r>
-                    <a:rPr lang="en-US" altLang="zh-CN" sz="900" dirty="0">
-                      <a:latin typeface="宋体" panose="02010600030101010101" pitchFamily="2" charset="-122"/>
-                      <a:ea typeface="宋体" panose="02010600030101010101" pitchFamily="2" charset="-122"/>
-                      <a:cs typeface="Arial" panose="020B0604020202020204" pitchFamily="34" charset="0"/>
-                    </a:rPr>
-                    <a:t>10mg</a:t>
-                  </a:r>
-                  <a:r>
-                    <a:rPr lang="zh-CN" altLang="en-US" sz="900" dirty="0">
-                      <a:latin typeface="宋体" panose="02010600030101010101" pitchFamily="2" charset="-122"/>
-                      <a:ea typeface="宋体" panose="02010600030101010101" pitchFamily="2" charset="-122"/>
-                      <a:cs typeface="Arial" panose="020B0604020202020204" pitchFamily="34" charset="0"/>
-                    </a:rPr>
-                    <a:t>，每周 </a:t>
-                  </a:r>
-                  <a:r>
-                    <a:rPr lang="en-US" altLang="zh-CN" sz="900" dirty="0">
-                      <a:latin typeface="宋体" panose="02010600030101010101" pitchFamily="2" charset="-122"/>
-                      <a:ea typeface="宋体" panose="02010600030101010101" pitchFamily="2" charset="-122"/>
-                      <a:cs typeface="Arial" panose="020B0604020202020204" pitchFamily="34" charset="0"/>
-                    </a:rPr>
-                    <a:t>1 </a:t>
-                  </a:r>
-                  <a:r>
-                    <a:rPr lang="zh-CN" altLang="en-US" sz="900" dirty="0">
-                      <a:latin typeface="宋体" panose="02010600030101010101" pitchFamily="2" charset="-122"/>
-                      <a:ea typeface="宋体" panose="02010600030101010101" pitchFamily="2" charset="-122"/>
-                      <a:cs typeface="Arial" panose="020B0604020202020204" pitchFamily="34" charset="0"/>
-                    </a:rPr>
-                    <a:t>次 </a:t>
-                  </a:r>
-                  <a:endParaRPr lang="en-US" altLang="zh-CN" sz="900" dirty="0">
-                    <a:latin typeface="宋体" panose="02010600030101010101" pitchFamily="2" charset="-122"/>
-                    <a:ea typeface="宋体" panose="02010600030101010101" pitchFamily="2" charset="-122"/>
-                    <a:cs typeface="Arial" panose="020B0604020202020204" pitchFamily="34" charset="0"/>
-                  </a:endParaRPr>
-                </a:p>
-                <a:p>
-                  <a:pPr marL="171450" indent="-171450">
-                    <a:buFont typeface="Arial" panose="020B0604020202020204" pitchFamily="34" charset="0"/>
-                    <a:buChar char="•"/>
-                  </a:pPr>
-                  <a:r>
-                    <a:rPr lang="zh-CN" altLang="en-US" sz="900" dirty="0">
-                      <a:latin typeface="宋体" panose="02010600030101010101" pitchFamily="2" charset="-122"/>
-                      <a:ea typeface="宋体" panose="02010600030101010101" pitchFamily="2" charset="-122"/>
-                      <a:cs typeface="Arial" panose="020B0604020202020204" pitchFamily="34" charset="0"/>
-                    </a:rPr>
-                    <a:t>艾拉莫德片：</a:t>
-                  </a:r>
-                  <a:r>
-                    <a:rPr lang="en-US" altLang="zh-CN" sz="900" dirty="0">
-                      <a:latin typeface="宋体" panose="02010600030101010101" pitchFamily="2" charset="-122"/>
-                      <a:ea typeface="宋体" panose="02010600030101010101" pitchFamily="2" charset="-122"/>
-                      <a:cs typeface="Arial" panose="020B0604020202020204" pitchFamily="34" charset="0"/>
-                    </a:rPr>
-                    <a:t>25mg</a:t>
-                  </a:r>
-                  <a:r>
-                    <a:rPr lang="zh-CN" altLang="en-US" sz="900" dirty="0">
-                      <a:latin typeface="宋体" panose="02010600030101010101" pitchFamily="2" charset="-122"/>
-                      <a:ea typeface="宋体" panose="02010600030101010101" pitchFamily="2" charset="-122"/>
-                      <a:cs typeface="Arial" panose="020B0604020202020204" pitchFamily="34" charset="0"/>
-                    </a:rPr>
-                    <a:t>，每日 </a:t>
-                  </a:r>
-                  <a:r>
-                    <a:rPr lang="en-US" altLang="zh-CN" sz="900" dirty="0">
-                      <a:latin typeface="宋体" panose="02010600030101010101" pitchFamily="2" charset="-122"/>
-                      <a:ea typeface="宋体" panose="02010600030101010101" pitchFamily="2" charset="-122"/>
-                      <a:cs typeface="Arial" panose="020B0604020202020204" pitchFamily="34" charset="0"/>
-                    </a:rPr>
-                    <a:t>1 </a:t>
-                  </a:r>
-                  <a:r>
-                    <a:rPr lang="zh-CN" altLang="en-US" sz="900" dirty="0">
-                      <a:latin typeface="宋体" panose="02010600030101010101" pitchFamily="2" charset="-122"/>
-                      <a:ea typeface="宋体" panose="02010600030101010101" pitchFamily="2" charset="-122"/>
-                      <a:cs typeface="Arial" panose="020B0604020202020204" pitchFamily="34" charset="0"/>
-                    </a:rPr>
-                    <a:t>次 </a:t>
-                  </a:r>
-                  <a:endParaRPr lang="en-US" altLang="zh-CN" sz="900" dirty="0">
-                    <a:latin typeface="宋体" panose="02010600030101010101" pitchFamily="2" charset="-122"/>
-                    <a:ea typeface="宋体" panose="02010600030101010101" pitchFamily="2" charset="-122"/>
-                    <a:cs typeface="Arial" panose="020B0604020202020204" pitchFamily="34" charset="0"/>
-                  </a:endParaRPr>
-                </a:p>
-                <a:p>
-                  <a:pPr marL="171450" indent="-171450">
-                    <a:buFont typeface="Arial" panose="020B0604020202020204" pitchFamily="34" charset="0"/>
-                    <a:buChar char="•"/>
-                  </a:pPr>
-                  <a:r>
-                    <a:rPr lang="zh-CN" altLang="en-US" sz="900" dirty="0">
-                      <a:latin typeface="宋体" panose="02010600030101010101" pitchFamily="2" charset="-122"/>
-                      <a:ea typeface="宋体" panose="02010600030101010101" pitchFamily="2" charset="-122"/>
-                      <a:cs typeface="Arial" panose="020B0604020202020204" pitchFamily="34" charset="0"/>
-                    </a:rPr>
-                    <a:t>叶酸片：</a:t>
-                  </a:r>
-                  <a:r>
-                    <a:rPr lang="en-US" altLang="zh-CN" sz="900" dirty="0">
-                      <a:latin typeface="宋体" panose="02010600030101010101" pitchFamily="2" charset="-122"/>
-                      <a:ea typeface="宋体" panose="02010600030101010101" pitchFamily="2" charset="-122"/>
-                      <a:cs typeface="Arial" panose="020B0604020202020204" pitchFamily="34" charset="0"/>
-                    </a:rPr>
-                    <a:t>5mg</a:t>
-                  </a:r>
-                  <a:r>
-                    <a:rPr lang="zh-CN" altLang="en-US" sz="900" dirty="0">
-                      <a:latin typeface="宋体" panose="02010600030101010101" pitchFamily="2" charset="-122"/>
-                      <a:ea typeface="宋体" panose="02010600030101010101" pitchFamily="2" charset="-122"/>
-                      <a:cs typeface="Arial" panose="020B0604020202020204" pitchFamily="34" charset="0"/>
-                    </a:rPr>
-                    <a:t>，每周 </a:t>
-                  </a:r>
-                  <a:r>
-                    <a:rPr lang="en-US" altLang="zh-CN" sz="900" dirty="0">
-                      <a:latin typeface="宋体" panose="02010600030101010101" pitchFamily="2" charset="-122"/>
-                      <a:ea typeface="宋体" panose="02010600030101010101" pitchFamily="2" charset="-122"/>
-                      <a:cs typeface="Arial" panose="020B0604020202020204" pitchFamily="34" charset="0"/>
-                    </a:rPr>
-                    <a:t>1 </a:t>
-                  </a:r>
-                  <a:r>
-                    <a:rPr lang="zh-CN" altLang="en-US" sz="900" dirty="0">
-                      <a:latin typeface="宋体" panose="02010600030101010101" pitchFamily="2" charset="-122"/>
-                      <a:ea typeface="宋体" panose="02010600030101010101" pitchFamily="2" charset="-122"/>
-                      <a:cs typeface="Arial" panose="020B0604020202020204" pitchFamily="34" charset="0"/>
-                    </a:rPr>
-                    <a:t>次 </a:t>
-                  </a:r>
-                  <a:endParaRPr lang="en-US" altLang="zh-CN" sz="900" dirty="0">
-                    <a:latin typeface="宋体" panose="02010600030101010101" pitchFamily="2" charset="-122"/>
-                    <a:ea typeface="宋体" panose="02010600030101010101" pitchFamily="2" charset="-122"/>
-                    <a:cs typeface="Arial" panose="020B0604020202020204" pitchFamily="34" charset="0"/>
-                  </a:endParaRPr>
-                </a:p>
-                <a:p>
-                  <a:pPr marL="171450" indent="-171450">
-                    <a:buFont typeface="Arial" panose="020B0604020202020204" pitchFamily="34" charset="0"/>
-                    <a:buChar char="•"/>
-                  </a:pPr>
-                  <a:r>
-                    <a:rPr lang="zh-CN" altLang="en-US" sz="900" dirty="0">
-                      <a:latin typeface="宋体" panose="02010600030101010101" pitchFamily="2" charset="-122"/>
-                      <a:ea typeface="宋体" panose="02010600030101010101" pitchFamily="2" charset="-122"/>
-                      <a:cs typeface="Arial" panose="020B0604020202020204" pitchFamily="34" charset="0"/>
-                    </a:rPr>
-                    <a:t>碳酸钙 </a:t>
-                  </a:r>
-                  <a:r>
-                    <a:rPr lang="en-US" altLang="zh-CN" sz="900" dirty="0">
-                      <a:latin typeface="宋体" panose="02010600030101010101" pitchFamily="2" charset="-122"/>
-                      <a:ea typeface="宋体" panose="02010600030101010101" pitchFamily="2" charset="-122"/>
-                      <a:cs typeface="Arial" panose="020B0604020202020204" pitchFamily="34" charset="0"/>
-                    </a:rPr>
-                    <a:t>D3</a:t>
-                  </a:r>
-                  <a:r>
-                    <a:rPr lang="zh-CN" altLang="en-US" sz="900" dirty="0">
-                      <a:latin typeface="宋体" panose="02010600030101010101" pitchFamily="2" charset="-122"/>
-                      <a:ea typeface="宋体" panose="02010600030101010101" pitchFamily="2" charset="-122"/>
-                      <a:cs typeface="Arial" panose="020B0604020202020204" pitchFamily="34" charset="0"/>
-                    </a:rPr>
-                    <a:t>：</a:t>
-                  </a:r>
-                  <a:r>
-                    <a:rPr lang="en-US" altLang="zh-CN" sz="900" dirty="0">
-                      <a:latin typeface="宋体" panose="02010600030101010101" pitchFamily="2" charset="-122"/>
-                      <a:ea typeface="宋体" panose="02010600030101010101" pitchFamily="2" charset="-122"/>
-                      <a:cs typeface="Arial" panose="020B0604020202020204" pitchFamily="34" charset="0"/>
-                    </a:rPr>
-                    <a:t>600mg</a:t>
-                  </a:r>
-                  <a:r>
-                    <a:rPr lang="zh-CN" altLang="en-US" sz="900" dirty="0">
-                      <a:latin typeface="宋体" panose="02010600030101010101" pitchFamily="2" charset="-122"/>
-                      <a:ea typeface="宋体" panose="02010600030101010101" pitchFamily="2" charset="-122"/>
-                      <a:cs typeface="Arial" panose="020B0604020202020204" pitchFamily="34" charset="0"/>
-                    </a:rPr>
-                    <a:t>，每日 </a:t>
-                  </a:r>
-                  <a:r>
-                    <a:rPr lang="en-US" altLang="zh-CN" sz="900" dirty="0">
-                      <a:latin typeface="宋体" panose="02010600030101010101" pitchFamily="2" charset="-122"/>
-                      <a:ea typeface="宋体" panose="02010600030101010101" pitchFamily="2" charset="-122"/>
-                      <a:cs typeface="Arial" panose="020B0604020202020204" pitchFamily="34" charset="0"/>
-                    </a:rPr>
-                    <a:t>1 </a:t>
-                  </a:r>
-                  <a:r>
-                    <a:rPr lang="zh-CN" altLang="en-US" sz="900" dirty="0">
-                      <a:latin typeface="宋体" panose="02010600030101010101" pitchFamily="2" charset="-122"/>
-                      <a:ea typeface="宋体" panose="02010600030101010101" pitchFamily="2" charset="-122"/>
-                      <a:cs typeface="Arial" panose="020B0604020202020204" pitchFamily="34" charset="0"/>
-                    </a:rPr>
-                    <a:t>次</a:t>
-                  </a:r>
-                </a:p>
-              </p:txBody>
-            </p:sp>
-            <p:sp>
-              <p:nvSpPr>
-                <p:cNvPr id="63" name="文本框 62">
-                  <a:extLst>
-                    <a:ext uri="{FF2B5EF4-FFF2-40B4-BE49-F238E27FC236}">
-                      <a16:creationId xmlns:a16="http://schemas.microsoft.com/office/drawing/2014/main" id="{71304135-AB8C-9463-20B8-B8DC5437DBB6}"/>
-                    </a:ext>
-                  </a:extLst>
-                </p:cNvPr>
-                <p:cNvSpPr txBox="1"/>
-                <p:nvPr/>
-              </p:nvSpPr>
-              <p:spPr>
-                <a:xfrm>
-                  <a:off x="3825040" y="2984901"/>
-                  <a:ext cx="738545" cy="165454"/>
-                </a:xfrm>
-                <a:prstGeom prst="rect">
-                  <a:avLst/>
-                </a:prstGeom>
-                <a:solidFill>
-                  <a:srgbClr val="F2F2F2"/>
-                </a:solidFill>
-              </p:spPr>
-              <p:txBody>
-                <a:bodyPr wrap="square" rtlCol="0">
-                  <a:spAutoFit/>
-                </a:bodyPr>
-                <a:lstStyle/>
-                <a:p>
-                  <a:pPr algn="ctr"/>
-                  <a:r>
-                    <a:rPr lang="zh-CN" altLang="en-US" sz="1000" b="1" dirty="0">
-                      <a:latin typeface="宋体" panose="02010600030101010101" pitchFamily="2" charset="-122"/>
-                      <a:ea typeface="宋体" panose="02010600030101010101" pitchFamily="2" charset="-122"/>
-                      <a:cs typeface="Arial" panose="020B0604020202020204" pitchFamily="34" charset="0"/>
-                    </a:rPr>
-                    <a:t>出院处方</a:t>
-                  </a:r>
-                  <a:endParaRPr lang="zh-CN" altLang="en-US" sz="800" b="1" dirty="0">
-                    <a:latin typeface="宋体" panose="02010600030101010101" pitchFamily="2" charset="-122"/>
-                    <a:ea typeface="宋体" panose="02010600030101010101" pitchFamily="2" charset="-122"/>
-                    <a:cs typeface="Arial" panose="020B0604020202020204" pitchFamily="34" charset="0"/>
-                  </a:endParaRPr>
-                </a:p>
-              </p:txBody>
-            </p:sp>
-          </p:grpSp>
-        </p:grpSp>
-      </p:grpSp>
-    </p:spTree>
-    <p:extLst>
-      <p:ext uri="{BB962C8B-B14F-4D97-AF65-F5344CB8AC3E}">
-        <p14:creationId xmlns:p14="http://schemas.microsoft.com/office/powerpoint/2010/main" val="581361519"/>
-      </p:ext>
-    </p:extLst>
-  </p:cSld>
-  <p:clrMapOvr>
-    <a:masterClrMapping/>
-  </p:clrMapOvr>
-</p:sld>
-</file>
-
 <file path=ppt/theme/theme1.xml><?xml version="1.0" encoding="utf-8"?>
 <a:theme xmlns:a="http://schemas.openxmlformats.org/drawingml/2006/main" name="Office 主题​​">
   <a:themeElements>
